--- a/examples/sefh-71-ia-tdm/salida/ponencia-ia-tdm-montero.pptx
+++ b/examples/sefh-71-ia-tdm/salida/ponencia-ia-tdm-montero.pptx
@@ -867,8 +867,8 @@
         </p:nvSpPr>
         <p:spPr>
           <a:xfrm>
-            <a:off x="635000" y="2235200"/>
-            <a:ext cx="10922000" cy="698500"/>
+            <a:off x="635000" y="2286000"/>
+            <a:ext cx="10922000" cy="355600"/>
           </a:xfrm>
           <a:prstGeom prst="rect">
             <a:avLst/>
@@ -881,7 +881,7 @@
           <a:p>
             <a:pPr algn="ctr"/>
             <a:r>
-              <a:rPr lang="es-ES" sz="2400" dirty="0" b="1">
+              <a:rPr lang="es-ES" sz="2000" dirty="0" b="1">
                 <a:ln w="0"/>
                 <a:solidFill>
                   <a:srgbClr val="AD3B94"/>
@@ -894,26 +894,7 @@
                   </a:outerShdw>
                 </a:effectLst>
               </a:rPr>
-              <a:t>CURSO PRECONGRESO ·</a:t>
-            </a:r>
-          </a:p>
-          <a:p>
-            <a:pPr algn="ctr"/>
-            <a:r>
-              <a:rPr lang="es-ES" sz="2400" dirty="0" b="1">
-                <a:ln w="0"/>
-                <a:solidFill>
-                  <a:srgbClr val="AD3B94"/>
-                </a:solidFill>
-                <a:effectLst>
-                  <a:outerShdw blurRad="38100" dist="19050" dir="2700000" algn="tl" rotWithShape="0">
-                    <a:schemeClr val="dk1">
-                      <a:alpha val="40000"/>
-                    </a:schemeClr>
-                  </a:outerShdw>
-                </a:effectLst>
-              </a:rPr>
-              <a:t>INTELIGENCIA ARTIFICIAL APLICADA A LA FARMACOCINÉTICA CLÍNICA</a:t>
+              <a:t>CURSO PRECONGRESO · INTELIGENCIA ARTIFICIAL APLICADA A LA FARMACOCINÉTICA CLÍNICA</a:t>
             </a:r>
           </a:p>
         </p:txBody>
@@ -932,7 +913,7 @@
         </p:nvSpPr>
         <p:spPr>
           <a:xfrm>
-            <a:off x="1270000" y="3086100"/>
+            <a:off x="1270000" y="2794000"/>
             <a:ext cx="9652000" cy="1143000"/>
           </a:xfrm>
           <a:prstGeom prst="rect">
@@ -963,7 +944,24 @@
                   </a:outerShdw>
                 </a:effectLst>
               </a:rPr>
-              <a:t>«Qué puede aportar realmente la IA a la TDM y a la farmacocinética clínica»</a:t>
+              <a:t>«Qué puede aportar realmente la IA</a:t>
+            </a:r>
+            <a:br/>
+            <a:r>
+              <a:rPr lang="es-ES" sz="3600" dirty="0" b="1">
+                <a:ln w="0"/>
+                <a:solidFill>
+                  <a:srgbClr val="00B3B2"/>
+                </a:solidFill>
+                <a:effectLst>
+                  <a:outerShdw blurRad="38100" dist="19050" dir="2700000" algn="tl" rotWithShape="0">
+                    <a:schemeClr val="dk1">
+                      <a:alpha val="40000"/>
+                    </a:schemeClr>
+                  </a:outerShdw>
+                </a:effectLst>
+              </a:rPr>
+              <a:t>a la TDM y a la farmacocinética clínica»</a:t>
             </a:r>
           </a:p>
         </p:txBody>
@@ -982,7 +980,7 @@
         </p:nvSpPr>
         <p:spPr>
           <a:xfrm>
-            <a:off x="1651000" y="4521200"/>
+            <a:off x="1651000" y="4381500"/>
             <a:ext cx="8890000" cy="317500"/>
           </a:xfrm>
           <a:prstGeom prst="rect">
@@ -1020,8 +1018,8 @@
         </p:nvSpPr>
         <p:spPr>
           <a:xfrm>
-            <a:off x="1651000" y="4902200"/>
-            <a:ext cx="8890000" cy="698500"/>
+            <a:off x="1270000" y="4775200"/>
+            <a:ext cx="9652000" cy="698500"/>
           </a:xfrm>
           <a:prstGeom prst="rect">
             <a:avLst/>
@@ -1039,7 +1037,16 @@
                   <a:srgbClr val="5E6B78"/>
                 </a:solidFill>
               </a:rPr>
-              <a:t>Farmacéutico especialista en Farmacia Hospitalaria · Hospital Universitario Nuestra Señora de Candelaria · Grupo DIGIFHAR (SEFH)</a:t>
+              <a:t>Farmacéutico especialista en Farmacia Hospitalaria ·</a:t>
+            </a:r>
+            <a:br/>
+            <a:r>
+              <a:rPr lang="es-ES" sz="2000" i="1" dirty="0">
+                <a:solidFill>
+                  <a:srgbClr val="5E6B78"/>
+                </a:solidFill>
+              </a:rPr>
+              <a:t>Hospital Universitario Nuestra Señora de Candelaria · Grupo DIGIFHAR (SEFH)</a:t>
             </a:r>
           </a:p>
         </p:txBody>
@@ -1084,7 +1091,7 @@
           <a:noFill/>
         </p:spPr>
         <p:txBody>
-          <a:bodyPr wrap="square" lIns="0" tIns="0" rIns="0" bIns="0" anchor="ctr">
+          <a:bodyPr wrap="square" lIns="0" tIns="0" rIns="0" bIns="0" anchor="t">
             <a:noAutofit/>
           </a:bodyPr>
           <a:lstStyle/>
@@ -1100,12 +1107,21 @@
                   <a:srgbClr val="263445"/>
                 </a:solidFill>
               </a:rPr>
-              <a:t>ChatGPT sabe hablar de farmacocinética, pero no </a:t>
+              <a:t>ChatGPT sabe hablar de farmacocinética,</a:t>
+            </a:r>
+            <a:br/>
+            <a:r>
+              <a:rPr sz="3200" b="0" i="0" lang="es-ES">
+                <a:solidFill>
+                  <a:srgbClr val="263445"/>
+                </a:solidFill>
+              </a:rPr>
+              <a:t>pero no </a:t>
             </a:r>
             <a:r>
               <a:rPr sz="3200" b="1" i="0" lang="es-ES">
                 <a:solidFill>
-                  <a:srgbClr val="007F7E"/>
+                  <a:srgbClr val="007A79"/>
                 </a:solidFill>
               </a:rPr>
               <a:t>hacer</a:t>
@@ -1130,12 +1146,12 @@
         <p:spPr>
           <a:xfrm>
             <a:off x="571500" y="6172200"/>
-            <a:ext cx="6392333" cy="0"/>
+            <a:ext cx="6392482" cy="0"/>
           </a:xfrm>
           <a:prstGeom prst="line">
             <a:avLst/>
           </a:prstGeom>
-          <a:ln w="25400">
+          <a:ln w="19050">
             <a:solidFill>
               <a:srgbClr val="C9D2DB"/>
             </a:solidFill>
@@ -1155,13 +1171,13 @@
           </a:xfrm>
           <a:prstGeom prst="roundRect">
             <a:avLst>
-              <a:gd name="adj" fmla="val 3144"/>
+              <a:gd name="adj" fmla="val 5031"/>
             </a:avLst>
           </a:prstGeom>
           <a:solidFill>
             <a:srgbClr val="31454F"/>
           </a:solidFill>
-          <a:ln w="38100">
+          <a:ln w="31750">
             <a:solidFill>
               <a:srgbClr val="263445"/>
             </a:solidFill>
@@ -1223,7 +1239,7 @@
           <a:solidFill>
             <a:srgbClr val="FFFFFF"/>
           </a:solidFill>
-          <a:ln w="12700">
+          <a:ln w="19050">
             <a:solidFill>
               <a:srgbClr val="263445"/>
             </a:solidFill>
@@ -1440,8 +1456,8 @@
         </p:blipFill>
         <p:spPr>
           <a:xfrm>
-            <a:off x="675269" y="2540000"/>
-            <a:ext cx="2205463" cy="3670300"/>
+            <a:off x="651305" y="2489200"/>
+            <a:ext cx="2253390" cy="3721100"/>
           </a:xfrm>
           <a:prstGeom prst="rect">
             <a:avLst/>
@@ -1456,20 +1472,20 @@
         </p:nvSpPr>
         <p:spPr>
           <a:xfrm>
-            <a:off x="3302000" y="4254500"/>
-            <a:ext cx="3556000" cy="889000"/>
+            <a:off x="3048000" y="4127500"/>
+            <a:ext cx="3556000" cy="825500"/>
           </a:xfrm>
           <a:prstGeom prst="wedgeRoundRectCallout">
             <a:avLst>
-              <a:gd name="adj1" fmla="val -76428"/>
-              <a:gd name="adj2" fmla="val -124285"/>
+              <a:gd name="adj1" fmla="val -56071"/>
+              <a:gd name="adj2" fmla="val -70000"/>
               <a:gd name="adj3" fmla="val 16667"/>
             </a:avLst>
           </a:prstGeom>
           <a:solidFill>
             <a:srgbClr val="FFFFFF"/>
           </a:solidFill>
-          <a:ln w="28575">
+          <a:ln w="31750">
             <a:solidFill>
               <a:srgbClr val="263445"/>
             </a:solidFill>
@@ -1495,7 +1511,7 @@
       </p:sp>
       <p:pic>
         <p:nvPicPr>
-          <p:cNvPr id="10" name="Calculadora boca abajo" descr="Calculadora boca abajo"/>
+          <p:cNvPr id="10" name="Calculadora boca abajo en el suelo" descr="Calculadora boca abajo en el suelo"/>
           <p:cNvPicPr>
             <a:picLocks noChangeAspect="1"/>
           </p:cNvPicPr>
@@ -1508,9 +1524,9 @@
           </a:stretch>
         </p:blipFill>
         <p:spPr>
-          <a:xfrm rot="10800000">
-            <a:off x="5164166" y="5461000"/>
-            <a:ext cx="530167" cy="711200"/>
+          <a:xfrm rot="12000000">
+            <a:off x="3390900" y="5473700"/>
+            <a:ext cx="520700" cy="698500"/>
           </a:xfrm>
           <a:prstGeom prst="rect">
             <a:avLst/>
@@ -1525,12 +1541,12 @@
         </p:nvSpPr>
         <p:spPr>
           <a:xfrm>
-            <a:off x="7116233" y="2016125"/>
-            <a:ext cx="4567767" cy="4064000"/>
+            <a:off x="7116382" y="2143125"/>
+            <a:ext cx="4567873" cy="3810000"/>
           </a:xfrm>
           <a:prstGeom prst="roundRect">
             <a:avLst>
-              <a:gd name="adj" fmla="val 2812"/>
+              <a:gd name="adj" fmla="val 2666"/>
             </a:avLst>
           </a:prstGeom>
           <a:solidFill>
@@ -1556,8 +1572,8 @@
         </p:nvSpPr>
         <p:spPr>
           <a:xfrm>
-            <a:off x="7421033" y="2168525"/>
-            <a:ext cx="3958167" cy="1358900"/>
+            <a:off x="7421182" y="2295525"/>
+            <a:ext cx="3958273" cy="1358900"/>
           </a:xfrm>
           <a:prstGeom prst="rect">
             <a:avLst/>
@@ -1590,8 +1606,8 @@
         </p:nvSpPr>
         <p:spPr>
           <a:xfrm>
-            <a:off x="7421033" y="3603625"/>
-            <a:ext cx="3958167" cy="1358900"/>
+            <a:off x="7421182" y="3730625"/>
+            <a:ext cx="3958273" cy="1358900"/>
           </a:xfrm>
           <a:prstGeom prst="rect">
             <a:avLst/>
@@ -1624,15 +1640,15 @@
         </p:nvCxnSpPr>
         <p:spPr>
           <a:xfrm>
-            <a:off x="7421033" y="5076825"/>
-            <a:ext cx="3958167" cy="0"/>
+            <a:off x="7421182" y="5153025"/>
+            <a:ext cx="3958272" cy="0"/>
           </a:xfrm>
           <a:prstGeom prst="line">
             <a:avLst/>
           </a:prstGeom>
           <a:ln w="19050">
             <a:solidFill>
-              <a:srgbClr val="DDB7D3"/>
+              <a:srgbClr val="E9C3DF"/>
             </a:solidFill>
           </a:ln>
         </p:spPr>
@@ -1645,8 +1661,8 @@
         </p:nvSpPr>
         <p:spPr>
           <a:xfrm>
-            <a:off x="7421033" y="5191125"/>
-            <a:ext cx="3958167" cy="698500"/>
+            <a:off x="7421182" y="5254625"/>
+            <a:ext cx="3958273" cy="635000"/>
           </a:xfrm>
           <a:prstGeom prst="rect">
             <a:avLst/>
@@ -1666,7 +1682,7 @@
                   <a:srgbClr val="5E6B78"/>
                 </a:solidFill>
               </a:rPr>
-              <a:t>717 predicciones · 239 ingresos en UCI · Grok: 29 %</a:t>
+              <a:t>717 predicciones · 239 ingresos en UCI · Grok: 29 %</a:t>
             </a:r>
           </a:p>
         </p:txBody>
@@ -1740,7 +1756,7 @@
           <a:noFill/>
         </p:spPr>
         <p:txBody>
-          <a:bodyPr wrap="square" lIns="0" tIns="0" rIns="0" bIns="0" anchor="ctr">
+          <a:bodyPr wrap="square" lIns="0" tIns="0" rIns="0" bIns="0" anchor="t">
             <a:noAutofit/>
           </a:bodyPr>
           <a:lstStyle/>
@@ -1794,7 +1810,7 @@
             <a:r>
               <a:rPr sz="2400" b="1" i="0" lang="es-ES">
                 <a:solidFill>
-                  <a:srgbClr val="007F7E"/>
+                  <a:srgbClr val="007A79"/>
                 </a:solidFill>
               </a:rPr>
               <a:t>¿Quién decide la forma del modelo: una persona o los datos?</a:t>
@@ -1811,7 +1827,7 @@
         <p:spPr>
           <a:xfrm>
             <a:off x="508000" y="2438400"/>
-            <a:ext cx="5511800" cy="292100"/>
+            <a:ext cx="5511927" cy="292100"/>
           </a:xfrm>
           <a:prstGeom prst="rect">
             <a:avLst/>
@@ -1844,8 +1860,8 @@
         </p:nvSpPr>
         <p:spPr>
           <a:xfrm>
-            <a:off x="6172200" y="2438400"/>
-            <a:ext cx="5511800" cy="292100"/>
+            <a:off x="6172327" y="2438400"/>
+            <a:ext cx="5511927" cy="292100"/>
           </a:xfrm>
           <a:prstGeom prst="rect">
             <a:avLst/>
@@ -1901,7 +1917,7 @@
         <p:spPr>
           <a:xfrm>
             <a:off x="508000" y="2857500"/>
-            <a:ext cx="5359400" cy="952500"/>
+            <a:ext cx="5359527" cy="952500"/>
           </a:xfrm>
           <a:prstGeom prst="roundRect">
             <a:avLst>
@@ -1931,8 +1947,8 @@
         </p:nvSpPr>
         <p:spPr>
           <a:xfrm>
-            <a:off x="723900" y="2978150"/>
-            <a:ext cx="711200" cy="711200"/>
+            <a:off x="711200" y="2952750"/>
+            <a:ext cx="762000" cy="762000"/>
           </a:xfrm>
           <a:prstGeom prst="ellipse">
             <a:avLst/>
@@ -1968,8 +1984,8 @@
         </p:blipFill>
         <p:spPr>
           <a:xfrm>
-            <a:off x="837692" y="3105629"/>
-            <a:ext cx="483616" cy="456242"/>
+            <a:off x="889000" y="3142052"/>
+            <a:ext cx="406400" cy="383396"/>
           </a:xfrm>
           <a:prstGeom prst="rect">
             <a:avLst/>
@@ -1984,8 +2000,8 @@
         </p:nvSpPr>
         <p:spPr>
           <a:xfrm>
-            <a:off x="1625600" y="2857500"/>
-            <a:ext cx="4089400" cy="952500"/>
+            <a:off x="1676400" y="2857500"/>
+            <a:ext cx="3987927" cy="952500"/>
           </a:xfrm>
           <a:prstGeom prst="rect">
             <a:avLst/>
@@ -2019,7 +2035,7 @@
         <p:spPr>
           <a:xfrm>
             <a:off x="508000" y="3962400"/>
-            <a:ext cx="5359400" cy="952500"/>
+            <a:ext cx="5359527" cy="952500"/>
           </a:xfrm>
           <a:prstGeom prst="roundRect">
             <a:avLst>
@@ -2049,8 +2065,8 @@
         </p:nvSpPr>
         <p:spPr>
           <a:xfrm>
-            <a:off x="723900" y="4083050"/>
-            <a:ext cx="711200" cy="711200"/>
+            <a:off x="711200" y="4057650"/>
+            <a:ext cx="762000" cy="762000"/>
           </a:xfrm>
           <a:prstGeom prst="ellipse">
             <a:avLst/>
@@ -2086,8 +2102,8 @@
         </p:blipFill>
         <p:spPr>
           <a:xfrm>
-            <a:off x="899243" y="4196842"/>
-            <a:ext cx="360514" cy="483616"/>
+            <a:off x="940724" y="4235450"/>
+            <a:ext cx="302953" cy="406400"/>
           </a:xfrm>
           <a:prstGeom prst="rect">
             <a:avLst/>
@@ -2102,8 +2118,8 @@
         </p:nvSpPr>
         <p:spPr>
           <a:xfrm>
-            <a:off x="1625600" y="3962400"/>
-            <a:ext cx="4089400" cy="952500"/>
+            <a:off x="1676400" y="3962400"/>
+            <a:ext cx="3987927" cy="952500"/>
           </a:xfrm>
           <a:prstGeom prst="rect">
             <a:avLst/>
@@ -2137,7 +2153,7 @@
         <p:spPr>
           <a:xfrm>
             <a:off x="508000" y="5067300"/>
-            <a:ext cx="5359400" cy="952500"/>
+            <a:ext cx="5359527" cy="952500"/>
           </a:xfrm>
           <a:prstGeom prst="roundRect">
             <a:avLst>
@@ -2167,8 +2183,8 @@
         </p:nvSpPr>
         <p:spPr>
           <a:xfrm>
-            <a:off x="723900" y="5187950"/>
-            <a:ext cx="711200" cy="711200"/>
+            <a:off x="711200" y="5162550"/>
+            <a:ext cx="762000" cy="762000"/>
           </a:xfrm>
           <a:prstGeom prst="ellipse">
             <a:avLst/>
@@ -2204,8 +2220,8 @@
         </p:blipFill>
         <p:spPr>
           <a:xfrm>
-            <a:off x="837692" y="5360317"/>
-            <a:ext cx="483616" cy="366467"/>
+            <a:off x="889000" y="5389572"/>
+            <a:ext cx="406400" cy="307955"/>
           </a:xfrm>
           <a:prstGeom prst="rect">
             <a:avLst/>
@@ -2220,8 +2236,8 @@
         </p:nvSpPr>
         <p:spPr>
           <a:xfrm>
-            <a:off x="1625600" y="5067300"/>
-            <a:ext cx="4089400" cy="952500"/>
+            <a:off x="1676400" y="5067300"/>
+            <a:ext cx="3987927" cy="952500"/>
           </a:xfrm>
           <a:prstGeom prst="rect">
             <a:avLst/>
@@ -2254,16 +2270,16 @@
         </p:nvSpPr>
         <p:spPr>
           <a:xfrm>
-            <a:off x="6172200" y="3111500"/>
+            <a:off x="6172327" y="3111500"/>
             <a:ext cx="2819400" cy="2819400"/>
           </a:xfrm>
           <a:prstGeom prst="ellipse">
             <a:avLst/>
           </a:prstGeom>
           <a:solidFill>
-            <a:srgbClr val="C3BF24"/>
-          </a:solidFill>
-          <a:ln w="38100">
+            <a:srgbClr val="E9C3DF"/>
+          </a:solidFill>
+          <a:ln w="31750">
             <a:solidFill>
               <a:srgbClr val="FFFFFF"/>
             </a:solidFill>
@@ -2285,16 +2301,16 @@
         </p:nvSpPr>
         <p:spPr>
           <a:xfrm>
-            <a:off x="6629400" y="3568700"/>
+            <a:off x="6629527" y="3568700"/>
             <a:ext cx="1905000" cy="1905000"/>
           </a:xfrm>
           <a:prstGeom prst="ellipse">
             <a:avLst/>
           </a:prstGeom>
           <a:solidFill>
-            <a:srgbClr val="3A8AA6"/>
-          </a:solidFill>
-          <a:ln w="38100">
+            <a:srgbClr val="C97AB5"/>
+          </a:solidFill>
+          <a:ln w="31750">
             <a:solidFill>
               <a:srgbClr val="FFFFFF"/>
             </a:solidFill>
@@ -2316,7 +2332,7 @@
         </p:nvSpPr>
         <p:spPr>
           <a:xfrm>
-            <a:off x="7073900" y="4013200"/>
+            <a:off x="7074027" y="4013200"/>
             <a:ext cx="1016000" cy="1016000"/>
           </a:xfrm>
           <a:prstGeom prst="ellipse">
@@ -2325,7 +2341,7 @@
           <a:solidFill>
             <a:srgbClr val="AD3B94"/>
           </a:solidFill>
-          <a:ln w="38100">
+          <a:ln w="31750">
             <a:solidFill>
               <a:srgbClr val="FFFFFF"/>
             </a:solidFill>
@@ -2347,7 +2363,7 @@
         </p:nvSpPr>
         <p:spPr>
           <a:xfrm>
-            <a:off x="8286750" y="3575050"/>
+            <a:off x="8286877" y="3575050"/>
             <a:ext cx="114300" cy="114300"/>
           </a:xfrm>
           <a:prstGeom prst="ellipse">
@@ -2356,7 +2372,7 @@
           <a:solidFill>
             <a:srgbClr val="FFFFFF"/>
           </a:solidFill>
-          <a:ln w="25400">
+          <a:ln w="19050">
             <a:solidFill>
               <a:srgbClr val="263445"/>
             </a:solidFill>
@@ -2378,7 +2394,7 @@
         </p:nvCxnSpPr>
         <p:spPr>
           <a:xfrm>
-            <a:off x="8401050" y="3632200"/>
+            <a:off x="8401177" y="3632200"/>
             <a:ext cx="565150" cy="0"/>
           </a:xfrm>
           <a:prstGeom prst="line">
@@ -2399,8 +2415,8 @@
         </p:nvSpPr>
         <p:spPr>
           <a:xfrm>
-            <a:off x="9042400" y="3302000"/>
-            <a:ext cx="2641600" cy="660400"/>
+            <a:off x="9042527" y="3302000"/>
+            <a:ext cx="2641727" cy="660400"/>
           </a:xfrm>
           <a:prstGeom prst="rect">
             <a:avLst/>
@@ -2417,7 +2433,7 @@
             <a:r>
               <a:rPr sz="2000" b="1" i="0" lang="es-ES">
                 <a:solidFill>
-                  <a:srgbClr val="77730E"/>
+                  <a:srgbClr val="8E2F79"/>
                 </a:solidFill>
               </a:rPr>
               <a:t>Aprendizaje automático</a:t>
@@ -2433,7 +2449,7 @@
         </p:nvSpPr>
         <p:spPr>
           <a:xfrm>
-            <a:off x="8255000" y="4425950"/>
+            <a:off x="8255127" y="4425950"/>
             <a:ext cx="114300" cy="114300"/>
           </a:xfrm>
           <a:prstGeom prst="ellipse">
@@ -2442,7 +2458,7 @@
           <a:solidFill>
             <a:srgbClr val="FFFFFF"/>
           </a:solidFill>
-          <a:ln w="25400">
+          <a:ln w="19050">
             <a:solidFill>
               <a:srgbClr val="263445"/>
             </a:solidFill>
@@ -2464,7 +2480,7 @@
         </p:nvCxnSpPr>
         <p:spPr>
           <a:xfrm>
-            <a:off x="8369300" y="4483100"/>
+            <a:off x="8369427" y="4483100"/>
             <a:ext cx="596900" cy="0"/>
           </a:xfrm>
           <a:prstGeom prst="line">
@@ -2485,8 +2501,8 @@
         </p:nvSpPr>
         <p:spPr>
           <a:xfrm>
-            <a:off x="9042400" y="4152900"/>
-            <a:ext cx="2641600" cy="660400"/>
+            <a:off x="9042527" y="4152900"/>
+            <a:ext cx="2641727" cy="660400"/>
           </a:xfrm>
           <a:prstGeom prst="rect">
             <a:avLst/>
@@ -2503,18 +2519,16 @@
             <a:r>
               <a:rPr sz="2000" b="1" i="0" lang="es-ES">
                 <a:solidFill>
-                  <a:srgbClr val="2B6C85"/>
+                  <a:srgbClr val="8E2F79"/>
                 </a:solidFill>
               </a:rPr>
               <a:t>Aprendizaje profundo</a:t>
             </a:r>
-          </a:p>
-          <a:p>
-            <a:pPr algn="l"/>
+            <a:br/>
             <a:r>
               <a:rPr sz="2000" b="1" i="0" lang="es-ES">
                 <a:solidFill>
-                  <a:srgbClr val="2B6C85"/>
+                  <a:srgbClr val="8E2F79"/>
                 </a:solidFill>
               </a:rPr>
               <a:t>(redes neuronales)</a:t>
@@ -2530,7 +2544,7 @@
         </p:nvSpPr>
         <p:spPr>
           <a:xfrm>
-            <a:off x="7715250" y="4718050"/>
+            <a:off x="7715377" y="4718050"/>
             <a:ext cx="114300" cy="114300"/>
           </a:xfrm>
           <a:prstGeom prst="ellipse">
@@ -2539,7 +2553,7 @@
           <a:solidFill>
             <a:srgbClr val="FFFFFF"/>
           </a:solidFill>
-          <a:ln w="25400">
+          <a:ln w="19050">
             <a:solidFill>
               <a:srgbClr val="263445"/>
             </a:solidFill>
@@ -2561,7 +2575,7 @@
         </p:nvCxnSpPr>
         <p:spPr>
           <a:xfrm>
-            <a:off x="7810500" y="4813300"/>
+            <a:off x="7810627" y="4813300"/>
             <a:ext cx="787400" cy="571500"/>
           </a:xfrm>
           <a:prstGeom prst="line">
@@ -2582,7 +2596,7 @@
         </p:nvCxnSpPr>
         <p:spPr>
           <a:xfrm>
-            <a:off x="8597900" y="5384800"/>
+            <a:off x="8598027" y="5384800"/>
             <a:ext cx="368300" cy="0"/>
           </a:xfrm>
           <a:prstGeom prst="line">
@@ -2603,8 +2617,8 @@
         </p:nvSpPr>
         <p:spPr>
           <a:xfrm>
-            <a:off x="9042400" y="5054600"/>
-            <a:ext cx="2641600" cy="660400"/>
+            <a:off x="9042527" y="5054600"/>
+            <a:ext cx="2641727" cy="660400"/>
           </a:xfrm>
           <a:prstGeom prst="rect">
             <a:avLst/>
@@ -2626,9 +2640,7 @@
               </a:rPr>
               <a:t>Modelos de lenguaje</a:t>
             </a:r>
-          </a:p>
-          <a:p>
-            <a:pPr algn="l"/>
+            <a:br/>
             <a:r>
               <a:rPr sz="2000" b="1" i="0" lang="es-ES">
                 <a:solidFill>
@@ -2709,7 +2721,7 @@
           <a:noFill/>
         </p:spPr>
         <p:txBody>
-          <a:bodyPr wrap="square" lIns="0" tIns="0" rIns="0" bIns="0" anchor="ctr">
+          <a:bodyPr wrap="square" lIns="0" tIns="0" rIns="0" bIns="0" anchor="t">
             <a:noAutofit/>
           </a:bodyPr>
           <a:lstStyle/>
@@ -2725,7 +2737,16 @@
                   <a:srgbClr val="263445"/>
                 </a:solidFill>
               </a:rPr>
-              <a:t>Treinta años de estudios: predice parecido al bayesiano, pero apenas ha llegado al día a día.</a:t>
+              <a:t>Treinta años de estudios: predice parecido al bayesiano,</a:t>
+            </a:r>
+            <a:br/>
+            <a:r>
+              <a:rPr sz="3200" b="0" i="0" lang="es-ES">
+                <a:solidFill>
+                  <a:srgbClr val="263445"/>
+                </a:solidFill>
+              </a:rPr>
+              <a:t>pero apenas ha llegado al día a día.</a:t>
             </a:r>
           </a:p>
         </p:txBody>
@@ -2744,7 +2765,7 @@
           <a:prstGeom prst="line">
             <a:avLst/>
           </a:prstGeom>
-          <a:ln w="25400">
+          <a:ln w="31750">
             <a:solidFill>
               <a:srgbClr val="263445"/>
             </a:solidFill>
@@ -2760,7 +2781,7 @@
         </p:nvSpPr>
         <p:spPr>
           <a:xfrm>
-            <a:off x="514350" y="1898650"/>
+            <a:off x="508000" y="1898650"/>
             <a:ext cx="165100" cy="165100"/>
           </a:xfrm>
           <a:prstGeom prst="ellipse">
@@ -2769,7 +2790,7 @@
           <a:solidFill>
             <a:srgbClr val="FFFFFF"/>
           </a:solidFill>
-          <a:ln w="38100">
+          <a:ln w="31750">
             <a:solidFill>
               <a:srgbClr val="263445"/>
             </a:solidFill>
@@ -2792,7 +2813,7 @@
         <p:spPr>
           <a:xfrm>
             <a:off x="508000" y="2146300"/>
-            <a:ext cx="5511800" cy="825500"/>
+            <a:ext cx="5359527" cy="825500"/>
           </a:xfrm>
           <a:prstGeom prst="rect">
             <a:avLst/>
@@ -2833,7 +2854,7 @@
         </p:nvSpPr>
         <p:spPr>
           <a:xfrm>
-            <a:off x="11220450" y="1898650"/>
+            <a:off x="6172327" y="1898650"/>
             <a:ext cx="165100" cy="165100"/>
           </a:xfrm>
           <a:prstGeom prst="ellipse">
@@ -2842,7 +2863,7 @@
           <a:solidFill>
             <a:srgbClr val="FFFFFF"/>
           </a:solidFill>
-          <a:ln w="38100">
+          <a:ln w="31750">
             <a:solidFill>
               <a:srgbClr val="263445"/>
             </a:solidFill>
@@ -2864,8 +2885,8 @@
         </p:nvSpPr>
         <p:spPr>
           <a:xfrm>
-            <a:off x="6172200" y="2146300"/>
-            <a:ext cx="5511800" cy="825500"/>
+            <a:off x="6172327" y="2146300"/>
+            <a:ext cx="5359527" cy="825500"/>
           </a:xfrm>
           <a:prstGeom prst="rect">
             <a:avLst/>
@@ -2878,7 +2899,7 @@
           </a:bodyPr>
           <a:lstStyle/>
           <a:p>
-            <a:pPr algn="r"/>
+            <a:pPr algn="l"/>
             <a:r>
               <a:rPr sz="2400" b="1" i="0" lang="es-ES">
                 <a:solidFill>
@@ -2900,18 +2921,18 @@
       </p:sp>
       <p:sp>
         <p:nvSpPr>
-          <p:cNvPr id="8" name="Tarjeta sin concentraciones"/>
-          <p:cNvSpPr/>
-          <p:nvPr/>
-        </p:nvSpPr>
-        <p:spPr>
-          <a:xfrm>
-            <a:off x="508000" y="3022600"/>
-            <a:ext cx="5511800" cy="2324100"/>
+          <p:cNvPr id="8" name="Tarjeta Sin concentraciones del paciente"/>
+          <p:cNvSpPr/>
+          <p:nvPr/>
+        </p:nvSpPr>
+        <p:spPr>
+          <a:xfrm>
+            <a:off x="508000" y="2984500"/>
+            <a:ext cx="5511927" cy="2286000"/>
           </a:xfrm>
           <a:prstGeom prst="roundRect">
             <a:avLst>
-              <a:gd name="adj" fmla="val 4918"/>
+              <a:gd name="adj" fmla="val 4444"/>
             </a:avLst>
           </a:prstGeom>
           <a:solidFill>
@@ -2945,8 +2966,8 @@
         </p:blipFill>
         <p:spPr>
           <a:xfrm>
-            <a:off x="789641" y="3200400"/>
-            <a:ext cx="224118" cy="533400"/>
+            <a:off x="786333" y="3187700"/>
+            <a:ext cx="256134" cy="609600"/>
           </a:xfrm>
           <a:prstGeom prst="rect">
             <a:avLst/>
@@ -2961,8 +2982,8 @@
         </p:nvSpPr>
         <p:spPr>
           <a:xfrm>
-            <a:off x="1219200" y="3213100"/>
-            <a:ext cx="4622800" cy="508000"/>
+            <a:off x="1219200" y="3187700"/>
+            <a:ext cx="4597527" cy="609600"/>
           </a:xfrm>
           <a:prstGeom prst="rect">
             <a:avLst/>
@@ -2989,68 +3010,18 @@
       </p:sp>
       <p:sp>
         <p:nvSpPr>
-          <p:cNvPr id="11" name="TextBox 10"/>
-          <p:cNvSpPr txBox="1"/>
-          <p:nvPr/>
-        </p:nvSpPr>
-        <p:spPr>
-          <a:xfrm>
-            <a:off x="762000" y="3886200"/>
-            <a:ext cx="5003800" cy="1270000"/>
-          </a:xfrm>
-          <a:prstGeom prst="rect">
-            <a:avLst/>
-          </a:prstGeom>
-          <a:noFill/>
-        </p:spPr>
-        <p:txBody>
-          <a:bodyPr wrap="square" lIns="0" tIns="0" rIns="0" bIns="0" anchor="t">
-            <a:noAutofit/>
-          </a:bodyPr>
-          <a:lstStyle/>
-          <a:p>
-            <a:pPr algn="l"/>
-            <a:r>
-              <a:rPr sz="2200" b="0" i="0" lang="es-ES">
-                <a:solidFill>
-                  <a:srgbClr val="263445"/>
-                </a:solidFill>
-              </a:rPr>
-              <a:t>El modelo híbrido mejora un </a:t>
-            </a:r>
-            <a:r>
-              <a:rPr sz="2200" b="1" i="0" lang="es-ES">
-                <a:solidFill>
-                  <a:srgbClr val="AD3B94"/>
-                </a:solidFill>
-              </a:rPr>
-              <a:t>17 %</a:t>
-            </a:r>
-            <a:r>
-              <a:rPr sz="2200" b="0" i="0" lang="es-ES">
-                <a:solidFill>
-                  <a:srgbClr val="263445"/>
-                </a:solidFill>
-              </a:rPr>
-              <a:t> el error del bayesiano · vancomicina en sepsis, 4059 pacientes</a:t>
-            </a:r>
-          </a:p>
-        </p:txBody>
-      </p:sp>
-      <p:sp>
-        <p:nvSpPr>
-          <p:cNvPr id="12" name="Tarjeta con concentraciones"/>
-          <p:cNvSpPr/>
-          <p:nvPr/>
-        </p:nvSpPr>
-        <p:spPr>
-          <a:xfrm>
-            <a:off x="6172200" y="3022600"/>
-            <a:ext cx="5511800" cy="2324100"/>
+          <p:cNvPr id="11" name="Tarjeta Con concentraciones del paciente"/>
+          <p:cNvSpPr/>
+          <p:nvPr/>
+        </p:nvSpPr>
+        <p:spPr>
+          <a:xfrm>
+            <a:off x="6172327" y="2984500"/>
+            <a:ext cx="5511927" cy="2286000"/>
           </a:xfrm>
           <a:prstGeom prst="roundRect">
             <a:avLst>
-              <a:gd name="adj" fmla="val 4918"/>
+              <a:gd name="adj" fmla="val 4444"/>
             </a:avLst>
           </a:prstGeom>
           <a:solidFill>
@@ -3070,7 +3041,7 @@
       </p:sp>
       <p:pic>
         <p:nvPicPr>
-          <p:cNvPr id="13" name="Tubo de análisis" descr="Tubo de análisis"/>
+          <p:cNvPr id="12" name="Tubo de análisis" descr="Tubo de análisis"/>
           <p:cNvPicPr>
             <a:picLocks noChangeAspect="1"/>
           </p:cNvPicPr>
@@ -3084,8 +3055,8 @@
         </p:blipFill>
         <p:spPr>
           <a:xfrm>
-            <a:off x="6448238" y="3200400"/>
-            <a:ext cx="235324" cy="533400"/>
+            <a:off x="6444256" y="3187700"/>
+            <a:ext cx="268941" cy="609600"/>
           </a:xfrm>
           <a:prstGeom prst="rect">
             <a:avLst/>
@@ -3094,14 +3065,14 @@
       </p:pic>
       <p:sp>
         <p:nvSpPr>
-          <p:cNvPr id="14" name="TextBox 13"/>
+          <p:cNvPr id="13" name="TextBox 12"/>
           <p:cNvSpPr txBox="1"/>
           <p:nvPr/>
         </p:nvSpPr>
         <p:spPr>
           <a:xfrm>
-            <a:off x="6883400" y="3213100"/>
-            <a:ext cx="4622800" cy="508000"/>
+            <a:off x="6883527" y="3187700"/>
+            <a:ext cx="4597527" cy="609600"/>
           </a:xfrm>
           <a:prstGeom prst="rect">
             <a:avLst/>
@@ -3128,13 +3099,63 @@
       </p:sp>
       <p:sp>
         <p:nvSpPr>
+          <p:cNvPr id="14" name="TextBox 13"/>
+          <p:cNvSpPr txBox="1"/>
+          <p:nvPr/>
+        </p:nvSpPr>
+        <p:spPr>
+          <a:xfrm>
+            <a:off x="711200" y="3937000"/>
+            <a:ext cx="5105527" cy="1130300"/>
+          </a:xfrm>
+          <a:prstGeom prst="rect">
+            <a:avLst/>
+          </a:prstGeom>
+          <a:noFill/>
+        </p:spPr>
+        <p:txBody>
+          <a:bodyPr wrap="square" lIns="0" tIns="0" rIns="0" bIns="0" anchor="ctr">
+            <a:noAutofit/>
+          </a:bodyPr>
+          <a:lstStyle/>
+          <a:p>
+            <a:pPr algn="l"/>
+            <a:r>
+              <a:rPr sz="2200" b="0" i="0" lang="es-ES">
+                <a:solidFill>
+                  <a:srgbClr val="263445"/>
+                </a:solidFill>
+              </a:rPr>
+              <a:t>El modelo híbrido mejora un </a:t>
+            </a:r>
+            <a:r>
+              <a:rPr sz="2200" b="1" i="0" lang="es-ES">
+                <a:solidFill>
+                  <a:srgbClr val="AD3B94"/>
+                </a:solidFill>
+              </a:rPr>
+              <a:t>17 %</a:t>
+            </a:r>
+            <a:r>
+              <a:rPr sz="2200" b="0" i="0" lang="es-ES">
+                <a:solidFill>
+                  <a:srgbClr val="263445"/>
+                </a:solidFill>
+              </a:rPr>
+              <a:t> el error del bayesiano · vancomicina en sepsis, 4059 pacientes</a:t>
+            </a:r>
+          </a:p>
+        </p:txBody>
+      </p:sp>
+      <p:sp>
+        <p:nvSpPr>
           <p:cNvPr id="15" name="Marca color"/>
           <p:cNvSpPr/>
           <p:nvPr/>
         </p:nvSpPr>
         <p:spPr>
           <a:xfrm>
-            <a:off x="6426200" y="3924300"/>
+            <a:off x="6375527" y="3949700"/>
             <a:ext cx="127000" cy="127000"/>
           </a:xfrm>
           <a:prstGeom prst="ellipse">
@@ -3163,8 +3184,8 @@
         </p:nvSpPr>
         <p:spPr>
           <a:xfrm>
-            <a:off x="6654800" y="3860800"/>
-            <a:ext cx="4775200" cy="635000"/>
+            <a:off x="6604127" y="3873500"/>
+            <a:ext cx="4876927" cy="609600"/>
           </a:xfrm>
           <a:prstGeom prst="rect">
             <a:avLst/>
@@ -3181,7 +3202,7 @@
             <a:r>
               <a:rPr sz="2200" b="1" i="0" lang="es-ES">
                 <a:solidFill>
-                  <a:srgbClr val="2F8541"/>
+                  <a:srgbClr val="2B7D3D"/>
                 </a:solidFill>
               </a:rPr>
               <a:t>Gana el bayesiano: </a:t>
@@ -3189,7 +3210,7 @@
             <a:r>
               <a:rPr sz="2200" b="0" i="0" lang="es-ES">
                 <a:solidFill>
-                  <a:srgbClr val="2F8541"/>
+                  <a:srgbClr val="2B7D3D"/>
                 </a:solidFill>
               </a:rPr>
               <a:t>13 % de error frente a 34 %</a:t>
@@ -3205,7 +3226,7 @@
         </p:nvSpPr>
         <p:spPr>
           <a:xfrm>
-            <a:off x="6426200" y="4635500"/>
+            <a:off x="6375527" y="4648200"/>
             <a:ext cx="127000" cy="127000"/>
           </a:xfrm>
           <a:prstGeom prst="ellipse">
@@ -3234,8 +3255,8 @@
         </p:nvSpPr>
         <p:spPr>
           <a:xfrm>
-            <a:off x="6654800" y="4572000"/>
-            <a:ext cx="4775200" cy="635000"/>
+            <a:off x="6604127" y="4572000"/>
+            <a:ext cx="4876927" cy="609600"/>
           </a:xfrm>
           <a:prstGeom prst="rect">
             <a:avLst/>
@@ -3270,28 +3291,25 @@
       </p:sp>
       <p:sp>
         <p:nvSpPr>
-          <p:cNvPr id="19" name="Franja"/>
-          <p:cNvSpPr/>
-          <p:nvPr/>
-        </p:nvSpPr>
-        <p:spPr>
-          <a:xfrm>
-            <a:off x="508000" y="5473700"/>
+          <p:cNvPr id="19" name="Advertencia"/>
+          <p:cNvSpPr/>
+          <p:nvPr/>
+        </p:nvSpPr>
+        <p:spPr>
+          <a:xfrm>
+            <a:off x="508000" y="5410200"/>
             <a:ext cx="11176000" cy="444500"/>
           </a:xfrm>
           <a:prstGeom prst="roundRect">
             <a:avLst>
-              <a:gd name="adj" fmla="val 50000"/>
+              <a:gd name="adj" fmla="val 22857"/>
             </a:avLst>
           </a:prstGeom>
           <a:solidFill>
-            <a:srgbClr val="FFFFFF"/>
-          </a:solidFill>
-          <a:ln w="19050">
-            <a:solidFill>
-              <a:srgbClr val="5E6B78"/>
-            </a:solidFill>
-            <a:prstDash val="dash"/>
+            <a:srgbClr val="263445"/>
+          </a:solidFill>
+          <a:ln>
+            <a:noFill/>
           </a:ln>
         </p:spPr>
         <p:txBody>
@@ -3304,7 +3322,7 @@
             <a:r>
               <a:rPr sz="2200" b="1" i="0" lang="es-ES">
                 <a:solidFill>
-                  <a:srgbClr val="5E6B78"/>
+                  <a:srgbClr val="FFFFFF"/>
                 </a:solidFill>
               </a:rPr>
               <a:t>Casi todo retrospectivo · La IA y los híbridos siguen en investigación</a:t>
@@ -3381,7 +3399,7 @@
           <a:noFill/>
         </p:spPr>
         <p:txBody>
-          <a:bodyPr wrap="square" lIns="0" tIns="0" rIns="0" bIns="0" anchor="ctr">
+          <a:bodyPr wrap="square" lIns="0" tIns="0" rIns="0" bIns="0" anchor="t">
             <a:noAutofit/>
           </a:bodyPr>
           <a:lstStyle/>
@@ -3411,15 +3429,15 @@
         <p:spPr>
           <a:xfrm>
             <a:off x="508000" y="5314950"/>
-            <a:ext cx="7399867" cy="812800"/>
-          </a:xfrm>
-          <a:prstGeom prst="rect">
-            <a:avLst/>
-          </a:prstGeom>
-          <a:solidFill>
-            <a:srgbClr val="E9EEF3"/>
-          </a:solidFill>
-          <a:ln w="25400">
+            <a:ext cx="7400036" cy="812800"/>
+          </a:xfrm>
+          <a:prstGeom prst="rect">
+            <a:avLst/>
+          </a:prstGeom>
+          <a:solidFill>
+            <a:srgbClr val="EEF2F6"/>
+          </a:solidFill>
+          <a:ln w="19050">
             <a:solidFill>
               <a:srgbClr val="FFFFFF"/>
             </a:solidFill>
@@ -3442,7 +3460,7 @@
         <p:spPr>
           <a:xfrm>
             <a:off x="647700" y="5353050"/>
-            <a:ext cx="7120467" cy="736600"/>
+            <a:ext cx="7120636" cy="736600"/>
           </a:xfrm>
           <a:prstGeom prst="rect">
             <a:avLst/>
@@ -3476,15 +3494,15 @@
         <p:spPr>
           <a:xfrm>
             <a:off x="1460500" y="4502150"/>
-            <a:ext cx="6447367" cy="812800"/>
-          </a:xfrm>
-          <a:prstGeom prst="rect">
-            <a:avLst/>
-          </a:prstGeom>
-          <a:solidFill>
-            <a:srgbClr val="DEE5EC"/>
-          </a:solidFill>
-          <a:ln w="25400">
+            <a:ext cx="6447536" cy="812800"/>
+          </a:xfrm>
+          <a:prstGeom prst="rect">
+            <a:avLst/>
+          </a:prstGeom>
+          <a:solidFill>
+            <a:srgbClr val="E4EAF0"/>
+          </a:solidFill>
+          <a:ln w="19050">
             <a:solidFill>
               <a:srgbClr val="FFFFFF"/>
             </a:solidFill>
@@ -3507,7 +3525,7 @@
         <p:spPr>
           <a:xfrm>
             <a:off x="1600200" y="4540250"/>
-            <a:ext cx="6167967" cy="736600"/>
+            <a:ext cx="6168136" cy="736600"/>
           </a:xfrm>
           <a:prstGeom prst="rect">
             <a:avLst/>
@@ -3549,15 +3567,15 @@
         <p:spPr>
           <a:xfrm>
             <a:off x="2413000" y="3689350"/>
-            <a:ext cx="5494867" cy="812800"/>
-          </a:xfrm>
-          <a:prstGeom prst="rect">
-            <a:avLst/>
-          </a:prstGeom>
-          <a:solidFill>
-            <a:srgbClr val="D3DCE5"/>
-          </a:solidFill>
-          <a:ln w="25400">
+            <a:ext cx="5495036" cy="812800"/>
+          </a:xfrm>
+          <a:prstGeom prst="rect">
+            <a:avLst/>
+          </a:prstGeom>
+          <a:solidFill>
+            <a:srgbClr val="DAE2EA"/>
+          </a:solidFill>
+          <a:ln w="19050">
             <a:solidFill>
               <a:srgbClr val="FFFFFF"/>
             </a:solidFill>
@@ -3580,7 +3598,7 @@
         <p:spPr>
           <a:xfrm>
             <a:off x="2552700" y="3727450"/>
-            <a:ext cx="5215467" cy="736600"/>
+            <a:ext cx="5215636" cy="736600"/>
           </a:xfrm>
           <a:prstGeom prst="rect">
             <a:avLst/>
@@ -3622,15 +3640,15 @@
         <p:spPr>
           <a:xfrm>
             <a:off x="3365500" y="2876550"/>
-            <a:ext cx="4542367" cy="812800"/>
-          </a:xfrm>
-          <a:prstGeom prst="rect">
-            <a:avLst/>
-          </a:prstGeom>
-          <a:solidFill>
-            <a:srgbClr val="C8D3DE"/>
-          </a:solidFill>
-          <a:ln w="25400">
+            <a:ext cx="4542536" cy="812800"/>
+          </a:xfrm>
+          <a:prstGeom prst="rect">
+            <a:avLst/>
+          </a:prstGeom>
+          <a:solidFill>
+            <a:srgbClr val="D0DAE4"/>
+          </a:solidFill>
+          <a:ln w="19050">
             <a:solidFill>
               <a:srgbClr val="FFFFFF"/>
             </a:solidFill>
@@ -3653,7 +3671,7 @@
         <p:spPr>
           <a:xfrm>
             <a:off x="3505200" y="2914650"/>
-            <a:ext cx="4262967" cy="736600"/>
+            <a:ext cx="4263136" cy="736600"/>
           </a:xfrm>
           <a:prstGeom prst="rect">
             <a:avLst/>
@@ -3687,15 +3705,15 @@
         <p:spPr>
           <a:xfrm>
             <a:off x="4318000" y="2063750"/>
-            <a:ext cx="3589867" cy="812800"/>
-          </a:xfrm>
-          <a:prstGeom prst="rect">
-            <a:avLst/>
-          </a:prstGeom>
-          <a:solidFill>
-            <a:srgbClr val="BDCAD7"/>
-          </a:solidFill>
-          <a:ln w="25400">
+            <a:ext cx="3590036" cy="812800"/>
+          </a:xfrm>
+          <a:prstGeom prst="rect">
+            <a:avLst/>
+          </a:prstGeom>
+          <a:solidFill>
+            <a:srgbClr val="C6D2DE"/>
+          </a:solidFill>
+          <a:ln w="19050">
             <a:solidFill>
               <a:srgbClr val="FFFFFF"/>
             </a:solidFill>
@@ -3718,7 +3736,7 @@
         <p:spPr>
           <a:xfrm>
             <a:off x="4457700" y="2101850"/>
-            <a:ext cx="3310467" cy="736600"/>
+            <a:ext cx="3310636" cy="736600"/>
           </a:xfrm>
           <a:prstGeom prst="rect">
             <a:avLst/>
@@ -3745,14 +3763,84 @@
       </p:sp>
       <p:sp>
         <p:nvSpPr>
-          <p:cNvPr id="13" name="Mancha"/>
+          <p:cNvPr id="13" name="Perfil escalera"/>
+          <p:cNvSpPr/>
+          <p:nvPr/>
+        </p:nvSpPr>
+        <p:spPr>
+          <a:xfrm>
+            <a:off x="508000" y="2063750"/>
+            <a:ext cx="7400036" cy="4064000"/>
+          </a:xfrm>
+          <a:custGeom>
+            <a:avLst/>
+            <a:gdLst/>
+            <a:ahLst/>
+            <a:cxnLst/>
+            <a:rect l="l" t="t" r="r" b="b"/>
+            <a:pathLst>
+              <a:path w="7400036" h="4064000">
+                <a:moveTo>
+                  <a:pt x="0" y="4064000"/>
+                </a:moveTo>
+                <a:lnTo>
+                  <a:pt x="0" y="3251200"/>
+                </a:lnTo>
+                <a:lnTo>
+                  <a:pt x="952500" y="3251200"/>
+                </a:lnTo>
+                <a:lnTo>
+                  <a:pt x="952500" y="2438400"/>
+                </a:lnTo>
+                <a:lnTo>
+                  <a:pt x="1905000" y="2438400"/>
+                </a:lnTo>
+                <a:lnTo>
+                  <a:pt x="1905000" y="1625600"/>
+                </a:lnTo>
+                <a:lnTo>
+                  <a:pt x="2857500" y="1625600"/>
+                </a:lnTo>
+                <a:lnTo>
+                  <a:pt x="2857500" y="812800"/>
+                </a:lnTo>
+                <a:lnTo>
+                  <a:pt x="3810000" y="812800"/>
+                </a:lnTo>
+                <a:lnTo>
+                  <a:pt x="3810000" y="0"/>
+                </a:lnTo>
+                <a:lnTo>
+                  <a:pt x="7400036" y="0"/>
+                </a:lnTo>
+              </a:path>
+            </a:pathLst>
+          </a:custGeom>
+          <a:noFill/>
+          <a:ln w="31750">
+            <a:solidFill>
+              <a:srgbClr val="263445"/>
+            </a:solidFill>
+          </a:ln>
+        </p:spPr>
+        <p:txBody>
+          <a:bodyPr rtlCol="0" anchor="ctr"/>
+          <a:lstStyle/>
+          <a:p>
+            <a:pPr algn="ctr"/>
+          </a:p>
+        </p:txBody>
+      </p:sp>
+      <p:sp>
+        <p:nvSpPr>
+          <p:cNvPr id="14" name="Mancha"/>
           <p:cNvSpPr/>
           <p:nvPr/>
         </p:nvSpPr>
         <p:spPr>
           <a:xfrm>
             <a:off x="539750" y="4686935"/>
-            <a:ext cx="889000" cy="653415"/>
+            <a:ext cx="889000" cy="615315"/>
           </a:xfrm>
           <a:prstGeom prst="ellipse">
             <a:avLst/>
@@ -3760,21 +3848,23 @@
           <a:solidFill>
             <a:srgbClr val="F8EAF4"/>
           </a:solidFill>
-          <a:ln>
-            <a:noFill/>
-          </a:ln>
-        </p:spPr>
-        <p:txBody>
-          <a:bodyPr rtlCol="0" anchor="ctr"/>
-          <a:lstStyle/>
-          <a:p>
-            <a:pPr algn="ctr"/>
-          </a:p>
-        </p:txBody>
-      </p:sp>
-      <p:sp>
-        <p:nvSpPr>
-          <p:cNvPr id="14" name="Estudio"/>
+          <a:ln w="19050">
+            <a:solidFill>
+              <a:srgbClr val="E9C3DF"/>
+            </a:solidFill>
+          </a:ln>
+        </p:spPr>
+        <p:txBody>
+          <a:bodyPr rtlCol="0" anchor="ctr"/>
+          <a:lstStyle/>
+          <a:p>
+            <a:pPr algn="ctr"/>
+          </a:p>
+        </p:txBody>
+      </p:sp>
+      <p:sp>
+        <p:nvSpPr>
+          <p:cNvPr id="15" name="Estudio"/>
           <p:cNvSpPr/>
           <p:nvPr/>
         </p:nvSpPr>
@@ -3805,7 +3895,7 @@
       </p:sp>
       <p:sp>
         <p:nvSpPr>
-          <p:cNvPr id="15" name="Estudio"/>
+          <p:cNvPr id="16" name="Estudio"/>
           <p:cNvSpPr/>
           <p:nvPr/>
         </p:nvSpPr>
@@ -3836,7 +3926,7 @@
       </p:sp>
       <p:sp>
         <p:nvSpPr>
-          <p:cNvPr id="16" name="Estudio"/>
+          <p:cNvPr id="17" name="Estudio"/>
           <p:cNvSpPr/>
           <p:nvPr/>
         </p:nvSpPr>
@@ -3867,7 +3957,7 @@
       </p:sp>
       <p:sp>
         <p:nvSpPr>
-          <p:cNvPr id="17" name="Estudio"/>
+          <p:cNvPr id="18" name="Estudio"/>
           <p:cNvSpPr/>
           <p:nvPr/>
         </p:nvSpPr>
@@ -3898,7 +3988,7 @@
       </p:sp>
       <p:sp>
         <p:nvSpPr>
-          <p:cNvPr id="18" name="Estudio"/>
+          <p:cNvPr id="19" name="Estudio"/>
           <p:cNvSpPr/>
           <p:nvPr/>
         </p:nvSpPr>
@@ -3929,7 +4019,7 @@
       </p:sp>
       <p:sp>
         <p:nvSpPr>
-          <p:cNvPr id="19" name="Estudio"/>
+          <p:cNvPr id="20" name="Estudio"/>
           <p:cNvSpPr/>
           <p:nvPr/>
         </p:nvSpPr>
@@ -3960,7 +4050,7 @@
       </p:sp>
       <p:sp>
         <p:nvSpPr>
-          <p:cNvPr id="20" name="Estudio"/>
+          <p:cNvPr id="21" name="Estudio"/>
           <p:cNvSpPr/>
           <p:nvPr/>
         </p:nvSpPr>
@@ -3991,7 +4081,7 @@
       </p:sp>
       <p:sp>
         <p:nvSpPr>
-          <p:cNvPr id="21" name="Estudio"/>
+          <p:cNvPr id="22" name="Estudio"/>
           <p:cNvSpPr/>
           <p:nvPr/>
         </p:nvSpPr>
@@ -4022,7 +4112,7 @@
       </p:sp>
       <p:sp>
         <p:nvSpPr>
-          <p:cNvPr id="22" name="Estudio"/>
+          <p:cNvPr id="23" name="Estudio"/>
           <p:cNvSpPr/>
           <p:nvPr/>
         </p:nvSpPr>
@@ -4053,7 +4143,7 @@
       </p:sp>
       <p:sp>
         <p:nvSpPr>
-          <p:cNvPr id="23" name="Estudio"/>
+          <p:cNvPr id="24" name="Estudio"/>
           <p:cNvSpPr/>
           <p:nvPr/>
         </p:nvSpPr>
@@ -4084,7 +4174,7 @@
       </p:sp>
       <p:sp>
         <p:nvSpPr>
-          <p:cNvPr id="24" name="Estudio"/>
+          <p:cNvPr id="25" name="Estudio"/>
           <p:cNvSpPr/>
           <p:nvPr/>
         </p:nvSpPr>
@@ -4115,7 +4205,7 @@
       </p:sp>
       <p:sp>
         <p:nvSpPr>
-          <p:cNvPr id="25" name="Estudio"/>
+          <p:cNvPr id="26" name="Estudio"/>
           <p:cNvSpPr/>
           <p:nvPr/>
         </p:nvSpPr>
@@ -4146,7 +4236,7 @@
       </p:sp>
       <p:sp>
         <p:nvSpPr>
-          <p:cNvPr id="26" name="Estudio"/>
+          <p:cNvPr id="27" name="Estudio"/>
           <p:cNvSpPr/>
           <p:nvPr/>
         </p:nvSpPr>
@@ -4177,7 +4267,7 @@
       </p:sp>
       <p:sp>
         <p:nvSpPr>
-          <p:cNvPr id="27" name="Estudio"/>
+          <p:cNvPr id="28" name="Estudio"/>
           <p:cNvSpPr/>
           <p:nvPr/>
         </p:nvSpPr>
@@ -4208,7 +4298,7 @@
       </p:sp>
       <p:sp>
         <p:nvSpPr>
-          <p:cNvPr id="28" name="Estudio"/>
+          <p:cNvPr id="29" name="Estudio"/>
           <p:cNvSpPr/>
           <p:nvPr/>
         </p:nvSpPr>
@@ -4239,7 +4329,7 @@
       </p:sp>
       <p:sp>
         <p:nvSpPr>
-          <p:cNvPr id="29" name="Estudio"/>
+          <p:cNvPr id="30" name="Estudio"/>
           <p:cNvSpPr/>
           <p:nvPr/>
         </p:nvSpPr>
@@ -4270,7 +4360,7 @@
       </p:sp>
       <p:sp>
         <p:nvSpPr>
-          <p:cNvPr id="30" name="Estudio"/>
+          <p:cNvPr id="31" name="Estudio"/>
           <p:cNvSpPr/>
           <p:nvPr/>
         </p:nvSpPr>
@@ -4301,7 +4391,7 @@
       </p:sp>
       <p:sp>
         <p:nvSpPr>
-          <p:cNvPr id="31" name="Estudio"/>
+          <p:cNvPr id="32" name="Estudio"/>
           <p:cNvSpPr/>
           <p:nvPr/>
         </p:nvSpPr>
@@ -4332,7 +4422,7 @@
       </p:sp>
       <p:sp>
         <p:nvSpPr>
-          <p:cNvPr id="32" name="Estudio"/>
+          <p:cNvPr id="33" name="Estudio"/>
           <p:cNvSpPr/>
           <p:nvPr/>
         </p:nvSpPr>
@@ -4363,7 +4453,7 @@
       </p:sp>
       <p:sp>
         <p:nvSpPr>
-          <p:cNvPr id="33" name="Estudio"/>
+          <p:cNvPr id="34" name="Estudio"/>
           <p:cNvSpPr/>
           <p:nvPr/>
         </p:nvSpPr>
@@ -4394,7 +4484,7 @@
       </p:sp>
       <p:sp>
         <p:nvSpPr>
-          <p:cNvPr id="34" name="Estudio"/>
+          <p:cNvPr id="35" name="Estudio"/>
           <p:cNvSpPr/>
           <p:nvPr/>
         </p:nvSpPr>
@@ -4425,7 +4515,7 @@
       </p:sp>
       <p:sp>
         <p:nvSpPr>
-          <p:cNvPr id="35" name="Estudio"/>
+          <p:cNvPr id="36" name="Estudio"/>
           <p:cNvSpPr/>
           <p:nvPr/>
         </p:nvSpPr>
@@ -4456,7 +4546,7 @@
       </p:sp>
       <p:sp>
         <p:nvSpPr>
-          <p:cNvPr id="36" name="Estudio"/>
+          <p:cNvPr id="37" name="Estudio"/>
           <p:cNvSpPr/>
           <p:nvPr/>
         </p:nvSpPr>
@@ -4487,7 +4577,7 @@
       </p:sp>
       <p:sp>
         <p:nvSpPr>
-          <p:cNvPr id="37" name="Estudio"/>
+          <p:cNvPr id="38" name="Estudio"/>
           <p:cNvSpPr/>
           <p:nvPr/>
         </p:nvSpPr>
@@ -4518,7 +4608,7 @@
       </p:sp>
       <p:sp>
         <p:nvSpPr>
-          <p:cNvPr id="38" name="Estudio"/>
+          <p:cNvPr id="39" name="Estudio"/>
           <p:cNvSpPr/>
           <p:nvPr/>
         </p:nvSpPr>
@@ -4549,7 +4639,7 @@
       </p:sp>
       <p:sp>
         <p:nvSpPr>
-          <p:cNvPr id="39" name="Estudio"/>
+          <p:cNvPr id="40" name="Estudio"/>
           <p:cNvSpPr/>
           <p:nvPr/>
         </p:nvSpPr>
@@ -4580,7 +4670,7 @@
       </p:sp>
       <p:sp>
         <p:nvSpPr>
-          <p:cNvPr id="40" name="Estudio"/>
+          <p:cNvPr id="41" name="Estudio"/>
           <p:cNvSpPr/>
           <p:nvPr/>
         </p:nvSpPr>
@@ -4611,7 +4701,7 @@
       </p:sp>
       <p:sp>
         <p:nvSpPr>
-          <p:cNvPr id="41" name="Estudio"/>
+          <p:cNvPr id="42" name="Estudio"/>
           <p:cNvSpPr/>
           <p:nvPr/>
         </p:nvSpPr>
@@ -4642,7 +4732,7 @@
       </p:sp>
       <p:sp>
         <p:nvSpPr>
-          <p:cNvPr id="42" name="Estudio"/>
+          <p:cNvPr id="43" name="Estudio"/>
           <p:cNvSpPr/>
           <p:nvPr/>
         </p:nvSpPr>
@@ -4673,7 +4763,7 @@
       </p:sp>
       <p:sp>
         <p:nvSpPr>
-          <p:cNvPr id="43" name="Estudio"/>
+          <p:cNvPr id="44" name="Estudio"/>
           <p:cNvSpPr/>
           <p:nvPr/>
         </p:nvSpPr>
@@ -4704,7 +4794,7 @@
       </p:sp>
       <p:sp>
         <p:nvSpPr>
-          <p:cNvPr id="44" name="Estudio"/>
+          <p:cNvPr id="45" name="Estudio"/>
           <p:cNvSpPr/>
           <p:nvPr/>
         </p:nvSpPr>
@@ -4735,7 +4825,7 @@
       </p:sp>
       <p:sp>
         <p:nvSpPr>
-          <p:cNvPr id="45" name="Estudio"/>
+          <p:cNvPr id="46" name="Estudio"/>
           <p:cNvSpPr/>
           <p:nvPr/>
         </p:nvSpPr>
@@ -4766,7 +4856,7 @@
       </p:sp>
       <p:sp>
         <p:nvSpPr>
-          <p:cNvPr id="46" name="Estudio"/>
+          <p:cNvPr id="47" name="Estudio"/>
           <p:cNvSpPr/>
           <p:nvPr/>
         </p:nvSpPr>
@@ -4797,7 +4887,7 @@
       </p:sp>
       <p:sp>
         <p:nvSpPr>
-          <p:cNvPr id="47" name="Estudio"/>
+          <p:cNvPr id="48" name="Estudio"/>
           <p:cNvSpPr/>
           <p:nvPr/>
         </p:nvSpPr>
@@ -4828,7 +4918,7 @@
       </p:sp>
       <p:sp>
         <p:nvSpPr>
-          <p:cNvPr id="48" name="Estudio"/>
+          <p:cNvPr id="49" name="Estudio"/>
           <p:cNvSpPr/>
           <p:nvPr/>
         </p:nvSpPr>
@@ -4859,7 +4949,7 @@
       </p:sp>
       <p:sp>
         <p:nvSpPr>
-          <p:cNvPr id="49" name="Estudio"/>
+          <p:cNvPr id="50" name="Estudio"/>
           <p:cNvSpPr/>
           <p:nvPr/>
         </p:nvSpPr>
@@ -4890,7 +4980,7 @@
       </p:sp>
       <p:sp>
         <p:nvSpPr>
-          <p:cNvPr id="50" name="Estudio"/>
+          <p:cNvPr id="51" name="Estudio"/>
           <p:cNvSpPr/>
           <p:nvPr/>
         </p:nvSpPr>
@@ -4921,7 +5011,7 @@
       </p:sp>
       <p:sp>
         <p:nvSpPr>
-          <p:cNvPr id="51" name="Estudio"/>
+          <p:cNvPr id="52" name="Estudio"/>
           <p:cNvSpPr/>
           <p:nvPr/>
         </p:nvSpPr>
@@ -4952,7 +5042,7 @@
       </p:sp>
       <p:sp>
         <p:nvSpPr>
-          <p:cNvPr id="52" name="Estudio"/>
+          <p:cNvPr id="53" name="Estudio"/>
           <p:cNvSpPr/>
           <p:nvPr/>
         </p:nvSpPr>
@@ -4983,7 +5073,7 @@
       </p:sp>
       <p:sp>
         <p:nvSpPr>
-          <p:cNvPr id="53" name="Estudio"/>
+          <p:cNvPr id="54" name="Estudio"/>
           <p:cNvSpPr/>
           <p:nvPr/>
         </p:nvSpPr>
@@ -5014,7 +5104,7 @@
       </p:sp>
       <p:sp>
         <p:nvSpPr>
-          <p:cNvPr id="54" name="Estudio"/>
+          <p:cNvPr id="55" name="Estudio"/>
           <p:cNvSpPr/>
           <p:nvPr/>
         </p:nvSpPr>
@@ -5045,7 +5135,7 @@
       </p:sp>
       <p:sp>
         <p:nvSpPr>
-          <p:cNvPr id="55" name="Estudio"/>
+          <p:cNvPr id="56" name="Estudio"/>
           <p:cNvSpPr/>
           <p:nvPr/>
         </p:nvSpPr>
@@ -5076,7 +5166,7 @@
       </p:sp>
       <p:sp>
         <p:nvSpPr>
-          <p:cNvPr id="56" name="Estudio"/>
+          <p:cNvPr id="57" name="Estudio"/>
           <p:cNvSpPr/>
           <p:nvPr/>
         </p:nvSpPr>
@@ -5107,7 +5197,7 @@
       </p:sp>
       <p:sp>
         <p:nvSpPr>
-          <p:cNvPr id="57" name="Estudio"/>
+          <p:cNvPr id="58" name="Estudio"/>
           <p:cNvSpPr/>
           <p:nvPr/>
         </p:nvSpPr>
@@ -5138,7 +5228,7 @@
       </p:sp>
       <p:sp>
         <p:nvSpPr>
-          <p:cNvPr id="58" name="Estudio"/>
+          <p:cNvPr id="59" name="Estudio"/>
           <p:cNvSpPr/>
           <p:nvPr/>
         </p:nvSpPr>
@@ -5169,7 +5259,7 @@
       </p:sp>
       <p:sp>
         <p:nvSpPr>
-          <p:cNvPr id="59" name="Estudio"/>
+          <p:cNvPr id="60" name="Estudio"/>
           <p:cNvSpPr/>
           <p:nvPr/>
         </p:nvSpPr>
@@ -5200,7 +5290,7 @@
       </p:sp>
       <p:sp>
         <p:nvSpPr>
-          <p:cNvPr id="60" name="Estudio"/>
+          <p:cNvPr id="61" name="Estudio"/>
           <p:cNvSpPr/>
           <p:nvPr/>
         </p:nvSpPr>
@@ -5231,7 +5321,7 @@
       </p:sp>
       <p:sp>
         <p:nvSpPr>
-          <p:cNvPr id="61" name="Estudio"/>
+          <p:cNvPr id="62" name="Estudio"/>
           <p:cNvSpPr/>
           <p:nvPr/>
         </p:nvSpPr>
@@ -5262,7 +5352,7 @@
       </p:sp>
       <p:sp>
         <p:nvSpPr>
-          <p:cNvPr id="62" name="Estudio"/>
+          <p:cNvPr id="63" name="Estudio"/>
           <p:cNvSpPr/>
           <p:nvPr/>
         </p:nvSpPr>
@@ -5293,7 +5383,7 @@
       </p:sp>
       <p:sp>
         <p:nvSpPr>
-          <p:cNvPr id="63" name="Estudio"/>
+          <p:cNvPr id="64" name="Estudio"/>
           <p:cNvSpPr/>
           <p:nvPr/>
         </p:nvSpPr>
@@ -5324,7 +5414,7 @@
       </p:sp>
       <p:sp>
         <p:nvSpPr>
-          <p:cNvPr id="64" name="Estudio"/>
+          <p:cNvPr id="65" name="Estudio"/>
           <p:cNvSpPr/>
           <p:nvPr/>
         </p:nvSpPr>
@@ -5355,7 +5445,7 @@
       </p:sp>
       <p:sp>
         <p:nvSpPr>
-          <p:cNvPr id="65" name="Estudio"/>
+          <p:cNvPr id="66" name="Estudio"/>
           <p:cNvSpPr/>
           <p:nvPr/>
         </p:nvSpPr>
@@ -5386,7 +5476,7 @@
       </p:sp>
       <p:sp>
         <p:nvSpPr>
-          <p:cNvPr id="66" name="Estudio"/>
+          <p:cNvPr id="67" name="Estudio"/>
           <p:cNvSpPr/>
           <p:nvPr/>
         </p:nvSpPr>
@@ -5417,7 +5507,7 @@
       </p:sp>
       <p:sp>
         <p:nvSpPr>
-          <p:cNvPr id="67" name="Estudio"/>
+          <p:cNvPr id="68" name="Estudio"/>
           <p:cNvSpPr/>
           <p:nvPr/>
         </p:nvSpPr>
@@ -5448,7 +5538,7 @@
       </p:sp>
       <p:sp>
         <p:nvSpPr>
-          <p:cNvPr id="68" name="Estudio"/>
+          <p:cNvPr id="69" name="Estudio"/>
           <p:cNvSpPr/>
           <p:nvPr/>
         </p:nvSpPr>
@@ -5479,7 +5569,7 @@
       </p:sp>
       <p:sp>
         <p:nvSpPr>
-          <p:cNvPr id="69" name="Estudio"/>
+          <p:cNvPr id="70" name="Estudio"/>
           <p:cNvSpPr/>
           <p:nvPr/>
         </p:nvSpPr>
@@ -5510,7 +5600,7 @@
       </p:sp>
       <p:sp>
         <p:nvSpPr>
-          <p:cNvPr id="70" name="Estudio"/>
+          <p:cNvPr id="71" name="Estudio"/>
           <p:cNvSpPr/>
           <p:nvPr/>
         </p:nvSpPr>
@@ -5541,7 +5631,7 @@
       </p:sp>
       <p:sp>
         <p:nvSpPr>
-          <p:cNvPr id="71" name="Estudio"/>
+          <p:cNvPr id="72" name="Estudio"/>
           <p:cNvSpPr/>
           <p:nvPr/>
         </p:nvSpPr>
@@ -5572,7 +5662,7 @@
       </p:sp>
       <p:sp>
         <p:nvSpPr>
-          <p:cNvPr id="72" name="Estudio"/>
+          <p:cNvPr id="73" name="Estudio"/>
           <p:cNvSpPr/>
           <p:nvPr/>
         </p:nvSpPr>
@@ -5603,7 +5693,7 @@
       </p:sp>
       <p:sp>
         <p:nvSpPr>
-          <p:cNvPr id="73" name="Estudio"/>
+          <p:cNvPr id="74" name="Estudio"/>
           <p:cNvSpPr/>
           <p:nvPr/>
         </p:nvSpPr>
@@ -5634,7 +5724,7 @@
       </p:sp>
       <p:sp>
         <p:nvSpPr>
-          <p:cNvPr id="74" name="Estudio"/>
+          <p:cNvPr id="75" name="Estudio"/>
           <p:cNvSpPr/>
           <p:nvPr/>
         </p:nvSpPr>
@@ -5665,7 +5755,7 @@
       </p:sp>
       <p:sp>
         <p:nvSpPr>
-          <p:cNvPr id="75" name="Estudio"/>
+          <p:cNvPr id="76" name="Estudio"/>
           <p:cNvSpPr/>
           <p:nvPr/>
         </p:nvSpPr>
@@ -5696,7 +5786,7 @@
       </p:sp>
       <p:sp>
         <p:nvSpPr>
-          <p:cNvPr id="76" name="Estudio"/>
+          <p:cNvPr id="77" name="Estudio"/>
           <p:cNvSpPr/>
           <p:nvPr/>
         </p:nvSpPr>
@@ -5727,7 +5817,7 @@
       </p:sp>
       <p:sp>
         <p:nvSpPr>
-          <p:cNvPr id="77" name="Estudio"/>
+          <p:cNvPr id="78" name="Estudio"/>
           <p:cNvSpPr/>
           <p:nvPr/>
         </p:nvSpPr>
@@ -5758,7 +5848,7 @@
       </p:sp>
       <p:sp>
         <p:nvSpPr>
-          <p:cNvPr id="78" name="Estudio"/>
+          <p:cNvPr id="79" name="Estudio"/>
           <p:cNvSpPr/>
           <p:nvPr/>
         </p:nvSpPr>
@@ -5789,7 +5879,7 @@
       </p:sp>
       <p:sp>
         <p:nvSpPr>
-          <p:cNvPr id="79" name="Estudio"/>
+          <p:cNvPr id="80" name="Estudio"/>
           <p:cNvSpPr/>
           <p:nvPr/>
         </p:nvSpPr>
@@ -5820,7 +5910,7 @@
       </p:sp>
       <p:sp>
         <p:nvSpPr>
-          <p:cNvPr id="80" name="Estudio"/>
+          <p:cNvPr id="81" name="Estudio"/>
           <p:cNvSpPr/>
           <p:nvPr/>
         </p:nvSpPr>
@@ -5851,7 +5941,7 @@
       </p:sp>
       <p:sp>
         <p:nvSpPr>
-          <p:cNvPr id="81" name="Estudio"/>
+          <p:cNvPr id="82" name="Estudio"/>
           <p:cNvSpPr/>
           <p:nvPr/>
         </p:nvSpPr>
@@ -5882,7 +5972,7 @@
       </p:sp>
       <p:sp>
         <p:nvSpPr>
-          <p:cNvPr id="82" name="Estudio"/>
+          <p:cNvPr id="83" name="Estudio"/>
           <p:cNvSpPr/>
           <p:nvPr/>
         </p:nvSpPr>
@@ -5913,7 +6003,7 @@
       </p:sp>
       <p:sp>
         <p:nvSpPr>
-          <p:cNvPr id="83" name="Estudio"/>
+          <p:cNvPr id="84" name="Estudio"/>
           <p:cNvSpPr/>
           <p:nvPr/>
         </p:nvSpPr>
@@ -5944,13 +6034,44 @@
       </p:sp>
       <p:sp>
         <p:nvSpPr>
-          <p:cNvPr id="84" name="Estudio"/>
-          <p:cNvSpPr/>
-          <p:nvPr/>
-        </p:nvSpPr>
-        <p:spPr>
-          <a:xfrm>
-            <a:off x="1210925" y="5100648"/>
+          <p:cNvPr id="85" name="Mancha"/>
+          <p:cNvSpPr/>
+          <p:nvPr/>
+        </p:nvSpPr>
+        <p:spPr>
+          <a:xfrm>
+            <a:off x="1644650" y="4079875"/>
+            <a:ext cx="584200" cy="409575"/>
+          </a:xfrm>
+          <a:prstGeom prst="ellipse">
+            <a:avLst/>
+          </a:prstGeom>
+          <a:solidFill>
+            <a:srgbClr val="F8EAF4"/>
+          </a:solidFill>
+          <a:ln w="19050">
+            <a:solidFill>
+              <a:srgbClr val="E9C3DF"/>
+            </a:solidFill>
+          </a:ln>
+        </p:spPr>
+        <p:txBody>
+          <a:bodyPr rtlCol="0" anchor="ctr"/>
+          <a:lstStyle/>
+          <a:p>
+            <a:pPr algn="ctr"/>
+          </a:p>
+        </p:txBody>
+      </p:sp>
+      <p:sp>
+        <p:nvSpPr>
+          <p:cNvPr id="86" name="Estudio"/>
+          <p:cNvSpPr/>
+          <p:nvPr/>
+        </p:nvSpPr>
+        <p:spPr>
+          <a:xfrm>
+            <a:off x="2039761" y="4331952"/>
             <a:ext cx="103137" cy="103137"/>
           </a:xfrm>
           <a:prstGeom prst="ellipse">
@@ -5975,13 +6096,13 @@
       </p:sp>
       <p:sp>
         <p:nvSpPr>
-          <p:cNvPr id="85" name="Estudio"/>
-          <p:cNvSpPr/>
-          <p:nvPr/>
-        </p:nvSpPr>
-        <p:spPr>
-          <a:xfrm>
-            <a:off x="819030" y="5048556"/>
+          <p:cNvPr id="87" name="Estudio"/>
+          <p:cNvSpPr/>
+          <p:nvPr/>
+        </p:nvSpPr>
+        <p:spPr>
+          <a:xfrm>
+            <a:off x="1824272" y="4305242"/>
             <a:ext cx="93099" cy="93099"/>
           </a:xfrm>
           <a:prstGeom prst="ellipse">
@@ -6006,13 +6127,13 @@
       </p:sp>
       <p:sp>
         <p:nvSpPr>
-          <p:cNvPr id="86" name="Estudio"/>
-          <p:cNvSpPr/>
-          <p:nvPr/>
-        </p:nvSpPr>
-        <p:spPr>
-          <a:xfrm>
-            <a:off x="725417" y="4917699"/>
+          <p:cNvPr id="88" name="Estudio"/>
+          <p:cNvSpPr/>
+          <p:nvPr/>
+        </p:nvSpPr>
+        <p:spPr>
+          <a:xfrm>
+            <a:off x="1769812" y="4230091"/>
             <a:ext cx="104137" cy="104137"/>
           </a:xfrm>
           <a:prstGeom prst="ellipse">
@@ -6037,13 +6158,13 @@
       </p:sp>
       <p:sp>
         <p:nvSpPr>
-          <p:cNvPr id="87" name="Estudio"/>
-          <p:cNvSpPr/>
-          <p:nvPr/>
-        </p:nvSpPr>
-        <p:spPr>
-          <a:xfrm>
-            <a:off x="1204745" y="5080537"/>
+          <p:cNvPr id="89" name="Estudio"/>
+          <p:cNvSpPr/>
+          <p:nvPr/>
+        </p:nvSpPr>
+        <p:spPr>
+          <a:xfrm>
+            <a:off x="2041339" y="4325790"/>
             <a:ext cx="80587" cy="80587"/>
           </a:xfrm>
           <a:prstGeom prst="ellipse">
@@ -6068,13 +6189,13 @@
       </p:sp>
       <p:sp>
         <p:nvSpPr>
-          <p:cNvPr id="88" name="Estudio"/>
-          <p:cNvSpPr/>
-          <p:nvPr/>
-        </p:nvSpPr>
-        <p:spPr>
-          <a:xfrm>
-            <a:off x="998461" y="5171029"/>
+          <p:cNvPr id="90" name="Estudio"/>
+          <p:cNvSpPr/>
+          <p:nvPr/>
+        </p:nvSpPr>
+        <p:spPr>
+          <a:xfrm>
+            <a:off x="1925630" y="4374957"/>
             <a:ext cx="85568" cy="85568"/>
           </a:xfrm>
           <a:prstGeom prst="ellipse">
@@ -6099,13 +6220,13 @@
       </p:sp>
       <p:sp>
         <p:nvSpPr>
-          <p:cNvPr id="89" name="Estudio"/>
-          <p:cNvSpPr/>
-          <p:nvPr/>
-        </p:nvSpPr>
-        <p:spPr>
-          <a:xfrm>
-            <a:off x="1164817" y="5116046"/>
+          <p:cNvPr id="91" name="Estudio"/>
+          <p:cNvSpPr/>
+          <p:nvPr/>
+        </p:nvSpPr>
+        <p:spPr>
+          <a:xfrm>
+            <a:off x="2014571" y="4340931"/>
             <a:ext cx="101226" cy="101226"/>
           </a:xfrm>
           <a:prstGeom prst="ellipse">
@@ -6130,13 +6251,13 @@
       </p:sp>
       <p:sp>
         <p:nvSpPr>
-          <p:cNvPr id="90" name="Estudio"/>
-          <p:cNvSpPr/>
-          <p:nvPr/>
-        </p:nvSpPr>
-        <p:spPr>
-          <a:xfrm>
-            <a:off x="1093594" y="5084668"/>
+          <p:cNvPr id="92" name="Estudio"/>
+          <p:cNvSpPr/>
+          <p:nvPr/>
+        </p:nvSpPr>
+        <p:spPr>
+          <a:xfrm>
+            <a:off x="1981715" y="4330212"/>
             <a:ext cx="71018" cy="71018"/>
           </a:xfrm>
           <a:prstGeom prst="ellipse">
@@ -6161,13 +6282,13 @@
       </p:sp>
       <p:sp>
         <p:nvSpPr>
-          <p:cNvPr id="91" name="Estudio"/>
-          <p:cNvSpPr/>
-          <p:nvPr/>
-        </p:nvSpPr>
-        <p:spPr>
-          <a:xfrm>
-            <a:off x="912540" y="5170932"/>
+          <p:cNvPr id="93" name="Estudio"/>
+          <p:cNvSpPr/>
+          <p:nvPr/>
+        </p:nvSpPr>
+        <p:spPr>
+          <a:xfrm>
+            <a:off x="1880082" y="4377088"/>
             <a:ext cx="75731" cy="75731"/>
           </a:xfrm>
           <a:prstGeom prst="ellipse">
@@ -6192,36 +6313,7 @@
       </p:sp>
       <p:sp>
         <p:nvSpPr>
-          <p:cNvPr id="92" name="Mancha"/>
-          <p:cNvSpPr/>
-          <p:nvPr/>
-        </p:nvSpPr>
-        <p:spPr>
-          <a:xfrm>
-            <a:off x="1644650" y="4079875"/>
-            <a:ext cx="584200" cy="447675"/>
-          </a:xfrm>
-          <a:prstGeom prst="ellipse">
-            <a:avLst/>
-          </a:prstGeom>
-          <a:solidFill>
-            <a:srgbClr val="F8EAF4"/>
-          </a:solidFill>
-          <a:ln>
-            <a:noFill/>
-          </a:ln>
-        </p:spPr>
-        <p:txBody>
-          <a:bodyPr rtlCol="0" anchor="ctr"/>
-          <a:lstStyle/>
-          <a:p>
-            <a:pPr algn="ctr"/>
-          </a:p>
-        </p:txBody>
-      </p:sp>
-      <p:sp>
-        <p:nvSpPr>
-          <p:cNvPr id="93" name="Estudio"/>
+          <p:cNvPr id="94" name="Estudio"/>
           <p:cNvSpPr/>
           <p:nvPr/>
         </p:nvSpPr>
@@ -6252,7 +6344,7 @@
       </p:sp>
       <p:sp>
         <p:nvSpPr>
-          <p:cNvPr id="94" name="Estudio"/>
+          <p:cNvPr id="95" name="Estudio"/>
           <p:cNvSpPr/>
           <p:nvPr/>
         </p:nvSpPr>
@@ -6283,7 +6375,7 @@
       </p:sp>
       <p:sp>
         <p:nvSpPr>
-          <p:cNvPr id="95" name="Estudio"/>
+          <p:cNvPr id="96" name="Estudio"/>
           <p:cNvSpPr/>
           <p:nvPr/>
         </p:nvSpPr>
@@ -6314,7 +6406,7 @@
       </p:sp>
       <p:sp>
         <p:nvSpPr>
-          <p:cNvPr id="96" name="Estudio"/>
+          <p:cNvPr id="97" name="Estudio"/>
           <p:cNvSpPr/>
           <p:nvPr/>
         </p:nvSpPr>
@@ -6345,7 +6437,7 @@
       </p:sp>
       <p:sp>
         <p:nvSpPr>
-          <p:cNvPr id="97" name="Estudio"/>
+          <p:cNvPr id="98" name="Estudio"/>
           <p:cNvSpPr/>
           <p:nvPr/>
         </p:nvSpPr>
@@ -6376,7 +6468,7 @@
       </p:sp>
       <p:sp>
         <p:nvSpPr>
-          <p:cNvPr id="98" name="Estudio"/>
+          <p:cNvPr id="99" name="Estudio"/>
           <p:cNvSpPr/>
           <p:nvPr/>
         </p:nvSpPr>
@@ -6407,14 +6499,14 @@
       </p:sp>
       <p:sp>
         <p:nvSpPr>
-          <p:cNvPr id="99" name="Estudio"/>
-          <p:cNvSpPr/>
-          <p:nvPr/>
-        </p:nvSpPr>
-        <p:spPr>
-          <a:xfrm>
-            <a:off x="1882515" y="4224570"/>
-            <a:ext cx="74053" cy="74053"/>
+          <p:cNvPr id="100" name="Estudio"/>
+          <p:cNvSpPr/>
+          <p:nvPr/>
+        </p:nvSpPr>
+        <p:spPr>
+          <a:xfrm>
+            <a:off x="2800350" y="3536950"/>
+            <a:ext cx="177800" cy="177800"/>
           </a:xfrm>
           <a:prstGeom prst="ellipse">
             <a:avLst/>
@@ -6422,7 +6514,7 @@
           <a:solidFill>
             <a:srgbClr val="AD3B94"/>
           </a:solidFill>
-          <a:ln w="9525">
+          <a:ln w="19050">
             <a:solidFill>
               <a:srgbClr val="FFFFFF"/>
             </a:solidFill>
@@ -6438,261 +6530,13 @@
       </p:sp>
       <p:sp>
         <p:nvSpPr>
-          <p:cNvPr id="100" name="Estudio"/>
-          <p:cNvSpPr/>
-          <p:nvPr/>
-        </p:nvSpPr>
-        <p:spPr>
-          <a:xfrm>
-            <a:off x="1767130" y="4378126"/>
-            <a:ext cx="65587" cy="65587"/>
-          </a:xfrm>
-          <a:prstGeom prst="ellipse">
-            <a:avLst/>
-          </a:prstGeom>
-          <a:solidFill>
-            <a:srgbClr val="AD3B94"/>
-          </a:solidFill>
-          <a:ln w="9525">
-            <a:solidFill>
-              <a:srgbClr val="FFFFFF"/>
-            </a:solidFill>
-          </a:ln>
-        </p:spPr>
-        <p:txBody>
-          <a:bodyPr rtlCol="0" anchor="ctr"/>
-          <a:lstStyle/>
-          <a:p>
-            <a:pPr algn="ctr"/>
-          </a:p>
-        </p:txBody>
-      </p:sp>
-      <p:sp>
-        <p:nvSpPr>
-          <p:cNvPr id="101" name="Estudio"/>
-          <p:cNvSpPr/>
-          <p:nvPr/>
-        </p:nvSpPr>
-        <p:spPr>
-          <a:xfrm>
-            <a:off x="1939659" y="4265555"/>
-            <a:ext cx="92617" cy="92617"/>
-          </a:xfrm>
-          <a:prstGeom prst="ellipse">
-            <a:avLst/>
-          </a:prstGeom>
-          <a:solidFill>
-            <a:srgbClr val="AD3B94"/>
-          </a:solidFill>
-          <a:ln w="9525">
-            <a:solidFill>
-              <a:srgbClr val="FFFFFF"/>
-            </a:solidFill>
-          </a:ln>
-        </p:spPr>
-        <p:txBody>
-          <a:bodyPr rtlCol="0" anchor="ctr"/>
-          <a:lstStyle/>
-          <a:p>
-            <a:pPr algn="ctr"/>
-          </a:p>
-        </p:txBody>
-      </p:sp>
-      <p:sp>
-        <p:nvSpPr>
-          <p:cNvPr id="102" name="Estudio"/>
-          <p:cNvSpPr/>
-          <p:nvPr/>
-        </p:nvSpPr>
-        <p:spPr>
-          <a:xfrm>
-            <a:off x="2000812" y="4341280"/>
-            <a:ext cx="106104" cy="106104"/>
-          </a:xfrm>
-          <a:prstGeom prst="ellipse">
-            <a:avLst/>
-          </a:prstGeom>
-          <a:solidFill>
-            <a:srgbClr val="AD3B94"/>
-          </a:solidFill>
-          <a:ln w="9525">
-            <a:solidFill>
-              <a:srgbClr val="FFFFFF"/>
-            </a:solidFill>
-          </a:ln>
-        </p:spPr>
-        <p:txBody>
-          <a:bodyPr rtlCol="0" anchor="ctr"/>
-          <a:lstStyle/>
-          <a:p>
-            <a:pPr algn="ctr"/>
-          </a:p>
-        </p:txBody>
-      </p:sp>
-      <p:sp>
-        <p:nvSpPr>
-          <p:cNvPr id="103" name="Estudio"/>
-          <p:cNvSpPr/>
-          <p:nvPr/>
-        </p:nvSpPr>
-        <p:spPr>
-          <a:xfrm>
-            <a:off x="1971320" y="4369083"/>
-            <a:ext cx="71443" cy="71443"/>
-          </a:xfrm>
-          <a:prstGeom prst="ellipse">
-            <a:avLst/>
-          </a:prstGeom>
-          <a:solidFill>
-            <a:srgbClr val="AD3B94"/>
-          </a:solidFill>
-          <a:ln w="9525">
-            <a:solidFill>
-              <a:srgbClr val="FFFFFF"/>
-            </a:solidFill>
-          </a:ln>
-        </p:spPr>
-        <p:txBody>
-          <a:bodyPr rtlCol="0" anchor="ctr"/>
-          <a:lstStyle/>
-          <a:p>
-            <a:pPr algn="ctr"/>
-          </a:p>
-        </p:txBody>
-      </p:sp>
-      <p:sp>
-        <p:nvSpPr>
-          <p:cNvPr id="104" name="Estudio"/>
-          <p:cNvSpPr/>
-          <p:nvPr/>
-        </p:nvSpPr>
-        <p:spPr>
-          <a:xfrm>
-            <a:off x="1708107" y="4293686"/>
-            <a:ext cx="84489" cy="84489"/>
-          </a:xfrm>
-          <a:prstGeom prst="ellipse">
-            <a:avLst/>
-          </a:prstGeom>
-          <a:solidFill>
-            <a:srgbClr val="AD3B94"/>
-          </a:solidFill>
-          <a:ln w="9525">
-            <a:solidFill>
-              <a:srgbClr val="FFFFFF"/>
-            </a:solidFill>
-          </a:ln>
-        </p:spPr>
-        <p:txBody>
-          <a:bodyPr rtlCol="0" anchor="ctr"/>
-          <a:lstStyle/>
-          <a:p>
-            <a:pPr algn="ctr"/>
-          </a:p>
-        </p:txBody>
-      </p:sp>
-      <p:sp>
-        <p:nvSpPr>
-          <p:cNvPr id="105" name="Estudio"/>
-          <p:cNvSpPr/>
-          <p:nvPr/>
-        </p:nvSpPr>
-        <p:spPr>
-          <a:xfrm>
-            <a:off x="1978915" y="4366487"/>
-            <a:ext cx="78868" cy="78868"/>
-          </a:xfrm>
-          <a:prstGeom prst="ellipse">
-            <a:avLst/>
-          </a:prstGeom>
-          <a:solidFill>
-            <a:srgbClr val="AD3B94"/>
-          </a:solidFill>
-          <a:ln w="9525">
-            <a:solidFill>
-              <a:srgbClr val="FFFFFF"/>
-            </a:solidFill>
-          </a:ln>
-        </p:spPr>
-        <p:txBody>
-          <a:bodyPr rtlCol="0" anchor="ctr"/>
-          <a:lstStyle/>
-          <a:p>
-            <a:pPr algn="ctr"/>
-          </a:p>
-        </p:txBody>
-      </p:sp>
-      <p:sp>
-        <p:nvSpPr>
-          <p:cNvPr id="106" name="Estudio"/>
-          <p:cNvSpPr/>
-          <p:nvPr/>
-        </p:nvSpPr>
-        <p:spPr>
-          <a:xfrm>
-            <a:off x="1968609" y="4326792"/>
-            <a:ext cx="86633" cy="86633"/>
-          </a:xfrm>
-          <a:prstGeom prst="ellipse">
-            <a:avLst/>
-          </a:prstGeom>
-          <a:solidFill>
-            <a:srgbClr val="AD3B94"/>
-          </a:solidFill>
-          <a:ln w="9525">
-            <a:solidFill>
-              <a:srgbClr val="FFFFFF"/>
-            </a:solidFill>
-          </a:ln>
-        </p:spPr>
-        <p:txBody>
-          <a:bodyPr rtlCol="0" anchor="ctr"/>
-          <a:lstStyle/>
-          <a:p>
-            <a:pPr algn="ctr"/>
-          </a:p>
-        </p:txBody>
-      </p:sp>
-      <p:sp>
-        <p:nvSpPr>
-          <p:cNvPr id="107" name="Estudio"/>
-          <p:cNvSpPr/>
-          <p:nvPr/>
-        </p:nvSpPr>
-        <p:spPr>
-          <a:xfrm>
-            <a:off x="2819400" y="3556000"/>
-            <a:ext cx="139700" cy="139700"/>
-          </a:xfrm>
-          <a:prstGeom prst="ellipse">
-            <a:avLst/>
-          </a:prstGeom>
-          <a:solidFill>
-            <a:srgbClr val="AD3B94"/>
-          </a:solidFill>
-          <a:ln w="9525">
-            <a:solidFill>
-              <a:srgbClr val="FFFFFF"/>
-            </a:solidFill>
-          </a:ln>
-        </p:spPr>
-        <p:txBody>
-          <a:bodyPr rtlCol="0" anchor="ctr"/>
-          <a:lstStyle/>
-          <a:p>
-            <a:pPr algn="ctr"/>
-          </a:p>
-        </p:txBody>
-      </p:sp>
-      <p:sp>
-        <p:nvSpPr>
-          <p:cNvPr id="108" name="Rótulo marcador"/>
+          <p:cNvPr id="101" name="Rótulo marcador"/>
           <p:cNvSpPr txBox="1"/>
           <p:nvPr/>
         </p:nvSpPr>
         <p:spPr>
           <a:xfrm>
-            <a:off x="508000" y="2921000"/>
+            <a:off x="508000" y="2984500"/>
             <a:ext cx="1841500" cy="635000"/>
           </a:xfrm>
           <a:prstGeom prst="rect">
@@ -6720,19 +6564,19 @@
       </p:sp>
       <p:cxnSp>
         <p:nvCxnSpPr>
-          <p:cNvPr id="109" name="Guía marcador"/>
+          <p:cNvPr id="102" name="Guía marcador"/>
           <p:cNvCxnSpPr/>
           <p:nvPr/>
         </p:nvCxnSpPr>
         <p:spPr>
           <a:xfrm>
-            <a:off x="825500" y="3594100"/>
-            <a:ext cx="0" cy="1041400"/>
+            <a:off x="825500" y="3657600"/>
+            <a:ext cx="0" cy="977900"/>
           </a:xfrm>
           <a:prstGeom prst="line">
             <a:avLst/>
           </a:prstGeom>
-          <a:ln w="25400">
+          <a:ln w="19050">
             <a:solidFill>
               <a:srgbClr val="AD3B94"/>
             </a:solidFill>
@@ -6742,18 +6586,18 @@
       </p:cxnSp>
       <p:sp>
         <p:nvSpPr>
-          <p:cNvPr id="110" name="Tarjeta TDM"/>
-          <p:cNvSpPr/>
-          <p:nvPr/>
-        </p:nvSpPr>
-        <p:spPr>
-          <a:xfrm>
-            <a:off x="8060267" y="1879600"/>
-            <a:ext cx="3623733" cy="4127500"/>
+          <p:cNvPr id="103" name="Tarjeta TDM"/>
+          <p:cNvSpPr/>
+          <p:nvPr/>
+        </p:nvSpPr>
+        <p:spPr>
+          <a:xfrm>
+            <a:off x="8060436" y="1879600"/>
+            <a:ext cx="3623818" cy="4127500"/>
           </a:xfrm>
           <a:prstGeom prst="roundRect">
             <a:avLst>
-              <a:gd name="adj" fmla="val 3154"/>
+              <a:gd name="adj" fmla="val 2803"/>
             </a:avLst>
           </a:prstGeom>
           <a:solidFill>
@@ -6775,22 +6619,22 @@
       </p:sp>
       <p:sp>
         <p:nvSpPr>
-          <p:cNvPr id="111" name="Cabecera tarjeta"/>
-          <p:cNvSpPr/>
-          <p:nvPr/>
-        </p:nvSpPr>
-        <p:spPr>
-          <a:xfrm>
-            <a:off x="8060267" y="1879600"/>
-            <a:ext cx="3623733" cy="1244600"/>
+          <p:cNvPr id="104" name="Cabecera tarjeta"/>
+          <p:cNvSpPr/>
+          <p:nvPr/>
+        </p:nvSpPr>
+        <p:spPr>
+          <a:xfrm>
+            <a:off x="8060436" y="1879600"/>
+            <a:ext cx="3623818" cy="1244600"/>
           </a:xfrm>
           <a:prstGeom prst="roundRect">
             <a:avLst>
-              <a:gd name="adj" fmla="val 9183"/>
+              <a:gd name="adj" fmla="val 8163"/>
             </a:avLst>
           </a:prstGeom>
           <a:solidFill>
-            <a:srgbClr val="2F8541"/>
+            <a:srgbClr val="2B7D3D"/>
           </a:solidFill>
           <a:ln>
             <a:noFill/>
@@ -6806,20 +6650,20 @@
       </p:sp>
       <p:sp>
         <p:nvSpPr>
-          <p:cNvPr id="112" name="Cabecera tarjeta (base)"/>
-          <p:cNvSpPr/>
-          <p:nvPr/>
-        </p:nvSpPr>
-        <p:spPr>
-          <a:xfrm>
-            <a:off x="8060267" y="2870200"/>
-            <a:ext cx="3623733" cy="254000"/>
-          </a:xfrm>
-          <a:prstGeom prst="rect">
-            <a:avLst/>
-          </a:prstGeom>
-          <a:solidFill>
-            <a:srgbClr val="2F8541"/>
+          <p:cNvPr id="105" name="Cabecera (base)"/>
+          <p:cNvSpPr/>
+          <p:nvPr/>
+        </p:nvSpPr>
+        <p:spPr>
+          <a:xfrm>
+            <a:off x="8060436" y="2870200"/>
+            <a:ext cx="3623818" cy="254000"/>
+          </a:xfrm>
+          <a:prstGeom prst="rect">
+            <a:avLst/>
+          </a:prstGeom>
+          <a:solidFill>
+            <a:srgbClr val="2B7D3D"/>
           </a:solidFill>
           <a:ln>
             <a:noFill/>
@@ -6835,14 +6679,14 @@
       </p:sp>
       <p:sp>
         <p:nvSpPr>
-          <p:cNvPr id="113" name="TextBox 112"/>
+          <p:cNvPr id="106" name="TextBox 105"/>
           <p:cNvSpPr txBox="1"/>
           <p:nvPr/>
         </p:nvSpPr>
         <p:spPr>
           <a:xfrm>
-            <a:off x="8263467" y="1981200"/>
-            <a:ext cx="3217333" cy="1041400"/>
+            <a:off x="8263636" y="1981200"/>
+            <a:ext cx="3217418" cy="1041400"/>
           </a:xfrm>
           <a:prstGeom prst="rect">
             <a:avLst/>
@@ -6862,21 +6706,39 @@
                   <a:srgbClr val="FFFFFF"/>
                 </a:solidFill>
               </a:rPr>
-              <a:t>Dosificación individualizada de antimicrobianos (TDM o MIPD)</a:t>
-            </a:r>
-          </a:p>
-        </p:txBody>
-      </p:sp>
-      <p:sp>
-        <p:nvSpPr>
-          <p:cNvPr id="114" name="TextBox 113"/>
+              <a:t>Dosificación individualizada</a:t>
+            </a:r>
+            <a:br/>
+            <a:r>
+              <a:rPr sz="2200" b="1" i="0" lang="es-ES">
+                <a:solidFill>
+                  <a:srgbClr val="FFFFFF"/>
+                </a:solidFill>
+              </a:rPr>
+              <a:t>de antimicrobianos</a:t>
+            </a:r>
+            <a:br/>
+            <a:r>
+              <a:rPr sz="2200" b="1" i="0" lang="es-ES">
+                <a:solidFill>
+                  <a:srgbClr val="FFFFFF"/>
+                </a:solidFill>
+              </a:rPr>
+              <a:t>(TDM o MIPD)</a:t>
+            </a:r>
+          </a:p>
+        </p:txBody>
+      </p:sp>
+      <p:sp>
+        <p:nvSpPr>
+          <p:cNvPr id="107" name="TextBox 106"/>
           <p:cNvSpPr txBox="1"/>
           <p:nvPr/>
         </p:nvSpPr>
         <p:spPr>
           <a:xfrm>
-            <a:off x="8263467" y="3225800"/>
-            <a:ext cx="3217333" cy="279400"/>
+            <a:off x="8263636" y="3225800"/>
+            <a:ext cx="3217418" cy="279400"/>
           </a:xfrm>
           <a:prstGeom prst="rect">
             <a:avLst/>
@@ -6893,7 +6755,7 @@
             <a:r>
               <a:rPr sz="2000" b="1" i="0" lang="es-ES">
                 <a:solidFill>
-                  <a:srgbClr val="2F8541"/>
+                  <a:srgbClr val="2B7D3D"/>
                 </a:solidFill>
               </a:rPr>
               <a:t>10 ensayos · 1241 pacientes</a:t>
@@ -6903,14 +6765,14 @@
       </p:sp>
       <p:sp>
         <p:nvSpPr>
-          <p:cNvPr id="115" name="TextBox 114"/>
+          <p:cNvPr id="108" name="TextBox 107"/>
           <p:cNvSpPr txBox="1"/>
           <p:nvPr/>
         </p:nvSpPr>
         <p:spPr>
           <a:xfrm>
-            <a:off x="8263467" y="3606800"/>
-            <a:ext cx="3217333" cy="685800"/>
+            <a:off x="8263636" y="3606800"/>
+            <a:ext cx="3217418" cy="685800"/>
           </a:xfrm>
           <a:prstGeom prst="rect">
             <a:avLst/>
@@ -6946,42 +6808,42 @@
                   <a:srgbClr val="263445"/>
                 </a:solidFill>
               </a:rPr>
-              <a:t> (RR 0,70)</a:t>
+              <a:t> (RR 0,70)</a:t>
             </a:r>
           </a:p>
         </p:txBody>
       </p:sp>
       <p:cxnSp>
         <p:nvCxnSpPr>
-          <p:cNvPr id="116" name="Connector 115"/>
+          <p:cNvPr id="109" name="Connector 108"/>
           <p:cNvCxnSpPr/>
           <p:nvPr/>
         </p:nvCxnSpPr>
         <p:spPr>
           <a:xfrm>
-            <a:off x="8263467" y="4318000"/>
-            <a:ext cx="3217333" cy="0"/>
+            <a:off x="8263636" y="4318000"/>
+            <a:ext cx="3217418" cy="0"/>
           </a:xfrm>
           <a:prstGeom prst="line">
             <a:avLst/>
           </a:prstGeom>
-          <a:ln w="15875">
-            <a:solidFill>
-              <a:srgbClr val="B9DDBF"/>
+          <a:ln w="19050">
+            <a:solidFill>
+              <a:srgbClr val="E7F4E9"/>
             </a:solidFill>
           </a:ln>
         </p:spPr>
       </p:cxnSp>
       <p:sp>
         <p:nvSpPr>
-          <p:cNvPr id="117" name="TextBox 116"/>
+          <p:cNvPr id="110" name="TextBox 109"/>
           <p:cNvSpPr txBox="1"/>
           <p:nvPr/>
         </p:nvSpPr>
         <p:spPr>
           <a:xfrm>
-            <a:off x="8263467" y="4381500"/>
-            <a:ext cx="3217333" cy="685800"/>
+            <a:off x="8263636" y="4381500"/>
+            <a:ext cx="3217418" cy="685800"/>
           </a:xfrm>
           <a:prstGeom prst="rect">
             <a:avLst/>
@@ -7017,42 +6879,42 @@
                   <a:srgbClr val="263445"/>
                 </a:solidFill>
               </a:rPr>
-              <a:t> (RR 0,55)</a:t>
+              <a:t> (RR 0,55)</a:t>
             </a:r>
           </a:p>
         </p:txBody>
       </p:sp>
       <p:cxnSp>
         <p:nvCxnSpPr>
-          <p:cNvPr id="118" name="Connector 117"/>
+          <p:cNvPr id="111" name="Connector 110"/>
           <p:cNvCxnSpPr/>
           <p:nvPr/>
         </p:nvCxnSpPr>
         <p:spPr>
           <a:xfrm>
-            <a:off x="8263467" y="5092700"/>
-            <a:ext cx="3217333" cy="0"/>
+            <a:off x="8263636" y="5092700"/>
+            <a:ext cx="3217418" cy="0"/>
           </a:xfrm>
           <a:prstGeom prst="line">
             <a:avLst/>
           </a:prstGeom>
-          <a:ln w="15875">
-            <a:solidFill>
-              <a:srgbClr val="B9DDBF"/>
+          <a:ln w="19050">
+            <a:solidFill>
+              <a:srgbClr val="E7F4E9"/>
             </a:solidFill>
           </a:ln>
         </p:spPr>
       </p:cxnSp>
       <p:sp>
         <p:nvSpPr>
-          <p:cNvPr id="119" name="TextBox 118"/>
+          <p:cNvPr id="112" name="TextBox 111"/>
           <p:cNvSpPr txBox="1"/>
           <p:nvPr/>
         </p:nvSpPr>
         <p:spPr>
           <a:xfrm>
-            <a:off x="8263467" y="5156200"/>
-            <a:ext cx="3217333" cy="685800"/>
+            <a:off x="8263636" y="5156200"/>
+            <a:ext cx="3217418" cy="685800"/>
           </a:xfrm>
           <a:prstGeom prst="rect">
             <a:avLst/>
@@ -7079,14 +6941,14 @@
       </p:sp>
       <p:cxnSp>
         <p:nvCxnSpPr>
-          <p:cNvPr id="120" name="Unión peldaño 5"/>
+          <p:cNvPr id="113" name="Unión peldaño 5"/>
           <p:cNvCxnSpPr/>
           <p:nvPr/>
         </p:nvCxnSpPr>
         <p:spPr>
           <a:xfrm>
-            <a:off x="7869767" y="2470150"/>
-            <a:ext cx="190500" cy="0"/>
+            <a:off x="7527036" y="1949450"/>
+            <a:ext cx="533400" cy="0"/>
           </a:xfrm>
           <a:prstGeom prst="line">
             <a:avLst/>
@@ -7100,14 +6962,14 @@
       </p:cxnSp>
       <p:sp>
         <p:nvSpPr>
-          <p:cNvPr id="121" name="Nodo peldaño 5"/>
-          <p:cNvSpPr/>
-          <p:nvPr/>
-        </p:nvSpPr>
-        <p:spPr>
-          <a:xfrm>
-            <a:off x="7793567" y="2393950"/>
-            <a:ext cx="152400" cy="152400"/>
+          <p:cNvPr id="114" name="Marcador TDM en peldaño 5"/>
+          <p:cNvSpPr/>
+          <p:nvPr/>
+        </p:nvSpPr>
+        <p:spPr>
+          <a:xfrm>
+            <a:off x="7438136" y="1860550"/>
+            <a:ext cx="177800" cy="177800"/>
           </a:xfrm>
           <a:prstGeom prst="ellipse">
             <a:avLst/>
@@ -7115,7 +6977,7 @@
           <a:solidFill>
             <a:srgbClr val="5BB46C"/>
           </a:solidFill>
-          <a:ln w="25400">
+          <a:ln w="19050">
             <a:solidFill>
               <a:srgbClr val="FFFFFF"/>
             </a:solidFill>
@@ -7131,7 +6993,7 @@
       </p:sp>
       <p:sp>
         <p:nvSpPr>
-          <p:cNvPr id="122" name="Fuente"/>
+          <p:cNvPr id="115" name="Fuente"/>
           <p:cNvSpPr txBox="1"/>
           <p:nvPr/>
         </p:nvSpPr>
@@ -7198,7 +7060,7 @@
           <a:noFill/>
         </p:spPr>
         <p:txBody>
-          <a:bodyPr wrap="square" lIns="0" tIns="0" rIns="0" bIns="0" anchor="ctr">
+          <a:bodyPr wrap="square" lIns="0" tIns="0" rIns="0" bIns="0" anchor="t">
             <a:noAutofit/>
           </a:bodyPr>
           <a:lstStyle/>
@@ -7219,9 +7081,125 @@
           </a:p>
         </p:txBody>
       </p:sp>
+      <p:sp>
+        <p:nvSpPr>
+          <p:cNvPr id="3" name="Rótulo arnés"/>
+          <p:cNvSpPr txBox="1"/>
+          <p:nvPr/>
+        </p:nvSpPr>
+        <p:spPr>
+          <a:xfrm>
+            <a:off x="1452054" y="1879600"/>
+            <a:ext cx="4064000" cy="635000"/>
+          </a:xfrm>
+          <a:prstGeom prst="rect">
+            <a:avLst/>
+          </a:prstGeom>
+          <a:noFill/>
+        </p:spPr>
+        <p:txBody>
+          <a:bodyPr wrap="square" lIns="0" tIns="0" rIns="0" bIns="0" anchor="b">
+            <a:noAutofit/>
+          </a:bodyPr>
+          <a:lstStyle/>
+          <a:p>
+            <a:pPr algn="l"/>
+            <a:r>
+              <a:rPr sz="2000" b="1" i="0" lang="es-ES">
+                <a:solidFill>
+                  <a:srgbClr val="263445"/>
+                </a:solidFill>
+              </a:rPr>
+              <a:t>Arnés (el protocolo)</a:t>
+            </a:r>
+          </a:p>
+          <a:p>
+            <a:pPr algn="l"/>
+            <a:r>
+              <a:rPr sz="2000" b="0" i="0" lang="es-ES">
+                <a:solidFill>
+                  <a:srgbClr val="5E6B78"/>
+                </a:solidFill>
+              </a:rPr>
+              <a:t>procedimiento normalizado de trabajo</a:t>
+            </a:r>
+          </a:p>
+        </p:txBody>
+      </p:sp>
+      <p:sp>
+        <p:nvSpPr>
+          <p:cNvPr id="4" name="Arnés"/>
+          <p:cNvSpPr/>
+          <p:nvPr/>
+        </p:nvSpPr>
+        <p:spPr>
+          <a:xfrm>
+            <a:off x="1452054" y="2667000"/>
+            <a:ext cx="9288145" cy="2921000"/>
+          </a:xfrm>
+          <a:prstGeom prst="roundRect">
+            <a:avLst>
+              <a:gd name="adj" fmla="val 3478"/>
+            </a:avLst>
+          </a:prstGeom>
+          <a:noFill/>
+          <a:ln w="31750">
+            <a:solidFill>
+              <a:srgbClr val="263445"/>
+            </a:solidFill>
+            <a:prstDash val="dash"/>
+          </a:ln>
+        </p:spPr>
+        <p:txBody>
+          <a:bodyPr rtlCol="0" anchor="ctr"/>
+          <a:lstStyle/>
+          <a:p>
+            <a:pPr algn="ctr"/>
+          </a:p>
+        </p:txBody>
+      </p:sp>
+      <p:sp>
+        <p:nvSpPr>
+          <p:cNvPr id="5" name="Borde arnés"/>
+          <p:cNvSpPr/>
+          <p:nvPr/>
+        </p:nvSpPr>
+        <p:spPr>
+          <a:xfrm>
+            <a:off x="4699000" y="5448300"/>
+            <a:ext cx="2794000" cy="279400"/>
+          </a:xfrm>
+          <a:prstGeom prst="rect">
+            <a:avLst/>
+          </a:prstGeom>
+          <a:solidFill>
+            <a:srgbClr val="FFFFFF"/>
+          </a:solidFill>
+          <a:ln>
+            <a:noFill/>
+          </a:ln>
+        </p:spPr>
+        <p:txBody>
+          <a:bodyPr rtlCol="0" anchor="ctr" wrap="square" lIns="0" tIns="0" rIns="0" bIns="0">
+            <a:noAutofit/>
+          </a:bodyPr>
+          <a:lstStyle/>
+          <a:p>
+            <a:pPr algn="ctr"/>
+            <a:r>
+              <a:rPr sz="2000" b="0" i="1" lang="es-ES">
+                <a:solidFill>
+                  <a:srgbClr val="263445"/>
+                </a:solidFill>
+              </a:rPr>
+              <a:t>reglas · límites · registro</a:t>
+            </a:r>
+          </a:p>
+        </p:txBody>
+      </p:sp>
       <p:pic>
         <p:nvPicPr>
-          <p:cNvPr id="3" name="Farmacéutico con pluma" descr="Farmacéutico con pluma"/>
+          <p:cNvPr id="6" name="Loro robótico (modelo de lenguaje)" descr="Loro robótico (modelo de lenguaje)"/>
           <p:cNvPicPr>
             <a:picLocks noChangeAspect="1"/>
           </p:cNvPicPr>
@@ -7235,214 +7213,17 @@
         </p:blipFill>
         <p:spPr>
           <a:xfrm>
-            <a:off x="5727700" y="1875618"/>
-            <a:ext cx="736600" cy="642964"/>
+            <a:off x="5723230" y="2819400"/>
+            <a:ext cx="745541" cy="1498600"/>
           </a:xfrm>
           <a:prstGeom prst="rect">
             <a:avLst/>
           </a:prstGeom>
         </p:spPr>
       </p:pic>
-      <p:sp>
-        <p:nvSpPr>
-          <p:cNvPr id="4" name="TextBox 3"/>
-          <p:cNvSpPr txBox="1"/>
-          <p:nvPr/>
-        </p:nvSpPr>
-        <p:spPr>
-          <a:xfrm>
-            <a:off x="6578600" y="1841500"/>
-            <a:ext cx="4572000" cy="711200"/>
-          </a:xfrm>
-          <a:prstGeom prst="rect">
-            <a:avLst/>
-          </a:prstGeom>
-          <a:noFill/>
-        </p:spPr>
-        <p:txBody>
-          <a:bodyPr wrap="square" lIns="0" tIns="0" rIns="0" bIns="0" anchor="ctr">
-            <a:noAutofit/>
-          </a:bodyPr>
-          <a:lstStyle/>
-          <a:p>
-            <a:pPr algn="l"/>
-            <a:r>
-              <a:rPr sz="2000" b="1" i="0" lang="es-ES">
-                <a:solidFill>
-                  <a:srgbClr val="2F5480"/>
-                </a:solidFill>
-              </a:rPr>
-              <a:t>Farmacéutico</a:t>
-            </a:r>
-            <a:r>
-              <a:rPr sz="2000" b="0" i="0" lang="es-ES">
-                <a:solidFill>
-                  <a:srgbClr val="263445"/>
-                </a:solidFill>
-              </a:rPr>
-              <a:t> · supervisa y aporta criterio</a:t>
-            </a:r>
-          </a:p>
-          <a:p>
-            <a:pPr algn="l"/>
-            <a:r>
-              <a:rPr sz="2000" b="0" i="0" lang="es-ES">
-                <a:solidFill>
-                  <a:srgbClr val="5E6B78"/>
-                </a:solidFill>
-              </a:rPr>
-              <a:t>firma del informe</a:t>
-            </a:r>
-          </a:p>
-        </p:txBody>
-      </p:sp>
-      <p:cxnSp>
-        <p:nvCxnSpPr>
-          <p:cNvPr id="5" name="Supervisión"/>
-          <p:cNvCxnSpPr/>
-          <p:nvPr/>
-        </p:nvCxnSpPr>
-        <p:spPr>
-          <a:xfrm>
-            <a:off x="6096000" y="2565400"/>
-            <a:ext cx="0" cy="101600"/>
-          </a:xfrm>
-          <a:prstGeom prst="line">
-            <a:avLst/>
-          </a:prstGeom>
-          <a:ln w="25400">
-            <a:solidFill>
-              <a:srgbClr val="4A73A0"/>
-            </a:solidFill>
-            <a:prstDash val="sysDot"/>
-            <a:tailEnd type="triangle" w="med" len="med"/>
-          </a:ln>
-        </p:spPr>
-      </p:cxnSp>
-      <p:sp>
-        <p:nvSpPr>
-          <p:cNvPr id="6" name="Arnés"/>
-          <p:cNvSpPr/>
-          <p:nvPr/>
-        </p:nvSpPr>
-        <p:spPr>
-          <a:xfrm>
-            <a:off x="1452033" y="2667000"/>
-            <a:ext cx="9287933" cy="2895600"/>
-          </a:xfrm>
-          <a:prstGeom prst="roundRect">
-            <a:avLst>
-              <a:gd name="adj" fmla="val 5263"/>
-            </a:avLst>
-          </a:prstGeom>
-          <a:noFill/>
-          <a:ln w="31750">
-            <a:solidFill>
-              <a:srgbClr val="263445"/>
-            </a:solidFill>
-            <a:prstDash val="dash"/>
-          </a:ln>
-        </p:spPr>
-        <p:txBody>
-          <a:bodyPr rtlCol="0" anchor="ctr"/>
-          <a:lstStyle/>
-          <a:p>
-            <a:pPr algn="ctr"/>
-          </a:p>
-        </p:txBody>
-      </p:sp>
-      <p:sp>
-        <p:nvSpPr>
-          <p:cNvPr id="7" name="Rótulo arnés"/>
-          <p:cNvSpPr/>
-          <p:nvPr/>
-        </p:nvSpPr>
-        <p:spPr>
-          <a:xfrm>
-            <a:off x="1617133" y="2514600"/>
-            <a:ext cx="4445000" cy="609600"/>
-          </a:xfrm>
-          <a:prstGeom prst="rect">
-            <a:avLst/>
-          </a:prstGeom>
-          <a:solidFill>
-            <a:srgbClr val="FFFFFF"/>
-          </a:solidFill>
-          <a:ln>
-            <a:noFill/>
-          </a:ln>
-        </p:spPr>
-        <p:txBody>
-          <a:bodyPr rtlCol="0" anchor="t" wrap="square" lIns="88900" tIns="12700" rIns="88900" bIns="0">
-            <a:noAutofit/>
-          </a:bodyPr>
-          <a:lstStyle/>
-          <a:p>
-            <a:pPr algn="l"/>
-            <a:r>
-              <a:rPr sz="2000" b="1" i="0" lang="es-ES">
-                <a:solidFill>
-                  <a:srgbClr val="263445"/>
-                </a:solidFill>
-              </a:rPr>
-              <a:t>Arnés (el protocolo)</a:t>
-            </a:r>
-          </a:p>
-          <a:p>
-            <a:pPr algn="l"/>
-            <a:r>
-              <a:rPr sz="2000" b="0" i="0" lang="es-ES">
-                <a:solidFill>
-                  <a:srgbClr val="5E6B78"/>
-                </a:solidFill>
-              </a:rPr>
-              <a:t>procedimiento normalizado de trabajo</a:t>
-            </a:r>
-          </a:p>
-        </p:txBody>
-      </p:sp>
-      <p:sp>
-        <p:nvSpPr>
-          <p:cNvPr id="8" name="Borde arnés"/>
-          <p:cNvSpPr/>
-          <p:nvPr/>
-        </p:nvSpPr>
-        <p:spPr>
-          <a:xfrm>
-            <a:off x="4699000" y="5422900"/>
-            <a:ext cx="2794000" cy="279400"/>
-          </a:xfrm>
-          <a:prstGeom prst="rect">
-            <a:avLst/>
-          </a:prstGeom>
-          <a:solidFill>
-            <a:srgbClr val="FFFFFF"/>
-          </a:solidFill>
-          <a:ln>
-            <a:noFill/>
-          </a:ln>
-        </p:spPr>
-        <p:txBody>
-          <a:bodyPr rtlCol="0" anchor="ctr" wrap="square" lIns="0" tIns="0" rIns="0" bIns="0">
-            <a:noAutofit/>
-          </a:bodyPr>
-          <a:lstStyle/>
-          <a:p>
-            <a:pPr algn="ctr"/>
-            <a:r>
-              <a:rPr sz="2000" b="0" i="1" lang="es-ES">
-                <a:solidFill>
-                  <a:srgbClr val="263445"/>
-                </a:solidFill>
-              </a:rPr>
-              <a:t>reglas · límites · registro</a:t>
-            </a:r>
-          </a:p>
-        </p:txBody>
-      </p:sp>
       <p:pic>
         <p:nvPicPr>
-          <p:cNvPr id="9" name="Ficha del caso" descr="Ficha del caso"/>
+          <p:cNvPr id="7" name="Ficha del caso" descr="Ficha del caso"/>
           <p:cNvPicPr>
             <a:picLocks noChangeAspect="1"/>
           </p:cNvPicPr>
@@ -7456,7 +7237,7 @@
         </p:blipFill>
         <p:spPr>
           <a:xfrm>
-            <a:off x="2485423" y="3251200"/>
+            <a:off x="2487540" y="3092450"/>
             <a:ext cx="727220" cy="952500"/>
           </a:xfrm>
           <a:prstGeom prst="rect">
@@ -7466,7 +7247,7 @@
       </p:pic>
       <p:pic>
         <p:nvPicPr>
-          <p:cNvPr id="10" name="Loro robótico (modelo de lenguaje)" descr="Loro robótico (modelo de lenguaje)"/>
+          <p:cNvPr id="8" name="Icono curva" descr="Icono curva"/>
           <p:cNvPicPr>
             <a:picLocks noChangeAspect="1"/>
           </p:cNvPicPr>
@@ -7480,8 +7261,8 @@
         </p:blipFill>
         <p:spPr>
           <a:xfrm>
-            <a:off x="5837465" y="3200400"/>
-            <a:ext cx="512837" cy="1041400"/>
+            <a:off x="9125458" y="2870200"/>
+            <a:ext cx="430784" cy="406400"/>
           </a:xfrm>
           <a:prstGeom prst="rect">
             <a:avLst/>
@@ -7490,7 +7271,7 @@
       </p:pic>
       <p:pic>
         <p:nvPicPr>
-          <p:cNvPr id="11" name="Icono curva" descr="Icono curva"/>
+          <p:cNvPr id="9" name="Icono campana" descr="Icono campana"/>
           <p:cNvPicPr>
             <a:picLocks noChangeAspect="1"/>
           </p:cNvPicPr>
@@ -7504,8 +7285,8 @@
         </p:blipFill>
         <p:spPr>
           <a:xfrm>
-            <a:off x="9194885" y="3263900"/>
-            <a:ext cx="296164" cy="279400"/>
+            <a:off x="9086850" y="3365500"/>
+            <a:ext cx="508000" cy="406400"/>
           </a:xfrm>
           <a:prstGeom prst="rect">
             <a:avLst/>
@@ -7514,7 +7295,7 @@
       </p:pic>
       <p:pic>
         <p:nvPicPr>
-          <p:cNvPr id="12" name="Icono campana" descr="Icono campana"/>
+          <p:cNvPr id="10" name="Icono red" descr="Icono red"/>
           <p:cNvPicPr>
             <a:picLocks noChangeAspect="1"/>
           </p:cNvPicPr>
@@ -7528,17 +7309,62 @@
         </p:blipFill>
         <p:spPr>
           <a:xfrm>
-            <a:off x="9168342" y="3581400"/>
-            <a:ext cx="349250" cy="279400"/>
+            <a:off x="9137650" y="3860800"/>
+            <a:ext cx="406400" cy="406400"/>
           </a:xfrm>
           <a:prstGeom prst="rect">
             <a:avLst/>
           </a:prstGeom>
         </p:spPr>
       </p:pic>
+      <p:cxnSp>
+        <p:nvCxnSpPr>
+          <p:cNvPr id="11" name="Contexto → modelo"/>
+          <p:cNvCxnSpPr/>
+          <p:nvPr/>
+        </p:nvCxnSpPr>
+        <p:spPr>
+          <a:xfrm>
+            <a:off x="3359150" y="3568700"/>
+            <a:ext cx="2241550" cy="0"/>
+          </a:xfrm>
+          <a:prstGeom prst="line">
+            <a:avLst/>
+          </a:prstGeom>
+          <a:ln w="31750">
+            <a:solidFill>
+              <a:srgbClr val="263445"/>
+            </a:solidFill>
+            <a:tailEnd type="triangle" w="med" len="med"/>
+          </a:ln>
+        </p:spPr>
+      </p:cxnSp>
+      <p:cxnSp>
+        <p:nvCxnSpPr>
+          <p:cNvPr id="12" name="Modelo ↔ herramientas"/>
+          <p:cNvCxnSpPr/>
+          <p:nvPr/>
+        </p:nvCxnSpPr>
+        <p:spPr>
+          <a:xfrm>
+            <a:off x="6591300" y="3568700"/>
+            <a:ext cx="2343150" cy="0"/>
+          </a:xfrm>
+          <a:prstGeom prst="line">
+            <a:avLst/>
+          </a:prstGeom>
+          <a:ln w="31750">
+            <a:solidFill>
+              <a:srgbClr val="263445"/>
+            </a:solidFill>
+            <a:headEnd type="triangle" w="med" len="med"/>
+            <a:tailEnd type="triangle" w="med" len="med"/>
+          </a:ln>
+        </p:spPr>
+      </p:cxnSp>
       <p:pic>
         <p:nvPicPr>
-          <p:cNvPr id="13" name="Icono red" descr="Icono red"/>
+          <p:cNvPr id="13" name="Farmacéutico con pluma" descr="Farmacéutico con pluma"/>
           <p:cNvPicPr>
             <a:picLocks noChangeAspect="1"/>
           </p:cNvPicPr>
@@ -7552,8 +7378,8 @@
         </p:blipFill>
         <p:spPr>
           <a:xfrm>
-            <a:off x="9203267" y="3898900"/>
-            <a:ext cx="279400" cy="279400"/>
+            <a:off x="5717713" y="1841500"/>
+            <a:ext cx="756575" cy="660400"/>
           </a:xfrm>
           <a:prstGeom prst="rect">
             <a:avLst/>
@@ -7562,49 +7388,80 @@
       </p:pic>
       <p:cxnSp>
         <p:nvCxnSpPr>
-          <p:cNvPr id="14" name="Contexto → modelo"/>
+          <p:cNvPr id="14" name="Supervisión"/>
           <p:cNvCxnSpPr/>
           <p:nvPr/>
         </p:nvCxnSpPr>
         <p:spPr>
           <a:xfrm>
-            <a:off x="3420533" y="3727450"/>
-            <a:ext cx="2228850" cy="0"/>
+            <a:off x="6096000" y="2527300"/>
+            <a:ext cx="0" cy="254000"/>
           </a:xfrm>
           <a:prstGeom prst="line">
             <a:avLst/>
           </a:prstGeom>
           <a:ln w="31750">
             <a:solidFill>
-              <a:srgbClr val="263445"/>
-            </a:solidFill>
+              <a:srgbClr val="4A73A0"/>
+            </a:solidFill>
+            <a:prstDash val="sysDot"/>
             <a:tailEnd type="triangle" w="med" len="med"/>
           </a:ln>
         </p:spPr>
       </p:cxnSp>
-      <p:cxnSp>
-        <p:nvCxnSpPr>
-          <p:cNvPr id="15" name="Modelo ↔ herramientas"/>
-          <p:cNvCxnSpPr/>
-          <p:nvPr/>
-        </p:nvCxnSpPr>
-        <p:spPr>
-          <a:xfrm>
-            <a:off x="6538383" y="3727450"/>
-            <a:ext cx="2360084" cy="0"/>
-          </a:xfrm>
-          <a:prstGeom prst="line">
-            <a:avLst/>
-          </a:prstGeom>
-          <a:ln w="31750">
-            <a:solidFill>
-              <a:srgbClr val="263445"/>
-            </a:solidFill>
-            <a:headEnd type="triangle" w="med" len="med"/>
-            <a:tailEnd type="triangle" w="med" len="med"/>
-          </a:ln>
-        </p:spPr>
-      </p:cxnSp>
+      <p:sp>
+        <p:nvSpPr>
+          <p:cNvPr id="15" name="TextBox 14"/>
+          <p:cNvSpPr txBox="1"/>
+          <p:nvPr/>
+        </p:nvSpPr>
+        <p:spPr>
+          <a:xfrm>
+            <a:off x="6588709" y="1841500"/>
+            <a:ext cx="4826000" cy="660400"/>
+          </a:xfrm>
+          <a:prstGeom prst="rect">
+            <a:avLst/>
+          </a:prstGeom>
+          <a:noFill/>
+        </p:spPr>
+        <p:txBody>
+          <a:bodyPr wrap="square" lIns="0" tIns="0" rIns="0" bIns="0" anchor="ctr">
+            <a:noAutofit/>
+          </a:bodyPr>
+          <a:lstStyle/>
+          <a:p>
+            <a:pPr algn="l"/>
+            <a:r>
+              <a:rPr sz="2000" b="1" i="0" lang="es-ES">
+                <a:solidFill>
+                  <a:srgbClr val="2F5480"/>
+                </a:solidFill>
+              </a:rPr>
+              <a:t>Farmacéutico</a:t>
+            </a:r>
+            <a:r>
+              <a:rPr sz="2000" b="0" i="0" lang="es-ES">
+                <a:solidFill>
+                  <a:srgbClr val="263445"/>
+                </a:solidFill>
+              </a:rPr>
+              <a:t> · supervisa y aporta criterio</a:t>
+            </a:r>
+          </a:p>
+          <a:p>
+            <a:pPr algn="l"/>
+            <a:r>
+              <a:rPr sz="2000" b="0" i="0" lang="es-ES">
+                <a:solidFill>
+                  <a:srgbClr val="5E6B78"/>
+                </a:solidFill>
+              </a:rPr>
+              <a:t>firma del informe</a:t>
+            </a:r>
+          </a:p>
+        </p:txBody>
+      </p:sp>
       <p:sp>
         <p:nvSpPr>
           <p:cNvPr id="16" name="TextBox 15"/>
@@ -7613,8 +7470,8 @@
         </p:nvSpPr>
         <p:spPr>
           <a:xfrm>
-            <a:off x="1579033" y="4305300"/>
-            <a:ext cx="2540000" cy="952500"/>
+            <a:off x="1549400" y="4406900"/>
+            <a:ext cx="2603500" cy="952500"/>
           </a:xfrm>
           <a:prstGeom prst="rect">
             <a:avLst/>
@@ -7631,7 +7488,7 @@
             <a:r>
               <a:rPr sz="2000" b="1" i="0" lang="es-ES">
                 <a:solidFill>
-                  <a:srgbClr val="007F7E"/>
+                  <a:srgbClr val="263445"/>
                 </a:solidFill>
               </a:rPr>
               <a:t>Contexto</a:t>
@@ -7666,8 +7523,8 @@
         </p:nvSpPr>
         <p:spPr>
           <a:xfrm>
-            <a:off x="4246033" y="4305300"/>
-            <a:ext cx="3695700" cy="952500"/>
+            <a:off x="4191000" y="4406900"/>
+            <a:ext cx="3810000" cy="952500"/>
           </a:xfrm>
           <a:prstGeom prst="rect">
             <a:avLst/>
@@ -7684,7 +7541,7 @@
             <a:r>
               <a:rPr sz="2000" b="1" i="0" lang="es-ES">
                 <a:solidFill>
-                  <a:srgbClr val="263445"/>
+                  <a:srgbClr val="8E2F79"/>
                 </a:solidFill>
               </a:rPr>
               <a:t>Modelo de lenguaje</a:t>
@@ -7719,8 +7576,8 @@
         </p:nvSpPr>
         <p:spPr>
           <a:xfrm>
-            <a:off x="8072967" y="4305300"/>
-            <a:ext cx="2540000" cy="952500"/>
+            <a:off x="8039100" y="4406900"/>
+            <a:ext cx="2603500" cy="952500"/>
           </a:xfrm>
           <a:prstGeom prst="rect">
             <a:avLst/>
@@ -7737,7 +7594,7 @@
             <a:r>
               <a:rPr sz="2000" b="1" i="0" lang="es-ES">
                 <a:solidFill>
-                  <a:srgbClr val="2F8541"/>
+                  <a:srgbClr val="2B7D3D"/>
                 </a:solidFill>
               </a:rPr>
               <a:t>Herramientas</a:t>
@@ -7772,7 +7629,7 @@
         </p:nvSpPr>
         <p:spPr>
           <a:xfrm>
-            <a:off x="508000" y="5791200"/>
+            <a:off x="508000" y="5803900"/>
             <a:ext cx="11176000" cy="381000"/>
           </a:xfrm>
           <a:prstGeom prst="rect">
@@ -7798,7 +7655,7 @@
             <a:r>
               <a:rPr sz="2400" b="1" i="0" lang="es-ES">
                 <a:solidFill>
-                  <a:srgbClr val="2F8541"/>
+                  <a:srgbClr val="2B7D3D"/>
                 </a:solidFill>
               </a:rPr>
               <a:t>la herramienta validada, sí.</a:t>
@@ -7875,7 +7732,7 @@
           <a:noFill/>
         </p:spPr>
         <p:txBody>
-          <a:bodyPr wrap="square" lIns="0" tIns="0" rIns="0" bIns="0" anchor="ctr">
+          <a:bodyPr wrap="square" lIns="0" tIns="0" rIns="0" bIns="0" anchor="t">
             <a:noAutofit/>
           </a:bodyPr>
           <a:lstStyle/>
@@ -7909,7 +7766,7 @@
           </a:xfrm>
           <a:prstGeom prst="roundRect">
             <a:avLst>
-              <a:gd name="adj" fmla="val 2857"/>
+              <a:gd name="adj" fmla="val 2285"/>
             </a:avLst>
           </a:prstGeom>
           <a:solidFill>
@@ -7927,9 +7784,118 @@
           </a:p>
         </p:txBody>
       </p:sp>
+      <p:sp>
+        <p:nvSpPr>
+          <p:cNvPr id="4" name="Franja"/>
+          <p:cNvSpPr txBox="1"/>
+          <p:nvPr/>
+        </p:nvSpPr>
+        <p:spPr>
+          <a:xfrm>
+            <a:off x="711200" y="1905000"/>
+            <a:ext cx="4826000" cy="584200"/>
+          </a:xfrm>
+          <a:prstGeom prst="rect">
+            <a:avLst/>
+          </a:prstGeom>
+          <a:noFill/>
+        </p:spPr>
+        <p:txBody>
+          <a:bodyPr wrap="square" lIns="0" tIns="0" rIns="0" bIns="0" anchor="ctr">
+            <a:noAutofit/>
+          </a:bodyPr>
+          <a:lstStyle/>
+          <a:p>
+            <a:pPr algn="l"/>
+            <a:r>
+              <a:rPr sz="2000" b="0" i="1" lang="es-ES">
+                <a:solidFill>
+                  <a:srgbClr val="DDE7F0"/>
+                </a:solidFill>
+              </a:rPr>
+              <a:t>Prepublicación · 30 casos retrospectivos ·</a:t>
+            </a:r>
+            <a:br/>
+            <a:r>
+              <a:rPr sz="2000" b="0" i="1" lang="es-ES">
+                <a:solidFill>
+                  <a:srgbClr val="DDE7F0"/>
+                </a:solidFill>
+              </a:rPr>
+              <a:t>función renal estable</a:t>
+            </a:r>
+          </a:p>
+        </p:txBody>
+      </p:sp>
+      <p:sp>
+        <p:nvSpPr>
+          <p:cNvPr id="5" name="Arnés"/>
+          <p:cNvSpPr/>
+          <p:nvPr/>
+        </p:nvSpPr>
+        <p:spPr>
+          <a:xfrm>
+            <a:off x="1452054" y="2667000"/>
+            <a:ext cx="9288145" cy="3048000"/>
+          </a:xfrm>
+          <a:prstGeom prst="roundRect">
+            <a:avLst>
+              <a:gd name="adj" fmla="val 3333"/>
+            </a:avLst>
+          </a:prstGeom>
+          <a:noFill/>
+          <a:ln w="31750">
+            <a:solidFill>
+              <a:srgbClr val="D42A3B"/>
+            </a:solidFill>
+            <a:prstDash val="dash"/>
+          </a:ln>
+        </p:spPr>
+        <p:txBody>
+          <a:bodyPr rtlCol="0" anchor="ctr"/>
+          <a:lstStyle/>
+          <a:p>
+            <a:pPr algn="ctr"/>
+          </a:p>
+        </p:txBody>
+      </p:sp>
+      <p:sp>
+        <p:nvSpPr>
+          <p:cNvPr id="6" name="Rótulo arnés"/>
+          <p:cNvSpPr txBox="1"/>
+          <p:nvPr/>
+        </p:nvSpPr>
+        <p:spPr>
+          <a:xfrm>
+            <a:off x="1579054" y="2755900"/>
+            <a:ext cx="1016000" cy="279400"/>
+          </a:xfrm>
+          <a:prstGeom prst="rect">
+            <a:avLst/>
+          </a:prstGeom>
+          <a:noFill/>
+        </p:spPr>
+        <p:txBody>
+          <a:bodyPr wrap="square" lIns="0" tIns="0" rIns="0" bIns="0" anchor="t">
+            <a:noAutofit/>
+          </a:bodyPr>
+          <a:lstStyle/>
+          <a:p>
+            <a:pPr algn="l"/>
+            <a:r>
+              <a:rPr sz="2000" b="1" i="0" lang="es-ES">
+                <a:solidFill>
+                  <a:srgbClr val="FFFFFF"/>
+                </a:solidFill>
+              </a:rPr>
+              <a:t>Arnés</a:t>
+            </a:r>
+          </a:p>
+        </p:txBody>
+      </p:sp>
       <p:pic>
         <p:nvPicPr>
-          <p:cNvPr id="4" name="Farmacéutico (radiografía)" descr="Farmacéutico (radiografía)"/>
+          <p:cNvPr id="7" name="Loro robótico (modelo de lenguaje)" descr="Loro robótico (modelo de lenguaje)"/>
           <p:cNvPicPr>
             <a:picLocks noChangeAspect="1"/>
           </p:cNvPicPr>
@@ -7943,227 +7909,17 @@
         </p:blipFill>
         <p:spPr>
           <a:xfrm>
-            <a:off x="5727700" y="1875618"/>
-            <a:ext cx="736600" cy="642964"/>
+            <a:off x="5712227" y="2819400"/>
+            <a:ext cx="767546" cy="1498600"/>
           </a:xfrm>
           <a:prstGeom prst="rect">
             <a:avLst/>
           </a:prstGeom>
         </p:spPr>
       </p:pic>
-      <p:sp>
-        <p:nvSpPr>
-          <p:cNvPr id="5" name="TextBox 4"/>
-          <p:cNvSpPr txBox="1"/>
-          <p:nvPr/>
-        </p:nvSpPr>
-        <p:spPr>
-          <a:xfrm>
-            <a:off x="6578600" y="1854200"/>
-            <a:ext cx="1905000" cy="279400"/>
-          </a:xfrm>
-          <a:prstGeom prst="rect">
-            <a:avLst/>
-          </a:prstGeom>
-          <a:noFill/>
-        </p:spPr>
-        <p:txBody>
-          <a:bodyPr wrap="square" lIns="0" tIns="0" rIns="0" bIns="0" anchor="t">
-            <a:noAutofit/>
-          </a:bodyPr>
-          <a:lstStyle/>
-          <a:p>
-            <a:pPr algn="l"/>
-            <a:r>
-              <a:rPr sz="2000" b="1" i="0" lang="es-ES">
-                <a:solidFill>
-                  <a:srgbClr val="FFFFFF"/>
-                </a:solidFill>
-              </a:rPr>
-              <a:t>Farmacéutico</a:t>
-            </a:r>
-          </a:p>
-        </p:txBody>
-      </p:sp>
-      <p:sp>
-        <p:nvSpPr>
-          <p:cNvPr id="6" name="Estado farmacéutico"/>
-          <p:cNvSpPr/>
-          <p:nvPr/>
-        </p:nvSpPr>
-        <p:spPr>
-          <a:xfrm>
-            <a:off x="6578600" y="2171700"/>
-            <a:ext cx="3586401" cy="292100"/>
-          </a:xfrm>
-          <a:prstGeom prst="roundRect">
-            <a:avLst>
-              <a:gd name="adj" fmla="val 47826"/>
-            </a:avLst>
-          </a:prstGeom>
-          <a:solidFill>
-            <a:srgbClr val="DDE7F0"/>
-          </a:solidFill>
-          <a:ln>
-            <a:noFill/>
-          </a:ln>
-        </p:spPr>
-        <p:txBody>
-          <a:bodyPr rtlCol="0" anchor="ctr" wrap="square" lIns="88900" tIns="0" rIns="88900" bIns="0">
-            <a:noAutofit/>
-          </a:bodyPr>
-          <a:lstStyle/>
-          <a:p>
-            <a:pPr algn="ctr"/>
-            <a:r>
-              <a:rPr sz="2000" b="1" i="0" lang="es-ES">
-                <a:solidFill>
-                  <a:srgbClr val="0E1B2C"/>
-                </a:solidFill>
-              </a:rPr>
-              <a:t>borrador + revisión obligatoria</a:t>
-            </a:r>
-          </a:p>
-        </p:txBody>
-      </p:sp>
-      <p:cxnSp>
-        <p:nvCxnSpPr>
-          <p:cNvPr id="7" name="Supervisión"/>
-          <p:cNvCxnSpPr/>
-          <p:nvPr/>
-        </p:nvCxnSpPr>
-        <p:spPr>
-          <a:xfrm>
-            <a:off x="6096000" y="2565400"/>
-            <a:ext cx="0" cy="101600"/>
-          </a:xfrm>
-          <a:prstGeom prst="line">
-            <a:avLst/>
-          </a:prstGeom>
-          <a:ln w="25400">
-            <a:solidFill>
-              <a:srgbClr val="A9DBFF"/>
-            </a:solidFill>
-            <a:prstDash val="sysDot"/>
-            <a:tailEnd type="triangle" w="med" len="med"/>
-          </a:ln>
-        </p:spPr>
-      </p:cxnSp>
-      <p:sp>
-        <p:nvSpPr>
-          <p:cNvPr id="8" name="Arnés"/>
-          <p:cNvSpPr/>
-          <p:nvPr/>
-        </p:nvSpPr>
-        <p:spPr>
-          <a:xfrm>
-            <a:off x="1452033" y="2667000"/>
-            <a:ext cx="9287933" cy="2667000"/>
-          </a:xfrm>
-          <a:prstGeom prst="roundRect">
-            <a:avLst>
-              <a:gd name="adj" fmla="val 5714"/>
-            </a:avLst>
-          </a:prstGeom>
-          <a:noFill/>
-          <a:ln w="38100">
-            <a:solidFill>
-              <a:srgbClr val="D42A3B"/>
-            </a:solidFill>
-            <a:prstDash val="dash"/>
-          </a:ln>
-        </p:spPr>
-        <p:txBody>
-          <a:bodyPr rtlCol="0" anchor="ctr"/>
-          <a:lstStyle/>
-          <a:p>
-            <a:pPr algn="ctr"/>
-          </a:p>
-        </p:txBody>
-      </p:sp>
-      <p:sp>
-        <p:nvSpPr>
-          <p:cNvPr id="9" name="Rótulo arnés"/>
-          <p:cNvSpPr/>
-          <p:nvPr/>
-        </p:nvSpPr>
-        <p:spPr>
-          <a:xfrm>
-            <a:off x="1617133" y="2527300"/>
-            <a:ext cx="762000" cy="279400"/>
-          </a:xfrm>
-          <a:prstGeom prst="rect">
-            <a:avLst/>
-          </a:prstGeom>
-          <a:solidFill>
-            <a:srgbClr val="0E1B2C"/>
-          </a:solidFill>
-          <a:ln>
-            <a:noFill/>
-          </a:ln>
-        </p:spPr>
-        <p:txBody>
-          <a:bodyPr rtlCol="0" anchor="ctr" wrap="square" lIns="0" tIns="0" rIns="0" bIns="0">
-            <a:noAutofit/>
-          </a:bodyPr>
-          <a:lstStyle/>
-          <a:p>
-            <a:pPr algn="ctr"/>
-            <a:r>
-              <a:rPr sz="2000" b="1" i="0" lang="es-ES">
-                <a:solidFill>
-                  <a:srgbClr val="FFFFFF"/>
-                </a:solidFill>
-              </a:rPr>
-              <a:t>Arnés</a:t>
-            </a:r>
-          </a:p>
-        </p:txBody>
-      </p:sp>
-      <p:sp>
-        <p:nvSpPr>
-          <p:cNvPr id="10" name="Estado arnés"/>
-          <p:cNvSpPr/>
-          <p:nvPr/>
-        </p:nvSpPr>
-        <p:spPr>
-          <a:xfrm>
-            <a:off x="5532967" y="5435600"/>
-            <a:ext cx="5207000" cy="292100"/>
-          </a:xfrm>
-          <a:prstGeom prst="roundRect">
-            <a:avLst>
-              <a:gd name="adj" fmla="val 47826"/>
-            </a:avLst>
-          </a:prstGeom>
-          <a:solidFill>
-            <a:srgbClr val="D42A3B"/>
-          </a:solidFill>
-          <a:ln>
-            <a:noFill/>
-          </a:ln>
-        </p:spPr>
-        <p:txBody>
-          <a:bodyPr rtlCol="0" anchor="ctr" wrap="square" lIns="88900" tIns="0" rIns="88900" bIns="0">
-            <a:noAutofit/>
-          </a:bodyPr>
-          <a:lstStyle/>
-          <a:p>
-            <a:pPr algn="ctr"/>
-            <a:r>
-              <a:rPr sz="2000" b="1" i="0" lang="es-ES">
-                <a:solidFill>
-                  <a:srgbClr val="FFFFFF"/>
-                </a:solidFill>
-              </a:rPr>
-              <a:t>sin tope de dosis · 1 de cada 6 casos &gt; 4 g/día</a:t>
-            </a:r>
-          </a:p>
-        </p:txBody>
-      </p:sp>
       <p:pic>
         <p:nvPicPr>
-          <p:cNvPr id="11" name="Ficha del caso" descr="Ficha del caso"/>
+          <p:cNvPr id="8" name="Ficha del caso" descr="Ficha del caso"/>
           <p:cNvPicPr>
             <a:picLocks noChangeAspect="1"/>
           </p:cNvPicPr>
@@ -8177,8 +7933,8 @@
         </p:blipFill>
         <p:spPr>
           <a:xfrm>
-            <a:off x="2485423" y="2844800"/>
-            <a:ext cx="727220" cy="952500"/>
+            <a:off x="2482197" y="3092450"/>
+            <a:ext cx="737905" cy="952500"/>
           </a:xfrm>
           <a:prstGeom prst="rect">
             <a:avLst/>
@@ -8187,7 +7943,7 @@
       </p:pic>
       <p:pic>
         <p:nvPicPr>
-          <p:cNvPr id="12" name="Loro robótico (modelo de lenguaje)" descr="Loro robótico (modelo de lenguaje)"/>
+          <p:cNvPr id="9" name="Icono curva" descr="Icono curva"/>
           <p:cNvPicPr>
             <a:picLocks noChangeAspect="1"/>
           </p:cNvPicPr>
@@ -8201,8 +7957,8 @@
         </p:blipFill>
         <p:spPr>
           <a:xfrm>
-            <a:off x="5837465" y="2794000"/>
-            <a:ext cx="512837" cy="1041400"/>
+            <a:off x="9126361" y="2870200"/>
+            <a:ext cx="428978" cy="406400"/>
           </a:xfrm>
           <a:prstGeom prst="rect">
             <a:avLst/>
@@ -8211,7 +7967,7 @@
       </p:pic>
       <p:pic>
         <p:nvPicPr>
-          <p:cNvPr id="13" name="Icono curva" descr="Icono curva"/>
+          <p:cNvPr id="10" name="Icono campana" descr="Icono campana"/>
           <p:cNvPicPr>
             <a:picLocks noChangeAspect="1"/>
           </p:cNvPicPr>
@@ -8225,8 +7981,8 @@
         </p:blipFill>
         <p:spPr>
           <a:xfrm>
-            <a:off x="9194885" y="2857500"/>
-            <a:ext cx="296164" cy="279400"/>
+            <a:off x="9091083" y="3365500"/>
+            <a:ext cx="499533" cy="406400"/>
           </a:xfrm>
           <a:prstGeom prst="rect">
             <a:avLst/>
@@ -8235,7 +7991,7 @@
       </p:pic>
       <p:pic>
         <p:nvPicPr>
-          <p:cNvPr id="14" name="Icono campana" descr="Icono campana"/>
+          <p:cNvPr id="11" name="Icono red" descr="Icono red"/>
           <p:cNvPicPr>
             <a:picLocks noChangeAspect="1"/>
           </p:cNvPicPr>
@@ -8249,17 +8005,62 @@
         </p:blipFill>
         <p:spPr>
           <a:xfrm>
-            <a:off x="9168342" y="3175000"/>
-            <a:ext cx="349250" cy="279400"/>
+            <a:off x="9137650" y="3860800"/>
+            <a:ext cx="406400" cy="406400"/>
           </a:xfrm>
           <a:prstGeom prst="rect">
             <a:avLst/>
           </a:prstGeom>
         </p:spPr>
       </p:pic>
+      <p:cxnSp>
+        <p:nvCxnSpPr>
+          <p:cNvPr id="12" name="Contexto → modelo"/>
+          <p:cNvCxnSpPr/>
+          <p:nvPr/>
+        </p:nvCxnSpPr>
+        <p:spPr>
+          <a:xfrm>
+            <a:off x="3359150" y="3568700"/>
+            <a:ext cx="2241550" cy="0"/>
+          </a:xfrm>
+          <a:prstGeom prst="line">
+            <a:avLst/>
+          </a:prstGeom>
+          <a:ln w="31750">
+            <a:solidFill>
+              <a:srgbClr val="A9DBFF"/>
+            </a:solidFill>
+            <a:tailEnd type="triangle" w="med" len="med"/>
+          </a:ln>
+        </p:spPr>
+      </p:cxnSp>
+      <p:cxnSp>
+        <p:nvCxnSpPr>
+          <p:cNvPr id="13" name="Modelo ↔ herramientas"/>
+          <p:cNvCxnSpPr/>
+          <p:nvPr/>
+        </p:nvCxnSpPr>
+        <p:spPr>
+          <a:xfrm>
+            <a:off x="6591300" y="3568700"/>
+            <a:ext cx="2343150" cy="0"/>
+          </a:xfrm>
+          <a:prstGeom prst="line">
+            <a:avLst/>
+          </a:prstGeom>
+          <a:ln w="31750">
+            <a:solidFill>
+              <a:srgbClr val="A9DBFF"/>
+            </a:solidFill>
+            <a:headEnd type="triangle" w="med" len="med"/>
+            <a:tailEnd type="triangle" w="med" len="med"/>
+          </a:ln>
+        </p:spPr>
+      </p:cxnSp>
       <p:pic>
         <p:nvPicPr>
-          <p:cNvPr id="15" name="Icono red" descr="Icono red"/>
+          <p:cNvPr id="14" name="Farmacéutico con pluma" descr="Farmacéutico con pluma"/>
           <p:cNvPicPr>
             <a:picLocks noChangeAspect="1"/>
           </p:cNvPicPr>
@@ -8273,8 +8074,8 @@
         </p:blipFill>
         <p:spPr>
           <a:xfrm>
-            <a:off x="9203267" y="3492500"/>
-            <a:ext cx="279400" cy="279400"/>
+            <a:off x="5720854" y="1841500"/>
+            <a:ext cx="750291" cy="660400"/>
           </a:xfrm>
           <a:prstGeom prst="rect">
             <a:avLst/>
@@ -8283,59 +8084,37 @@
       </p:pic>
       <p:cxnSp>
         <p:nvCxnSpPr>
-          <p:cNvPr id="16" name="Contexto → modelo"/>
+          <p:cNvPr id="15" name="Supervisión"/>
           <p:cNvCxnSpPr/>
           <p:nvPr/>
         </p:nvCxnSpPr>
         <p:spPr>
           <a:xfrm>
-            <a:off x="3420533" y="3321050"/>
-            <a:ext cx="2228850" cy="0"/>
+            <a:off x="6096000" y="2527300"/>
+            <a:ext cx="0" cy="254000"/>
           </a:xfrm>
           <a:prstGeom prst="line">
             <a:avLst/>
           </a:prstGeom>
           <a:ln w="31750">
             <a:solidFill>
-              <a:srgbClr val="A9DBFF"/>
-            </a:solidFill>
+              <a:srgbClr val="4A73A0"/>
+            </a:solidFill>
+            <a:prstDash val="sysDot"/>
             <a:tailEnd type="triangle" w="med" len="med"/>
           </a:ln>
         </p:spPr>
       </p:cxnSp>
-      <p:cxnSp>
-        <p:nvCxnSpPr>
-          <p:cNvPr id="17" name="Modelo ↔ herramientas"/>
-          <p:cNvCxnSpPr/>
-          <p:nvPr/>
-        </p:nvCxnSpPr>
-        <p:spPr>
-          <a:xfrm>
-            <a:off x="6538383" y="3321050"/>
-            <a:ext cx="2360084" cy="0"/>
-          </a:xfrm>
-          <a:prstGeom prst="line">
-            <a:avLst/>
-          </a:prstGeom>
-          <a:ln w="31750">
-            <a:solidFill>
-              <a:srgbClr val="A9DBFF"/>
-            </a:solidFill>
-            <a:headEnd type="triangle" w="med" len="med"/>
-            <a:tailEnd type="triangle" w="med" len="med"/>
-          </a:ln>
-        </p:spPr>
-      </p:cxnSp>
-      <p:sp>
-        <p:nvSpPr>
-          <p:cNvPr id="18" name="TextBox 17"/>
+      <p:sp>
+        <p:nvSpPr>
+          <p:cNvPr id="16" name="TextBox 15"/>
           <p:cNvSpPr txBox="1"/>
           <p:nvPr/>
         </p:nvSpPr>
         <p:spPr>
           <a:xfrm>
-            <a:off x="1579033" y="3886200"/>
-            <a:ext cx="2540000" cy="279400"/>
+            <a:off x="6588709" y="1854200"/>
+            <a:ext cx="1905000" cy="279400"/>
           </a:xfrm>
           <a:prstGeom prst="rect">
             <a:avLst/>
@@ -8348,32 +8127,32 @@
           </a:bodyPr>
           <a:lstStyle/>
           <a:p>
-            <a:pPr algn="ctr"/>
+            <a:pPr algn="l"/>
             <a:r>
               <a:rPr sz="2000" b="1" i="0" lang="es-ES">
                 <a:solidFill>
                   <a:srgbClr val="FFFFFF"/>
                 </a:solidFill>
               </a:rPr>
-              <a:t>Contexto</a:t>
-            </a:r>
-          </a:p>
-        </p:txBody>
-      </p:sp>
-      <p:sp>
-        <p:nvSpPr>
-          <p:cNvPr id="19" name="Estado contexto"/>
-          <p:cNvSpPr/>
-          <p:nvPr/>
-        </p:nvSpPr>
-        <p:spPr>
-          <a:xfrm>
-            <a:off x="1706033" y="4216400"/>
-            <a:ext cx="2286000" cy="533400"/>
+              <a:t>Farmacéutico</a:t>
+            </a:r>
+          </a:p>
+        </p:txBody>
+      </p:sp>
+      <p:sp>
+        <p:nvSpPr>
+          <p:cNvPr id="17" name="Estado farmacéutico"/>
+          <p:cNvSpPr/>
+          <p:nvPr/>
+        </p:nvSpPr>
+        <p:spPr>
+          <a:xfrm>
+            <a:off x="6588709" y="2171700"/>
+            <a:ext cx="3586401" cy="292100"/>
           </a:xfrm>
           <a:prstGeom prst="roundRect">
             <a:avLst>
-              <a:gd name="adj" fmla="val 26190"/>
+              <a:gd name="adj" fmla="val 50000"/>
             </a:avLst>
           </a:prstGeom>
           <a:solidFill>
@@ -8384,7 +8163,7 @@
           </a:ln>
         </p:spPr>
         <p:txBody>
-          <a:bodyPr rtlCol="0" anchor="ctr" wrap="square" lIns="88900" tIns="0" rIns="88900" bIns="0">
+          <a:bodyPr rtlCol="0" anchor="ctr" wrap="square" lIns="95250" tIns="0" rIns="95250" bIns="0">
             <a:noAutofit/>
           </a:bodyPr>
           <a:lstStyle/>
@@ -8396,21 +8175,21 @@
                   <a:srgbClr val="0E1B2C"/>
                 </a:solidFill>
               </a:rPr>
-              <a:t>guías locales recuperadas</a:t>
-            </a:r>
-          </a:p>
-        </p:txBody>
-      </p:sp>
-      <p:sp>
-        <p:nvSpPr>
-          <p:cNvPr id="20" name="TextBox 19"/>
+              <a:t>borrador + revisión obligatoria</a:t>
+            </a:r>
+          </a:p>
+        </p:txBody>
+      </p:sp>
+      <p:sp>
+        <p:nvSpPr>
+          <p:cNvPr id="18" name="TextBox 17"/>
           <p:cNvSpPr txBox="1"/>
           <p:nvPr/>
         </p:nvSpPr>
         <p:spPr>
           <a:xfrm>
-            <a:off x="4246033" y="3886200"/>
-            <a:ext cx="3695700" cy="279400"/>
+            <a:off x="1549400" y="4406900"/>
+            <a:ext cx="2603500" cy="279400"/>
           </a:xfrm>
           <a:prstGeom prst="rect">
             <a:avLst/>
@@ -8430,36 +8209,36 @@
                   <a:srgbClr val="FFFFFF"/>
                 </a:solidFill>
               </a:rPr>
-              <a:t>Modelo (GPT-4o)</a:t>
-            </a:r>
-          </a:p>
-        </p:txBody>
-      </p:sp>
-      <p:sp>
-        <p:nvSpPr>
-          <p:cNvPr id="21" name="Estado modelo"/>
-          <p:cNvSpPr/>
-          <p:nvPr/>
-        </p:nvSpPr>
-        <p:spPr>
-          <a:xfrm>
-            <a:off x="5059434" y="4216400"/>
-            <a:ext cx="2068899" cy="292100"/>
+              <a:t>Contexto</a:t>
+            </a:r>
+          </a:p>
+        </p:txBody>
+      </p:sp>
+      <p:sp>
+        <p:nvSpPr>
+          <p:cNvPr id="19" name="Estado contexto"/>
+          <p:cNvSpPr/>
+          <p:nvPr/>
+        </p:nvSpPr>
+        <p:spPr>
+          <a:xfrm>
+            <a:off x="1898650" y="4724400"/>
+            <a:ext cx="1905000" cy="584200"/>
           </a:xfrm>
           <a:prstGeom prst="roundRect">
             <a:avLst>
-              <a:gd name="adj" fmla="val 47826"/>
+              <a:gd name="adj" fmla="val 50000"/>
             </a:avLst>
           </a:prstGeom>
           <a:solidFill>
-            <a:srgbClr val="F0A500"/>
+            <a:srgbClr val="DDE7F0"/>
           </a:solidFill>
           <a:ln>
             <a:noFill/>
           </a:ln>
         </p:spPr>
         <p:txBody>
-          <a:bodyPr rtlCol="0" anchor="ctr" wrap="square" lIns="88900" tIns="0" rIns="88900" bIns="0">
+          <a:bodyPr rtlCol="0" anchor="ctr" wrap="square" lIns="95250" tIns="0" rIns="95250" bIns="0">
             <a:noAutofit/>
           </a:bodyPr>
           <a:lstStyle/>
@@ -8471,103 +8250,30 @@
                   <a:srgbClr val="0E1B2C"/>
                 </a:solidFill>
               </a:rPr>
-              <a:t>interpreta: 83 %</a:t>
-            </a:r>
-          </a:p>
-        </p:txBody>
-      </p:sp>
-      <p:sp>
-        <p:nvSpPr>
-          <p:cNvPr id="22" name="Fallo 1"/>
-          <p:cNvSpPr/>
-          <p:nvPr/>
-        </p:nvSpPr>
-        <p:spPr>
-          <a:xfrm>
-            <a:off x="4311165" y="4559300"/>
-            <a:ext cx="3565436" cy="292100"/>
-          </a:xfrm>
-          <a:prstGeom prst="roundRect">
-            <a:avLst>
-              <a:gd name="adj" fmla="val 47826"/>
-            </a:avLst>
-          </a:prstGeom>
-          <a:solidFill>
-            <a:srgbClr val="D42A3B"/>
-          </a:solidFill>
-          <a:ln>
-            <a:noFill/>
-          </a:ln>
-        </p:spPr>
-        <p:txBody>
-          <a:bodyPr rtlCol="0" anchor="ctr" wrap="square" lIns="88900" tIns="0" rIns="88900" bIns="0">
-            <a:noAutofit/>
-          </a:bodyPr>
-          <a:lstStyle/>
-          <a:p>
-            <a:pPr algn="ctr"/>
+              <a:t>guías locales</a:t>
+            </a:r>
+            <a:br/>
             <a:r>
               <a:rPr sz="2000" b="1" i="0" lang="es-ES">
                 <a:solidFill>
-                  <a:srgbClr val="FFFFFF"/>
-                </a:solidFill>
-              </a:rPr>
-              <a:t>predice concentraciones: 58 %</a:t>
-            </a:r>
-          </a:p>
-        </p:txBody>
-      </p:sp>
-      <p:sp>
-        <p:nvSpPr>
-          <p:cNvPr id="23" name="Fallo 2"/>
-          <p:cNvSpPr/>
-          <p:nvPr/>
-        </p:nvSpPr>
-        <p:spPr>
-          <a:xfrm>
-            <a:off x="4661244" y="4902200"/>
-            <a:ext cx="2865279" cy="292100"/>
-          </a:xfrm>
-          <a:prstGeom prst="roundRect">
-            <a:avLst>
-              <a:gd name="adj" fmla="val 47826"/>
-            </a:avLst>
-          </a:prstGeom>
-          <a:solidFill>
-            <a:srgbClr val="D42A3B"/>
-          </a:solidFill>
-          <a:ln>
-            <a:noFill/>
-          </a:ln>
-        </p:spPr>
-        <p:txBody>
-          <a:bodyPr rtlCol="0" anchor="ctr" wrap="square" lIns="88900" tIns="0" rIns="88900" bIns="0">
-            <a:noAutofit/>
-          </a:bodyPr>
-          <a:lstStyle/>
-          <a:p>
-            <a:pPr algn="ctr"/>
-            <a:r>
-              <a:rPr sz="2000" b="1" i="0" lang="es-ES">
-                <a:solidFill>
-                  <a:srgbClr val="FFFFFF"/>
-                </a:solidFill>
-              </a:rPr>
-              <a:t>cuándo extraer: 0 de 30</a:t>
-            </a:r>
-          </a:p>
-        </p:txBody>
-      </p:sp>
-      <p:sp>
-        <p:nvSpPr>
-          <p:cNvPr id="24" name="TextBox 23"/>
+                  <a:srgbClr val="0E1B2C"/>
+                </a:solidFill>
+              </a:rPr>
+              <a:t>recuperadas</a:t>
+            </a:r>
+          </a:p>
+        </p:txBody>
+      </p:sp>
+      <p:sp>
+        <p:nvSpPr>
+          <p:cNvPr id="20" name="TextBox 19"/>
           <p:cNvSpPr txBox="1"/>
           <p:nvPr/>
         </p:nvSpPr>
         <p:spPr>
           <a:xfrm>
-            <a:off x="8072967" y="3886200"/>
-            <a:ext cx="2540000" cy="889000"/>
+            <a:off x="4191000" y="4406900"/>
+            <a:ext cx="3810000" cy="279400"/>
           </a:xfrm>
           <a:prstGeom prst="rect">
             <a:avLst/>
@@ -8587,47 +8293,36 @@
                   <a:srgbClr val="FFFFFF"/>
                 </a:solidFill>
               </a:rPr>
-              <a:t>Herramienta</a:t>
-            </a:r>
-          </a:p>
-          <a:p>
-            <a:pPr algn="ctr"/>
-            <a:r>
-              <a:rPr sz="2000" b="0" i="0" lang="es-ES">
-                <a:solidFill>
-                  <a:srgbClr val="C9D6E2"/>
-                </a:solidFill>
-              </a:rPr>
-              <a:t>(motor de ecuaciones de primer orden)</a:t>
-            </a:r>
-          </a:p>
-        </p:txBody>
-      </p:sp>
-      <p:sp>
-        <p:nvSpPr>
-          <p:cNvPr id="25" name="Estado herramienta"/>
-          <p:cNvSpPr/>
-          <p:nvPr/>
-        </p:nvSpPr>
-        <p:spPr>
-          <a:xfrm>
-            <a:off x="8148016" y="4851400"/>
-            <a:ext cx="2389902" cy="292100"/>
+              <a:t>Modelo (GPT-4o)</a:t>
+            </a:r>
+          </a:p>
+        </p:txBody>
+      </p:sp>
+      <p:sp>
+        <p:nvSpPr>
+          <p:cNvPr id="21" name="Estado modelo"/>
+          <p:cNvSpPr/>
+          <p:nvPr/>
+        </p:nvSpPr>
+        <p:spPr>
+          <a:xfrm>
+            <a:off x="5061550" y="4724400"/>
+            <a:ext cx="2068899" cy="292100"/>
           </a:xfrm>
           <a:prstGeom prst="roundRect">
             <a:avLst>
-              <a:gd name="adj" fmla="val 47826"/>
+              <a:gd name="adj" fmla="val 50000"/>
             </a:avLst>
           </a:prstGeom>
           <a:solidFill>
-            <a:srgbClr val="5BB46C"/>
+            <a:srgbClr val="F0A500"/>
           </a:solidFill>
           <a:ln>
             <a:noFill/>
           </a:ln>
         </p:spPr>
         <p:txBody>
-          <a:bodyPr rtlCol="0" anchor="ctr" wrap="square" lIns="88900" tIns="0" rIns="88900" bIns="0">
+          <a:bodyPr rtlCol="0" anchor="ctr" wrap="square" lIns="95250" tIns="0" rIns="95250" bIns="0">
             <a:noAutofit/>
           </a:bodyPr>
           <a:lstStyle/>
@@ -8639,6 +8334,174 @@
                   <a:srgbClr val="0E1B2C"/>
                 </a:solidFill>
               </a:rPr>
+              <a:t>interpreta: 83 %</a:t>
+            </a:r>
+          </a:p>
+        </p:txBody>
+      </p:sp>
+      <p:sp>
+        <p:nvSpPr>
+          <p:cNvPr id="22" name="Fallo 1"/>
+          <p:cNvSpPr/>
+          <p:nvPr/>
+        </p:nvSpPr>
+        <p:spPr>
+          <a:xfrm>
+            <a:off x="4313282" y="5041900"/>
+            <a:ext cx="3565436" cy="292100"/>
+          </a:xfrm>
+          <a:prstGeom prst="roundRect">
+            <a:avLst>
+              <a:gd name="adj" fmla="val 50000"/>
+            </a:avLst>
+          </a:prstGeom>
+          <a:solidFill>
+            <a:srgbClr val="D42A3B"/>
+          </a:solidFill>
+          <a:ln>
+            <a:noFill/>
+          </a:ln>
+        </p:spPr>
+        <p:txBody>
+          <a:bodyPr rtlCol="0" anchor="ctr" wrap="square" lIns="95250" tIns="0" rIns="95250" bIns="0">
+            <a:noAutofit/>
+          </a:bodyPr>
+          <a:lstStyle/>
+          <a:p>
+            <a:pPr algn="ctr"/>
+            <a:r>
+              <a:rPr sz="2000" b="1" i="0" lang="es-ES">
+                <a:solidFill>
+                  <a:srgbClr val="FFFFFF"/>
+                </a:solidFill>
+              </a:rPr>
+              <a:t>predice concentraciones: 58 %</a:t>
+            </a:r>
+          </a:p>
+        </p:txBody>
+      </p:sp>
+      <p:sp>
+        <p:nvSpPr>
+          <p:cNvPr id="23" name="Fallo 2"/>
+          <p:cNvSpPr/>
+          <p:nvPr/>
+        </p:nvSpPr>
+        <p:spPr>
+          <a:xfrm>
+            <a:off x="4663361" y="5359400"/>
+            <a:ext cx="2865279" cy="292100"/>
+          </a:xfrm>
+          <a:prstGeom prst="roundRect">
+            <a:avLst>
+              <a:gd name="adj" fmla="val 50000"/>
+            </a:avLst>
+          </a:prstGeom>
+          <a:solidFill>
+            <a:srgbClr val="D42A3B"/>
+          </a:solidFill>
+          <a:ln>
+            <a:noFill/>
+          </a:ln>
+        </p:spPr>
+        <p:txBody>
+          <a:bodyPr rtlCol="0" anchor="ctr" wrap="square" lIns="95250" tIns="0" rIns="95250" bIns="0">
+            <a:noAutofit/>
+          </a:bodyPr>
+          <a:lstStyle/>
+          <a:p>
+            <a:pPr algn="ctr"/>
+            <a:r>
+              <a:rPr sz="2000" b="1" i="0" lang="es-ES">
+                <a:solidFill>
+                  <a:srgbClr val="FFFFFF"/>
+                </a:solidFill>
+              </a:rPr>
+              <a:t>cuándo extraer: 0 de 30</a:t>
+            </a:r>
+          </a:p>
+        </p:txBody>
+      </p:sp>
+      <p:sp>
+        <p:nvSpPr>
+          <p:cNvPr id="24" name="TextBox 23"/>
+          <p:cNvSpPr txBox="1"/>
+          <p:nvPr/>
+        </p:nvSpPr>
+        <p:spPr>
+          <a:xfrm>
+            <a:off x="8191500" y="4406900"/>
+            <a:ext cx="2451100" cy="889000"/>
+          </a:xfrm>
+          <a:prstGeom prst="rect">
+            <a:avLst/>
+          </a:prstGeom>
+          <a:noFill/>
+        </p:spPr>
+        <p:txBody>
+          <a:bodyPr wrap="square" lIns="0" tIns="0" rIns="0" bIns="0" anchor="t">
+            <a:noAutofit/>
+          </a:bodyPr>
+          <a:lstStyle/>
+          <a:p>
+            <a:pPr algn="ctr"/>
+            <a:r>
+              <a:rPr sz="2000" b="1" i="0" lang="es-ES">
+                <a:solidFill>
+                  <a:srgbClr val="FFFFFF"/>
+                </a:solidFill>
+              </a:rPr>
+              <a:t>Herramienta</a:t>
+            </a:r>
+          </a:p>
+          <a:p>
+            <a:pPr algn="ctr"/>
+            <a:r>
+              <a:rPr sz="2000" b="0" i="0" lang="es-ES">
+                <a:solidFill>
+                  <a:srgbClr val="DDE7F0"/>
+                </a:solidFill>
+              </a:rPr>
+              <a:t>(motor de ecuaciones de primer orden)</a:t>
+            </a:r>
+          </a:p>
+        </p:txBody>
+      </p:sp>
+      <p:sp>
+        <p:nvSpPr>
+          <p:cNvPr id="25" name="Estado herramienta"/>
+          <p:cNvSpPr/>
+          <p:nvPr/>
+        </p:nvSpPr>
+        <p:spPr>
+          <a:xfrm>
+            <a:off x="8222099" y="5359400"/>
+            <a:ext cx="2389902" cy="292100"/>
+          </a:xfrm>
+          <a:prstGeom prst="roundRect">
+            <a:avLst>
+              <a:gd name="adj" fmla="val 50000"/>
+            </a:avLst>
+          </a:prstGeom>
+          <a:solidFill>
+            <a:srgbClr val="5BB46C"/>
+          </a:solidFill>
+          <a:ln>
+            <a:noFill/>
+          </a:ln>
+        </p:spPr>
+        <p:txBody>
+          <a:bodyPr rtlCol="0" anchor="ctr" wrap="square" lIns="95250" tIns="0" rIns="95250" bIns="0">
+            <a:noAutofit/>
+          </a:bodyPr>
+          <a:lstStyle/>
+          <a:p>
+            <a:pPr algn="ctr"/>
+            <a:r>
+              <a:rPr sz="2000" b="1" i="0" lang="es-ES">
+                <a:solidFill>
+                  <a:srgbClr val="0E1B2C"/>
+                </a:solidFill>
+              </a:rPr>
               <a:t>cálculos sin errores</a:t>
             </a:r>
           </a:p>
@@ -8652,8 +8515,8 @@
         </p:nvSpPr>
         <p:spPr>
           <a:xfrm>
-            <a:off x="7914701" y="3543300"/>
-            <a:ext cx="1009165" cy="1155700"/>
+            <a:off x="7916817" y="3949700"/>
+            <a:ext cx="979532" cy="1238250"/>
           </a:xfrm>
           <a:custGeom>
             <a:avLst/>
@@ -8662,14 +8525,14 @@
             <a:cxnLst/>
             <a:rect l="0" t="0" r="r" b="b"/>
             <a:pathLst>
-              <a:path w="1009165" h="1155700" fill="none">
+              <a:path w="979532" h="1238250" fill="none">
                 <a:moveTo>
-                  <a:pt x="0" y="1155700"/>
+                  <a:pt x="0" y="1238250"/>
                 </a:moveTo>
                 <a:cubicBezTo>
-                  <a:pt x="215900" y="711200"/>
-                  <a:pt x="279400" y="63500"/>
-                  <a:pt x="1009165" y="0"/>
+                  <a:pt x="114300" y="711200"/>
+                  <a:pt x="25400" y="63500"/>
+                  <a:pt x="979532" y="0"/>
                 </a:cubicBezTo>
               </a:path>
             </a:pathLst>
@@ -8692,8 +8555,8 @@
         </p:nvSpPr>
         <p:spPr>
           <a:xfrm>
-            <a:off x="6487583" y="3594100"/>
-            <a:ext cx="1587500" cy="279400"/>
+            <a:off x="6515100" y="3746500"/>
+            <a:ext cx="1714500" cy="279400"/>
           </a:xfrm>
           <a:prstGeom prst="rect">
             <a:avLst/>
@@ -8720,14 +8583,55 @@
       </p:sp>
       <p:sp>
         <p:nvSpPr>
-          <p:cNvPr id="28" name="Flecha curva"/>
-          <p:cNvSpPr/>
-          <p:nvPr/>
-        </p:nvSpPr>
-        <p:spPr>
-          <a:xfrm>
-            <a:off x="10587566" y="4254500"/>
-            <a:ext cx="533400" cy="1181100"/>
+          <p:cNvPr id="28" name="Estado arnés"/>
+          <p:cNvSpPr/>
+          <p:nvPr/>
+        </p:nvSpPr>
+        <p:spPr>
+          <a:xfrm>
+            <a:off x="1452054" y="5829300"/>
+            <a:ext cx="5125839" cy="292100"/>
+          </a:xfrm>
+          <a:prstGeom prst="roundRect">
+            <a:avLst>
+              <a:gd name="adj" fmla="val 50000"/>
+            </a:avLst>
+          </a:prstGeom>
+          <a:solidFill>
+            <a:srgbClr val="D42A3B"/>
+          </a:solidFill>
+          <a:ln>
+            <a:noFill/>
+          </a:ln>
+        </p:spPr>
+        <p:txBody>
+          <a:bodyPr rtlCol="0" anchor="ctr" wrap="square" lIns="95250" tIns="0" rIns="95250" bIns="0">
+            <a:noAutofit/>
+          </a:bodyPr>
+          <a:lstStyle/>
+          <a:p>
+            <a:pPr algn="ctr"/>
+            <a:r>
+              <a:rPr sz="2000" b="1" i="0" lang="es-ES">
+                <a:solidFill>
+                  <a:srgbClr val="FFFFFF"/>
+                </a:solidFill>
+              </a:rPr>
+              <a:t>sin tope de dosis · 1 de cada 6 casos &gt; 4 g/día</a:t>
+            </a:r>
+          </a:p>
+        </p:txBody>
+      </p:sp>
+      <p:sp>
+        <p:nvSpPr>
+          <p:cNvPr id="29" name="Flecha curva"/>
+          <p:cNvSpPr/>
+          <p:nvPr/>
+        </p:nvSpPr>
+        <p:spPr>
+          <a:xfrm>
+            <a:off x="6615993" y="5740400"/>
+            <a:ext cx="406400" cy="234950"/>
           </a:xfrm>
           <a:custGeom>
             <a:avLst/>
@@ -8736,14 +8640,14 @@
             <a:cxnLst/>
             <a:rect l="0" t="0" r="r" b="b"/>
             <a:pathLst>
-              <a:path w="533400" h="1181100" fill="none">
+              <a:path w="406400" h="234950" fill="none">
                 <a:moveTo>
-                  <a:pt x="0" y="1181100"/>
+                  <a:pt x="0" y="234950"/>
                 </a:moveTo>
                 <a:cubicBezTo>
-                  <a:pt x="406400" y="1016000"/>
-                  <a:pt x="533400" y="317500"/>
-                  <a:pt x="177800" y="0"/>
+                  <a:pt x="215900" y="234950"/>
+                  <a:pt x="406400" y="127000"/>
+                  <a:pt x="406400" y="0"/>
                 </a:cubicBezTo>
               </a:path>
             </a:pathLst>
@@ -8760,48 +8664,14 @@
       </p:sp>
       <p:sp>
         <p:nvSpPr>
-          <p:cNvPr id="29" name="Rótulo límite"/>
+          <p:cNvPr id="30" name="Rótulo límite"/>
           <p:cNvSpPr txBox="1"/>
           <p:nvPr/>
         </p:nvSpPr>
         <p:spPr>
           <a:xfrm>
-            <a:off x="10828867" y="3429000"/>
-            <a:ext cx="889000" cy="635000"/>
-          </a:xfrm>
-          <a:prstGeom prst="rect">
-            <a:avLst/>
-          </a:prstGeom>
-          <a:noFill/>
-        </p:spPr>
-        <p:txBody>
-          <a:bodyPr wrap="square" lIns="0" tIns="0" rIns="0" bIns="0" anchor="t">
-            <a:noAutofit/>
-          </a:bodyPr>
-          <a:lstStyle/>
-          <a:p>
-            <a:pPr algn="l"/>
-            <a:r>
-              <a:rPr sz="2000" b="0" i="1" lang="es-ES">
-                <a:solidFill>
-                  <a:srgbClr val="FFFFFF"/>
-                </a:solidFill>
-              </a:rPr>
-              <a:t>esto es un límite</a:t>
-            </a:r>
-          </a:p>
-        </p:txBody>
-      </p:sp>
-      <p:sp>
-        <p:nvSpPr>
-          <p:cNvPr id="30" name="Franja"/>
-          <p:cNvSpPr txBox="1"/>
-          <p:nvPr/>
-        </p:nvSpPr>
-        <p:spPr>
-          <a:xfrm>
-            <a:off x="762000" y="5842000"/>
-            <a:ext cx="8890000" cy="292100"/>
+            <a:off x="7149394" y="5829300"/>
+            <a:ext cx="1905000" cy="292100"/>
           </a:xfrm>
           <a:prstGeom prst="rect">
             <a:avLst/>
@@ -8816,12 +8686,12 @@
           <a:p>
             <a:pPr algn="l"/>
             <a:r>
-              <a:rPr sz="2000" b="1" i="0" lang="es-ES">
-                <a:solidFill>
-                  <a:srgbClr val="F0A500"/>
-                </a:solidFill>
-              </a:rPr>
-              <a:t>Prepublicación · 30 casos retrospectivos · función renal estable</a:t>
+              <a:rPr sz="2000" b="0" i="1" lang="es-ES">
+                <a:solidFill>
+                  <a:srgbClr val="FFFFFF"/>
+                </a:solidFill>
+              </a:rPr>
+              <a:t>esto es un límite</a:t>
             </a:r>
           </a:p>
         </p:txBody>
@@ -8895,7 +8765,7 @@
           <a:noFill/>
         </p:spPr>
         <p:txBody>
-          <a:bodyPr wrap="square" lIns="0" tIns="0" rIns="0" bIns="0" anchor="ctr">
+          <a:bodyPr wrap="square" lIns="0" tIns="0" rIns="0" bIns="0" anchor="t">
             <a:noAutofit/>
           </a:bodyPr>
           <a:lstStyle/>
@@ -8911,7 +8781,16 @@
                   <a:srgbClr val="263445"/>
                 </a:solidFill>
               </a:rPr>
-              <a:t>Leemos la ficha técnica de lo que dispensamos; leamos también la de la IA que usamos.</a:t>
+              <a:t>Leemos la ficha técnica de lo que dispensamos;</a:t>
+            </a:r>
+            <a:br/>
+            <a:r>
+              <a:rPr sz="3200" b="0" i="0" lang="es-ES">
+                <a:solidFill>
+                  <a:srgbClr val="263445"/>
+                </a:solidFill>
+              </a:rPr>
+              <a:t>leamos también la de la IA que usamos.</a:t>
             </a:r>
           </a:p>
         </p:txBody>
@@ -8924,8 +8803,8 @@
         </p:nvSpPr>
         <p:spPr>
           <a:xfrm>
-            <a:off x="609600" y="2184400"/>
-            <a:ext cx="3759200" cy="482600"/>
+            <a:off x="609600" y="1892300"/>
+            <a:ext cx="3746500" cy="444500"/>
           </a:xfrm>
           <a:custGeom>
             <a:avLst/>
@@ -8934,25 +8813,25 @@
             <a:cxnLst/>
             <a:rect l="l" t="t" r="r" b="b"/>
             <a:pathLst>
-              <a:path w="3759200" h="482600">
+              <a:path w="3746500" h="444500">
                 <a:moveTo>
-                  <a:pt x="0" y="482600"/>
+                  <a:pt x="0" y="444500"/>
                 </a:moveTo>
                 <a:lnTo>
-                  <a:pt x="711200" y="0"/>
+                  <a:pt x="762000" y="0"/>
                 </a:lnTo>
                 <a:lnTo>
-                  <a:pt x="3759200" y="0"/>
+                  <a:pt x="3746500" y="0"/>
                 </a:lnTo>
                 <a:lnTo>
-                  <a:pt x="3048000" y="482600"/>
+                  <a:pt x="2984500" y="444500"/>
                 </a:lnTo>
                 <a:close/>
               </a:path>
             </a:pathLst>
           </a:custGeom>
           <a:solidFill>
-            <a:srgbClr val="E9EEF2"/>
+            <a:srgbClr val="E4E9EE"/>
           </a:solidFill>
           <a:ln w="31750">
             <a:solidFill>
@@ -8976,8 +8855,8 @@
         </p:nvSpPr>
         <p:spPr>
           <a:xfrm>
-            <a:off x="3657600" y="2184400"/>
-            <a:ext cx="711200" cy="3657600"/>
+            <a:off x="3594100" y="1892300"/>
+            <a:ext cx="762000" cy="4254500"/>
           </a:xfrm>
           <a:custGeom>
             <a:avLst/>
@@ -8986,25 +8865,25 @@
             <a:cxnLst/>
             <a:rect l="l" t="t" r="r" b="b"/>
             <a:pathLst>
-              <a:path w="711200" h="3657600">
+              <a:path w="762000" h="4254500">
                 <a:moveTo>
-                  <a:pt x="0" y="482600"/>
+                  <a:pt x="0" y="444500"/>
                 </a:moveTo>
                 <a:lnTo>
-                  <a:pt x="711200" y="0"/>
+                  <a:pt x="762000" y="0"/>
                 </a:lnTo>
                 <a:lnTo>
-                  <a:pt x="711200" y="3175000"/>
+                  <a:pt x="762000" y="3810000"/>
                 </a:lnTo>
                 <a:lnTo>
-                  <a:pt x="0" y="3657600"/>
+                  <a:pt x="0" y="4254500"/>
                 </a:lnTo>
                 <a:close/>
               </a:path>
             </a:pathLst>
           </a:custGeom>
           <a:solidFill>
-            <a:srgbClr val="D5DDE4"/>
+            <a:srgbClr val="B9C3CD"/>
           </a:solidFill>
           <a:ln w="31750">
             <a:solidFill>
@@ -9028,8 +8907,8 @@
         </p:nvSpPr>
         <p:spPr>
           <a:xfrm rot="16200000">
-            <a:off x="2743200" y="3708400"/>
-            <a:ext cx="2540000" cy="609600"/>
+            <a:off x="2324100" y="3702050"/>
+            <a:ext cx="3302000" cy="635000"/>
           </a:xfrm>
           <a:prstGeom prst="rect">
             <a:avLst/>
@@ -9049,7 +8928,16 @@
                   <a:srgbClr val="263445"/>
                 </a:solidFill>
               </a:rPr>
-              <a:t>Lea la ficha técnica antes de usar</a:t>
+              <a:t>Lea la ficha técnica</a:t>
+            </a:r>
+            <a:br/>
+            <a:r>
+              <a:rPr sz="2000" b="1" i="0" lang="es-ES">
+                <a:solidFill>
+                  <a:srgbClr val="263445"/>
+                </a:solidFill>
+              </a:rPr>
+              <a:t>antes de usar</a:t>
             </a:r>
           </a:p>
         </p:txBody>
@@ -9062,8 +8950,8 @@
         </p:nvSpPr>
         <p:spPr>
           <a:xfrm>
-            <a:off x="609600" y="2667000"/>
-            <a:ext cx="3048000" cy="3175000"/>
+            <a:off x="609600" y="2336800"/>
+            <a:ext cx="2984500" cy="3810000"/>
           </a:xfrm>
           <a:prstGeom prst="rect">
             <a:avLst/>
@@ -9093,8 +8981,8 @@
         </p:nvSpPr>
         <p:spPr>
           <a:xfrm>
-            <a:off x="619125" y="2857500"/>
-            <a:ext cx="3028950" cy="114300"/>
+            <a:off x="619125" y="2552700"/>
+            <a:ext cx="2965450" cy="114300"/>
           </a:xfrm>
           <a:prstGeom prst="rect">
             <a:avLst/>
@@ -9122,8 +9010,8 @@
         </p:nvSpPr>
         <p:spPr>
           <a:xfrm>
-            <a:off x="619125" y="3009900"/>
-            <a:ext cx="3028950" cy="38100"/>
+            <a:off x="619125" y="2705100"/>
+            <a:ext cx="2965450" cy="38100"/>
           </a:xfrm>
           <a:prstGeom prst="rect">
             <a:avLst/>
@@ -9151,8 +9039,8 @@
         </p:nvSpPr>
         <p:spPr>
           <a:xfrm>
-            <a:off x="812800" y="3200400"/>
-            <a:ext cx="2641600" cy="571500"/>
+            <a:off x="812800" y="2946400"/>
+            <a:ext cx="2578100" cy="571500"/>
           </a:xfrm>
           <a:prstGeom prst="rect">
             <a:avLst/>
@@ -9167,7 +9055,7 @@
           <a:p>
             <a:pPr algn="l"/>
             <a:r>
-              <a:rPr sz="4400" b="1" i="0" lang="es-ES">
+              <a:rPr sz="4000" b="1" i="0" lang="es-ES">
                 <a:solidFill>
                   <a:srgbClr val="263445"/>
                 </a:solidFill>
@@ -9185,8 +9073,8 @@
         </p:nvSpPr>
         <p:spPr>
           <a:xfrm>
-            <a:off x="812800" y="3810000"/>
-            <a:ext cx="2641600" cy="698500"/>
+            <a:off x="812800" y="3581400"/>
+            <a:ext cx="2578100" cy="698500"/>
           </a:xfrm>
           <a:prstGeom prst="rect">
             <a:avLst/>
@@ -9206,7 +9094,16 @@
                   <a:srgbClr val="263445"/>
                 </a:solidFill>
               </a:rPr>
-              <a:t>Contiene: 1 modelo de lenguaje</a:t>
+              <a:t>Contiene:</a:t>
+            </a:r>
+            <a:br/>
+            <a:r>
+              <a:rPr sz="2200" b="0" i="0" lang="es-ES">
+                <a:solidFill>
+                  <a:srgbClr val="263445"/>
+                </a:solidFill>
+              </a:rPr>
+              <a:t>1 modelo de lenguaje</a:t>
             </a:r>
           </a:p>
         </p:txBody>
@@ -9219,8 +9116,8 @@
         </p:nvSpPr>
         <p:spPr>
           <a:xfrm>
-            <a:off x="2590800" y="4648200"/>
-            <a:ext cx="889000" cy="889000"/>
+            <a:off x="1568450" y="4826000"/>
+            <a:ext cx="1066800" cy="1066800"/>
           </a:xfrm>
           <a:prstGeom prst="ellipse">
             <a:avLst/>
@@ -9256,8 +9153,8 @@
         </p:blipFill>
         <p:spPr>
           <a:xfrm>
-            <a:off x="2841598" y="4699000"/>
-            <a:ext cx="387405" cy="787400"/>
+            <a:off x="1868052" y="4889500"/>
+            <a:ext cx="467597" cy="939800"/>
           </a:xfrm>
           <a:prstGeom prst="rect">
             <a:avLst/>
@@ -9266,108 +9163,17 @@
       </p:pic>
       <p:sp>
         <p:nvSpPr>
-          <p:cNvPr id="13" name="Caja: línea"/>
-          <p:cNvSpPr/>
-          <p:nvPr/>
-        </p:nvSpPr>
-        <p:spPr>
-          <a:xfrm>
-            <a:off x="812800" y="5080000"/>
-            <a:ext cx="1333500" cy="12700"/>
-          </a:xfrm>
-          <a:prstGeom prst="rect">
-            <a:avLst/>
-          </a:prstGeom>
-          <a:solidFill>
-            <a:srgbClr val="C9D2DB"/>
-          </a:solidFill>
-          <a:ln>
-            <a:noFill/>
-          </a:ln>
-        </p:spPr>
-        <p:txBody>
-          <a:bodyPr rtlCol="0" anchor="ctr"/>
-          <a:lstStyle/>
-          <a:p>
-            <a:pPr algn="ctr"/>
-          </a:p>
-        </p:txBody>
-      </p:sp>
-      <p:sp>
-        <p:nvSpPr>
-          <p:cNvPr id="14" name="Caja: línea"/>
-          <p:cNvSpPr/>
-          <p:nvPr/>
-        </p:nvSpPr>
-        <p:spPr>
-          <a:xfrm>
-            <a:off x="812800" y="5219700"/>
-            <a:ext cx="952500" cy="12700"/>
-          </a:xfrm>
-          <a:prstGeom prst="rect">
-            <a:avLst/>
-          </a:prstGeom>
-          <a:solidFill>
-            <a:srgbClr val="C9D2DB"/>
-          </a:solidFill>
-          <a:ln>
-            <a:noFill/>
-          </a:ln>
-        </p:spPr>
-        <p:txBody>
-          <a:bodyPr rtlCol="0" anchor="ctr"/>
-          <a:lstStyle/>
-          <a:p>
-            <a:pPr algn="ctr"/>
-          </a:p>
-        </p:txBody>
-      </p:sp>
-      <p:sp>
-        <p:nvSpPr>
-          <p:cNvPr id="15" name="Ficha: sombra"/>
-          <p:cNvSpPr/>
-          <p:nvPr/>
-        </p:nvSpPr>
-        <p:spPr>
-          <a:xfrm>
-            <a:off x="5291667" y="1955800"/>
-            <a:ext cx="6392333" cy="4254500"/>
-          </a:xfrm>
-          <a:prstGeom prst="roundRect">
-            <a:avLst>
-              <a:gd name="adj" fmla="val 1194"/>
-            </a:avLst>
-          </a:prstGeom>
-          <a:solidFill>
-            <a:srgbClr val="E3E8ED"/>
-          </a:solidFill>
-          <a:ln>
-            <a:noFill/>
-          </a:ln>
-        </p:spPr>
-        <p:txBody>
-          <a:bodyPr rtlCol="0" anchor="ctr"/>
-          <a:lstStyle/>
-          <a:p>
-            <a:pPr algn="ctr"/>
-          </a:p>
-        </p:txBody>
-      </p:sp>
-      <p:sp>
-        <p:nvSpPr>
-          <p:cNvPr id="16" name="Ficha técnica"/>
-          <p:cNvSpPr/>
-          <p:nvPr/>
-        </p:nvSpPr>
-        <p:spPr>
-          <a:xfrm>
-            <a:off x="5228167" y="1892300"/>
-            <a:ext cx="6392333" cy="4254500"/>
-          </a:xfrm>
-          <a:prstGeom prst="roundRect">
-            <a:avLst>
-              <a:gd name="adj" fmla="val 1194"/>
-            </a:avLst>
+          <p:cNvPr id="13" name="Ficha: panel 1"/>
+          <p:cNvSpPr/>
+          <p:nvPr/>
+        </p:nvSpPr>
+        <p:spPr>
+          <a:xfrm>
+            <a:off x="5228273" y="1892300"/>
+            <a:ext cx="6455982" cy="1206500"/>
+          </a:xfrm>
+          <a:prstGeom prst="rect">
+            <a:avLst/>
           </a:prstGeom>
           <a:solidFill>
             <a:srgbClr val="FFFFFF"/>
@@ -9388,7 +9194,7 @@
       </p:sp>
       <p:pic>
         <p:nvPicPr>
-          <p:cNvPr id="17" name="Icono Composición" descr="Icono Composición"/>
+          <p:cNvPr id="14" name="Icono Composición" descr="Icono Composición"/>
           <p:cNvPicPr>
             <a:picLocks noChangeAspect="1"/>
           </p:cNvPicPr>
@@ -9402,8 +9208,8 @@
         </p:blipFill>
         <p:spPr>
           <a:xfrm>
-            <a:off x="5444067" y="2118505"/>
-            <a:ext cx="584200" cy="487390"/>
+            <a:off x="5431473" y="2100290"/>
+            <a:ext cx="609600" cy="508581"/>
           </a:xfrm>
           <a:prstGeom prst="rect">
             <a:avLst/>
@@ -9412,14 +9218,14 @@
       </p:pic>
       <p:sp>
         <p:nvSpPr>
-          <p:cNvPr id="18" name="TextBox 17"/>
+          <p:cNvPr id="15" name="TextBox 14"/>
           <p:cNvSpPr txBox="1"/>
           <p:nvPr/>
         </p:nvSpPr>
         <p:spPr>
           <a:xfrm>
-            <a:off x="6180667" y="2070100"/>
-            <a:ext cx="5223933" cy="1587500"/>
+            <a:off x="6244273" y="2032000"/>
+            <a:ext cx="5236782" cy="1016000"/>
           </a:xfrm>
           <a:prstGeom prst="rect">
             <a:avLst/>
@@ -9440,7 +9246,7 @@
             <a:r>
               <a:rPr sz="2200" b="1" i="0" lang="es-ES">
                 <a:solidFill>
-                  <a:srgbClr val="007F7E"/>
+                  <a:srgbClr val="007A79"/>
                 </a:solidFill>
               </a:rPr>
               <a:t>Composición</a:t>
@@ -9467,31 +9273,40 @@
           </a:p>
         </p:txBody>
       </p:sp>
-      <p:cxnSp>
-        <p:nvCxnSpPr>
-          <p:cNvPr id="19" name="Pliegue"/>
-          <p:cNvCxnSpPr/>
-          <p:nvPr/>
-        </p:nvCxnSpPr>
-        <p:spPr>
-          <a:xfrm>
-            <a:off x="5380567" y="3136900"/>
-            <a:ext cx="6087533" cy="0"/>
-          </a:xfrm>
-          <a:prstGeom prst="line">
-            <a:avLst/>
-          </a:prstGeom>
-          <a:ln w="15875">
-            <a:solidFill>
-              <a:srgbClr val="E2E7EC"/>
-            </a:solidFill>
-            <a:prstDash val="dash"/>
-          </a:ln>
-        </p:spPr>
-      </p:cxnSp>
+      <p:sp>
+        <p:nvSpPr>
+          <p:cNvPr id="16" name="Ficha: panel 2"/>
+          <p:cNvSpPr/>
+          <p:nvPr/>
+        </p:nvSpPr>
+        <p:spPr>
+          <a:xfrm>
+            <a:off x="5228273" y="3098800"/>
+            <a:ext cx="6455982" cy="1206500"/>
+          </a:xfrm>
+          <a:prstGeom prst="rect">
+            <a:avLst/>
+          </a:prstGeom>
+          <a:solidFill>
+            <a:srgbClr val="F3F6F9"/>
+          </a:solidFill>
+          <a:ln w="19050">
+            <a:solidFill>
+              <a:srgbClr val="C9D2DB"/>
+            </a:solidFill>
+          </a:ln>
+        </p:spPr>
+        <p:txBody>
+          <a:bodyPr rtlCol="0" anchor="ctr"/>
+          <a:lstStyle/>
+          <a:p>
+            <a:pPr algn="ctr"/>
+          </a:p>
+        </p:txBody>
+      </p:sp>
       <p:pic>
         <p:nvPicPr>
-          <p:cNvPr id="20" name="Icono Mecanismo de acción" descr="Icono Mecanismo de acción"/>
+          <p:cNvPr id="17" name="Icono Mecanismo de acción" descr="Icono Mecanismo de acción"/>
           <p:cNvPicPr>
             <a:picLocks noChangeAspect="1"/>
           </p:cNvPicPr>
@@ -9505,8 +9320,8 @@
         </p:blipFill>
         <p:spPr>
           <a:xfrm>
-            <a:off x="5475218" y="3289300"/>
-            <a:ext cx="521897" cy="508000"/>
+            <a:off x="5470105" y="3302000"/>
+            <a:ext cx="532335" cy="518160"/>
           </a:xfrm>
           <a:prstGeom prst="rect">
             <a:avLst/>
@@ -9515,14 +9330,14 @@
       </p:pic>
       <p:sp>
         <p:nvSpPr>
-          <p:cNvPr id="21" name="TextBox 20"/>
+          <p:cNvPr id="18" name="TextBox 17"/>
           <p:cNvSpPr txBox="1"/>
           <p:nvPr/>
         </p:nvSpPr>
         <p:spPr>
           <a:xfrm>
-            <a:off x="6180667" y="3251200"/>
-            <a:ext cx="5223933" cy="1587500"/>
+            <a:off x="6244273" y="3238500"/>
+            <a:ext cx="5236782" cy="1016000"/>
           </a:xfrm>
           <a:prstGeom prst="rect">
             <a:avLst/>
@@ -9543,7 +9358,7 @@
             <a:r>
               <a:rPr sz="2200" b="1" i="0" lang="es-ES">
                 <a:solidFill>
-                  <a:srgbClr val="007F7E"/>
+                  <a:srgbClr val="007A79"/>
                 </a:solidFill>
               </a:rPr>
               <a:t>Mecanismo de acción</a:t>
@@ -9570,31 +9385,40 @@
           </a:p>
         </p:txBody>
       </p:sp>
-      <p:cxnSp>
-        <p:nvCxnSpPr>
-          <p:cNvPr id="22" name="Pliegue"/>
-          <p:cNvCxnSpPr/>
-          <p:nvPr/>
-        </p:nvCxnSpPr>
-        <p:spPr>
-          <a:xfrm>
-            <a:off x="5380567" y="4318000"/>
-            <a:ext cx="6087533" cy="0"/>
-          </a:xfrm>
-          <a:prstGeom prst="line">
-            <a:avLst/>
-          </a:prstGeom>
-          <a:ln w="15875">
-            <a:solidFill>
-              <a:srgbClr val="E2E7EC"/>
-            </a:solidFill>
-            <a:prstDash val="dash"/>
-          </a:ln>
-        </p:spPr>
-      </p:cxnSp>
+      <p:sp>
+        <p:nvSpPr>
+          <p:cNvPr id="19" name="Ficha: panel 3"/>
+          <p:cNvSpPr/>
+          <p:nvPr/>
+        </p:nvSpPr>
+        <p:spPr>
+          <a:xfrm>
+            <a:off x="5228273" y="4305300"/>
+            <a:ext cx="6455982" cy="1841500"/>
+          </a:xfrm>
+          <a:prstGeom prst="rect">
+            <a:avLst/>
+          </a:prstGeom>
+          <a:solidFill>
+            <a:srgbClr val="FFFFFF"/>
+          </a:solidFill>
+          <a:ln w="19050">
+            <a:solidFill>
+              <a:srgbClr val="C9D2DB"/>
+            </a:solidFill>
+          </a:ln>
+        </p:spPr>
+        <p:txBody>
+          <a:bodyPr rtlCol="0" anchor="ctr"/>
+          <a:lstStyle/>
+          <a:p>
+            <a:pPr algn="ctr"/>
+          </a:p>
+        </p:txBody>
+      </p:sp>
       <p:pic>
         <p:nvPicPr>
-          <p:cNvPr id="23" name="Icono Eficacia clínica y seguridad" descr="Icono Eficacia clínica y seguridad"/>
+          <p:cNvPr id="20" name="Icono Eficacia clínica y seguridad" descr="Icono Eficacia clínica y seguridad"/>
           <p:cNvPicPr>
             <a:picLocks noChangeAspect="1"/>
           </p:cNvPicPr>
@@ -9608,8 +9432,8 @@
         </p:blipFill>
         <p:spPr>
           <a:xfrm>
-            <a:off x="5444067" y="4476391"/>
-            <a:ext cx="584200" cy="496019"/>
+            <a:off x="5431473" y="4508788"/>
+            <a:ext cx="609600" cy="517585"/>
           </a:xfrm>
           <a:prstGeom prst="rect">
             <a:avLst/>
@@ -9618,14 +9442,14 @@
       </p:pic>
       <p:sp>
         <p:nvSpPr>
-          <p:cNvPr id="24" name="TextBox 23"/>
+          <p:cNvPr id="21" name="TextBox 20"/>
           <p:cNvSpPr txBox="1"/>
           <p:nvPr/>
         </p:nvSpPr>
         <p:spPr>
           <a:xfrm>
-            <a:off x="6180667" y="4432300"/>
-            <a:ext cx="5223933" cy="1587500"/>
+            <a:off x="6244273" y="4445000"/>
+            <a:ext cx="5236782" cy="1651000"/>
           </a:xfrm>
           <a:prstGeom prst="rect">
             <a:avLst/>
@@ -9646,7 +9470,7 @@
             <a:r>
               <a:rPr sz="2200" b="1" i="0" lang="es-ES">
                 <a:solidFill>
-                  <a:srgbClr val="007F7E"/>
+                  <a:srgbClr val="007A79"/>
                 </a:solidFill>
               </a:rPr>
               <a:t>Eficacia clínica y seguridad</a:t>
@@ -9708,7 +9532,7 @@
           <a:noFill/>
         </p:spPr>
         <p:txBody>
-          <a:bodyPr wrap="square" lIns="0" tIns="0" rIns="0" bIns="0" anchor="ctr">
+          <a:bodyPr wrap="square" lIns="0" tIns="0" rIns="0" bIns="0" anchor="t">
             <a:noAutofit/>
           </a:bodyPr>
           <a:lstStyle/>
@@ -9729,7 +9553,7 @@
             <a:r>
               <a:rPr sz="3600" b="1" i="0" lang="es-ES">
                 <a:solidFill>
-                  <a:srgbClr val="2F8541"/>
+                  <a:srgbClr val="2B7D3D"/>
                 </a:solidFill>
               </a:rPr>
               <a:t>herramienta</a:t>
@@ -9758,13 +9582,7 @@
               </a:rPr>
               <a:t> explica</a:t>
             </a:r>
-          </a:p>
-          <a:p>
-            <a:pPr algn="ctr">
-              <a:lnSpc>
-                <a:spcPct val="92000"/>
-              </a:lnSpc>
-            </a:pPr>
+            <a:br/>
             <a:r>
               <a:rPr sz="3600" b="0" i="0" lang="es-ES">
                 <a:solidFill>
@@ -9794,7 +9612,7 @@
       </p:sp>
       <p:pic>
         <p:nvPicPr>
-          <p:cNvPr id="3" name="Farmacéutico con pluma (a todo color)" descr="Farmacéutico con pluma (a todo color)"/>
+          <p:cNvPr id="3" name="Farmacéutico con pluma" descr="Farmacéutico con pluma"/>
           <p:cNvPicPr>
             <a:picLocks noChangeAspect="1"/>
           </p:cNvPicPr>
@@ -9808,8 +9626,8 @@
         </p:blipFill>
         <p:spPr>
           <a:xfrm>
-            <a:off x="5619750" y="1924265"/>
-            <a:ext cx="952500" cy="831419"/>
+            <a:off x="5586767" y="1905000"/>
+            <a:ext cx="1018466" cy="889000"/>
           </a:xfrm>
           <a:prstGeom prst="rect">
             <a:avLst/>
@@ -9824,13 +9642,13 @@
         </p:nvCxnSpPr>
         <p:spPr>
           <a:xfrm>
-            <a:off x="6096000" y="2813050"/>
-            <a:ext cx="0" cy="171450"/>
+            <a:off x="6096000" y="2819400"/>
+            <a:ext cx="0" cy="248420"/>
           </a:xfrm>
           <a:prstGeom prst="line">
             <a:avLst/>
           </a:prstGeom>
-          <a:ln w="28575">
+          <a:ln w="31750">
             <a:solidFill>
               <a:srgbClr val="4A73A0"/>
             </a:solidFill>
@@ -9847,16 +9665,16 @@
         </p:nvSpPr>
         <p:spPr>
           <a:xfrm>
-            <a:off x="2396067" y="2984500"/>
-            <a:ext cx="7399867" cy="2413000"/>
+            <a:off x="2396109" y="2984500"/>
+            <a:ext cx="7400036" cy="1589202"/>
           </a:xfrm>
           <a:prstGeom prst="roundRect">
             <a:avLst>
-              <a:gd name="adj" fmla="val 5263"/>
+              <a:gd name="adj" fmla="val 6393"/>
             </a:avLst>
           </a:prstGeom>
           <a:noFill/>
-          <a:ln w="28575">
+          <a:ln w="31750">
             <a:solidFill>
               <a:srgbClr val="C3CBD3"/>
             </a:solidFill>
@@ -9873,7 +9691,7 @@
       </p:sp>
       <p:pic>
         <p:nvPicPr>
-          <p:cNvPr id="6" name="ficha-caso-gray" descr="ficha-caso-gray"/>
+          <p:cNvPr id="6" name="Loro robótico (modelo de lenguaje)" descr="Loro robótico (modelo de lenguaje)"/>
           <p:cNvPicPr>
             <a:picLocks noChangeAspect="1"/>
           </p:cNvPicPr>
@@ -9887,8 +9705,8 @@
         </p:blipFill>
         <p:spPr>
           <a:xfrm>
-            <a:off x="3001082" y="3525630"/>
-            <a:ext cx="1016000" cy="1330739"/>
+            <a:off x="5799007" y="3105920"/>
+            <a:ext cx="593986" cy="1193962"/>
           </a:xfrm>
           <a:prstGeom prst="rect">
             <a:avLst/>
@@ -9897,7 +9715,7 @@
       </p:pic>
       <p:pic>
         <p:nvPicPr>
-          <p:cNvPr id="7" name="loro-gray" descr="loro-gray"/>
+          <p:cNvPr id="7" name="Ficha del caso" descr="Ficha del caso"/>
           <p:cNvPicPr>
             <a:picLocks noChangeAspect="1"/>
           </p:cNvPicPr>
@@ -9911,8 +9729,8 @@
         </p:blipFill>
         <p:spPr>
           <a:xfrm>
-            <a:off x="5687796" y="3365500"/>
-            <a:ext cx="813034" cy="1651000"/>
+            <a:off x="3221074" y="3323464"/>
+            <a:ext cx="579389" cy="758874"/>
           </a:xfrm>
           <a:prstGeom prst="rect">
             <a:avLst/>
@@ -9921,7 +9739,7 @@
       </p:pic>
       <p:pic>
         <p:nvPicPr>
-          <p:cNvPr id="8" name="icono-curva-gray" descr="icono-curva-gray"/>
+          <p:cNvPr id="8" name="Icono curva" descr="Icono curva"/>
           <p:cNvPicPr>
             <a:picLocks noChangeAspect="1"/>
           </p:cNvPicPr>
@@ -9935,8 +9753,8 @@
         </p:blipFill>
         <p:spPr>
           <a:xfrm>
-            <a:off x="8440602" y="3441700"/>
-            <a:ext cx="484632" cy="457200"/>
+            <a:off x="8509625" y="3146393"/>
+            <a:ext cx="343214" cy="323786"/>
           </a:xfrm>
           <a:prstGeom prst="rect">
             <a:avLst/>
@@ -9945,7 +9763,7 @@
       </p:pic>
       <p:pic>
         <p:nvPicPr>
-          <p:cNvPr id="9" name="icono-campana-gray" descr="icono-campana-gray"/>
+          <p:cNvPr id="9" name="Icono campana" descr="Icono campana"/>
           <p:cNvPicPr>
             <a:picLocks noChangeAspect="1"/>
           </p:cNvPicPr>
@@ -9959,8 +9777,8 @@
         </p:blipFill>
         <p:spPr>
           <a:xfrm>
-            <a:off x="8397168" y="3949700"/>
-            <a:ext cx="571500" cy="457200"/>
+            <a:off x="8478865" y="3541008"/>
+            <a:ext cx="404733" cy="323786"/>
           </a:xfrm>
           <a:prstGeom prst="rect">
             <a:avLst/>
@@ -9969,7 +9787,7 @@
       </p:pic>
       <p:pic>
         <p:nvPicPr>
-          <p:cNvPr id="10" name="icono-red-gray" descr="icono-red-gray"/>
+          <p:cNvPr id="10" name="Icono red" descr="Icono red"/>
           <p:cNvPicPr>
             <a:picLocks noChangeAspect="1"/>
           </p:cNvPicPr>
@@ -9983,8 +9801,8 @@
         </p:blipFill>
         <p:spPr>
           <a:xfrm>
-            <a:off x="8454318" y="4457700"/>
-            <a:ext cx="457200" cy="457200"/>
+            <a:off x="8519339" y="3935622"/>
+            <a:ext cx="323786" cy="323786"/>
           </a:xfrm>
           <a:prstGeom prst="rect">
             <a:avLst/>
@@ -9993,19 +9811,19 @@
       </p:pic>
       <p:cxnSp>
         <p:nvCxnSpPr>
-          <p:cNvPr id="11" name="Connector 10"/>
+          <p:cNvPr id="11" name="Contexto → modelo"/>
           <p:cNvCxnSpPr/>
           <p:nvPr/>
         </p:nvCxnSpPr>
         <p:spPr>
           <a:xfrm>
-            <a:off x="4144082" y="4191000"/>
-            <a:ext cx="1442232" cy="0"/>
+            <a:off x="3915501" y="3702901"/>
+            <a:ext cx="1785884" cy="0"/>
           </a:xfrm>
           <a:prstGeom prst="line">
             <a:avLst/>
           </a:prstGeom>
-          <a:ln w="28575">
+          <a:ln w="31750">
             <a:solidFill>
               <a:srgbClr val="C3CBD3"/>
             </a:solidFill>
@@ -10015,19 +9833,19 @@
       </p:cxnSp>
       <p:cxnSp>
         <p:nvCxnSpPr>
-          <p:cNvPr id="12" name="Connector 11"/>
+          <p:cNvPr id="12" name="Modelo ↔ herramientas"/>
           <p:cNvCxnSpPr/>
           <p:nvPr/>
         </p:nvCxnSpPr>
         <p:spPr>
           <a:xfrm>
-            <a:off x="6602314" y="4191000"/>
-            <a:ext cx="1572604" cy="0"/>
+            <a:off x="6490615" y="3702901"/>
+            <a:ext cx="1866830" cy="0"/>
           </a:xfrm>
           <a:prstGeom prst="line">
             <a:avLst/>
           </a:prstGeom>
-          <a:ln w="28575">
+          <a:ln w="31750">
             <a:solidFill>
               <a:srgbClr val="C3CBD3"/>
             </a:solidFill>
@@ -10044,7 +9862,7 @@
         </p:nvSpPr>
         <p:spPr>
           <a:xfrm>
-            <a:off x="508000" y="5588000"/>
+            <a:off x="508000" y="5511800"/>
             <a:ext cx="11176000" cy="635000"/>
           </a:xfrm>
           <a:prstGeom prst="roundRect">
@@ -10060,7 +9878,7 @@
           </a:ln>
         </p:spPr>
         <p:txBody>
-          <a:bodyPr rtlCol="0" anchor="ctr" wrap="square" lIns="177800" tIns="25400" rIns="177800" bIns="25400">
+          <a:bodyPr rtlCol="0" anchor="ctr" wrap="square" lIns="203200" tIns="25400" rIns="203200" bIns="25400">
             <a:noAutofit/>
           </a:bodyPr>
           <a:lstStyle/>
@@ -10069,7 +9887,7 @@
             <a:r>
               <a:rPr sz="2000" b="1" i="0" lang="es-ES">
                 <a:solidFill>
-                  <a:srgbClr val="007F7E"/>
+                  <a:srgbClr val="007A79"/>
                 </a:solidFill>
               </a:rPr>
               <a:t>A continuación: </a:t>

--- a/examples/sefh-71-ia-tdm/salida/ponencia-ia-tdm-montero.pptx
+++ b/examples/sefh-71-ia-tdm/salida/ponencia-ia-tdm-montero.pptx
@@ -483,6 +483,398 @@
 </p:notesMaster>
 </file>
 
+<file path=ppt/notesSlides/notesSlide1.xml><?xml version="1.0" encoding="utf-8"?>
+<p:notes xmlns:a="http://schemas.openxmlformats.org/drawingml/2006/main" xmlns:p="http://schemas.openxmlformats.org/presentationml/2006/main" xmlns:r="http://schemas.openxmlformats.org/officeDocument/2006/relationships">
+  <p:cSld>
+    <p:spTree>
+      <p:nvGrpSpPr>
+        <p:cNvPr id="1" name=""/>
+        <p:cNvGrpSpPr/>
+        <p:nvPr/>
+      </p:nvGrpSpPr>
+      <p:grpSpPr>
+        <a:xfrm>
+          <a:off x="0" y="0"/>
+          <a:ext cx="0" cy="0"/>
+          <a:chOff x="0" y="0"/>
+          <a:chExt cx="0" cy="0"/>
+        </a:xfrm>
+      </p:grpSpPr>
+      <p:sp>
+        <p:nvSpPr>
+          <p:cNvPr id="2" name="Slide Image Placeholder 1"/>
+          <p:cNvSpPr>
+            <a:spLocks noGrp="1"/>
+          </p:cNvSpPr>
+          <p:nvPr>
+            <p:ph type="sldImg" idx="2"/>
+          </p:nvPr>
+        </p:nvSpPr>
+        <p:spPr/>
+      </p:sp>
+      <p:sp>
+        <p:nvSpPr>
+          <p:cNvPr id="3" name="Notes Placeholder 2"/>
+          <p:cNvSpPr>
+            <a:spLocks noGrp="1"/>
+          </p:cNvSpPr>
+          <p:nvPr>
+            <p:ph type="body" idx="3" sz="quarter"/>
+          </p:nvPr>
+        </p:nvSpPr>
+        <p:spPr/>
+        <p:txBody>
+          <a:bodyPr/>
+          <a:lstStyle/>
+          <a:p>
+            <a:r>
+              <a:t>Titular original: ChatGPT sabe hablar de farmacocinética, pero no hacer farmacocinética.</a:t>
+            </a:r>
+          </a:p>
+        </p:txBody>
+      </p:sp>
+      <p:sp>
+        <p:nvSpPr>
+          <p:cNvPr id="4" name="Slide Number Placeholder 3"/>
+          <p:cNvSpPr>
+            <a:spLocks noGrp="1"/>
+          </p:cNvSpPr>
+          <p:nvPr>
+            <p:ph type="sldNum" idx="5" sz="quarter"/>
+          </p:nvPr>
+        </p:nvSpPr>
+        <p:spPr/>
+      </p:sp>
+    </p:spTree>
+  </p:cSld>
+  <p:clrMapOvr>
+    <a:masterClrMapping/>
+  </p:clrMapOvr>
+</p:notes>
+</file>
+
+<file path=ppt/notesSlides/notesSlide2.xml><?xml version="1.0" encoding="utf-8"?>
+<p:notes xmlns:a="http://schemas.openxmlformats.org/drawingml/2006/main" xmlns:p="http://schemas.openxmlformats.org/presentationml/2006/main" xmlns:r="http://schemas.openxmlformats.org/officeDocument/2006/relationships">
+  <p:cSld>
+    <p:spTree>
+      <p:nvGrpSpPr>
+        <p:cNvPr id="1" name=""/>
+        <p:cNvGrpSpPr/>
+        <p:nvPr/>
+      </p:nvGrpSpPr>
+      <p:grpSpPr>
+        <a:xfrm>
+          <a:off x="0" y="0"/>
+          <a:ext cx="0" cy="0"/>
+          <a:chOff x="0" y="0"/>
+          <a:chExt cx="0" cy="0"/>
+        </a:xfrm>
+      </p:grpSpPr>
+      <p:sp>
+        <p:nvSpPr>
+          <p:cNvPr id="2" name="Slide Image Placeholder 1"/>
+          <p:cNvSpPr>
+            <a:spLocks noGrp="1"/>
+          </p:cNvSpPr>
+          <p:nvPr>
+            <p:ph type="sldImg" idx="2"/>
+          </p:nvPr>
+        </p:nvSpPr>
+        <p:spPr/>
+      </p:sp>
+      <p:sp>
+        <p:nvSpPr>
+          <p:cNvPr id="3" name="Notes Placeholder 2"/>
+          <p:cNvSpPr>
+            <a:spLocks noGrp="1"/>
+          </p:cNvSpPr>
+          <p:nvPr>
+            <p:ph type="body" idx="3" sz="quarter"/>
+          </p:nvPr>
+        </p:nvSpPr>
+        <p:spPr/>
+        <p:txBody>
+          <a:bodyPr/>
+          <a:lstStyle/>
+          <a:p>
+            <a:r>
+              <a:t>Titular original: Treinta años de estudios: predice parecido al bayesiano, pero apenas ha llegado al día a día.</a:t>
+            </a:r>
+          </a:p>
+          <a:p/>
+          <a:p>
+            <a:r>
+              <a:t>1995 · Red neuronal frente a NONMEM (gentamicina, 111 pacientes).</a:t>
+            </a:r>
+          </a:p>
+          <a:p/>
+          <a:p>
+            <a:r>
+              <a:t>2025 · 58 estudios: el aprendizaje automático rinde igual o mejor que los modelos poblacionales.</a:t>
+            </a:r>
+          </a:p>
+          <a:p/>
+          <a:p>
+            <a:r>
+              <a:t>Sin concentraciones del paciente: el modelo híbrido mejora un 17 % el error del bayesiano · vancomicina en sepsis, 4059 pacientes.</a:t>
+            </a:r>
+          </a:p>
+          <a:p/>
+          <a:p>
+            <a:r>
+              <a:t>Con concentraciones del paciente: gana el bayesiano (13 % de error frente a 34 %); gana el aprendizaje automático (ABC de tacrolimus en 6 series externas).</a:t>
+            </a:r>
+          </a:p>
+        </p:txBody>
+      </p:sp>
+      <p:sp>
+        <p:nvSpPr>
+          <p:cNvPr id="4" name="Slide Number Placeholder 3"/>
+          <p:cNvSpPr>
+            <a:spLocks noGrp="1"/>
+          </p:cNvSpPr>
+          <p:nvPr>
+            <p:ph type="sldNum" idx="5" sz="quarter"/>
+          </p:nvPr>
+        </p:nvSpPr>
+        <p:spPr/>
+      </p:sp>
+    </p:spTree>
+  </p:cSld>
+  <p:clrMapOvr>
+    <a:masterClrMapping/>
+  </p:clrMapOvr>
+</p:notes>
+</file>
+
+<file path=ppt/notesSlides/notesSlide3.xml><?xml version="1.0" encoding="utf-8"?>
+<p:notes xmlns:a="http://schemas.openxmlformats.org/drawingml/2006/main" xmlns:p="http://schemas.openxmlformats.org/presentationml/2006/main" xmlns:r="http://schemas.openxmlformats.org/officeDocument/2006/relationships">
+  <p:cSld>
+    <p:spTree>
+      <p:nvGrpSpPr>
+        <p:cNvPr id="1" name=""/>
+        <p:cNvGrpSpPr/>
+        <p:nvPr/>
+      </p:nvGrpSpPr>
+      <p:grpSpPr>
+        <a:xfrm>
+          <a:off x="0" y="0"/>
+          <a:ext cx="0" cy="0"/>
+          <a:chOff x="0" y="0"/>
+          <a:chExt cx="0" cy="0"/>
+        </a:xfrm>
+      </p:grpSpPr>
+      <p:sp>
+        <p:nvSpPr>
+          <p:cNvPr id="2" name="Slide Image Placeholder 1"/>
+          <p:cNvSpPr>
+            <a:spLocks noGrp="1"/>
+          </p:cNvSpPr>
+          <p:nvPr>
+            <p:ph type="sldImg" idx="2"/>
+          </p:nvPr>
+        </p:nvSpPr>
+        <p:spPr/>
+      </p:sp>
+      <p:sp>
+        <p:nvSpPr>
+          <p:cNvPr id="3" name="Notes Placeholder 2"/>
+          <p:cNvSpPr>
+            <a:spLocks noGrp="1"/>
+          </p:cNvSpPr>
+          <p:nvPr>
+            <p:ph type="body" idx="3" sz="quarter"/>
+          </p:nvPr>
+        </p:nvSpPr>
+        <p:spPr/>
+        <p:txBody>
+          <a:bodyPr/>
+          <a:lstStyle/>
+          <a:p>
+            <a:r>
+              <a:t>En vuestro servicio:</a:t>
+            </a:r>
+          </a:p>
+          <a:p/>
+          <a:p>
+            <a:r>
+              <a:t>Contexto → historia clínica. Modelo → lee, llama a la herramienta y redacta el borrador. Herramientas → programa bayesiano. Arnés → procedimiento normalizado de trabajo. Farmacéutico → firma del informe.</a:t>
+            </a:r>
+          </a:p>
+        </p:txBody>
+      </p:sp>
+      <p:sp>
+        <p:nvSpPr>
+          <p:cNvPr id="4" name="Slide Number Placeholder 3"/>
+          <p:cNvSpPr>
+            <a:spLocks noGrp="1"/>
+          </p:cNvSpPr>
+          <p:nvPr>
+            <p:ph type="sldNum" idx="5" sz="quarter"/>
+          </p:nvPr>
+        </p:nvSpPr>
+        <p:spPr/>
+      </p:sp>
+    </p:spTree>
+  </p:cSld>
+  <p:clrMapOvr>
+    <a:masterClrMapping/>
+  </p:clrMapOvr>
+</p:notes>
+</file>
+
+<file path=ppt/notesSlides/notesSlide4.xml><?xml version="1.0" encoding="utf-8"?>
+<p:notes xmlns:a="http://schemas.openxmlformats.org/drawingml/2006/main" xmlns:p="http://schemas.openxmlformats.org/presentationml/2006/main" xmlns:r="http://schemas.openxmlformats.org/officeDocument/2006/relationships">
+  <p:cSld>
+    <p:spTree>
+      <p:nvGrpSpPr>
+        <p:cNvPr id="1" name=""/>
+        <p:cNvGrpSpPr/>
+        <p:nvPr/>
+      </p:nvGrpSpPr>
+      <p:grpSpPr>
+        <a:xfrm>
+          <a:off x="0" y="0"/>
+          <a:ext cx="0" cy="0"/>
+          <a:chOff x="0" y="0"/>
+          <a:chExt cx="0" cy="0"/>
+        </a:xfrm>
+      </p:grpSpPr>
+      <p:sp>
+        <p:nvSpPr>
+          <p:cNvPr id="2" name="Slide Image Placeholder 1"/>
+          <p:cNvSpPr>
+            <a:spLocks noGrp="1"/>
+          </p:cNvSpPr>
+          <p:nvPr>
+            <p:ph type="sldImg" idx="2"/>
+          </p:nvPr>
+        </p:nvSpPr>
+        <p:spPr/>
+      </p:sp>
+      <p:sp>
+        <p:nvSpPr>
+          <p:cNvPr id="3" name="Notes Placeholder 2"/>
+          <p:cNvSpPr>
+            <a:spLocks noGrp="1"/>
+          </p:cNvSpPr>
+          <p:nvPr>
+            <p:ph type="body" idx="3" sz="quarter"/>
+          </p:nvPr>
+        </p:nvSpPr>
+        <p:spPr/>
+        <p:txBody>
+          <a:bodyPr/>
+          <a:lstStyle/>
+          <a:p>
+            <a:r>
+              <a:t>Titular original: La lección de TDM-AID: cada tarea, a la pieza que mejor la hace.</a:t>
+            </a:r>
+          </a:p>
+          <a:p/>
+          <a:p>
+            <a:r>
+              <a:t>Herramienta: motor de ecuaciones de primer orden.</a:t>
+            </a:r>
+          </a:p>
+          <a:p/>
+          <a:p>
+            <a:r>
+              <a:t>Lectura: los cálculos que falló el modelo son trabajo de la herramienta; la dosis máxima es trabajo del arnés.</a:t>
+            </a:r>
+          </a:p>
+        </p:txBody>
+      </p:sp>
+      <p:sp>
+        <p:nvSpPr>
+          <p:cNvPr id="4" name="Slide Number Placeholder 3"/>
+          <p:cNvSpPr>
+            <a:spLocks noGrp="1"/>
+          </p:cNvSpPr>
+          <p:nvPr>
+            <p:ph type="sldNum" idx="5" sz="quarter"/>
+          </p:nvPr>
+        </p:nvSpPr>
+        <p:spPr/>
+      </p:sp>
+    </p:spTree>
+  </p:cSld>
+  <p:clrMapOvr>
+    <a:masterClrMapping/>
+  </p:clrMapOvr>
+</p:notes>
+</file>
+
+<file path=ppt/notesSlides/notesSlide5.xml><?xml version="1.0" encoding="utf-8"?>
+<p:notes xmlns:a="http://schemas.openxmlformats.org/drawingml/2006/main" xmlns:p="http://schemas.openxmlformats.org/presentationml/2006/main" xmlns:r="http://schemas.openxmlformats.org/officeDocument/2006/relationships">
+  <p:cSld>
+    <p:spTree>
+      <p:nvGrpSpPr>
+        <p:cNvPr id="1" name=""/>
+        <p:cNvGrpSpPr/>
+        <p:nvPr/>
+      </p:nvGrpSpPr>
+      <p:grpSpPr>
+        <a:xfrm>
+          <a:off x="0" y="0"/>
+          <a:ext cx="0" cy="0"/>
+          <a:chOff x="0" y="0"/>
+          <a:chExt cx="0" cy="0"/>
+        </a:xfrm>
+      </p:grpSpPr>
+      <p:sp>
+        <p:nvSpPr>
+          <p:cNvPr id="2" name="Slide Image Placeholder 1"/>
+          <p:cNvSpPr>
+            <a:spLocks noGrp="1"/>
+          </p:cNvSpPr>
+          <p:nvPr>
+            <p:ph type="sldImg" idx="2"/>
+          </p:nvPr>
+        </p:nvSpPr>
+        <p:spPr/>
+      </p:sp>
+      <p:sp>
+        <p:nvSpPr>
+          <p:cNvPr id="3" name="Notes Placeholder 2"/>
+          <p:cNvSpPr>
+            <a:spLocks noGrp="1"/>
+          </p:cNvSpPr>
+          <p:nvPr>
+            <p:ph type="body" idx="3" sz="quarter"/>
+          </p:nvPr>
+        </p:nvSpPr>
+        <p:spPr/>
+        <p:txBody>
+          <a:bodyPr/>
+          <a:lstStyle/>
+          <a:p>
+            <a:r>
+              <a:t>Titular original: Leemos la ficha técnica de lo que dispensamos; leamos también la de la IA que usamos.</a:t>
+            </a:r>
+          </a:p>
+        </p:txBody>
+      </p:sp>
+      <p:sp>
+        <p:nvSpPr>
+          <p:cNvPr id="4" name="Slide Number Placeholder 3"/>
+          <p:cNvSpPr>
+            <a:spLocks noGrp="1"/>
+          </p:cNvSpPr>
+          <p:nvPr>
+            <p:ph type="sldNum" idx="5" sz="quarter"/>
+          </p:nvPr>
+        </p:nvSpPr>
+        <p:spPr/>
+      </p:sp>
+    </p:spTree>
+  </p:cSld>
+  <p:clrMapOvr>
+    <a:masterClrMapping/>
+  </p:clrMapOvr>
+</p:notes>
+</file>
+
 <file path=ppt/slideLayouts/slideLayout1.xml><?xml version="1.0" encoding="utf-8"?>
 <p:sldLayout xmlns:a="http://schemas.openxmlformats.org/drawingml/2006/main" xmlns:r="http://schemas.openxmlformats.org/officeDocument/2006/relationships" xmlns:p="http://schemas.openxmlformats.org/presentationml/2006/main" preserve="1" userDrawn="1">
   <p:cSld name="Title Slide">
@@ -1083,7 +1475,7 @@
         <p:spPr>
           <a:xfrm>
             <a:off x="508000" y="749300"/>
-            <a:ext cx="11176000" cy="952500"/>
+            <a:ext cx="11176000" cy="635000"/>
           </a:xfrm>
           <a:prstGeom prst="rect">
             <a:avLst/>
@@ -1091,48 +1483,35 @@
           <a:noFill/>
         </p:spPr>
         <p:txBody>
-          <a:bodyPr wrap="square" lIns="0" tIns="0" rIns="0" bIns="0" anchor="t">
+          <a:bodyPr wrap="square" lIns="0" tIns="0" rIns="0" bIns="0" anchor="ctr">
             <a:noAutofit/>
           </a:bodyPr>
           <a:lstStyle/>
           <a:p>
-            <a:pPr algn="l">
-              <a:lnSpc>
-                <a:spcPct val="92000"/>
-              </a:lnSpc>
-            </a:pPr>
-            <a:r>
-              <a:rPr sz="3200" b="0" i="0" lang="es-ES">
+            <a:pPr algn="l"/>
+            <a:r>
+              <a:rPr sz="3600" b="1" i="0" lang="es-ES">
                 <a:solidFill>
                   <a:srgbClr val="263445"/>
                 </a:solidFill>
               </a:rPr>
-              <a:t>ChatGPT sabe hablar de farmacocinética,</a:t>
-            </a:r>
-            <a:br/>
-            <a:r>
-              <a:rPr sz="3200" b="0" i="0" lang="es-ES">
+              <a:t>ChatGPT sabe hablar de farmacocinética, no </a:t>
+            </a:r>
+            <a:r>
+              <a:rPr sz="3600" b="1" i="0" lang="es-ES">
+                <a:solidFill>
+                  <a:srgbClr val="007A79"/>
+                </a:solidFill>
+              </a:rPr>
+              <a:t>hacerla</a:t>
+            </a:r>
+            <a:r>
+              <a:rPr sz="3600" b="1" i="0" lang="es-ES">
                 <a:solidFill>
                   <a:srgbClr val="263445"/>
                 </a:solidFill>
               </a:rPr>
-              <a:t>pero no </a:t>
-            </a:r>
-            <a:r>
-              <a:rPr sz="3200" b="1" i="0" lang="es-ES">
-                <a:solidFill>
-                  <a:srgbClr val="007A79"/>
-                </a:solidFill>
-              </a:rPr>
-              <a:t>hacer</a:t>
-            </a:r>
-            <a:r>
-              <a:rPr sz="3200" b="0" i="0" lang="es-ES">
-                <a:solidFill>
-                  <a:srgbClr val="263445"/>
-                </a:solidFill>
-              </a:rPr>
-              <a:t> farmacocinética.</a:t>
+              <a:t>.</a:t>
             </a:r>
           </a:p>
         </p:txBody>
@@ -1166,7 +1545,7 @@
         </p:nvSpPr>
         <p:spPr>
           <a:xfrm>
-            <a:off x="3048000" y="1905000"/>
+            <a:off x="3048000" y="1778000"/>
             <a:ext cx="3873500" cy="2019300"/>
           </a:xfrm>
           <a:prstGeom prst="roundRect">
@@ -1199,7 +1578,7 @@
         </p:nvSpPr>
         <p:spPr>
           <a:xfrm>
-            <a:off x="3302000" y="3924300"/>
+            <a:off x="3302000" y="3797300"/>
             <a:ext cx="3365500" cy="76200"/>
           </a:xfrm>
           <a:prstGeom prst="rect">
@@ -1230,7 +1609,7 @@
         </p:nvSpPr>
         <p:spPr>
           <a:xfrm>
-            <a:off x="5778500" y="3860800"/>
+            <a:off x="5778500" y="3733800"/>
             <a:ext cx="241300" cy="63500"/>
           </a:xfrm>
           <a:prstGeom prst="rect">
@@ -1261,7 +1640,7 @@
         </p:nvSpPr>
         <p:spPr>
           <a:xfrm>
-            <a:off x="3365500" y="2057400"/>
+            <a:off x="3365500" y="1930400"/>
             <a:ext cx="3302000" cy="1765300"/>
           </a:xfrm>
           <a:prstGeom prst="rect">
@@ -1443,75 +1822,6 @@
       <p:pic>
         <p:nvPicPr>
           <p:cNvPr id="8" name="Loro robótico con bata señalando la pizarra" descr="Loro robótico con bata señalando la pizarra"/>
-          <p:cNvPicPr>
-            <a:picLocks noChangeAspect="1"/>
-          </p:cNvPicPr>
-          <p:nvPr/>
-        </p:nvPicPr>
-        <p:blipFill>
-          <a:blip r:embed="rId2"/>
-          <a:stretch>
-            <a:fillRect/>
-          </a:stretch>
-        </p:blipFill>
-        <p:spPr>
-          <a:xfrm>
-            <a:off x="651305" y="2489200"/>
-            <a:ext cx="2253390" cy="3721100"/>
-          </a:xfrm>
-          <a:prstGeom prst="rect">
-            <a:avLst/>
-          </a:prstGeom>
-        </p:spPr>
-      </p:pic>
-      <p:sp>
-        <p:nvSpPr>
-          <p:cNvPr id="9" name="Bocadillo"/>
-          <p:cNvSpPr/>
-          <p:nvPr/>
-        </p:nvSpPr>
-        <p:spPr>
-          <a:xfrm>
-            <a:off x="3048000" y="4127500"/>
-            <a:ext cx="3556000" cy="825500"/>
-          </a:xfrm>
-          <a:prstGeom prst="wedgeRoundRectCallout">
-            <a:avLst>
-              <a:gd name="adj1" fmla="val -56071"/>
-              <a:gd name="adj2" fmla="val -70000"/>
-              <a:gd name="adj3" fmla="val 16667"/>
-            </a:avLst>
-          </a:prstGeom>
-          <a:solidFill>
-            <a:srgbClr val="FFFFFF"/>
-          </a:solidFill>
-          <a:ln w="31750">
-            <a:solidFill>
-              <a:srgbClr val="263445"/>
-            </a:solidFill>
-          </a:ln>
-        </p:spPr>
-        <p:txBody>
-          <a:bodyPr rtlCol="0" anchor="ctr" wrap="square" lIns="177800" tIns="63500" rIns="177800" bIns="63500">
-            <a:noAutofit/>
-          </a:bodyPr>
-          <a:lstStyle/>
-          <a:p>
-            <a:pPr algn="l"/>
-            <a:r>
-              <a:rPr sz="2200" b="0" i="1" lang="es-ES">
-                <a:solidFill>
-                  <a:srgbClr val="263445"/>
-                </a:solidFill>
-              </a:rPr>
-              <a:t>aclaramiento… volumen de distribución… semivida…</a:t>
-            </a:r>
-          </a:p>
-        </p:txBody>
-      </p:sp>
-      <p:pic>
-        <p:nvPicPr>
-          <p:cNvPr id="10" name="Calculadora boca abajo en el suelo" descr="Calculadora boca abajo en el suelo"/>
           <p:cNvPicPr>
             <a:picLocks noChangeAspect="1"/>
           </p:cNvPicPr>
@@ -1524,6 +1834,75 @@
           </a:stretch>
         </p:blipFill>
         <p:spPr>
+          <a:xfrm>
+            <a:off x="628233" y="2413000"/>
+            <a:ext cx="2299535" cy="3797300"/>
+          </a:xfrm>
+          <a:prstGeom prst="rect">
+            <a:avLst/>
+          </a:prstGeom>
+        </p:spPr>
+      </p:pic>
+      <p:sp>
+        <p:nvSpPr>
+          <p:cNvPr id="9" name="Bocadillo"/>
+          <p:cNvSpPr/>
+          <p:nvPr/>
+        </p:nvSpPr>
+        <p:spPr>
+          <a:xfrm>
+            <a:off x="3048000" y="4064000"/>
+            <a:ext cx="3556000" cy="825500"/>
+          </a:xfrm>
+          <a:prstGeom prst="wedgeRoundRectCallout">
+            <a:avLst>
+              <a:gd name="adj1" fmla="val -56071"/>
+              <a:gd name="adj2" fmla="val -70000"/>
+              <a:gd name="adj3" fmla="val 16667"/>
+            </a:avLst>
+          </a:prstGeom>
+          <a:solidFill>
+            <a:srgbClr val="FFFFFF"/>
+          </a:solidFill>
+          <a:ln w="31750">
+            <a:solidFill>
+              <a:srgbClr val="263445"/>
+            </a:solidFill>
+          </a:ln>
+        </p:spPr>
+        <p:txBody>
+          <a:bodyPr rtlCol="0" anchor="ctr" wrap="square" lIns="177800" tIns="63500" rIns="177800" bIns="63500">
+            <a:noAutofit/>
+          </a:bodyPr>
+          <a:lstStyle/>
+          <a:p>
+            <a:pPr algn="l"/>
+            <a:r>
+              <a:rPr sz="2200" b="0" i="1" lang="es-ES">
+                <a:solidFill>
+                  <a:srgbClr val="263445"/>
+                </a:solidFill>
+              </a:rPr>
+              <a:t>aclaramiento… volumen de distribución… semivida…</a:t>
+            </a:r>
+          </a:p>
+        </p:txBody>
+      </p:sp>
+      <p:pic>
+        <p:nvPicPr>
+          <p:cNvPr id="10" name="Calculadora boca abajo en el suelo" descr="Calculadora boca abajo en el suelo"/>
+          <p:cNvPicPr>
+            <a:picLocks noChangeAspect="1"/>
+          </p:cNvPicPr>
+          <p:nvPr/>
+        </p:nvPicPr>
+        <p:blipFill>
+          <a:blip r:embed="rId4"/>
+          <a:stretch>
+            <a:fillRect/>
+          </a:stretch>
+        </p:blipFill>
+        <p:spPr>
           <a:xfrm rot="12000000">
             <a:off x="3390900" y="5473700"/>
             <a:ext cx="520700" cy="698500"/>
@@ -1541,7 +1920,7 @@
         </p:nvSpPr>
         <p:spPr>
           <a:xfrm>
-            <a:off x="7116382" y="2143125"/>
+            <a:off x="7116382" y="1778000"/>
             <a:ext cx="4567873" cy="3810000"/>
           </a:xfrm>
           <a:prstGeom prst="roundRect">
@@ -1572,7 +1951,7 @@
         </p:nvSpPr>
         <p:spPr>
           <a:xfrm>
-            <a:off x="7421182" y="2295525"/>
+            <a:off x="7421182" y="1930400"/>
             <a:ext cx="3958273" cy="1358900"/>
           </a:xfrm>
           <a:prstGeom prst="rect">
@@ -1606,7 +1985,7 @@
         </p:nvSpPr>
         <p:spPr>
           <a:xfrm>
-            <a:off x="7421182" y="3730625"/>
+            <a:off x="7421182" y="3365500"/>
             <a:ext cx="3958273" cy="1358900"/>
           </a:xfrm>
           <a:prstGeom prst="rect">
@@ -1640,7 +2019,7 @@
         </p:nvCxnSpPr>
         <p:spPr>
           <a:xfrm>
-            <a:off x="7421182" y="5153025"/>
+            <a:off x="7421182" y="4787900"/>
             <a:ext cx="3958272" cy="0"/>
           </a:xfrm>
           <a:prstGeom prst="line">
@@ -1661,7 +2040,7 @@
         </p:nvSpPr>
         <p:spPr>
           <a:xfrm>
-            <a:off x="7421182" y="5254625"/>
+            <a:off x="7421182" y="4889500"/>
             <a:ext cx="3958273" cy="635000"/>
           </a:xfrm>
           <a:prstGeom prst="rect">
@@ -1695,8 +2074,8 @@
         </p:nvSpPr>
         <p:spPr>
           <a:xfrm>
-            <a:off x="508000" y="6337300"/>
-            <a:ext cx="11176000" cy="241300"/>
+            <a:off x="7116382" y="5664200"/>
+            <a:ext cx="4567873" cy="203200"/>
           </a:xfrm>
           <a:prstGeom prst="rect">
             <a:avLst/>
@@ -1704,7 +2083,7 @@
           <a:noFill/>
         </p:spPr>
         <p:txBody>
-          <a:bodyPr wrap="square" lIns="0" tIns="0" rIns="0" bIns="0" anchor="b">
+          <a:bodyPr wrap="square" lIns="0" tIns="0" rIns="0" bIns="0" anchor="t">
             <a:noAutofit/>
           </a:bodyPr>
           <a:lstStyle/>
@@ -1748,7 +2127,7 @@
         <p:spPr>
           <a:xfrm>
             <a:off x="508000" y="749300"/>
-            <a:ext cx="11176000" cy="952500"/>
+            <a:ext cx="11176000" cy="635000"/>
           </a:xfrm>
           <a:prstGeom prst="rect">
             <a:avLst/>
@@ -1756,18 +2135,14 @@
           <a:noFill/>
         </p:spPr>
         <p:txBody>
-          <a:bodyPr wrap="square" lIns="0" tIns="0" rIns="0" bIns="0" anchor="t">
+          <a:bodyPr wrap="square" lIns="0" tIns="0" rIns="0" bIns="0" anchor="ctr">
             <a:noAutofit/>
           </a:bodyPr>
           <a:lstStyle/>
           <a:p>
-            <a:pPr algn="l">
-              <a:lnSpc>
-                <a:spcPct val="92000"/>
-              </a:lnSpc>
-            </a:pPr>
-            <a:r>
-              <a:rPr sz="3200" b="0" i="0" lang="es-ES">
+            <a:pPr algn="l"/>
+            <a:r>
+              <a:rPr sz="3600" b="1" i="0" lang="es-ES">
                 <a:solidFill>
                   <a:srgbClr val="263445"/>
                 </a:solidFill>
@@ -2277,7 +2652,7 @@
             <a:avLst/>
           </a:prstGeom>
           <a:solidFill>
-            <a:srgbClr val="E9C3DF"/>
+            <a:srgbClr val="C3BF24"/>
           </a:solidFill>
           <a:ln w="31750">
             <a:solidFill>
@@ -2308,7 +2683,7 @@
             <a:avLst/>
           </a:prstGeom>
           <a:solidFill>
-            <a:srgbClr val="C97AB5"/>
+            <a:srgbClr val="3A8AA6"/>
           </a:solidFill>
           <a:ln w="31750">
             <a:solidFill>
@@ -2433,7 +2808,7 @@
             <a:r>
               <a:rPr sz="2000" b="1" i="0" lang="es-ES">
                 <a:solidFill>
-                  <a:srgbClr val="8E2F79"/>
+                  <a:srgbClr val="77730E"/>
                 </a:solidFill>
               </a:rPr>
               <a:t>Aprendizaje automático</a:t>
@@ -2519,7 +2894,7 @@
             <a:r>
               <a:rPr sz="2000" b="1" i="0" lang="es-ES">
                 <a:solidFill>
-                  <a:srgbClr val="8E2F79"/>
+                  <a:srgbClr val="2B6C85"/>
                 </a:solidFill>
               </a:rPr>
               <a:t>Aprendizaje profundo</a:t>
@@ -2528,7 +2903,7 @@
             <a:r>
               <a:rPr sz="2000" b="1" i="0" lang="es-ES">
                 <a:solidFill>
-                  <a:srgbClr val="8E2F79"/>
+                  <a:srgbClr val="2B6C85"/>
                 </a:solidFill>
               </a:rPr>
               <a:t>(redes neuronales)</a:t>
@@ -2713,7 +3088,7 @@
         <p:spPr>
           <a:xfrm>
             <a:off x="508000" y="749300"/>
-            <a:ext cx="11176000" cy="952500"/>
+            <a:ext cx="11176000" cy="635000"/>
           </a:xfrm>
           <a:prstGeom prst="rect">
             <a:avLst/>
@@ -2721,32 +3096,19 @@
           <a:noFill/>
         </p:spPr>
         <p:txBody>
-          <a:bodyPr wrap="square" lIns="0" tIns="0" rIns="0" bIns="0" anchor="t">
+          <a:bodyPr wrap="square" lIns="0" tIns="0" rIns="0" bIns="0" anchor="ctr">
             <a:noAutofit/>
           </a:bodyPr>
           <a:lstStyle/>
           <a:p>
-            <a:pPr algn="l">
-              <a:lnSpc>
-                <a:spcPct val="92000"/>
-              </a:lnSpc>
-            </a:pPr>
-            <a:r>
-              <a:rPr sz="3200" b="0" i="0" lang="es-ES">
+            <a:pPr algn="l"/>
+            <a:r>
+              <a:rPr sz="3600" b="1" i="0" lang="es-ES">
                 <a:solidFill>
                   <a:srgbClr val="263445"/>
                 </a:solidFill>
               </a:rPr>
-              <a:t>Treinta años de estudios: predice parecido al bayesiano,</a:t>
-            </a:r>
-            <a:br/>
-            <a:r>
-              <a:rPr sz="3200" b="0" i="0" lang="es-ES">
-                <a:solidFill>
-                  <a:srgbClr val="263445"/>
-                </a:solidFill>
-              </a:rPr>
-              <a:t>pero apenas ha llegado al día a día.</a:t>
+              <a:t>Predice como el bayesiano, pero no ha llegado a la clínica.</a:t>
             </a:r>
           </a:p>
         </p:txBody>
@@ -2759,7 +3121,7 @@
         </p:nvCxnSpPr>
         <p:spPr>
           <a:xfrm>
-            <a:off x="508000" y="1981200"/>
+            <a:off x="508000" y="1930400"/>
             <a:ext cx="11176000" cy="0"/>
           </a:xfrm>
           <a:prstGeom prst="line">
@@ -2781,7 +3143,7 @@
         </p:nvSpPr>
         <p:spPr>
           <a:xfrm>
-            <a:off x="508000" y="1898650"/>
+            <a:off x="508000" y="1847850"/>
             <a:ext cx="165100" cy="165100"/>
           </a:xfrm>
           <a:prstGeom prst="ellipse">
@@ -2812,8 +3174,8 @@
         </p:nvSpPr>
         <p:spPr>
           <a:xfrm>
-            <a:off x="508000" y="2146300"/>
-            <a:ext cx="5359527" cy="825500"/>
+            <a:off x="508000" y="2082800"/>
+            <a:ext cx="5359527" cy="635000"/>
           </a:xfrm>
           <a:prstGeom prst="rect">
             <a:avLst/>
@@ -2836,12 +3198,12 @@
               <a:t>1995</a:t>
             </a:r>
             <a:r>
-              <a:rPr sz="2000" b="0" i="0" lang="es-ES">
+              <a:rPr sz="2200" b="0" i="0" lang="es-ES">
                 <a:solidFill>
                   <a:srgbClr val="263445"/>
                 </a:solidFill>
               </a:rPr>
-              <a:t> · Red neuronal frente a NONMEM (gentamicina, 111 pacientes)</a:t>
+              <a:t> · Red neuronal frente a NONMEM</a:t>
             </a:r>
           </a:p>
         </p:txBody>
@@ -2854,7 +3216,7 @@
         </p:nvSpPr>
         <p:spPr>
           <a:xfrm>
-            <a:off x="6172327" y="1898650"/>
+            <a:off x="6172327" y="1847850"/>
             <a:ext cx="165100" cy="165100"/>
           </a:xfrm>
           <a:prstGeom prst="ellipse">
@@ -2885,8 +3247,8 @@
         </p:nvSpPr>
         <p:spPr>
           <a:xfrm>
-            <a:off x="6172327" y="2146300"/>
-            <a:ext cx="5359527" cy="825500"/>
+            <a:off x="6172327" y="2082800"/>
+            <a:ext cx="5359527" cy="635000"/>
           </a:xfrm>
           <a:prstGeom prst="rect">
             <a:avLst/>
@@ -2909,12 +3271,12 @@
               <a:t>2025</a:t>
             </a:r>
             <a:r>
-              <a:rPr sz="2000" b="0" i="0" lang="es-ES">
+              <a:rPr sz="2200" b="0" i="0" lang="es-ES">
                 <a:solidFill>
                   <a:srgbClr val="263445"/>
                 </a:solidFill>
               </a:rPr>
-              <a:t> · 58 estudios: el aprendizaje automático rinde igual o mejor que los modelos poblacionales</a:t>
+              <a:t> · 58 estudios: rinde igual o mejor que los modelos poblacionales</a:t>
             </a:r>
           </a:p>
         </p:txBody>
@@ -2927,12 +3289,12 @@
         </p:nvSpPr>
         <p:spPr>
           <a:xfrm>
-            <a:off x="508000" y="2984500"/>
-            <a:ext cx="5511927" cy="2286000"/>
+            <a:off x="508000" y="2794000"/>
+            <a:ext cx="5511927" cy="2667000"/>
           </a:xfrm>
           <a:prstGeom prst="roundRect">
             <a:avLst>
-              <a:gd name="adj" fmla="val 4444"/>
+              <a:gd name="adj" fmla="val 3809"/>
             </a:avLst>
           </a:prstGeom>
           <a:solidFill>
@@ -2953,95 +3315,6 @@
       <p:pic>
         <p:nvPicPr>
           <p:cNvPr id="9" name="Gotero vacío" descr="Gotero vacío"/>
-          <p:cNvPicPr>
-            <a:picLocks noChangeAspect="1"/>
-          </p:cNvPicPr>
-          <p:nvPr/>
-        </p:nvPicPr>
-        <p:blipFill>
-          <a:blip r:embed="rId2"/>
-          <a:stretch>
-            <a:fillRect/>
-          </a:stretch>
-        </p:blipFill>
-        <p:spPr>
-          <a:xfrm>
-            <a:off x="786333" y="3187700"/>
-            <a:ext cx="256134" cy="609600"/>
-          </a:xfrm>
-          <a:prstGeom prst="rect">
-            <a:avLst/>
-          </a:prstGeom>
-        </p:spPr>
-      </p:pic>
-      <p:sp>
-        <p:nvSpPr>
-          <p:cNvPr id="10" name="TextBox 9"/>
-          <p:cNvSpPr txBox="1"/>
-          <p:nvPr/>
-        </p:nvSpPr>
-        <p:spPr>
-          <a:xfrm>
-            <a:off x="1219200" y="3187700"/>
-            <a:ext cx="4597527" cy="609600"/>
-          </a:xfrm>
-          <a:prstGeom prst="rect">
-            <a:avLst/>
-          </a:prstGeom>
-          <a:noFill/>
-        </p:spPr>
-        <p:txBody>
-          <a:bodyPr wrap="square" lIns="0" tIns="0" rIns="0" bIns="0" anchor="ctr">
-            <a:noAutofit/>
-          </a:bodyPr>
-          <a:lstStyle/>
-          <a:p>
-            <a:pPr algn="l"/>
-            <a:r>
-              <a:rPr sz="2400" b="1" i="0" lang="es-ES">
-                <a:solidFill>
-                  <a:srgbClr val="263445"/>
-                </a:solidFill>
-              </a:rPr>
-              <a:t>Sin concentraciones del paciente</a:t>
-            </a:r>
-          </a:p>
-        </p:txBody>
-      </p:sp>
-      <p:sp>
-        <p:nvSpPr>
-          <p:cNvPr id="11" name="Tarjeta Con concentraciones del paciente"/>
-          <p:cNvSpPr/>
-          <p:nvPr/>
-        </p:nvSpPr>
-        <p:spPr>
-          <a:xfrm>
-            <a:off x="6172327" y="2984500"/>
-            <a:ext cx="5511927" cy="2286000"/>
-          </a:xfrm>
-          <a:prstGeom prst="roundRect">
-            <a:avLst>
-              <a:gd name="adj" fmla="val 4444"/>
-            </a:avLst>
-          </a:prstGeom>
-          <a:solidFill>
-            <a:srgbClr val="F3F6F9"/>
-          </a:solidFill>
-          <a:ln>
-            <a:noFill/>
-          </a:ln>
-        </p:spPr>
-        <p:txBody>
-          <a:bodyPr rtlCol="0" anchor="ctr"/>
-          <a:lstStyle/>
-          <a:p>
-            <a:pPr algn="ctr"/>
-          </a:p>
-        </p:txBody>
-      </p:sp>
-      <p:pic>
-        <p:nvPicPr>
-          <p:cNvPr id="12" name="Tubo de análisis" descr="Tubo de análisis"/>
           <p:cNvPicPr>
             <a:picLocks noChangeAspect="1"/>
           </p:cNvPicPr>
@@ -3055,8 +3328,8 @@
         </p:blipFill>
         <p:spPr>
           <a:xfrm>
-            <a:off x="6444256" y="3187700"/>
-            <a:ext cx="268941" cy="609600"/>
+            <a:off x="768062" y="2997200"/>
+            <a:ext cx="170756" cy="406400"/>
           </a:xfrm>
           <a:prstGeom prst="rect">
             <a:avLst/>
@@ -3065,14 +3338,14 @@
       </p:pic>
       <p:sp>
         <p:nvSpPr>
-          <p:cNvPr id="13" name="TextBox 12"/>
+          <p:cNvPr id="10" name="TextBox 9"/>
           <p:cNvSpPr txBox="1"/>
           <p:nvPr/>
         </p:nvSpPr>
         <p:spPr>
           <a:xfrm>
-            <a:off x="6883527" y="3187700"/>
-            <a:ext cx="4597527" cy="609600"/>
+            <a:off x="1117600" y="2997200"/>
+            <a:ext cx="4699127" cy="406400"/>
           </a:xfrm>
           <a:prstGeom prst="rect">
             <a:avLst/>
@@ -3092,21 +3365,76 @@
                   <a:srgbClr val="263445"/>
                 </a:solidFill>
               </a:rPr>
-              <a:t>Con concentraciones del paciente</a:t>
-            </a:r>
-          </a:p>
-        </p:txBody>
-      </p:sp>
-      <p:sp>
-        <p:nvSpPr>
-          <p:cNvPr id="14" name="TextBox 13"/>
+              <a:t>Sin concentraciones del paciente</a:t>
+            </a:r>
+          </a:p>
+        </p:txBody>
+      </p:sp>
+      <p:sp>
+        <p:nvSpPr>
+          <p:cNvPr id="11" name="Tarjeta Con concentraciones del paciente"/>
+          <p:cNvSpPr/>
+          <p:nvPr/>
+        </p:nvSpPr>
+        <p:spPr>
+          <a:xfrm>
+            <a:off x="6172327" y="2794000"/>
+            <a:ext cx="5511927" cy="2667000"/>
+          </a:xfrm>
+          <a:prstGeom prst="roundRect">
+            <a:avLst>
+              <a:gd name="adj" fmla="val 3809"/>
+            </a:avLst>
+          </a:prstGeom>
+          <a:solidFill>
+            <a:srgbClr val="F3F6F9"/>
+          </a:solidFill>
+          <a:ln>
+            <a:noFill/>
+          </a:ln>
+        </p:spPr>
+        <p:txBody>
+          <a:bodyPr rtlCol="0" anchor="ctr"/>
+          <a:lstStyle/>
+          <a:p>
+            <a:pPr algn="ctr"/>
+          </a:p>
+        </p:txBody>
+      </p:sp>
+      <p:pic>
+        <p:nvPicPr>
+          <p:cNvPr id="12" name="Tubo de análisis" descr="Tubo de análisis"/>
+          <p:cNvPicPr>
+            <a:picLocks noChangeAspect="1"/>
+          </p:cNvPicPr>
+          <p:nvPr/>
+        </p:nvPicPr>
+        <p:blipFill>
+          <a:blip r:embed="rId4"/>
+          <a:stretch>
+            <a:fillRect/>
+          </a:stretch>
+        </p:blipFill>
+        <p:spPr>
+          <a:xfrm>
+            <a:off x="6428120" y="2997200"/>
+            <a:ext cx="179294" cy="406400"/>
+          </a:xfrm>
+          <a:prstGeom prst="rect">
+            <a:avLst/>
+          </a:prstGeom>
+        </p:spPr>
+      </p:pic>
+      <p:sp>
+        <p:nvSpPr>
+          <p:cNvPr id="13" name="TextBox 12"/>
           <p:cNvSpPr txBox="1"/>
           <p:nvPr/>
         </p:nvSpPr>
         <p:spPr>
           <a:xfrm>
-            <a:off x="711200" y="3937000"/>
-            <a:ext cx="5105527" cy="1130300"/>
+            <a:off x="6781927" y="2997200"/>
+            <a:ext cx="4699127" cy="406400"/>
           </a:xfrm>
           <a:prstGeom prst="rect">
             <a:avLst/>
@@ -3121,71 +3449,60 @@
           <a:p>
             <a:pPr algn="l"/>
             <a:r>
-              <a:rPr sz="2200" b="0" i="0" lang="es-ES">
+              <a:rPr sz="2400" b="1" i="0" lang="es-ES">
                 <a:solidFill>
                   <a:srgbClr val="263445"/>
                 </a:solidFill>
               </a:rPr>
-              <a:t>El modelo híbrido mejora un </a:t>
-            </a:r>
-            <a:r>
-              <a:rPr sz="2200" b="1" i="0" lang="es-ES">
+              <a:t>Con concentraciones del paciente</a:t>
+            </a:r>
+          </a:p>
+        </p:txBody>
+      </p:sp>
+      <p:sp>
+        <p:nvSpPr>
+          <p:cNvPr id="14" name="Cifra híbrido"/>
+          <p:cNvSpPr txBox="1"/>
+          <p:nvPr/>
+        </p:nvSpPr>
+        <p:spPr>
+          <a:xfrm>
+            <a:off x="711200" y="3492500"/>
+            <a:ext cx="5105527" cy="1206500"/>
+          </a:xfrm>
+          <a:prstGeom prst="rect">
+            <a:avLst/>
+          </a:prstGeom>
+          <a:noFill/>
+        </p:spPr>
+        <p:txBody>
+          <a:bodyPr wrap="square" lIns="0" tIns="0" rIns="0" bIns="0" anchor="ctr">
+            <a:noAutofit/>
+          </a:bodyPr>
+          <a:lstStyle/>
+          <a:p>
+            <a:pPr algn="l"/>
+            <a:r>
+              <a:rPr sz="9600" b="1" i="0" lang="es-ES">
                 <a:solidFill>
                   <a:srgbClr val="AD3B94"/>
                 </a:solidFill>
               </a:rPr>
               <a:t>17 %</a:t>
             </a:r>
-            <a:r>
-              <a:rPr sz="2200" b="0" i="0" lang="es-ES">
-                <a:solidFill>
-                  <a:srgbClr val="263445"/>
-                </a:solidFill>
-              </a:rPr>
-              <a:t> el error del bayesiano · vancomicina en sepsis, 4059 pacientes</a:t>
-            </a:r>
-          </a:p>
-        </p:txBody>
-      </p:sp>
-      <p:sp>
-        <p:nvSpPr>
-          <p:cNvPr id="15" name="Marca color"/>
-          <p:cNvSpPr/>
-          <p:nvPr/>
-        </p:nvSpPr>
-        <p:spPr>
-          <a:xfrm>
-            <a:off x="6375527" y="3949700"/>
-            <a:ext cx="127000" cy="127000"/>
-          </a:xfrm>
-          <a:prstGeom prst="ellipse">
-            <a:avLst/>
-          </a:prstGeom>
-          <a:solidFill>
-            <a:srgbClr val="5BB46C"/>
-          </a:solidFill>
-          <a:ln>
-            <a:noFill/>
-          </a:ln>
-        </p:spPr>
-        <p:txBody>
-          <a:bodyPr rtlCol="0" anchor="ctr"/>
-          <a:lstStyle/>
-          <a:p>
-            <a:pPr algn="ctr"/>
-          </a:p>
-        </p:txBody>
-      </p:sp>
-      <p:sp>
-        <p:nvSpPr>
-          <p:cNvPr id="16" name="TextBox 15"/>
+          </a:p>
+        </p:txBody>
+      </p:sp>
+      <p:sp>
+        <p:nvSpPr>
+          <p:cNvPr id="15" name="TextBox 14"/>
           <p:cNvSpPr txBox="1"/>
           <p:nvPr/>
         </p:nvSpPr>
         <p:spPr>
           <a:xfrm>
-            <a:off x="6604127" y="3873500"/>
-            <a:ext cx="4876927" cy="609600"/>
+            <a:off x="711200" y="4699000"/>
+            <a:ext cx="5105527" cy="635000"/>
           </a:xfrm>
           <a:prstGeom prst="rect">
             <a:avLst/>
@@ -3200,40 +3517,41 @@
           <a:p>
             <a:pPr algn="l"/>
             <a:r>
-              <a:rPr sz="2200" b="1" i="0" lang="es-ES">
-                <a:solidFill>
-                  <a:srgbClr val="2B7D3D"/>
-                </a:solidFill>
-              </a:rPr>
-              <a:t>Gana el bayesiano: </a:t>
-            </a:r>
-            <a:r>
               <a:rPr sz="2200" b="0" i="0" lang="es-ES">
                 <a:solidFill>
-                  <a:srgbClr val="2B7D3D"/>
-                </a:solidFill>
-              </a:rPr>
-              <a:t>13 % de error frente a 34 %</a:t>
-            </a:r>
-          </a:p>
-        </p:txBody>
-      </p:sp>
-      <p:sp>
-        <p:nvSpPr>
-          <p:cNvPr id="17" name="Marca color"/>
-          <p:cNvSpPr/>
-          <p:nvPr/>
-        </p:nvSpPr>
-        <p:spPr>
-          <a:xfrm>
-            <a:off x="6375527" y="4648200"/>
-            <a:ext cx="127000" cy="127000"/>
+                  <a:srgbClr val="263445"/>
+                </a:solidFill>
+              </a:rPr>
+              <a:t>menos error que el bayesiano</a:t>
+            </a:r>
+            <a:br/>
+            <a:r>
+              <a:rPr sz="2200" b="0" i="0" lang="es-ES">
+                <a:solidFill>
+                  <a:srgbClr val="263445"/>
+                </a:solidFill>
+              </a:rPr>
+              <a:t>con el modelo híbrido</a:t>
+            </a:r>
+          </a:p>
+        </p:txBody>
+      </p:sp>
+      <p:sp>
+        <p:nvSpPr>
+          <p:cNvPr id="16" name="Marca color"/>
+          <p:cNvSpPr/>
+          <p:nvPr/>
+        </p:nvSpPr>
+        <p:spPr>
+          <a:xfrm>
+            <a:off x="6375527" y="3632200"/>
+            <a:ext cx="152400" cy="152400"/>
           </a:xfrm>
           <a:prstGeom prst="ellipse">
             <a:avLst/>
           </a:prstGeom>
           <a:solidFill>
-            <a:srgbClr val="AD3B94"/>
+            <a:srgbClr val="5BB46C"/>
           </a:solidFill>
           <a:ln>
             <a:noFill/>
@@ -3249,14 +3567,14 @@
       </p:sp>
       <p:sp>
         <p:nvSpPr>
-          <p:cNvPr id="18" name="TextBox 17"/>
+          <p:cNvPr id="17" name="TextBox 16"/>
           <p:cNvSpPr txBox="1"/>
           <p:nvPr/>
         </p:nvSpPr>
         <p:spPr>
           <a:xfrm>
-            <a:off x="6604127" y="4572000"/>
-            <a:ext cx="4876927" cy="609600"/>
+            <a:off x="6654927" y="3556000"/>
+            <a:ext cx="4826127" cy="762000"/>
           </a:xfrm>
           <a:prstGeom prst="rect">
             <a:avLst/>
@@ -3271,33 +3589,110 @@
           <a:p>
             <a:pPr algn="l"/>
             <a:r>
-              <a:rPr sz="2200" b="1" i="0" lang="es-ES">
+              <a:rPr sz="2400" b="1" i="0" lang="es-ES">
+                <a:solidFill>
+                  <a:srgbClr val="2B7D3D"/>
+                </a:solidFill>
+              </a:rPr>
+              <a:t>Gana el bayesiano</a:t>
+            </a:r>
+          </a:p>
+          <a:p>
+            <a:pPr algn="l"/>
+            <a:r>
+              <a:rPr sz="2400" b="0" i="0" lang="es-ES">
+                <a:solidFill>
+                  <a:srgbClr val="263445"/>
+                </a:solidFill>
+              </a:rPr>
+              <a:t>13 % de error frente a 34 %</a:t>
+            </a:r>
+          </a:p>
+        </p:txBody>
+      </p:sp>
+      <p:sp>
+        <p:nvSpPr>
+          <p:cNvPr id="18" name="Marca color"/>
+          <p:cNvSpPr/>
+          <p:nvPr/>
+        </p:nvSpPr>
+        <p:spPr>
+          <a:xfrm>
+            <a:off x="6375527" y="4521200"/>
+            <a:ext cx="152400" cy="152400"/>
+          </a:xfrm>
+          <a:prstGeom prst="ellipse">
+            <a:avLst/>
+          </a:prstGeom>
+          <a:solidFill>
+            <a:srgbClr val="AD3B94"/>
+          </a:solidFill>
+          <a:ln>
+            <a:noFill/>
+          </a:ln>
+        </p:spPr>
+        <p:txBody>
+          <a:bodyPr rtlCol="0" anchor="ctr"/>
+          <a:lstStyle/>
+          <a:p>
+            <a:pPr algn="ctr"/>
+          </a:p>
+        </p:txBody>
+      </p:sp>
+      <p:sp>
+        <p:nvSpPr>
+          <p:cNvPr id="19" name="TextBox 18"/>
+          <p:cNvSpPr txBox="1"/>
+          <p:nvPr/>
+        </p:nvSpPr>
+        <p:spPr>
+          <a:xfrm>
+            <a:off x="6654927" y="4445000"/>
+            <a:ext cx="4826127" cy="762000"/>
+          </a:xfrm>
+          <a:prstGeom prst="rect">
+            <a:avLst/>
+          </a:prstGeom>
+          <a:noFill/>
+        </p:spPr>
+        <p:txBody>
+          <a:bodyPr wrap="square" lIns="0" tIns="0" rIns="0" bIns="0" anchor="t">
+            <a:noAutofit/>
+          </a:bodyPr>
+          <a:lstStyle/>
+          <a:p>
+            <a:pPr algn="l"/>
+            <a:r>
+              <a:rPr sz="2400" b="1" i="0" lang="es-ES">
                 <a:solidFill>
                   <a:srgbClr val="8E2F79"/>
                 </a:solidFill>
               </a:rPr>
-              <a:t>Gana el aprendizaje automático: </a:t>
-            </a:r>
-            <a:r>
-              <a:rPr sz="2200" b="0" i="0" lang="es-ES">
-                <a:solidFill>
-                  <a:srgbClr val="8E2F79"/>
-                </a:solidFill>
-              </a:rPr>
-              <a:t>ABC de tacrolimus en 6 series externas</a:t>
-            </a:r>
-          </a:p>
-        </p:txBody>
-      </p:sp>
-      <p:sp>
-        <p:nvSpPr>
-          <p:cNvPr id="19" name="Advertencia"/>
-          <p:cNvSpPr/>
-          <p:nvPr/>
-        </p:nvSpPr>
-        <p:spPr>
-          <a:xfrm>
-            <a:off x="508000" y="5410200"/>
+              <a:t>Gana el aprendizaje automático</a:t>
+            </a:r>
+          </a:p>
+          <a:p>
+            <a:pPr algn="l"/>
+            <a:r>
+              <a:rPr sz="2400" b="0" i="0" lang="es-ES">
+                <a:solidFill>
+                  <a:srgbClr val="263445"/>
+                </a:solidFill>
+              </a:rPr>
+              <a:t>en el ABC de tacrolimus</a:t>
+            </a:r>
+          </a:p>
+        </p:txBody>
+      </p:sp>
+      <p:sp>
+        <p:nvSpPr>
+          <p:cNvPr id="20" name="Advertencia"/>
+          <p:cNvSpPr/>
+          <p:nvPr/>
+        </p:nvSpPr>
+        <p:spPr>
+          <a:xfrm>
+            <a:off x="508000" y="5575300"/>
             <a:ext cx="11176000" cy="444500"/>
           </a:xfrm>
           <a:prstGeom prst="roundRect">
@@ -3332,7 +3727,7 @@
       </p:sp>
       <p:sp>
         <p:nvSpPr>
-          <p:cNvPr id="20" name="Fuente"/>
+          <p:cNvPr id="21" name="Fuente"/>
           <p:cNvSpPr txBox="1"/>
           <p:nvPr/>
         </p:nvSpPr>
@@ -3391,76 +3786,7 @@
         <p:spPr>
           <a:xfrm>
             <a:off x="508000" y="749300"/>
-            <a:ext cx="11176000" cy="952500"/>
-          </a:xfrm>
-          <a:prstGeom prst="rect">
-            <a:avLst/>
-          </a:prstGeom>
-          <a:noFill/>
-        </p:spPr>
-        <p:txBody>
-          <a:bodyPr wrap="square" lIns="0" tIns="0" rIns="0" bIns="0" anchor="t">
-            <a:noAutofit/>
-          </a:bodyPr>
-          <a:lstStyle/>
-          <a:p>
-            <a:pPr algn="l">
-              <a:lnSpc>
-                <a:spcPct val="92000"/>
-              </a:lnSpc>
-            </a:pPr>
-            <a:r>
-              <a:rPr sz="3200" b="0" i="0" lang="es-ES">
-                <a:solidFill>
-                  <a:srgbClr val="263445"/>
-                </a:solidFill>
-              </a:rPr>
-              <a:t>Predecir bien no es lo mismo que mejorar al paciente.</a:t>
-            </a:r>
-          </a:p>
-        </p:txBody>
-      </p:sp>
-      <p:sp>
-        <p:nvSpPr>
-          <p:cNvPr id="3" name="Peldaño 1"/>
-          <p:cNvSpPr/>
-          <p:nvPr/>
-        </p:nvSpPr>
-        <p:spPr>
-          <a:xfrm>
-            <a:off x="508000" y="5314950"/>
-            <a:ext cx="7400036" cy="812800"/>
-          </a:xfrm>
-          <a:prstGeom prst="rect">
-            <a:avLst/>
-          </a:prstGeom>
-          <a:solidFill>
-            <a:srgbClr val="EEF2F6"/>
-          </a:solidFill>
-          <a:ln w="19050">
-            <a:solidFill>
-              <a:srgbClr val="FFFFFF"/>
-            </a:solidFill>
-          </a:ln>
-        </p:spPr>
-        <p:txBody>
-          <a:bodyPr rtlCol="0" anchor="ctr"/>
-          <a:lstStyle/>
-          <a:p>
-            <a:pPr algn="ctr"/>
-          </a:p>
-        </p:txBody>
-      </p:sp>
-      <p:sp>
-        <p:nvSpPr>
-          <p:cNvPr id="4" name="Rótulo peldaño 1"/>
-          <p:cNvSpPr txBox="1"/>
-          <p:nvPr/>
-        </p:nvSpPr>
-        <p:spPr>
-          <a:xfrm>
-            <a:off x="647700" y="5353050"/>
-            <a:ext cx="7120636" cy="736600"/>
+            <a:ext cx="11176000" cy="635000"/>
           </a:xfrm>
           <a:prstGeom prst="rect">
             <a:avLst/>
@@ -3475,32 +3801,32 @@
           <a:p>
             <a:pPr algn="l"/>
             <a:r>
-              <a:rPr sz="2000" b="1" i="0" lang="es-ES">
+              <a:rPr sz="3600" b="1" i="0" lang="es-ES">
                 <a:solidFill>
                   <a:srgbClr val="263445"/>
                 </a:solidFill>
               </a:rPr>
-              <a:t>Estudio retrospectivo</a:t>
-            </a:r>
-          </a:p>
-        </p:txBody>
-      </p:sp>
-      <p:sp>
-        <p:nvSpPr>
-          <p:cNvPr id="5" name="Peldaño 2"/>
-          <p:cNvSpPr/>
-          <p:nvPr/>
-        </p:nvSpPr>
-        <p:spPr>
-          <a:xfrm>
-            <a:off x="1460500" y="4502150"/>
-            <a:ext cx="6447536" cy="812800"/>
-          </a:xfrm>
-          <a:prstGeom prst="rect">
-            <a:avLst/>
-          </a:prstGeom>
-          <a:solidFill>
-            <a:srgbClr val="E4EAF0"/>
+              <a:t>Predecir bien no es lo mismo que mejorar al paciente.</a:t>
+            </a:r>
+          </a:p>
+        </p:txBody>
+      </p:sp>
+      <p:sp>
+        <p:nvSpPr>
+          <p:cNvPr id="3" name="Peldaño 1"/>
+          <p:cNvSpPr/>
+          <p:nvPr/>
+        </p:nvSpPr>
+        <p:spPr>
+          <a:xfrm>
+            <a:off x="508000" y="5365750"/>
+            <a:ext cx="7400036" cy="762000"/>
+          </a:xfrm>
+          <a:prstGeom prst="rect">
+            <a:avLst/>
+          </a:prstGeom>
+          <a:solidFill>
+            <a:srgbClr val="EEF2F6"/>
           </a:solidFill>
           <a:ln w="19050">
             <a:solidFill>
@@ -3518,14 +3844,14 @@
       </p:sp>
       <p:sp>
         <p:nvSpPr>
-          <p:cNvPr id="6" name="Rótulo peldaño 2"/>
+          <p:cNvPr id="4" name="Rótulo peldaño 1"/>
           <p:cNvSpPr txBox="1"/>
           <p:nvPr/>
         </p:nvSpPr>
         <p:spPr>
           <a:xfrm>
-            <a:off x="1600200" y="4540250"/>
-            <a:ext cx="6168136" cy="736600"/>
+            <a:off x="647700" y="5403850"/>
+            <a:ext cx="7120636" cy="685800"/>
           </a:xfrm>
           <a:prstGeom prst="rect">
             <a:avLst/>
@@ -3545,35 +3871,27 @@
                   <a:srgbClr val="263445"/>
                 </a:solidFill>
               </a:rPr>
-              <a:t>Validación externa</a:t>
-            </a:r>
-            <a:r>
-              <a:rPr sz="2000" b="0" i="0" lang="es-ES">
-                <a:solidFill>
-                  <a:srgbClr val="263445"/>
-                </a:solidFill>
-              </a:rPr>
-              <a:t>: 10 de 115 estudios de tacrolimus</a:t>
-            </a:r>
-          </a:p>
-        </p:txBody>
-      </p:sp>
-      <p:sp>
-        <p:nvSpPr>
-          <p:cNvPr id="7" name="Peldaño 3"/>
-          <p:cNvSpPr/>
-          <p:nvPr/>
-        </p:nvSpPr>
-        <p:spPr>
-          <a:xfrm>
-            <a:off x="2413000" y="3689350"/>
-            <a:ext cx="5495036" cy="812800"/>
-          </a:xfrm>
-          <a:prstGeom prst="rect">
-            <a:avLst/>
-          </a:prstGeom>
-          <a:solidFill>
-            <a:srgbClr val="DAE2EA"/>
+              <a:t>Estudio retrospectivo</a:t>
+            </a:r>
+          </a:p>
+        </p:txBody>
+      </p:sp>
+      <p:sp>
+        <p:nvSpPr>
+          <p:cNvPr id="5" name="Peldaño 2"/>
+          <p:cNvSpPr/>
+          <p:nvPr/>
+        </p:nvSpPr>
+        <p:spPr>
+          <a:xfrm>
+            <a:off x="1460500" y="4603750"/>
+            <a:ext cx="6447536" cy="762000"/>
+          </a:xfrm>
+          <a:prstGeom prst="rect">
+            <a:avLst/>
+          </a:prstGeom>
+          <a:solidFill>
+            <a:srgbClr val="E4EAF0"/>
           </a:solidFill>
           <a:ln w="19050">
             <a:solidFill>
@@ -3591,14 +3909,14 @@
       </p:sp>
       <p:sp>
         <p:nvSpPr>
-          <p:cNvPr id="8" name="Rótulo peldaño 3"/>
+          <p:cNvPr id="6" name="Rótulo peldaño 2"/>
           <p:cNvSpPr txBox="1"/>
           <p:nvPr/>
         </p:nvSpPr>
         <p:spPr>
           <a:xfrm>
-            <a:off x="2552700" y="3727450"/>
-            <a:ext cx="5215636" cy="736600"/>
+            <a:off x="1600200" y="4641850"/>
+            <a:ext cx="6168136" cy="685800"/>
           </a:xfrm>
           <a:prstGeom prst="rect">
             <a:avLst/>
@@ -3618,7 +3936,7 @@
                   <a:srgbClr val="263445"/>
                 </a:solidFill>
               </a:rPr>
-              <a:t>Estudio prospectivo</a:t>
+              <a:t>Validación externa</a:t>
             </a:r>
             <a:r>
               <a:rPr sz="2000" b="0" i="0" lang="es-ES">
@@ -3626,27 +3944,27 @@
                   <a:srgbClr val="263445"/>
                 </a:solidFill>
               </a:rPr>
-              <a:t>: pocos, pequeños, sin comparador (CURATE.AI: 10 pacientes)</a:t>
-            </a:r>
-          </a:p>
-        </p:txBody>
-      </p:sp>
-      <p:sp>
-        <p:nvSpPr>
-          <p:cNvPr id="9" name="Peldaño 4"/>
-          <p:cNvSpPr/>
-          <p:nvPr/>
-        </p:nvSpPr>
-        <p:spPr>
-          <a:xfrm>
-            <a:off x="3365500" y="2876550"/>
-            <a:ext cx="4542536" cy="812800"/>
-          </a:xfrm>
-          <a:prstGeom prst="rect">
-            <a:avLst/>
-          </a:prstGeom>
-          <a:solidFill>
-            <a:srgbClr val="D0DAE4"/>
+              <a:t>: 10 de 115 estudios de tacrolimus</a:t>
+            </a:r>
+          </a:p>
+        </p:txBody>
+      </p:sp>
+      <p:sp>
+        <p:nvSpPr>
+          <p:cNvPr id="7" name="Peldaño 3"/>
+          <p:cNvSpPr/>
+          <p:nvPr/>
+        </p:nvSpPr>
+        <p:spPr>
+          <a:xfrm>
+            <a:off x="2413000" y="3841750"/>
+            <a:ext cx="5495036" cy="762000"/>
+          </a:xfrm>
+          <a:prstGeom prst="rect">
+            <a:avLst/>
+          </a:prstGeom>
+          <a:solidFill>
+            <a:srgbClr val="DAE2EA"/>
           </a:solidFill>
           <a:ln w="19050">
             <a:solidFill>
@@ -3664,14 +3982,14 @@
       </p:sp>
       <p:sp>
         <p:nvSpPr>
-          <p:cNvPr id="10" name="Rótulo peldaño 4"/>
+          <p:cNvPr id="8" name="Rótulo peldaño 3"/>
           <p:cNvSpPr txBox="1"/>
           <p:nvPr/>
         </p:nvSpPr>
         <p:spPr>
           <a:xfrm>
-            <a:off x="3505200" y="2914650"/>
-            <a:ext cx="4263136" cy="736600"/>
+            <a:off x="2552700" y="3879850"/>
+            <a:ext cx="5215636" cy="685800"/>
           </a:xfrm>
           <a:prstGeom prst="rect">
             <a:avLst/>
@@ -3691,27 +4009,35 @@
                   <a:srgbClr val="263445"/>
                 </a:solidFill>
               </a:rPr>
-              <a:t>Ensayo con desenlace de proceso</a:t>
-            </a:r>
-          </a:p>
-        </p:txBody>
-      </p:sp>
-      <p:sp>
-        <p:nvSpPr>
-          <p:cNvPr id="11" name="Peldaño 5"/>
-          <p:cNvSpPr/>
-          <p:nvPr/>
-        </p:nvSpPr>
-        <p:spPr>
-          <a:xfrm>
-            <a:off x="4318000" y="2063750"/>
-            <a:ext cx="3590036" cy="812800"/>
-          </a:xfrm>
-          <a:prstGeom prst="rect">
-            <a:avLst/>
-          </a:prstGeom>
-          <a:solidFill>
-            <a:srgbClr val="C6D2DE"/>
+              <a:t>Estudio prospectivo</a:t>
+            </a:r>
+            <a:r>
+              <a:rPr sz="2000" b="0" i="0" lang="es-ES">
+                <a:solidFill>
+                  <a:srgbClr val="263445"/>
+                </a:solidFill>
+              </a:rPr>
+              <a:t>: pocos, pequeños, sin comparador (CURATE.AI: 10 pacientes)</a:t>
+            </a:r>
+          </a:p>
+        </p:txBody>
+      </p:sp>
+      <p:sp>
+        <p:nvSpPr>
+          <p:cNvPr id="9" name="Peldaño 4"/>
+          <p:cNvSpPr/>
+          <p:nvPr/>
+        </p:nvSpPr>
+        <p:spPr>
+          <a:xfrm>
+            <a:off x="3365500" y="3079750"/>
+            <a:ext cx="4542536" cy="762000"/>
+          </a:xfrm>
+          <a:prstGeom prst="rect">
+            <a:avLst/>
+          </a:prstGeom>
+          <a:solidFill>
+            <a:srgbClr val="D0DAE4"/>
           </a:solidFill>
           <a:ln w="19050">
             <a:solidFill>
@@ -3729,14 +4055,14 @@
       </p:sp>
       <p:sp>
         <p:nvSpPr>
-          <p:cNvPr id="12" name="Rótulo peldaño 5"/>
+          <p:cNvPr id="10" name="Rótulo peldaño 4"/>
           <p:cNvSpPr txBox="1"/>
           <p:nvPr/>
         </p:nvSpPr>
         <p:spPr>
           <a:xfrm>
-            <a:off x="4457700" y="2101850"/>
-            <a:ext cx="3310636" cy="736600"/>
+            <a:off x="3505200" y="3117850"/>
+            <a:ext cx="4263136" cy="685800"/>
           </a:xfrm>
           <a:prstGeom prst="rect">
             <a:avLst/>
@@ -3756,6 +4082,71 @@
                   <a:srgbClr val="263445"/>
                 </a:solidFill>
               </a:rPr>
+              <a:t>Ensayo con desenlace de proceso</a:t>
+            </a:r>
+          </a:p>
+        </p:txBody>
+      </p:sp>
+      <p:sp>
+        <p:nvSpPr>
+          <p:cNvPr id="11" name="Peldaño 5"/>
+          <p:cNvSpPr/>
+          <p:nvPr/>
+        </p:nvSpPr>
+        <p:spPr>
+          <a:xfrm>
+            <a:off x="4318000" y="2317750"/>
+            <a:ext cx="3590036" cy="762000"/>
+          </a:xfrm>
+          <a:prstGeom prst="rect">
+            <a:avLst/>
+          </a:prstGeom>
+          <a:solidFill>
+            <a:srgbClr val="C6D2DE"/>
+          </a:solidFill>
+          <a:ln w="19050">
+            <a:solidFill>
+              <a:srgbClr val="FFFFFF"/>
+            </a:solidFill>
+          </a:ln>
+        </p:spPr>
+        <p:txBody>
+          <a:bodyPr rtlCol="0" anchor="ctr"/>
+          <a:lstStyle/>
+          <a:p>
+            <a:pPr algn="ctr"/>
+          </a:p>
+        </p:txBody>
+      </p:sp>
+      <p:sp>
+        <p:nvSpPr>
+          <p:cNvPr id="12" name="Rótulo peldaño 5"/>
+          <p:cNvSpPr txBox="1"/>
+          <p:nvPr/>
+        </p:nvSpPr>
+        <p:spPr>
+          <a:xfrm>
+            <a:off x="4457700" y="2355850"/>
+            <a:ext cx="3310636" cy="685800"/>
+          </a:xfrm>
+          <a:prstGeom prst="rect">
+            <a:avLst/>
+          </a:prstGeom>
+          <a:noFill/>
+        </p:spPr>
+        <p:txBody>
+          <a:bodyPr wrap="square" lIns="0" tIns="0" rIns="0" bIns="0" anchor="ctr">
+            <a:noAutofit/>
+          </a:bodyPr>
+          <a:lstStyle/>
+          <a:p>
+            <a:pPr algn="l"/>
+            <a:r>
+              <a:rPr sz="2000" b="1" i="0" lang="es-ES">
+                <a:solidFill>
+                  <a:srgbClr val="263445"/>
+                </a:solidFill>
+              </a:rPr>
               <a:t>Ensayo con desenlace clínico</a:t>
             </a:r>
           </a:p>
@@ -3769,8 +4160,8 @@
         </p:nvSpPr>
         <p:spPr>
           <a:xfrm>
-            <a:off x="508000" y="2063750"/>
-            <a:ext cx="7400036" cy="4064000"/>
+            <a:off x="508000" y="2317750"/>
+            <a:ext cx="7400036" cy="3810000"/>
           </a:xfrm>
           <a:custGeom>
             <a:avLst/>
@@ -3779,33 +4170,33 @@
             <a:cxnLst/>
             <a:rect l="l" t="t" r="r" b="b"/>
             <a:pathLst>
-              <a:path w="7400036" h="4064000">
+              <a:path w="7400036" h="3810000">
                 <a:moveTo>
-                  <a:pt x="0" y="4064000"/>
+                  <a:pt x="0" y="3810000"/>
                 </a:moveTo>
                 <a:lnTo>
-                  <a:pt x="0" y="3251200"/>
+                  <a:pt x="0" y="3048000"/>
                 </a:lnTo>
                 <a:lnTo>
-                  <a:pt x="952500" y="3251200"/>
+                  <a:pt x="952500" y="3048000"/>
                 </a:lnTo>
                 <a:lnTo>
-                  <a:pt x="952500" y="2438400"/>
+                  <a:pt x="952500" y="2286000"/>
                 </a:lnTo>
                 <a:lnTo>
-                  <a:pt x="1905000" y="2438400"/>
+                  <a:pt x="1905000" y="2286000"/>
                 </a:lnTo>
                 <a:lnTo>
-                  <a:pt x="1905000" y="1625600"/>
+                  <a:pt x="1905000" y="1524000"/>
                 </a:lnTo>
                 <a:lnTo>
-                  <a:pt x="2857500" y="1625600"/>
+                  <a:pt x="2857500" y="1524000"/>
                 </a:lnTo>
                 <a:lnTo>
-                  <a:pt x="2857500" y="812800"/>
+                  <a:pt x="2857500" y="762000"/>
                 </a:lnTo>
                 <a:lnTo>
-                  <a:pt x="3810000" y="812800"/>
+                  <a:pt x="3810000" y="762000"/>
                 </a:lnTo>
                 <a:lnTo>
                   <a:pt x="3810000" y="0"/>
@@ -3839,7 +4230,7 @@
         </p:nvSpPr>
         <p:spPr>
           <a:xfrm>
-            <a:off x="539750" y="4686935"/>
+            <a:off x="539750" y="4737735"/>
             <a:ext cx="889000" cy="615315"/>
           </a:xfrm>
           <a:prstGeom prst="ellipse">
@@ -3870,7 +4261,7 @@
         </p:nvSpPr>
         <p:spPr>
           <a:xfrm>
-            <a:off x="909493" y="4847050"/>
+            <a:off x="909493" y="4897850"/>
             <a:ext cx="84198" cy="84198"/>
           </a:xfrm>
           <a:prstGeom prst="ellipse">
@@ -3901,7 +4292,7 @@
         </p:nvSpPr>
         <p:spPr>
           <a:xfrm>
-            <a:off x="944823" y="5063799"/>
+            <a:off x="944823" y="5114599"/>
             <a:ext cx="89609" cy="89609"/>
           </a:xfrm>
           <a:prstGeom prst="ellipse">
@@ -3932,7 +4323,7 @@
         </p:nvSpPr>
         <p:spPr>
           <a:xfrm>
-            <a:off x="718616" y="4961022"/>
+            <a:off x="718616" y="5011822"/>
             <a:ext cx="98748" cy="98748"/>
           </a:xfrm>
           <a:prstGeom prst="ellipse">
@@ -3963,7 +4354,7 @@
         </p:nvSpPr>
         <p:spPr>
           <a:xfrm>
-            <a:off x="667407" y="5194886"/>
+            <a:off x="667407" y="5245686"/>
             <a:ext cx="76986" cy="76986"/>
           </a:xfrm>
           <a:prstGeom prst="ellipse">
@@ -3994,7 +4385,7 @@
         </p:nvSpPr>
         <p:spPr>
           <a:xfrm>
-            <a:off x="670851" y="5122262"/>
+            <a:off x="670851" y="5173062"/>
             <a:ext cx="65362" cy="65362"/>
           </a:xfrm>
           <a:prstGeom prst="ellipse">
@@ -4025,7 +4416,7 @@
         </p:nvSpPr>
         <p:spPr>
           <a:xfrm>
-            <a:off x="1261747" y="4952909"/>
+            <a:off x="1261747" y="5003709"/>
             <a:ext cx="106383" cy="106383"/>
           </a:xfrm>
           <a:prstGeom prst="ellipse">
@@ -4056,7 +4447,7 @@
         </p:nvSpPr>
         <p:spPr>
           <a:xfrm>
-            <a:off x="1057727" y="5144309"/>
+            <a:off x="1057727" y="5195109"/>
             <a:ext cx="64167" cy="64167"/>
           </a:xfrm>
           <a:prstGeom prst="ellipse">
@@ -4087,7 +4478,7 @@
         </p:nvSpPr>
         <p:spPr>
           <a:xfrm>
-            <a:off x="970640" y="5151731"/>
+            <a:off x="970640" y="5202531"/>
             <a:ext cx="66147" cy="66147"/>
           </a:xfrm>
           <a:prstGeom prst="ellipse">
@@ -4118,7 +4509,7 @@
         </p:nvSpPr>
         <p:spPr>
           <a:xfrm>
-            <a:off x="729734" y="5207245"/>
+            <a:off x="729734" y="5258045"/>
             <a:ext cx="84122" cy="84122"/>
           </a:xfrm>
           <a:prstGeom prst="ellipse">
@@ -4149,7 +4540,7 @@
         </p:nvSpPr>
         <p:spPr>
           <a:xfrm>
-            <a:off x="892993" y="5158656"/>
+            <a:off x="892993" y="5209456"/>
             <a:ext cx="100946" cy="100946"/>
           </a:xfrm>
           <a:prstGeom prst="ellipse">
@@ -4180,7 +4571,7 @@
         </p:nvSpPr>
         <p:spPr>
           <a:xfrm>
-            <a:off x="950892" y="5076630"/>
+            <a:off x="950892" y="5127430"/>
             <a:ext cx="92946" cy="92946"/>
           </a:xfrm>
           <a:prstGeom prst="ellipse">
@@ -4211,7 +4602,7 @@
         </p:nvSpPr>
         <p:spPr>
           <a:xfrm>
-            <a:off x="917055" y="5057792"/>
+            <a:off x="917055" y="5108592"/>
             <a:ext cx="75864" cy="75864"/>
           </a:xfrm>
           <a:prstGeom prst="ellipse">
@@ -4242,7 +4633,7 @@
         </p:nvSpPr>
         <p:spPr>
           <a:xfrm>
-            <a:off x="1278062" y="4875734"/>
+            <a:off x="1278062" y="4926534"/>
             <a:ext cx="94962" cy="94962"/>
           </a:xfrm>
           <a:prstGeom prst="ellipse">
@@ -4273,7 +4664,7 @@
         </p:nvSpPr>
         <p:spPr>
           <a:xfrm>
-            <a:off x="820713" y="5205708"/>
+            <a:off x="820713" y="5256508"/>
             <a:ext cx="73709" cy="73709"/>
           </a:xfrm>
           <a:prstGeom prst="ellipse">
@@ -4304,7 +4695,7 @@
         </p:nvSpPr>
         <p:spPr>
           <a:xfrm>
-            <a:off x="798925" y="4946461"/>
+            <a:off x="798925" y="4997261"/>
             <a:ext cx="81298" cy="81298"/>
           </a:xfrm>
           <a:prstGeom prst="ellipse">
@@ -4335,7 +4726,7 @@
         </p:nvSpPr>
         <p:spPr>
           <a:xfrm>
-            <a:off x="1181597" y="5086267"/>
+            <a:off x="1181597" y="5137067"/>
             <a:ext cx="80681" cy="80681"/>
           </a:xfrm>
           <a:prstGeom prst="ellipse">
@@ -4366,7 +4757,7 @@
         </p:nvSpPr>
         <p:spPr>
           <a:xfrm>
-            <a:off x="1261964" y="5211790"/>
+            <a:off x="1261964" y="5262590"/>
             <a:ext cx="72822" cy="72822"/>
           </a:xfrm>
           <a:prstGeom prst="ellipse">
@@ -4397,7 +4788,7 @@
         </p:nvSpPr>
         <p:spPr>
           <a:xfrm>
-            <a:off x="1223419" y="5204619"/>
+            <a:off x="1223419" y="5255419"/>
             <a:ext cx="84391" cy="84391"/>
           </a:xfrm>
           <a:prstGeom prst="ellipse">
@@ -4428,7 +4819,7 @@
         </p:nvSpPr>
         <p:spPr>
           <a:xfrm>
-            <a:off x="1267941" y="5152331"/>
+            <a:off x="1267941" y="5203131"/>
             <a:ext cx="91479" cy="91479"/>
           </a:xfrm>
           <a:prstGeom prst="ellipse">
@@ -4459,7 +4850,7 @@
         </p:nvSpPr>
         <p:spPr>
           <a:xfrm>
-            <a:off x="1137507" y="5173586"/>
+            <a:off x="1137507" y="5224386"/>
             <a:ext cx="75492" cy="75492"/>
           </a:xfrm>
           <a:prstGeom prst="ellipse">
@@ -4490,7 +4881,7 @@
         </p:nvSpPr>
         <p:spPr>
           <a:xfrm>
-            <a:off x="652516" y="4983545"/>
+            <a:off x="652516" y="5034345"/>
             <a:ext cx="97195" cy="97195"/>
           </a:xfrm>
           <a:prstGeom prst="ellipse">
@@ -4521,7 +4912,7 @@
         </p:nvSpPr>
         <p:spPr>
           <a:xfrm>
-            <a:off x="685043" y="4830217"/>
+            <a:off x="685043" y="4881017"/>
             <a:ext cx="74452" cy="74452"/>
           </a:xfrm>
           <a:prstGeom prst="ellipse">
@@ -4552,7 +4943,7 @@
         </p:nvSpPr>
         <p:spPr>
           <a:xfrm>
-            <a:off x="674949" y="4930991"/>
+            <a:off x="674949" y="4981791"/>
             <a:ext cx="71398" cy="71398"/>
           </a:xfrm>
           <a:prstGeom prst="ellipse">
@@ -4583,7 +4974,7 @@
         </p:nvSpPr>
         <p:spPr>
           <a:xfrm>
-            <a:off x="983221" y="5097232"/>
+            <a:off x="983221" y="5148032"/>
             <a:ext cx="83388" cy="83388"/>
           </a:xfrm>
           <a:prstGeom prst="ellipse">
@@ -4614,7 +5005,7 @@
         </p:nvSpPr>
         <p:spPr>
           <a:xfrm>
-            <a:off x="726065" y="5195081"/>
+            <a:off x="726065" y="5245881"/>
             <a:ext cx="92113" cy="92113"/>
           </a:xfrm>
           <a:prstGeom prst="ellipse">
@@ -4645,7 +5036,7 @@
         </p:nvSpPr>
         <p:spPr>
           <a:xfrm>
-            <a:off x="680150" y="5120092"/>
+            <a:off x="680150" y="5170892"/>
             <a:ext cx="82203" cy="82203"/>
           </a:xfrm>
           <a:prstGeom prst="ellipse">
@@ -4676,7 +5067,7 @@
         </p:nvSpPr>
         <p:spPr>
           <a:xfrm>
-            <a:off x="737727" y="5145266"/>
+            <a:off x="737727" y="5196066"/>
             <a:ext cx="99212" cy="99212"/>
           </a:xfrm>
           <a:prstGeom prst="ellipse">
@@ -4707,7 +5098,7 @@
         </p:nvSpPr>
         <p:spPr>
           <a:xfrm>
-            <a:off x="798517" y="4747486"/>
+            <a:off x="798517" y="4798286"/>
             <a:ext cx="102832" cy="102832"/>
           </a:xfrm>
           <a:prstGeom prst="ellipse">
@@ -4738,7 +5129,7 @@
         </p:nvSpPr>
         <p:spPr>
           <a:xfrm>
-            <a:off x="739840" y="4940443"/>
+            <a:off x="739840" y="4991243"/>
             <a:ext cx="92030" cy="92030"/>
           </a:xfrm>
           <a:prstGeom prst="ellipse">
@@ -4769,7 +5160,7 @@
         </p:nvSpPr>
         <p:spPr>
           <a:xfrm>
-            <a:off x="656421" y="4990223"/>
+            <a:off x="656421" y="5041023"/>
             <a:ext cx="107474" cy="107474"/>
           </a:xfrm>
           <a:prstGeom prst="ellipse">
@@ -4800,7 +5191,7 @@
         </p:nvSpPr>
         <p:spPr>
           <a:xfrm>
-            <a:off x="748531" y="5197047"/>
+            <a:off x="748531" y="5247847"/>
             <a:ext cx="78122" cy="78122"/>
           </a:xfrm>
           <a:prstGeom prst="ellipse">
@@ -4831,7 +5222,7 @@
         </p:nvSpPr>
         <p:spPr>
           <a:xfrm>
-            <a:off x="811188" y="4923351"/>
+            <a:off x="811188" y="4974151"/>
             <a:ext cx="66763" cy="66763"/>
           </a:xfrm>
           <a:prstGeom prst="ellipse">
@@ -4862,7 +5253,7 @@
         </p:nvSpPr>
         <p:spPr>
           <a:xfrm>
-            <a:off x="658039" y="5095300"/>
+            <a:off x="658039" y="5146100"/>
             <a:ext cx="90227" cy="90227"/>
           </a:xfrm>
           <a:prstGeom prst="ellipse">
@@ -4893,7 +5284,7 @@
         </p:nvSpPr>
         <p:spPr>
           <a:xfrm>
-            <a:off x="854442" y="5146076"/>
+            <a:off x="854442" y="5196876"/>
             <a:ext cx="83645" cy="83645"/>
           </a:xfrm>
           <a:prstGeom prst="ellipse">
@@ -4924,7 +5315,7 @@
         </p:nvSpPr>
         <p:spPr>
           <a:xfrm>
-            <a:off x="1248116" y="4977457"/>
+            <a:off x="1248116" y="5028257"/>
             <a:ext cx="102017" cy="102017"/>
           </a:xfrm>
           <a:prstGeom prst="ellipse">
@@ -4955,7 +5346,7 @@
         </p:nvSpPr>
         <p:spPr>
           <a:xfrm>
-            <a:off x="731558" y="5193392"/>
+            <a:off x="731558" y="5244192"/>
             <a:ext cx="70351" cy="70351"/>
           </a:xfrm>
           <a:prstGeom prst="ellipse">
@@ -4986,7 +5377,7 @@
         </p:nvSpPr>
         <p:spPr>
           <a:xfrm>
-            <a:off x="1228379" y="5161802"/>
+            <a:off x="1228379" y="5212602"/>
             <a:ext cx="71937" cy="71937"/>
           </a:xfrm>
           <a:prstGeom prst="ellipse">
@@ -5017,7 +5408,7 @@
         </p:nvSpPr>
         <p:spPr>
           <a:xfrm>
-            <a:off x="1095797" y="5080511"/>
+            <a:off x="1095797" y="5131311"/>
             <a:ext cx="105301" cy="105301"/>
           </a:xfrm>
           <a:prstGeom prst="ellipse">
@@ -5048,7 +5439,7 @@
         </p:nvSpPr>
         <p:spPr>
           <a:xfrm>
-            <a:off x="731008" y="4868959"/>
+            <a:off x="731008" y="4919759"/>
             <a:ext cx="90327" cy="90327"/>
           </a:xfrm>
           <a:prstGeom prst="ellipse">
@@ -5079,7 +5470,7 @@
         </p:nvSpPr>
         <p:spPr>
           <a:xfrm>
-            <a:off x="896328" y="5108106"/>
+            <a:off x="896328" y="5158906"/>
             <a:ext cx="68116" cy="68116"/>
           </a:xfrm>
           <a:prstGeom prst="ellipse">
@@ -5110,7 +5501,7 @@
         </p:nvSpPr>
         <p:spPr>
           <a:xfrm>
-            <a:off x="620479" y="5080968"/>
+            <a:off x="620479" y="5131768"/>
             <a:ext cx="94819" cy="94819"/>
           </a:xfrm>
           <a:prstGeom prst="ellipse">
@@ -5141,7 +5532,7 @@
         </p:nvSpPr>
         <p:spPr>
           <a:xfrm>
-            <a:off x="767531" y="5171994"/>
+            <a:off x="767531" y="5222794"/>
             <a:ext cx="100114" cy="100114"/>
           </a:xfrm>
           <a:prstGeom prst="ellipse">
@@ -5172,7 +5563,7 @@
         </p:nvSpPr>
         <p:spPr>
           <a:xfrm>
-            <a:off x="1002647" y="5174987"/>
+            <a:off x="1002647" y="5225787"/>
             <a:ext cx="95520" cy="95520"/>
           </a:xfrm>
           <a:prstGeom prst="ellipse">
@@ -5203,7 +5594,7 @@
         </p:nvSpPr>
         <p:spPr>
           <a:xfrm>
-            <a:off x="651691" y="5112073"/>
+            <a:off x="651691" y="5162873"/>
             <a:ext cx="73652" cy="73652"/>
           </a:xfrm>
           <a:prstGeom prst="ellipse">
@@ -5234,7 +5625,7 @@
         </p:nvSpPr>
         <p:spPr>
           <a:xfrm>
-            <a:off x="986986" y="5071494"/>
+            <a:off x="986986" y="5122294"/>
             <a:ext cx="75956" cy="75956"/>
           </a:xfrm>
           <a:prstGeom prst="ellipse">
@@ -5265,7 +5656,7 @@
         </p:nvSpPr>
         <p:spPr>
           <a:xfrm>
-            <a:off x="1234192" y="5025821"/>
+            <a:off x="1234192" y="5076621"/>
             <a:ext cx="72567" cy="72567"/>
           </a:xfrm>
           <a:prstGeom prst="ellipse">
@@ -5296,7 +5687,7 @@
         </p:nvSpPr>
         <p:spPr>
           <a:xfrm>
-            <a:off x="619623" y="5195949"/>
+            <a:off x="619623" y="5246749"/>
             <a:ext cx="66187" cy="66187"/>
           </a:xfrm>
           <a:prstGeom prst="ellipse">
@@ -5327,7 +5718,7 @@
         </p:nvSpPr>
         <p:spPr>
           <a:xfrm>
-            <a:off x="722279" y="5026605"/>
+            <a:off x="722279" y="5077405"/>
             <a:ext cx="79893" cy="79893"/>
           </a:xfrm>
           <a:prstGeom prst="ellipse">
@@ -5358,7 +5749,7 @@
         </p:nvSpPr>
         <p:spPr>
           <a:xfrm>
-            <a:off x="982193" y="5089781"/>
+            <a:off x="982193" y="5140581"/>
             <a:ext cx="103102" cy="103102"/>
           </a:xfrm>
           <a:prstGeom prst="ellipse">
@@ -5389,7 +5780,7 @@
         </p:nvSpPr>
         <p:spPr>
           <a:xfrm>
-            <a:off x="1267422" y="5085480"/>
+            <a:off x="1267422" y="5136280"/>
             <a:ext cx="92701" cy="92701"/>
           </a:xfrm>
           <a:prstGeom prst="ellipse">
@@ -5420,7 +5811,7 @@
         </p:nvSpPr>
         <p:spPr>
           <a:xfrm>
-            <a:off x="1082860" y="5137592"/>
+            <a:off x="1082860" y="5188392"/>
             <a:ext cx="65059" cy="65059"/>
           </a:xfrm>
           <a:prstGeom prst="ellipse">
@@ -5451,7 +5842,7 @@
         </p:nvSpPr>
         <p:spPr>
           <a:xfrm>
-            <a:off x="601642" y="5151759"/>
+            <a:off x="601642" y="5202559"/>
             <a:ext cx="103959" cy="103959"/>
           </a:xfrm>
           <a:prstGeom prst="ellipse">
@@ -5482,7 +5873,7 @@
         </p:nvSpPr>
         <p:spPr>
           <a:xfrm>
-            <a:off x="1076186" y="5170986"/>
+            <a:off x="1076186" y="5221786"/>
             <a:ext cx="91778" cy="91778"/>
           </a:xfrm>
           <a:prstGeom prst="ellipse">
@@ -5513,7 +5904,7 @@
         </p:nvSpPr>
         <p:spPr>
           <a:xfrm>
-            <a:off x="924082" y="5195226"/>
+            <a:off x="924082" y="5246026"/>
             <a:ext cx="95971" cy="95971"/>
           </a:xfrm>
           <a:prstGeom prst="ellipse">
@@ -5544,7 +5935,7 @@
         </p:nvSpPr>
         <p:spPr>
           <a:xfrm>
-            <a:off x="816168" y="5139740"/>
+            <a:off x="816168" y="5190540"/>
             <a:ext cx="87774" cy="87774"/>
           </a:xfrm>
           <a:prstGeom prst="ellipse">
@@ -5575,7 +5966,7 @@
         </p:nvSpPr>
         <p:spPr>
           <a:xfrm>
-            <a:off x="1095032" y="5199419"/>
+            <a:off x="1095032" y="5250219"/>
             <a:ext cx="103514" cy="103514"/>
           </a:xfrm>
           <a:prstGeom prst="ellipse">
@@ -5606,7 +5997,7 @@
         </p:nvSpPr>
         <p:spPr>
           <a:xfrm>
-            <a:off x="1094759" y="5112031"/>
+            <a:off x="1094759" y="5162831"/>
             <a:ext cx="104172" cy="104172"/>
           </a:xfrm>
           <a:prstGeom prst="ellipse">
@@ -5637,7 +6028,7 @@
         </p:nvSpPr>
         <p:spPr>
           <a:xfrm>
-            <a:off x="835660" y="4912847"/>
+            <a:off x="835660" y="4963647"/>
             <a:ext cx="93955" cy="93955"/>
           </a:xfrm>
           <a:prstGeom prst="ellipse">
@@ -5668,7 +6059,7 @@
         </p:nvSpPr>
         <p:spPr>
           <a:xfrm>
-            <a:off x="1209824" y="5079284"/>
+            <a:off x="1209824" y="5130084"/>
             <a:ext cx="98639" cy="98639"/>
           </a:xfrm>
           <a:prstGeom prst="ellipse">
@@ -5699,7 +6090,7 @@
         </p:nvSpPr>
         <p:spPr>
           <a:xfrm>
-            <a:off x="1189039" y="5077952"/>
+            <a:off x="1189039" y="5128752"/>
             <a:ext cx="88961" cy="88961"/>
           </a:xfrm>
           <a:prstGeom prst="ellipse">
@@ -5730,7 +6121,7 @@
         </p:nvSpPr>
         <p:spPr>
           <a:xfrm>
-            <a:off x="1024666" y="5038680"/>
+            <a:off x="1024666" y="5089480"/>
             <a:ext cx="90564" cy="90564"/>
           </a:xfrm>
           <a:prstGeom prst="ellipse">
@@ -5761,7 +6152,7 @@
         </p:nvSpPr>
         <p:spPr>
           <a:xfrm>
-            <a:off x="650392" y="5052766"/>
+            <a:off x="650392" y="5103566"/>
             <a:ext cx="91922" cy="91922"/>
           </a:xfrm>
           <a:prstGeom prst="ellipse">
@@ -5792,7 +6183,7 @@
         </p:nvSpPr>
         <p:spPr>
           <a:xfrm>
-            <a:off x="1282187" y="5009578"/>
+            <a:off x="1282187" y="5060378"/>
             <a:ext cx="80766" cy="80766"/>
           </a:xfrm>
           <a:prstGeom prst="ellipse">
@@ -5823,7 +6214,7 @@
         </p:nvSpPr>
         <p:spPr>
           <a:xfrm>
-            <a:off x="1100777" y="5017081"/>
+            <a:off x="1100777" y="5067881"/>
             <a:ext cx="89323" cy="89323"/>
           </a:xfrm>
           <a:prstGeom prst="ellipse">
@@ -5854,7 +6245,7 @@
         </p:nvSpPr>
         <p:spPr>
           <a:xfrm>
-            <a:off x="895037" y="5165218"/>
+            <a:off x="895037" y="5216018"/>
             <a:ext cx="96847" cy="96847"/>
           </a:xfrm>
           <a:prstGeom prst="ellipse">
@@ -5885,7 +6276,7 @@
         </p:nvSpPr>
         <p:spPr>
           <a:xfrm>
-            <a:off x="616666" y="5145388"/>
+            <a:off x="616666" y="5196188"/>
             <a:ext cx="90227" cy="90227"/>
           </a:xfrm>
           <a:prstGeom prst="ellipse">
@@ -5916,7 +6307,7 @@
         </p:nvSpPr>
         <p:spPr>
           <a:xfrm>
-            <a:off x="928389" y="5175747"/>
+            <a:off x="928389" y="5226547"/>
             <a:ext cx="85603" cy="85603"/>
           </a:xfrm>
           <a:prstGeom prst="ellipse">
@@ -5947,7 +6338,7 @@
         </p:nvSpPr>
         <p:spPr>
           <a:xfrm>
-            <a:off x="1010569" y="4935853"/>
+            <a:off x="1010569" y="4986653"/>
             <a:ext cx="104415" cy="104415"/>
           </a:xfrm>
           <a:prstGeom prst="ellipse">
@@ -5978,7 +6369,7 @@
         </p:nvSpPr>
         <p:spPr>
           <a:xfrm>
-            <a:off x="769977" y="5059888"/>
+            <a:off x="769977" y="5110688"/>
             <a:ext cx="93643" cy="93643"/>
           </a:xfrm>
           <a:prstGeom prst="ellipse">
@@ -6009,7 +6400,7 @@
         </p:nvSpPr>
         <p:spPr>
           <a:xfrm>
-            <a:off x="744756" y="5205630"/>
+            <a:off x="744756" y="5256430"/>
             <a:ext cx="71039" cy="71039"/>
           </a:xfrm>
           <a:prstGeom prst="ellipse">
@@ -6040,7 +6431,7 @@
         </p:nvSpPr>
         <p:spPr>
           <a:xfrm>
-            <a:off x="1644650" y="4079875"/>
+            <a:off x="1644650" y="4181475"/>
             <a:ext cx="584200" cy="409575"/>
           </a:xfrm>
           <a:prstGeom prst="ellipse">
@@ -6071,7 +6462,7 @@
         </p:nvSpPr>
         <p:spPr>
           <a:xfrm>
-            <a:off x="2039761" y="4331952"/>
+            <a:off x="2039761" y="4433552"/>
             <a:ext cx="103137" cy="103137"/>
           </a:xfrm>
           <a:prstGeom prst="ellipse">
@@ -6102,7 +6493,7 @@
         </p:nvSpPr>
         <p:spPr>
           <a:xfrm>
-            <a:off x="1824272" y="4305242"/>
+            <a:off x="1824272" y="4406842"/>
             <a:ext cx="93099" cy="93099"/>
           </a:xfrm>
           <a:prstGeom prst="ellipse">
@@ -6133,7 +6524,7 @@
         </p:nvSpPr>
         <p:spPr>
           <a:xfrm>
-            <a:off x="1769812" y="4230091"/>
+            <a:off x="1769812" y="4331691"/>
             <a:ext cx="104137" cy="104137"/>
           </a:xfrm>
           <a:prstGeom prst="ellipse">
@@ -6164,7 +6555,7 @@
         </p:nvSpPr>
         <p:spPr>
           <a:xfrm>
-            <a:off x="2041339" y="4325790"/>
+            <a:off x="2041339" y="4427390"/>
             <a:ext cx="80587" cy="80587"/>
           </a:xfrm>
           <a:prstGeom prst="ellipse">
@@ -6195,7 +6586,7 @@
         </p:nvSpPr>
         <p:spPr>
           <a:xfrm>
-            <a:off x="1925630" y="4374957"/>
+            <a:off x="1925630" y="4476557"/>
             <a:ext cx="85568" cy="85568"/>
           </a:xfrm>
           <a:prstGeom prst="ellipse">
@@ -6226,7 +6617,7 @@
         </p:nvSpPr>
         <p:spPr>
           <a:xfrm>
-            <a:off x="2014571" y="4340931"/>
+            <a:off x="2014571" y="4442531"/>
             <a:ext cx="101226" cy="101226"/>
           </a:xfrm>
           <a:prstGeom prst="ellipse">
@@ -6257,7 +6648,7 @@
         </p:nvSpPr>
         <p:spPr>
           <a:xfrm>
-            <a:off x="1981715" y="4330212"/>
+            <a:off x="1981715" y="4431812"/>
             <a:ext cx="71018" cy="71018"/>
           </a:xfrm>
           <a:prstGeom prst="ellipse">
@@ -6288,7 +6679,7 @@
         </p:nvSpPr>
         <p:spPr>
           <a:xfrm>
-            <a:off x="1880082" y="4377088"/>
+            <a:off x="1880082" y="4478688"/>
             <a:ext cx="75731" cy="75731"/>
           </a:xfrm>
           <a:prstGeom prst="ellipse">
@@ -6319,7 +6710,7 @@
         </p:nvSpPr>
         <p:spPr>
           <a:xfrm>
-            <a:off x="1785088" y="4281416"/>
+            <a:off x="1785088" y="4383016"/>
             <a:ext cx="85453" cy="85453"/>
           </a:xfrm>
           <a:prstGeom prst="ellipse">
@@ -6350,7 +6741,7 @@
         </p:nvSpPr>
         <p:spPr>
           <a:xfrm>
-            <a:off x="1816007" y="4319542"/>
+            <a:off x="1816007" y="4421142"/>
             <a:ext cx="100799" cy="100799"/>
           </a:xfrm>
           <a:prstGeom prst="ellipse">
@@ -6381,7 +6772,7 @@
         </p:nvSpPr>
         <p:spPr>
           <a:xfrm>
-            <a:off x="2087956" y="4370333"/>
+            <a:off x="2087956" y="4471933"/>
             <a:ext cx="64900" cy="64900"/>
           </a:xfrm>
           <a:prstGeom prst="ellipse">
@@ -6412,7 +6803,7 @@
         </p:nvSpPr>
         <p:spPr>
           <a:xfrm>
-            <a:off x="2046126" y="4394938"/>
+            <a:off x="2046126" y="4496538"/>
             <a:ext cx="65344" cy="65344"/>
           </a:xfrm>
           <a:prstGeom prst="ellipse">
@@ -6443,7 +6834,7 @@
         </p:nvSpPr>
         <p:spPr>
           <a:xfrm>
-            <a:off x="1966897" y="4315332"/>
+            <a:off x="1966897" y="4416932"/>
             <a:ext cx="98683" cy="98683"/>
           </a:xfrm>
           <a:prstGeom prst="ellipse">
@@ -6474,7 +6865,7 @@
         </p:nvSpPr>
         <p:spPr>
           <a:xfrm>
-            <a:off x="1718762" y="4368738"/>
+            <a:off x="1718762" y="4470338"/>
             <a:ext cx="69540" cy="69540"/>
           </a:xfrm>
           <a:prstGeom prst="ellipse">
@@ -6505,7 +6896,7 @@
         </p:nvSpPr>
         <p:spPr>
           <a:xfrm>
-            <a:off x="2800350" y="3536950"/>
+            <a:off x="2800350" y="3689350"/>
             <a:ext cx="177800" cy="177800"/>
           </a:xfrm>
           <a:prstGeom prst="ellipse">
@@ -6530,14 +6921,45 @@
       </p:sp>
       <p:sp>
         <p:nvSpPr>
-          <p:cNvPr id="101" name="Rótulo marcador"/>
+          <p:cNvPr id="101" name="Leyenda: marcador"/>
+          <p:cNvSpPr/>
+          <p:nvPr/>
+        </p:nvSpPr>
+        <p:spPr>
+          <a:xfrm>
+            <a:off x="539750" y="1682750"/>
+            <a:ext cx="114300" cy="114300"/>
+          </a:xfrm>
+          <a:prstGeom prst="ellipse">
+            <a:avLst/>
+          </a:prstGeom>
+          <a:solidFill>
+            <a:srgbClr val="AD3B94"/>
+          </a:solidFill>
+          <a:ln w="19050">
+            <a:solidFill>
+              <a:srgbClr val="FFFFFF"/>
+            </a:solidFill>
+          </a:ln>
+        </p:spPr>
+        <p:txBody>
+          <a:bodyPr rtlCol="0" anchor="ctr"/>
+          <a:lstStyle/>
+          <a:p>
+            <a:pPr algn="ctr"/>
+          </a:p>
+        </p:txBody>
+      </p:sp>
+      <p:sp>
+        <p:nvSpPr>
+          <p:cNvPr id="102" name="Leyenda: texto"/>
           <p:cNvSpPr txBox="1"/>
           <p:nvPr/>
         </p:nvSpPr>
         <p:spPr>
           <a:xfrm>
-            <a:off x="508000" y="2984500"/>
-            <a:ext cx="1841500" cy="635000"/>
+            <a:off x="762000" y="1600200"/>
+            <a:ext cx="4064000" cy="279400"/>
           </a:xfrm>
           <a:prstGeom prst="rect">
             <a:avLst/>
@@ -6545,48 +6967,91 @@
           <a:noFill/>
         </p:spPr>
         <p:txBody>
-          <a:bodyPr wrap="square" lIns="0" tIns="0" rIns="0" bIns="0" anchor="b">
+          <a:bodyPr wrap="square" lIns="0" tIns="0" rIns="0" bIns="0" anchor="ctr">
             <a:noAutofit/>
           </a:bodyPr>
           <a:lstStyle/>
           <a:p>
             <a:pPr algn="l"/>
             <a:r>
-              <a:rPr sz="2200" b="1" i="0" lang="es-ES">
-                <a:solidFill>
-                  <a:srgbClr val="AD3B94"/>
-                </a:solidFill>
-              </a:rPr>
-              <a:t>Aprendizaje automático</a:t>
-            </a:r>
-          </a:p>
-        </p:txBody>
-      </p:sp>
-      <p:cxnSp>
-        <p:nvCxnSpPr>
-          <p:cNvPr id="102" name="Guía marcador"/>
-          <p:cNvCxnSpPr/>
-          <p:nvPr/>
-        </p:nvCxnSpPr>
-        <p:spPr>
-          <a:xfrm>
-            <a:off x="825500" y="3657600"/>
-            <a:ext cx="0" cy="977900"/>
-          </a:xfrm>
-          <a:prstGeom prst="line">
-            <a:avLst/>
-          </a:prstGeom>
+              <a:rPr sz="2000" b="0" i="0" lang="es-ES">
+                <a:solidFill>
+                  <a:srgbClr val="263445"/>
+                </a:solidFill>
+              </a:rPr>
+              <a:t>Estudios de aprendizaje automático</a:t>
+            </a:r>
+          </a:p>
+        </p:txBody>
+      </p:sp>
+      <p:sp>
+        <p:nvSpPr>
+          <p:cNvPr id="103" name="Leyenda: marcador"/>
+          <p:cNvSpPr/>
+          <p:nvPr/>
+        </p:nvSpPr>
+        <p:spPr>
+          <a:xfrm>
+            <a:off x="508000" y="1943100"/>
+            <a:ext cx="177800" cy="177800"/>
+          </a:xfrm>
+          <a:prstGeom prst="ellipse">
+            <a:avLst/>
+          </a:prstGeom>
+          <a:solidFill>
+            <a:srgbClr val="5BB46C"/>
+          </a:solidFill>
           <a:ln w="19050">
             <a:solidFill>
-              <a:srgbClr val="AD3B94"/>
-            </a:solidFill>
-            <a:prstDash val="sysDot"/>
-          </a:ln>
-        </p:spPr>
-      </p:cxnSp>
-      <p:sp>
-        <p:nvSpPr>
-          <p:cNvPr id="103" name="Tarjeta TDM"/>
+              <a:srgbClr val="FFFFFF"/>
+            </a:solidFill>
+          </a:ln>
+        </p:spPr>
+        <p:txBody>
+          <a:bodyPr rtlCol="0" anchor="ctr"/>
+          <a:lstStyle/>
+          <a:p>
+            <a:pPr algn="ctr"/>
+          </a:p>
+        </p:txBody>
+      </p:sp>
+      <p:sp>
+        <p:nvSpPr>
+          <p:cNvPr id="104" name="Leyenda: texto"/>
+          <p:cNvSpPr txBox="1"/>
+          <p:nvPr/>
+        </p:nvSpPr>
+        <p:spPr>
+          <a:xfrm>
+            <a:off x="762000" y="1892300"/>
+            <a:ext cx="4064000" cy="279400"/>
+          </a:xfrm>
+          <a:prstGeom prst="rect">
+            <a:avLst/>
+          </a:prstGeom>
+          <a:noFill/>
+        </p:spPr>
+        <p:txBody>
+          <a:bodyPr wrap="square" lIns="0" tIns="0" rIns="0" bIns="0" anchor="ctr">
+            <a:noAutofit/>
+          </a:bodyPr>
+          <a:lstStyle/>
+          <a:p>
+            <a:pPr algn="l"/>
+            <a:r>
+              <a:rPr sz="2000" b="0" i="0" lang="es-ES">
+                <a:solidFill>
+                  <a:srgbClr val="263445"/>
+                </a:solidFill>
+              </a:rPr>
+              <a:t>Dosificación individualizada (TDM)</a:t>
+            </a:r>
+          </a:p>
+        </p:txBody>
+      </p:sp>
+      <p:sp>
+        <p:nvSpPr>
+          <p:cNvPr id="105" name="Tarjeta TDM"/>
           <p:cNvSpPr/>
           <p:nvPr/>
         </p:nvSpPr>
@@ -6619,7 +7084,7 @@
       </p:sp>
       <p:sp>
         <p:nvSpPr>
-          <p:cNvPr id="104" name="Cabecera tarjeta"/>
+          <p:cNvPr id="106" name="Cabecera tarjeta"/>
           <p:cNvSpPr/>
           <p:nvPr/>
         </p:nvSpPr>
@@ -6650,7 +7115,7 @@
       </p:sp>
       <p:sp>
         <p:nvSpPr>
-          <p:cNvPr id="105" name="Cabecera (base)"/>
+          <p:cNvPr id="107" name="Cabecera (base)"/>
           <p:cNvSpPr/>
           <p:nvPr/>
         </p:nvSpPr>
@@ -6679,7 +7144,7 @@
       </p:sp>
       <p:sp>
         <p:nvSpPr>
-          <p:cNvPr id="106" name="TextBox 105"/>
+          <p:cNvPr id="108" name="TextBox 107"/>
           <p:cNvSpPr txBox="1"/>
           <p:nvPr/>
         </p:nvSpPr>
@@ -6731,7 +7196,7 @@
       </p:sp>
       <p:sp>
         <p:nvSpPr>
-          <p:cNvPr id="107" name="TextBox 106"/>
+          <p:cNvPr id="109" name="TextBox 108"/>
           <p:cNvSpPr txBox="1"/>
           <p:nvPr/>
         </p:nvSpPr>
@@ -6765,7 +7230,7 @@
       </p:sp>
       <p:sp>
         <p:nvSpPr>
-          <p:cNvPr id="108" name="TextBox 107"/>
+          <p:cNvPr id="110" name="TextBox 109"/>
           <p:cNvSpPr txBox="1"/>
           <p:nvPr/>
         </p:nvSpPr>
@@ -6809,77 +7274,6 @@
                 </a:solidFill>
               </a:rPr>
               <a:t> (RR 0,70)</a:t>
-            </a:r>
-          </a:p>
-        </p:txBody>
-      </p:sp>
-      <p:cxnSp>
-        <p:nvCxnSpPr>
-          <p:cNvPr id="109" name="Connector 108"/>
-          <p:cNvCxnSpPr/>
-          <p:nvPr/>
-        </p:nvCxnSpPr>
-        <p:spPr>
-          <a:xfrm>
-            <a:off x="8263636" y="4318000"/>
-            <a:ext cx="3217418" cy="0"/>
-          </a:xfrm>
-          <a:prstGeom prst="line">
-            <a:avLst/>
-          </a:prstGeom>
-          <a:ln w="19050">
-            <a:solidFill>
-              <a:srgbClr val="E7F4E9"/>
-            </a:solidFill>
-          </a:ln>
-        </p:spPr>
-      </p:cxnSp>
-      <p:sp>
-        <p:nvSpPr>
-          <p:cNvPr id="110" name="TextBox 109"/>
-          <p:cNvSpPr txBox="1"/>
-          <p:nvPr/>
-        </p:nvSpPr>
-        <p:spPr>
-          <a:xfrm>
-            <a:off x="8263636" y="4381500"/>
-            <a:ext cx="3217418" cy="685800"/>
-          </a:xfrm>
-          <a:prstGeom prst="rect">
-            <a:avLst/>
-          </a:prstGeom>
-          <a:noFill/>
-        </p:spPr>
-        <p:txBody>
-          <a:bodyPr wrap="square" lIns="0" tIns="0" rIns="0" bIns="0" anchor="ctr">
-            <a:noAutofit/>
-          </a:bodyPr>
-          <a:lstStyle/>
-          <a:p>
-            <a:pPr algn="l"/>
-            <a:r>
-              <a:rPr sz="2200" b="0" i="0" lang="es-ES">
-                <a:solidFill>
-                  <a:srgbClr val="263445"/>
-                </a:solidFill>
-              </a:rPr>
-              <a:t>Nefrotoxicidad </a:t>
-            </a:r>
-            <a:r>
-              <a:rPr sz="2200" b="1" i="0" lang="es-ES">
-                <a:solidFill>
-                  <a:srgbClr val="263445"/>
-                </a:solidFill>
-              </a:rPr>
-              <a:t>−45 %</a:t>
-            </a:r>
-            <a:r>
-              <a:rPr sz="2200" b="0" i="0" lang="es-ES">
-                <a:solidFill>
-                  <a:srgbClr val="263445"/>
-                </a:solidFill>
-              </a:rPr>
-              <a:t> (RR 0,55)</a:t>
             </a:r>
           </a:p>
         </p:txBody>
@@ -6892,7 +7286,7 @@
         </p:nvCxnSpPr>
         <p:spPr>
           <a:xfrm>
-            <a:off x="8263636" y="5092700"/>
+            <a:off x="8263636" y="4318000"/>
             <a:ext cx="3217418" cy="0"/>
           </a:xfrm>
           <a:prstGeom prst="line">
@@ -6913,7 +7307,7 @@
         </p:nvSpPr>
         <p:spPr>
           <a:xfrm>
-            <a:off x="8263636" y="5156200"/>
+            <a:off x="8263636" y="4381500"/>
             <a:ext cx="3217418" cy="685800"/>
           </a:xfrm>
           <a:prstGeom prst="rect">
@@ -6934,20 +7328,91 @@
                   <a:srgbClr val="263445"/>
                 </a:solidFill>
               </a:rPr>
-              <a:t>Mortalidad: sin cambio significativo</a:t>
+              <a:t>Nefrotoxicidad </a:t>
+            </a:r>
+            <a:r>
+              <a:rPr sz="2200" b="1" i="0" lang="es-ES">
+                <a:solidFill>
+                  <a:srgbClr val="263445"/>
+                </a:solidFill>
+              </a:rPr>
+              <a:t>−45 %</a:t>
+            </a:r>
+            <a:r>
+              <a:rPr sz="2200" b="0" i="0" lang="es-ES">
+                <a:solidFill>
+                  <a:srgbClr val="263445"/>
+                </a:solidFill>
+              </a:rPr>
+              <a:t> (RR 0,55)</a:t>
             </a:r>
           </a:p>
         </p:txBody>
       </p:sp>
       <p:cxnSp>
         <p:nvCxnSpPr>
-          <p:cNvPr id="113" name="Unión peldaño 5"/>
+          <p:cNvPr id="113" name="Connector 112"/>
           <p:cNvCxnSpPr/>
           <p:nvPr/>
         </p:nvCxnSpPr>
         <p:spPr>
           <a:xfrm>
-            <a:off x="7527036" y="1949450"/>
+            <a:off x="8263636" y="5092700"/>
+            <a:ext cx="3217418" cy="0"/>
+          </a:xfrm>
+          <a:prstGeom prst="line">
+            <a:avLst/>
+          </a:prstGeom>
+          <a:ln w="19050">
+            <a:solidFill>
+              <a:srgbClr val="E7F4E9"/>
+            </a:solidFill>
+          </a:ln>
+        </p:spPr>
+      </p:cxnSp>
+      <p:sp>
+        <p:nvSpPr>
+          <p:cNvPr id="114" name="TextBox 113"/>
+          <p:cNvSpPr txBox="1"/>
+          <p:nvPr/>
+        </p:nvSpPr>
+        <p:spPr>
+          <a:xfrm>
+            <a:off x="8263636" y="5156200"/>
+            <a:ext cx="3217418" cy="685800"/>
+          </a:xfrm>
+          <a:prstGeom prst="rect">
+            <a:avLst/>
+          </a:prstGeom>
+          <a:noFill/>
+        </p:spPr>
+        <p:txBody>
+          <a:bodyPr wrap="square" lIns="0" tIns="0" rIns="0" bIns="0" anchor="ctr">
+            <a:noAutofit/>
+          </a:bodyPr>
+          <a:lstStyle/>
+          <a:p>
+            <a:pPr algn="l"/>
+            <a:r>
+              <a:rPr sz="2200" b="0" i="0" lang="es-ES">
+                <a:solidFill>
+                  <a:srgbClr val="263445"/>
+                </a:solidFill>
+              </a:rPr>
+              <a:t>Mortalidad: sin cambio significativo</a:t>
+            </a:r>
+          </a:p>
+        </p:txBody>
+      </p:sp>
+      <p:cxnSp>
+        <p:nvCxnSpPr>
+          <p:cNvPr id="115" name="Unión peldaño 5"/>
+          <p:cNvCxnSpPr/>
+          <p:nvPr/>
+        </p:nvCxnSpPr>
+        <p:spPr>
+          <a:xfrm>
+            <a:off x="7527036" y="2203450"/>
             <a:ext cx="533400" cy="0"/>
           </a:xfrm>
           <a:prstGeom prst="line">
@@ -6962,13 +7427,13 @@
       </p:cxnSp>
       <p:sp>
         <p:nvSpPr>
-          <p:cNvPr id="114" name="Marcador TDM en peldaño 5"/>
-          <p:cNvSpPr/>
-          <p:nvPr/>
-        </p:nvSpPr>
-        <p:spPr>
-          <a:xfrm>
-            <a:off x="7438136" y="1860550"/>
+          <p:cNvPr id="116" name="Marcador TDM en peldaño 5"/>
+          <p:cNvSpPr/>
+          <p:nvPr/>
+        </p:nvSpPr>
+        <p:spPr>
+          <a:xfrm>
+            <a:off x="7438136" y="2114550"/>
             <a:ext cx="177800" cy="177800"/>
           </a:xfrm>
           <a:prstGeom prst="ellipse">
@@ -6993,7 +7458,7 @@
       </p:sp>
       <p:sp>
         <p:nvSpPr>
-          <p:cNvPr id="115" name="Fuente"/>
+          <p:cNvPr id="117" name="Fuente"/>
           <p:cNvSpPr txBox="1"/>
           <p:nvPr/>
         </p:nvSpPr>
@@ -7052,7 +7517,7 @@
         <p:spPr>
           <a:xfrm>
             <a:off x="508000" y="749300"/>
-            <a:ext cx="11176000" cy="952500"/>
+            <a:ext cx="11176000" cy="635000"/>
           </a:xfrm>
           <a:prstGeom prst="rect">
             <a:avLst/>
@@ -7060,18 +7525,14 @@
           <a:noFill/>
         </p:spPr>
         <p:txBody>
-          <a:bodyPr wrap="square" lIns="0" tIns="0" rIns="0" bIns="0" anchor="t">
+          <a:bodyPr wrap="square" lIns="0" tIns="0" rIns="0" bIns="0" anchor="ctr">
             <a:noAutofit/>
           </a:bodyPr>
           <a:lstStyle/>
           <a:p>
-            <a:pPr algn="l">
-              <a:lnSpc>
-                <a:spcPct val="92000"/>
-              </a:lnSpc>
-            </a:pPr>
-            <a:r>
-              <a:rPr sz="3200" b="0" i="0" lang="es-ES">
+            <a:pPr algn="l"/>
+            <a:r>
+              <a:rPr sz="3600" b="1" i="0" lang="es-ES">
                 <a:solidFill>
                   <a:srgbClr val="263445"/>
                 </a:solidFill>
@@ -7089,8 +7550,8 @@
         </p:nvSpPr>
         <p:spPr>
           <a:xfrm>
-            <a:off x="1452054" y="1879600"/>
-            <a:ext cx="4064000" cy="635000"/>
+            <a:off x="508000" y="2095500"/>
+            <a:ext cx="3810000" cy="317500"/>
           </a:xfrm>
           <a:prstGeom prst="rect">
             <a:avLst/>
@@ -7105,7 +7566,7 @@
           <a:p>
             <a:pPr algn="l"/>
             <a:r>
-              <a:rPr sz="2000" b="1" i="0" lang="es-ES">
+              <a:rPr sz="2400" b="1" i="0" lang="es-ES">
                 <a:solidFill>
                   <a:srgbClr val="263445"/>
                 </a:solidFill>
@@ -7113,17 +7574,6 @@
               <a:t>Arnés (el protocolo)</a:t>
             </a:r>
           </a:p>
-          <a:p>
-            <a:pPr algn="l"/>
-            <a:r>
-              <a:rPr sz="2000" b="0" i="0" lang="es-ES">
-                <a:solidFill>
-                  <a:srgbClr val="5E6B78"/>
-                </a:solidFill>
-              </a:rPr>
-              <a:t>procedimiento normalizado de trabajo</a:t>
-            </a:r>
-          </a:p>
         </p:txBody>
       </p:sp>
       <p:sp>
@@ -7134,8 +7584,8 @@
         </p:nvSpPr>
         <p:spPr>
           <a:xfrm>
-            <a:off x="1452054" y="2667000"/>
-            <a:ext cx="9288145" cy="2921000"/>
+            <a:off x="508000" y="2476500"/>
+            <a:ext cx="11176000" cy="2921000"/>
           </a:xfrm>
           <a:prstGeom prst="roundRect">
             <a:avLst>
@@ -7166,7 +7616,7 @@
         </p:nvSpPr>
         <p:spPr>
           <a:xfrm>
-            <a:off x="4699000" y="5448300"/>
+            <a:off x="4699000" y="5257800"/>
             <a:ext cx="2794000" cy="279400"/>
           </a:xfrm>
           <a:prstGeom prst="rect">
@@ -7206,15 +7656,15 @@
           <p:nvPr/>
         </p:nvPicPr>
         <p:blipFill>
-          <a:blip r:embed="rId2"/>
+          <a:blip r:embed="rId3"/>
           <a:stretch>
             <a:fillRect/>
           </a:stretch>
         </p:blipFill>
         <p:spPr>
           <a:xfrm>
-            <a:off x="5723230" y="2819400"/>
-            <a:ext cx="745541" cy="1498600"/>
+            <a:off x="5685321" y="2667000"/>
+            <a:ext cx="821359" cy="1651000"/>
           </a:xfrm>
           <a:prstGeom prst="rect">
             <a:avLst/>
@@ -7230,15 +7680,15 @@
           <p:nvPr/>
         </p:nvPicPr>
         <p:blipFill>
-          <a:blip r:embed="rId3"/>
+          <a:blip r:embed="rId4"/>
           <a:stretch>
             <a:fillRect/>
           </a:stretch>
         </p:blipFill>
         <p:spPr>
           <a:xfrm>
-            <a:off x="2487540" y="3092450"/>
-            <a:ext cx="727220" cy="952500"/>
+            <a:off x="1595668" y="2921000"/>
+            <a:ext cx="872664" cy="1143000"/>
           </a:xfrm>
           <a:prstGeom prst="rect">
             <a:avLst/>
@@ -7254,15 +7704,15 @@
           <p:nvPr/>
         </p:nvPicPr>
         <p:blipFill>
-          <a:blip r:embed="rId4"/>
+          <a:blip r:embed="rId5"/>
           <a:stretch>
             <a:fillRect/>
           </a:stretch>
         </p:blipFill>
         <p:spPr>
           <a:xfrm>
-            <a:off x="9125458" y="2870200"/>
-            <a:ext cx="430784" cy="406400"/>
+            <a:off x="9917684" y="2715260"/>
+            <a:ext cx="484632" cy="457200"/>
           </a:xfrm>
           <a:prstGeom prst="rect">
             <a:avLst/>
@@ -7278,15 +7728,15 @@
           <p:nvPr/>
         </p:nvPicPr>
         <p:blipFill>
-          <a:blip r:embed="rId5"/>
+          <a:blip r:embed="rId6"/>
           <a:stretch>
             <a:fillRect/>
           </a:stretch>
         </p:blipFill>
         <p:spPr>
           <a:xfrm>
-            <a:off x="9086850" y="3365500"/>
-            <a:ext cx="508000" cy="406400"/>
+            <a:off x="9874250" y="3263900"/>
+            <a:ext cx="571500" cy="457200"/>
           </a:xfrm>
           <a:prstGeom prst="rect">
             <a:avLst/>
@@ -7302,15 +7752,15 @@
           <p:nvPr/>
         </p:nvPicPr>
         <p:blipFill>
-          <a:blip r:embed="rId6"/>
+          <a:blip r:embed="rId7"/>
           <a:stretch>
             <a:fillRect/>
           </a:stretch>
         </p:blipFill>
         <p:spPr>
           <a:xfrm>
-            <a:off x="9137650" y="3860800"/>
-            <a:ext cx="406400" cy="406400"/>
+            <a:off x="9931400" y="3812540"/>
+            <a:ext cx="457200" cy="457200"/>
           </a:xfrm>
           <a:prstGeom prst="rect">
             <a:avLst/>
@@ -7325,8 +7775,8 @@
         </p:nvCxnSpPr>
         <p:spPr>
           <a:xfrm>
-            <a:off x="3359150" y="3568700"/>
-            <a:ext cx="2241550" cy="0"/>
+            <a:off x="2673350" y="3492500"/>
+            <a:ext cx="2927350" cy="0"/>
           </a:xfrm>
           <a:prstGeom prst="line">
             <a:avLst/>
@@ -7347,8 +7797,8 @@
         </p:nvCxnSpPr>
         <p:spPr>
           <a:xfrm>
-            <a:off x="6591300" y="3568700"/>
-            <a:ext cx="2343150" cy="0"/>
+            <a:off x="6591300" y="3492500"/>
+            <a:ext cx="3134360" cy="0"/>
           </a:xfrm>
           <a:prstGeom prst="line">
             <a:avLst/>
@@ -7371,14 +7821,14 @@
           <p:nvPr/>
         </p:nvPicPr>
         <p:blipFill>
-          <a:blip r:embed="rId7"/>
+          <a:blip r:embed="rId8"/>
           <a:stretch>
             <a:fillRect/>
           </a:stretch>
         </p:blipFill>
         <p:spPr>
           <a:xfrm>
-            <a:off x="5717713" y="1841500"/>
+            <a:off x="5717713" y="1701800"/>
             <a:ext cx="756575" cy="660400"/>
           </a:xfrm>
           <a:prstGeom prst="rect">
@@ -7394,8 +7844,8 @@
         </p:nvCxnSpPr>
         <p:spPr>
           <a:xfrm>
-            <a:off x="6096000" y="2527300"/>
-            <a:ext cx="0" cy="254000"/>
+            <a:off x="6096000" y="2387600"/>
+            <a:ext cx="0" cy="241300"/>
           </a:xfrm>
           <a:prstGeom prst="line">
             <a:avLst/>
@@ -7417,7 +7867,7 @@
         </p:nvSpPr>
         <p:spPr>
           <a:xfrm>
-            <a:off x="6588709" y="1841500"/>
+            <a:off x="6588709" y="1701800"/>
             <a:ext cx="4826000" cy="660400"/>
           </a:xfrm>
           <a:prstGeom prst="rect">
@@ -7433,7 +7883,7 @@
           <a:p>
             <a:pPr algn="l"/>
             <a:r>
-              <a:rPr sz="2000" b="1" i="0" lang="es-ES">
+              <a:rPr sz="2400" b="1" i="0" lang="es-ES">
                 <a:solidFill>
                   <a:srgbClr val="2F5480"/>
                 </a:solidFill>
@@ -7447,17 +7897,6 @@
                 </a:solidFill>
               </a:rPr>
               <a:t> · supervisa y aporta criterio</a:t>
-            </a:r>
-          </a:p>
-          <a:p>
-            <a:pPr algn="l"/>
-            <a:r>
-              <a:rPr sz="2000" b="0" i="0" lang="es-ES">
-                <a:solidFill>
-                  <a:srgbClr val="5E6B78"/>
-                </a:solidFill>
-              </a:rPr>
-              <a:t>firma del informe</a:t>
             </a:r>
           </a:p>
         </p:txBody>
@@ -7470,8 +7909,8 @@
         </p:nvSpPr>
         <p:spPr>
           <a:xfrm>
-            <a:off x="1549400" y="4406900"/>
-            <a:ext cx="2603500" cy="952500"/>
+            <a:off x="508000" y="4394200"/>
+            <a:ext cx="3048000" cy="698500"/>
           </a:xfrm>
           <a:prstGeom prst="rect">
             <a:avLst/>
@@ -7486,31 +7925,23 @@
           <a:p>
             <a:pPr algn="ctr"/>
             <a:r>
-              <a:rPr sz="2000" b="1" i="0" lang="es-ES">
+              <a:rPr sz="2400" b="1" i="0" lang="es-ES">
                 <a:solidFill>
                   <a:srgbClr val="263445"/>
                 </a:solidFill>
               </a:rPr>
               <a:t>Contexto</a:t>
             </a:r>
+          </a:p>
+          <a:p>
+            <a:pPr algn="ctr"/>
             <a:r>
               <a:rPr sz="2000" b="0" i="0" lang="es-ES">
                 <a:solidFill>
                   <a:srgbClr val="263445"/>
                 </a:solidFill>
               </a:rPr>
-              <a:t> · lo que le das del caso</a:t>
-            </a:r>
-          </a:p>
-          <a:p>
-            <a:pPr algn="ctr"/>
-            <a:r>
-              <a:rPr sz="2000" b="0" i="0" lang="es-ES">
-                <a:solidFill>
-                  <a:srgbClr val="5E6B78"/>
-                </a:solidFill>
-              </a:rPr>
-              <a:t>historia clínica</a:t>
+              <a:t>lo que le das del caso</a:t>
             </a:r>
           </a:p>
         </p:txBody>
@@ -7523,8 +7954,8 @@
         </p:nvSpPr>
         <p:spPr>
           <a:xfrm>
-            <a:off x="4191000" y="4406900"/>
-            <a:ext cx="3810000" cy="952500"/>
+            <a:off x="4191000" y="4394200"/>
+            <a:ext cx="3810000" cy="698500"/>
           </a:xfrm>
           <a:prstGeom prst="rect">
             <a:avLst/>
@@ -7539,31 +7970,23 @@
           <a:p>
             <a:pPr algn="ctr"/>
             <a:r>
-              <a:rPr sz="2000" b="1" i="0" lang="es-ES">
+              <a:rPr sz="2400" b="1" i="0" lang="es-ES">
                 <a:solidFill>
                   <a:srgbClr val="8E2F79"/>
                 </a:solidFill>
               </a:rPr>
               <a:t>Modelo de lenguaje</a:t>
             </a:r>
+          </a:p>
+          <a:p>
+            <a:pPr algn="ctr"/>
             <a:r>
               <a:rPr sz="2000" b="0" i="0" lang="es-ES">
                 <a:solidFill>
                   <a:srgbClr val="263445"/>
                 </a:solidFill>
               </a:rPr>
-              <a:t> · predice texto</a:t>
-            </a:r>
-          </a:p>
-          <a:p>
-            <a:pPr algn="ctr"/>
-            <a:r>
-              <a:rPr sz="2000" b="0" i="0" lang="es-ES">
-                <a:solidFill>
-                  <a:srgbClr val="5E6B78"/>
-                </a:solidFill>
-              </a:rPr>
-              <a:t>lee, llama a la herramienta y redacta el borrador</a:t>
+              <a:t>predice texto</a:t>
             </a:r>
           </a:p>
         </p:txBody>
@@ -7576,8 +7999,8 @@
         </p:nvSpPr>
         <p:spPr>
           <a:xfrm>
-            <a:off x="8039100" y="4406900"/>
-            <a:ext cx="2603500" cy="952500"/>
+            <a:off x="8636000" y="4394200"/>
+            <a:ext cx="3048000" cy="698500"/>
           </a:xfrm>
           <a:prstGeom prst="rect">
             <a:avLst/>
@@ -7592,31 +8015,23 @@
           <a:p>
             <a:pPr algn="ctr"/>
             <a:r>
-              <a:rPr sz="2000" b="1" i="0" lang="es-ES">
+              <a:rPr sz="2400" b="1" i="0" lang="es-ES">
                 <a:solidFill>
                   <a:srgbClr val="2B7D3D"/>
                 </a:solidFill>
               </a:rPr>
               <a:t>Herramientas</a:t>
             </a:r>
+          </a:p>
+          <a:p>
+            <a:pPr algn="ctr"/>
             <a:r>
               <a:rPr sz="2000" b="0" i="0" lang="es-ES">
                 <a:solidFill>
                   <a:srgbClr val="263445"/>
                 </a:solidFill>
               </a:rPr>
-              <a:t> · código y programas validados</a:t>
-            </a:r>
-          </a:p>
-          <a:p>
-            <a:pPr algn="ctr"/>
-            <a:r>
-              <a:rPr sz="2000" b="0" i="0" lang="es-ES">
-                <a:solidFill>
-                  <a:srgbClr val="5E6B78"/>
-                </a:solidFill>
-              </a:rPr>
-              <a:t>programa bayesiano</a:t>
+              <a:t>código y programas validados</a:t>
             </a:r>
           </a:p>
         </p:txBody>
@@ -7629,7 +8044,7 @@
         </p:nvSpPr>
         <p:spPr>
           <a:xfrm>
-            <a:off x="508000" y="5803900"/>
+            <a:off x="508000" y="5702300"/>
             <a:ext cx="11176000" cy="381000"/>
           </a:xfrm>
           <a:prstGeom prst="rect">
@@ -7724,7 +8139,41 @@
         <p:spPr>
           <a:xfrm>
             <a:off x="508000" y="749300"/>
-            <a:ext cx="11176000" cy="952500"/>
+            <a:ext cx="11176000" cy="635000"/>
+          </a:xfrm>
+          <a:prstGeom prst="rect">
+            <a:avLst/>
+          </a:prstGeom>
+          <a:noFill/>
+        </p:spPr>
+        <p:txBody>
+          <a:bodyPr wrap="square" lIns="0" tIns="0" rIns="0" bIns="0" anchor="ctr">
+            <a:noAutofit/>
+          </a:bodyPr>
+          <a:lstStyle/>
+          <a:p>
+            <a:pPr algn="l"/>
+            <a:r>
+              <a:rPr sz="3600" b="1" i="0" lang="es-ES">
+                <a:solidFill>
+                  <a:srgbClr val="263445"/>
+                </a:solidFill>
+              </a:rPr>
+              <a:t>TDM-AID: cada tarea, a la pieza que mejor la hace.</a:t>
+            </a:r>
+          </a:p>
+        </p:txBody>
+      </p:sp>
+      <p:sp>
+        <p:nvSpPr>
+          <p:cNvPr id="3" name="Subtítulo"/>
+          <p:cNvSpPr txBox="1"/>
+          <p:nvPr/>
+        </p:nvSpPr>
+        <p:spPr>
+          <a:xfrm>
+            <a:off x="508000" y="1384300"/>
+            <a:ext cx="11176000" cy="254000"/>
           </a:xfrm>
           <a:prstGeom prst="rect">
             <a:avLst/>
@@ -7737,110 +8186,66 @@
           </a:bodyPr>
           <a:lstStyle/>
           <a:p>
-            <a:pPr algn="l">
-              <a:lnSpc>
-                <a:spcPct val="92000"/>
-              </a:lnSpc>
-            </a:pPr>
-            <a:r>
-              <a:rPr sz="3200" b="0" i="0" lang="es-ES">
-                <a:solidFill>
-                  <a:srgbClr val="263445"/>
-                </a:solidFill>
-              </a:rPr>
-              <a:t>La lección de TDM-AID: cada tarea, a la pieza que mejor la hace.</a:t>
-            </a:r>
-          </a:p>
-        </p:txBody>
-      </p:sp>
-      <p:sp>
-        <p:nvSpPr>
-          <p:cNvPr id="3" name="Fondo radiografía"/>
-          <p:cNvSpPr/>
-          <p:nvPr/>
-        </p:nvSpPr>
-        <p:spPr>
-          <a:xfrm>
-            <a:off x="508000" y="1790700"/>
-            <a:ext cx="11176000" cy="4445000"/>
+            <a:pPr algn="l"/>
+            <a:r>
+              <a:rPr sz="2000" b="0" i="1" lang="es-ES">
+                <a:solidFill>
+                  <a:srgbClr val="5E6B78"/>
+                </a:solidFill>
+              </a:rPr>
+              <a:t>Prepublicación · 30 casos retrospectivos · función renal estable</a:t>
+            </a:r>
+          </a:p>
+        </p:txBody>
+      </p:sp>
+      <p:sp>
+        <p:nvSpPr>
+          <p:cNvPr id="4" name="Rótulo arnés"/>
+          <p:cNvSpPr txBox="1"/>
+          <p:nvPr/>
+        </p:nvSpPr>
+        <p:spPr>
+          <a:xfrm>
+            <a:off x="508000" y="2095500"/>
+            <a:ext cx="3810000" cy="317500"/>
+          </a:xfrm>
+          <a:prstGeom prst="rect">
+            <a:avLst/>
+          </a:prstGeom>
+          <a:noFill/>
+        </p:spPr>
+        <p:txBody>
+          <a:bodyPr wrap="square" lIns="0" tIns="0" rIns="0" bIns="0" anchor="b">
+            <a:noAutofit/>
+          </a:bodyPr>
+          <a:lstStyle/>
+          <a:p>
+            <a:pPr algn="l"/>
+            <a:r>
+              <a:rPr sz="2400" b="1" i="0" lang="es-ES">
+                <a:solidFill>
+                  <a:srgbClr val="D42A3B"/>
+                </a:solidFill>
+              </a:rPr>
+              <a:t>Arnés</a:t>
+            </a:r>
+          </a:p>
+        </p:txBody>
+      </p:sp>
+      <p:sp>
+        <p:nvSpPr>
+          <p:cNvPr id="5" name="Arnés"/>
+          <p:cNvSpPr/>
+          <p:nvPr/>
+        </p:nvSpPr>
+        <p:spPr>
+          <a:xfrm>
+            <a:off x="508000" y="2476500"/>
+            <a:ext cx="11176000" cy="3403600"/>
           </a:xfrm>
           <a:prstGeom prst="roundRect">
             <a:avLst>
-              <a:gd name="adj" fmla="val 2285"/>
-            </a:avLst>
-          </a:prstGeom>
-          <a:solidFill>
-            <a:srgbClr val="0E1B2C"/>
-          </a:solidFill>
-          <a:ln>
-            <a:noFill/>
-          </a:ln>
-        </p:spPr>
-        <p:txBody>
-          <a:bodyPr rtlCol="0" anchor="ctr"/>
-          <a:lstStyle/>
-          <a:p>
-            <a:pPr algn="ctr"/>
-          </a:p>
-        </p:txBody>
-      </p:sp>
-      <p:sp>
-        <p:nvSpPr>
-          <p:cNvPr id="4" name="Franja"/>
-          <p:cNvSpPr txBox="1"/>
-          <p:nvPr/>
-        </p:nvSpPr>
-        <p:spPr>
-          <a:xfrm>
-            <a:off x="711200" y="1905000"/>
-            <a:ext cx="4826000" cy="584200"/>
-          </a:xfrm>
-          <a:prstGeom prst="rect">
-            <a:avLst/>
-          </a:prstGeom>
-          <a:noFill/>
-        </p:spPr>
-        <p:txBody>
-          <a:bodyPr wrap="square" lIns="0" tIns="0" rIns="0" bIns="0" anchor="ctr">
-            <a:noAutofit/>
-          </a:bodyPr>
-          <a:lstStyle/>
-          <a:p>
-            <a:pPr algn="l"/>
-            <a:r>
-              <a:rPr sz="2000" b="0" i="1" lang="es-ES">
-                <a:solidFill>
-                  <a:srgbClr val="DDE7F0"/>
-                </a:solidFill>
-              </a:rPr>
-              <a:t>Prepublicación · 30 casos retrospectivos ·</a:t>
-            </a:r>
-            <a:br/>
-            <a:r>
-              <a:rPr sz="2000" b="0" i="1" lang="es-ES">
-                <a:solidFill>
-                  <a:srgbClr val="DDE7F0"/>
-                </a:solidFill>
-              </a:rPr>
-              <a:t>función renal estable</a:t>
-            </a:r>
-          </a:p>
-        </p:txBody>
-      </p:sp>
-      <p:sp>
-        <p:nvSpPr>
-          <p:cNvPr id="5" name="Arnés"/>
-          <p:cNvSpPr/>
-          <p:nvPr/>
-        </p:nvSpPr>
-        <p:spPr>
-          <a:xfrm>
-            <a:off x="1452054" y="2667000"/>
-            <a:ext cx="9288145" cy="3048000"/>
-          </a:xfrm>
-          <a:prstGeom prst="roundRect">
-            <a:avLst>
-              <a:gd name="adj" fmla="val 3333"/>
+              <a:gd name="adj" fmla="val 2985"/>
             </a:avLst>
           </a:prstGeom>
           <a:noFill/>
@@ -7859,67 +8264,9 @@
           </a:p>
         </p:txBody>
       </p:sp>
-      <p:sp>
-        <p:nvSpPr>
-          <p:cNvPr id="6" name="Rótulo arnés"/>
-          <p:cNvSpPr txBox="1"/>
-          <p:nvPr/>
-        </p:nvSpPr>
-        <p:spPr>
-          <a:xfrm>
-            <a:off x="1579054" y="2755900"/>
-            <a:ext cx="1016000" cy="279400"/>
-          </a:xfrm>
-          <a:prstGeom prst="rect">
-            <a:avLst/>
-          </a:prstGeom>
-          <a:noFill/>
-        </p:spPr>
-        <p:txBody>
-          <a:bodyPr wrap="square" lIns="0" tIns="0" rIns="0" bIns="0" anchor="t">
-            <a:noAutofit/>
-          </a:bodyPr>
-          <a:lstStyle/>
-          <a:p>
-            <a:pPr algn="l"/>
-            <a:r>
-              <a:rPr sz="2000" b="1" i="0" lang="es-ES">
-                <a:solidFill>
-                  <a:srgbClr val="FFFFFF"/>
-                </a:solidFill>
-              </a:rPr>
-              <a:t>Arnés</a:t>
-            </a:r>
-          </a:p>
-        </p:txBody>
-      </p:sp>
       <p:pic>
         <p:nvPicPr>
-          <p:cNvPr id="7" name="Loro robótico (modelo de lenguaje)" descr="Loro robótico (modelo de lenguaje)"/>
-          <p:cNvPicPr>
-            <a:picLocks noChangeAspect="1"/>
-          </p:cNvPicPr>
-          <p:nvPr/>
-        </p:nvPicPr>
-        <p:blipFill>
-          <a:blip r:embed="rId2"/>
-          <a:stretch>
-            <a:fillRect/>
-          </a:stretch>
-        </p:blipFill>
-        <p:spPr>
-          <a:xfrm>
-            <a:off x="5712227" y="2819400"/>
-            <a:ext cx="767546" cy="1498600"/>
-          </a:xfrm>
-          <a:prstGeom prst="rect">
-            <a:avLst/>
-          </a:prstGeom>
-        </p:spPr>
-      </p:pic>
-      <p:pic>
-        <p:nvPicPr>
-          <p:cNvPr id="8" name="Ficha del caso" descr="Ficha del caso"/>
+          <p:cNvPr id="6" name="Loro robótico (modelo de lenguaje)" descr="Loro robótico (modelo de lenguaje)"/>
           <p:cNvPicPr>
             <a:picLocks noChangeAspect="1"/>
           </p:cNvPicPr>
@@ -7933,8 +8280,8 @@
         </p:blipFill>
         <p:spPr>
           <a:xfrm>
-            <a:off x="2482197" y="3092450"/>
-            <a:ext cx="737905" cy="952500"/>
+            <a:off x="5685321" y="2667000"/>
+            <a:ext cx="821359" cy="1651000"/>
           </a:xfrm>
           <a:prstGeom prst="rect">
             <a:avLst/>
@@ -7943,7 +8290,7 @@
       </p:pic>
       <p:pic>
         <p:nvPicPr>
-          <p:cNvPr id="9" name="Icono curva" descr="Icono curva"/>
+          <p:cNvPr id="7" name="Ficha del caso" descr="Ficha del caso"/>
           <p:cNvPicPr>
             <a:picLocks noChangeAspect="1"/>
           </p:cNvPicPr>
@@ -7957,8 +8304,8 @@
         </p:blipFill>
         <p:spPr>
           <a:xfrm>
-            <a:off x="9126361" y="2870200"/>
-            <a:ext cx="428978" cy="406400"/>
+            <a:off x="1595668" y="2921000"/>
+            <a:ext cx="872664" cy="1143000"/>
           </a:xfrm>
           <a:prstGeom prst="rect">
             <a:avLst/>
@@ -7967,7 +8314,7 @@
       </p:pic>
       <p:pic>
         <p:nvPicPr>
-          <p:cNvPr id="10" name="Icono campana" descr="Icono campana"/>
+          <p:cNvPr id="8" name="Icono curva" descr="Icono curva"/>
           <p:cNvPicPr>
             <a:picLocks noChangeAspect="1"/>
           </p:cNvPicPr>
@@ -7981,8 +8328,8 @@
         </p:blipFill>
         <p:spPr>
           <a:xfrm>
-            <a:off x="9091083" y="3365500"/>
-            <a:ext cx="499533" cy="406400"/>
+            <a:off x="9917684" y="2715260"/>
+            <a:ext cx="484632" cy="457200"/>
           </a:xfrm>
           <a:prstGeom prst="rect">
             <a:avLst/>
@@ -7991,7 +8338,7 @@
       </p:pic>
       <p:pic>
         <p:nvPicPr>
-          <p:cNvPr id="11" name="Icono red" descr="Icono red"/>
+          <p:cNvPr id="9" name="Icono campana" descr="Icono campana"/>
           <p:cNvPicPr>
             <a:picLocks noChangeAspect="1"/>
           </p:cNvPicPr>
@@ -8005,62 +8352,17 @@
         </p:blipFill>
         <p:spPr>
           <a:xfrm>
-            <a:off x="9137650" y="3860800"/>
-            <a:ext cx="406400" cy="406400"/>
+            <a:off x="9874250" y="3263900"/>
+            <a:ext cx="571500" cy="457200"/>
           </a:xfrm>
           <a:prstGeom prst="rect">
             <a:avLst/>
           </a:prstGeom>
         </p:spPr>
       </p:pic>
-      <p:cxnSp>
-        <p:nvCxnSpPr>
-          <p:cNvPr id="12" name="Contexto → modelo"/>
-          <p:cNvCxnSpPr/>
-          <p:nvPr/>
-        </p:nvCxnSpPr>
-        <p:spPr>
-          <a:xfrm>
-            <a:off x="3359150" y="3568700"/>
-            <a:ext cx="2241550" cy="0"/>
-          </a:xfrm>
-          <a:prstGeom prst="line">
-            <a:avLst/>
-          </a:prstGeom>
-          <a:ln w="31750">
-            <a:solidFill>
-              <a:srgbClr val="A9DBFF"/>
-            </a:solidFill>
-            <a:tailEnd type="triangle" w="med" len="med"/>
-          </a:ln>
-        </p:spPr>
-      </p:cxnSp>
-      <p:cxnSp>
-        <p:nvCxnSpPr>
-          <p:cNvPr id="13" name="Modelo ↔ herramientas"/>
-          <p:cNvCxnSpPr/>
-          <p:nvPr/>
-        </p:nvCxnSpPr>
-        <p:spPr>
-          <a:xfrm>
-            <a:off x="6591300" y="3568700"/>
-            <a:ext cx="2343150" cy="0"/>
-          </a:xfrm>
-          <a:prstGeom prst="line">
-            <a:avLst/>
-          </a:prstGeom>
-          <a:ln w="31750">
-            <a:solidFill>
-              <a:srgbClr val="A9DBFF"/>
-            </a:solidFill>
-            <a:headEnd type="triangle" w="med" len="med"/>
-            <a:tailEnd type="triangle" w="med" len="med"/>
-          </a:ln>
-        </p:spPr>
-      </p:cxnSp>
       <p:pic>
         <p:nvPicPr>
-          <p:cNvPr id="14" name="Farmacéutico con pluma" descr="Farmacéutico con pluma"/>
+          <p:cNvPr id="10" name="Icono red" descr="Icono red"/>
           <p:cNvPicPr>
             <a:picLocks noChangeAspect="1"/>
           </p:cNvPicPr>
@@ -8074,8 +8376,8 @@
         </p:blipFill>
         <p:spPr>
           <a:xfrm>
-            <a:off x="5720854" y="1841500"/>
-            <a:ext cx="750291" cy="660400"/>
+            <a:off x="9931400" y="3812540"/>
+            <a:ext cx="457200" cy="457200"/>
           </a:xfrm>
           <a:prstGeom prst="rect">
             <a:avLst/>
@@ -8084,14 +8386,83 @@
       </p:pic>
       <p:cxnSp>
         <p:nvCxnSpPr>
-          <p:cNvPr id="15" name="Supervisión"/>
+          <p:cNvPr id="11" name="Contexto → modelo"/>
           <p:cNvCxnSpPr/>
           <p:nvPr/>
         </p:nvCxnSpPr>
         <p:spPr>
           <a:xfrm>
-            <a:off x="6096000" y="2527300"/>
-            <a:ext cx="0" cy="254000"/>
+            <a:off x="2673350" y="3492500"/>
+            <a:ext cx="2927350" cy="0"/>
+          </a:xfrm>
+          <a:prstGeom prst="line">
+            <a:avLst/>
+          </a:prstGeom>
+          <a:ln w="31750">
+            <a:solidFill>
+              <a:srgbClr val="263445"/>
+            </a:solidFill>
+            <a:tailEnd type="triangle" w="med" len="med"/>
+          </a:ln>
+        </p:spPr>
+      </p:cxnSp>
+      <p:cxnSp>
+        <p:nvCxnSpPr>
+          <p:cNvPr id="12" name="Modelo ↔ herramientas"/>
+          <p:cNvCxnSpPr/>
+          <p:nvPr/>
+        </p:nvCxnSpPr>
+        <p:spPr>
+          <a:xfrm>
+            <a:off x="6591300" y="3492500"/>
+            <a:ext cx="3134360" cy="0"/>
+          </a:xfrm>
+          <a:prstGeom prst="line">
+            <a:avLst/>
+          </a:prstGeom>
+          <a:ln w="31750">
+            <a:solidFill>
+              <a:srgbClr val="263445"/>
+            </a:solidFill>
+            <a:headEnd type="triangle" w="med" len="med"/>
+            <a:tailEnd type="triangle" w="med" len="med"/>
+          </a:ln>
+        </p:spPr>
+      </p:cxnSp>
+      <p:pic>
+        <p:nvPicPr>
+          <p:cNvPr id="13" name="Farmacéutico con pluma" descr="Farmacéutico con pluma"/>
+          <p:cNvPicPr>
+            <a:picLocks noChangeAspect="1"/>
+          </p:cNvPicPr>
+          <p:nvPr/>
+        </p:nvPicPr>
+        <p:blipFill>
+          <a:blip r:embed="rId8"/>
+          <a:stretch>
+            <a:fillRect/>
+          </a:stretch>
+        </p:blipFill>
+        <p:spPr>
+          <a:xfrm>
+            <a:off x="5717713" y="1701800"/>
+            <a:ext cx="756575" cy="660400"/>
+          </a:xfrm>
+          <a:prstGeom prst="rect">
+            <a:avLst/>
+          </a:prstGeom>
+        </p:spPr>
+      </p:pic>
+      <p:cxnSp>
+        <p:nvCxnSpPr>
+          <p:cNvPr id="14" name="Supervisión"/>
+          <p:cNvCxnSpPr/>
+          <p:nvPr/>
+        </p:nvCxnSpPr>
+        <p:spPr>
+          <a:xfrm>
+            <a:off x="6096000" y="2387600"/>
+            <a:ext cx="0" cy="241300"/>
           </a:xfrm>
           <a:prstGeom prst="line">
             <a:avLst/>
@@ -8107,13 +8478,13 @@
       </p:cxnSp>
       <p:sp>
         <p:nvSpPr>
-          <p:cNvPr id="16" name="TextBox 15"/>
+          <p:cNvPr id="15" name="TextBox 14"/>
           <p:cNvSpPr txBox="1"/>
           <p:nvPr/>
         </p:nvSpPr>
         <p:spPr>
           <a:xfrm>
-            <a:off x="6588709" y="1854200"/>
+            <a:off x="6588709" y="1701800"/>
             <a:ext cx="1905000" cy="279400"/>
           </a:xfrm>
           <a:prstGeom prst="rect">
@@ -8129,9 +8500,9 @@
           <a:p>
             <a:pPr algn="l"/>
             <a:r>
-              <a:rPr sz="2000" b="1" i="0" lang="es-ES">
-                <a:solidFill>
-                  <a:srgbClr val="FFFFFF"/>
+              <a:rPr sz="2400" b="1" i="0" lang="es-ES">
+                <a:solidFill>
+                  <a:srgbClr val="2F5480"/>
                 </a:solidFill>
               </a:rPr>
               <a:t>Farmacéutico</a:t>
@@ -8141,13 +8512,13 @@
       </p:sp>
       <p:sp>
         <p:nvSpPr>
-          <p:cNvPr id="17" name="Estado farmacéutico"/>
-          <p:cNvSpPr/>
-          <p:nvPr/>
-        </p:nvSpPr>
-        <p:spPr>
-          <a:xfrm>
-            <a:off x="6588709" y="2171700"/>
+          <p:cNvPr id="16" name="Estado farmacéutico"/>
+          <p:cNvSpPr/>
+          <p:nvPr/>
+        </p:nvSpPr>
+        <p:spPr>
+          <a:xfrm>
+            <a:off x="6588709" y="2032000"/>
             <a:ext cx="3586401" cy="292100"/>
           </a:xfrm>
           <a:prstGeom prst="roundRect">
@@ -8182,14 +8553,14 @@
       </p:sp>
       <p:sp>
         <p:nvSpPr>
-          <p:cNvPr id="18" name="TextBox 17"/>
+          <p:cNvPr id="17" name="TextBox 16"/>
           <p:cNvSpPr txBox="1"/>
           <p:nvPr/>
         </p:nvSpPr>
         <p:spPr>
           <a:xfrm>
-            <a:off x="1549400" y="4406900"/>
-            <a:ext cx="2603500" cy="279400"/>
+            <a:off x="508000" y="4394200"/>
+            <a:ext cx="3048000" cy="355600"/>
           </a:xfrm>
           <a:prstGeom prst="rect">
             <a:avLst/>
@@ -8204,9 +8575,9 @@
           <a:p>
             <a:pPr algn="ctr"/>
             <a:r>
-              <a:rPr sz="2000" b="1" i="0" lang="es-ES">
-                <a:solidFill>
-                  <a:srgbClr val="FFFFFF"/>
+              <a:rPr sz="2400" b="1" i="0" lang="es-ES">
+                <a:solidFill>
+                  <a:srgbClr val="263445"/>
                 </a:solidFill>
               </a:rPr>
               <a:t>Contexto</a:t>
@@ -8216,13 +8587,81 @@
       </p:sp>
       <p:sp>
         <p:nvSpPr>
-          <p:cNvPr id="19" name="Estado contexto"/>
-          <p:cNvSpPr/>
-          <p:nvPr/>
-        </p:nvSpPr>
-        <p:spPr>
-          <a:xfrm>
-            <a:off x="1898650" y="4724400"/>
+          <p:cNvPr id="18" name="TextBox 17"/>
+          <p:cNvSpPr txBox="1"/>
+          <p:nvPr/>
+        </p:nvSpPr>
+        <p:spPr>
+          <a:xfrm>
+            <a:off x="4191000" y="4394200"/>
+            <a:ext cx="3810000" cy="355600"/>
+          </a:xfrm>
+          <a:prstGeom prst="rect">
+            <a:avLst/>
+          </a:prstGeom>
+          <a:noFill/>
+        </p:spPr>
+        <p:txBody>
+          <a:bodyPr wrap="square" lIns="0" tIns="0" rIns="0" bIns="0" anchor="t">
+            <a:noAutofit/>
+          </a:bodyPr>
+          <a:lstStyle/>
+          <a:p>
+            <a:pPr algn="ctr"/>
+            <a:r>
+              <a:rPr sz="2400" b="1" i="0" lang="es-ES">
+                <a:solidFill>
+                  <a:srgbClr val="8E2F79"/>
+                </a:solidFill>
+              </a:rPr>
+              <a:t>Modelo (GPT-4o)</a:t>
+            </a:r>
+          </a:p>
+        </p:txBody>
+      </p:sp>
+      <p:sp>
+        <p:nvSpPr>
+          <p:cNvPr id="19" name="TextBox 18"/>
+          <p:cNvSpPr txBox="1"/>
+          <p:nvPr/>
+        </p:nvSpPr>
+        <p:spPr>
+          <a:xfrm>
+            <a:off x="8636000" y="4394200"/>
+            <a:ext cx="3048000" cy="355600"/>
+          </a:xfrm>
+          <a:prstGeom prst="rect">
+            <a:avLst/>
+          </a:prstGeom>
+          <a:noFill/>
+        </p:spPr>
+        <p:txBody>
+          <a:bodyPr wrap="square" lIns="0" tIns="0" rIns="0" bIns="0" anchor="t">
+            <a:noAutofit/>
+          </a:bodyPr>
+          <a:lstStyle/>
+          <a:p>
+            <a:pPr algn="ctr"/>
+            <a:r>
+              <a:rPr sz="2400" b="1" i="0" lang="es-ES">
+                <a:solidFill>
+                  <a:srgbClr val="2B7D3D"/>
+                </a:solidFill>
+              </a:rPr>
+              <a:t>Herramienta</a:t>
+            </a:r>
+          </a:p>
+        </p:txBody>
+      </p:sp>
+      <p:sp>
+        <p:nvSpPr>
+          <p:cNvPr id="20" name="Estado contexto"/>
+          <p:cNvSpPr/>
+          <p:nvPr/>
+        </p:nvSpPr>
+        <p:spPr>
+          <a:xfrm>
+            <a:off x="1079500" y="4787900"/>
             <a:ext cx="1905000" cy="584200"/>
           </a:xfrm>
           <a:prstGeom prst="roundRect">
@@ -8266,47 +8705,13 @@
       </p:sp>
       <p:sp>
         <p:nvSpPr>
-          <p:cNvPr id="20" name="TextBox 19"/>
-          <p:cNvSpPr txBox="1"/>
-          <p:nvPr/>
-        </p:nvSpPr>
-        <p:spPr>
-          <a:xfrm>
-            <a:off x="4191000" y="4406900"/>
-            <a:ext cx="3810000" cy="279400"/>
-          </a:xfrm>
-          <a:prstGeom prst="rect">
-            <a:avLst/>
-          </a:prstGeom>
-          <a:noFill/>
-        </p:spPr>
-        <p:txBody>
-          <a:bodyPr wrap="square" lIns="0" tIns="0" rIns="0" bIns="0" anchor="t">
-            <a:noAutofit/>
-          </a:bodyPr>
-          <a:lstStyle/>
-          <a:p>
-            <a:pPr algn="ctr"/>
-            <a:r>
-              <a:rPr sz="2000" b="1" i="0" lang="es-ES">
-                <a:solidFill>
-                  <a:srgbClr val="FFFFFF"/>
-                </a:solidFill>
-              </a:rPr>
-              <a:t>Modelo (GPT-4o)</a:t>
-            </a:r>
-          </a:p>
-        </p:txBody>
-      </p:sp>
-      <p:sp>
-        <p:nvSpPr>
           <p:cNvPr id="21" name="Estado modelo"/>
           <p:cNvSpPr/>
           <p:nvPr/>
         </p:nvSpPr>
         <p:spPr>
           <a:xfrm>
-            <a:off x="5061550" y="4724400"/>
+            <a:off x="5061550" y="4787900"/>
             <a:ext cx="2068899" cy="292100"/>
           </a:xfrm>
           <a:prstGeom prst="roundRect">
@@ -8347,7 +8752,7 @@
         </p:nvSpPr>
         <p:spPr>
           <a:xfrm>
-            <a:off x="4313282" y="5041900"/>
+            <a:off x="4313282" y="5118100"/>
             <a:ext cx="3565436" cy="292100"/>
           </a:xfrm>
           <a:prstGeom prst="roundRect">
@@ -8388,7 +8793,7 @@
         </p:nvSpPr>
         <p:spPr>
           <a:xfrm>
-            <a:off x="4663361" y="5359400"/>
+            <a:off x="4663361" y="5448300"/>
             <a:ext cx="2865279" cy="292100"/>
           </a:xfrm>
           <a:prstGeom prst="roundRect">
@@ -8423,58 +8828,13 @@
       </p:sp>
       <p:sp>
         <p:nvSpPr>
-          <p:cNvPr id="24" name="TextBox 23"/>
-          <p:cNvSpPr txBox="1"/>
-          <p:nvPr/>
-        </p:nvSpPr>
-        <p:spPr>
-          <a:xfrm>
-            <a:off x="8191500" y="4406900"/>
-            <a:ext cx="2451100" cy="889000"/>
-          </a:xfrm>
-          <a:prstGeom prst="rect">
-            <a:avLst/>
-          </a:prstGeom>
-          <a:noFill/>
-        </p:spPr>
-        <p:txBody>
-          <a:bodyPr wrap="square" lIns="0" tIns="0" rIns="0" bIns="0" anchor="t">
-            <a:noAutofit/>
-          </a:bodyPr>
-          <a:lstStyle/>
-          <a:p>
-            <a:pPr algn="ctr"/>
-            <a:r>
-              <a:rPr sz="2000" b="1" i="0" lang="es-ES">
-                <a:solidFill>
-                  <a:srgbClr val="FFFFFF"/>
-                </a:solidFill>
-              </a:rPr>
-              <a:t>Herramienta</a:t>
-            </a:r>
-          </a:p>
-          <a:p>
-            <a:pPr algn="ctr"/>
-            <a:r>
-              <a:rPr sz="2000" b="0" i="0" lang="es-ES">
-                <a:solidFill>
-                  <a:srgbClr val="DDE7F0"/>
-                </a:solidFill>
-              </a:rPr>
-              <a:t>(motor de ecuaciones de primer orden)</a:t>
-            </a:r>
-          </a:p>
-        </p:txBody>
-      </p:sp>
-      <p:sp>
-        <p:nvSpPr>
-          <p:cNvPr id="25" name="Estado herramienta"/>
-          <p:cNvSpPr/>
-          <p:nvPr/>
-        </p:nvSpPr>
-        <p:spPr>
-          <a:xfrm>
-            <a:off x="8222099" y="5359400"/>
+          <p:cNvPr id="24" name="Estado herramienta"/>
+          <p:cNvSpPr/>
+          <p:nvPr/>
+        </p:nvSpPr>
+        <p:spPr>
+          <a:xfrm>
+            <a:off x="8965049" y="4787900"/>
             <a:ext cx="2389902" cy="292100"/>
           </a:xfrm>
           <a:prstGeom prst="roundRect">
@@ -8509,14 +8869,14 @@
       </p:sp>
       <p:sp>
         <p:nvSpPr>
-          <p:cNvPr id="26" name="Flecha curva"/>
-          <p:cNvSpPr/>
-          <p:nvPr/>
-        </p:nvSpPr>
-        <p:spPr>
-          <a:xfrm>
-            <a:off x="7916817" y="3949700"/>
-            <a:ext cx="979532" cy="1238250"/>
+          <p:cNvPr id="25" name="Flecha curva"/>
+          <p:cNvSpPr/>
+          <p:nvPr/>
+        </p:nvSpPr>
+        <p:spPr>
+          <a:xfrm>
+            <a:off x="7929517" y="3746500"/>
+            <a:ext cx="1773282" cy="1517650"/>
           </a:xfrm>
           <a:custGeom>
             <a:avLst/>
@@ -8525,14 +8885,14 @@
             <a:cxnLst/>
             <a:rect l="0" t="0" r="r" b="b"/>
             <a:pathLst>
-              <a:path w="979532" h="1238250" fill="none">
+              <a:path w="1773282" h="1517650" fill="none">
                 <a:moveTo>
-                  <a:pt x="0" y="1238250"/>
+                  <a:pt x="0" y="1517650"/>
                 </a:moveTo>
                 <a:cubicBezTo>
-                  <a:pt x="114300" y="711200"/>
-                  <a:pt x="25400" y="63500"/>
-                  <a:pt x="979532" y="0"/>
+                  <a:pt x="520700" y="1517650"/>
+                  <a:pt x="1011282" y="127000"/>
+                  <a:pt x="1773282" y="0"/>
                 </a:cubicBezTo>
               </a:path>
             </a:pathLst>
@@ -8540,7 +8900,7 @@
           <a:noFill/>
           <a:ln w="31750" cap="rnd">
             <a:solidFill>
-              <a:srgbClr val="FFFFFF"/>
+              <a:srgbClr val="263445"/>
             </a:solidFill>
             <a:round/>
             <a:tailEnd type="triangle" w="med" len="med"/>
@@ -8549,14 +8909,14 @@
       </p:sp>
       <p:sp>
         <p:nvSpPr>
-          <p:cNvPr id="27" name="Rótulo cálculo"/>
+          <p:cNvPr id="26" name="Rótulo cálculo"/>
           <p:cNvSpPr txBox="1"/>
           <p:nvPr/>
         </p:nvSpPr>
         <p:spPr>
           <a:xfrm>
-            <a:off x="6515100" y="3746500"/>
-            <a:ext cx="1714500" cy="279400"/>
+            <a:off x="7048500" y="3937000"/>
+            <a:ext cx="1651000" cy="279400"/>
           </a:xfrm>
           <a:prstGeom prst="rect">
             <a:avLst/>
@@ -8571,9 +8931,9 @@
           <a:p>
             <a:pPr algn="l"/>
             <a:r>
-              <a:rPr sz="2000" b="0" i="1" lang="es-ES">
-                <a:solidFill>
-                  <a:srgbClr val="FFFFFF"/>
+              <a:rPr sz="2200" b="0" i="1" lang="es-ES">
+                <a:solidFill>
+                  <a:srgbClr val="263445"/>
                 </a:solidFill>
               </a:rPr>
               <a:t>esto es cálculo</a:t>
@@ -8583,13 +8943,13 @@
       </p:sp>
       <p:sp>
         <p:nvSpPr>
-          <p:cNvPr id="28" name="Estado arnés"/>
-          <p:cNvSpPr/>
-          <p:nvPr/>
-        </p:nvSpPr>
-        <p:spPr>
-          <a:xfrm>
-            <a:off x="1452054" y="5829300"/>
+          <p:cNvPr id="27" name="Estado arnés"/>
+          <p:cNvSpPr/>
+          <p:nvPr/>
+        </p:nvSpPr>
+        <p:spPr>
+          <a:xfrm>
+            <a:off x="508000" y="5956300"/>
             <a:ext cx="5125839" cy="292100"/>
           </a:xfrm>
           <a:prstGeom prst="roundRect">
@@ -8624,14 +8984,14 @@
       </p:sp>
       <p:sp>
         <p:nvSpPr>
-          <p:cNvPr id="29" name="Flecha curva"/>
-          <p:cNvSpPr/>
-          <p:nvPr/>
-        </p:nvSpPr>
-        <p:spPr>
-          <a:xfrm>
-            <a:off x="6615993" y="5740400"/>
-            <a:ext cx="406400" cy="234950"/>
+          <p:cNvPr id="28" name="Flecha curva"/>
+          <p:cNvSpPr/>
+          <p:nvPr/>
+        </p:nvSpPr>
+        <p:spPr>
+          <a:xfrm>
+            <a:off x="5671939" y="5905500"/>
+            <a:ext cx="342900" cy="196850"/>
           </a:xfrm>
           <a:custGeom>
             <a:avLst/>
@@ -8640,14 +9000,14 @@
             <a:cxnLst/>
             <a:rect l="0" t="0" r="r" b="b"/>
             <a:pathLst>
-              <a:path w="406400" h="234950" fill="none">
+              <a:path w="342900" h="196850" fill="none">
                 <a:moveTo>
-                  <a:pt x="0" y="234950"/>
+                  <a:pt x="0" y="196850"/>
                 </a:moveTo>
                 <a:cubicBezTo>
-                  <a:pt x="215900" y="234950"/>
-                  <a:pt x="406400" y="127000"/>
-                  <a:pt x="406400" y="0"/>
+                  <a:pt x="215900" y="196850"/>
+                  <a:pt x="342900" y="76200"/>
+                  <a:pt x="342900" y="0"/>
                 </a:cubicBezTo>
               </a:path>
             </a:pathLst>
@@ -8655,7 +9015,7 @@
           <a:noFill/>
           <a:ln w="31750" cap="rnd">
             <a:solidFill>
-              <a:srgbClr val="FFFFFF"/>
+              <a:srgbClr val="263445"/>
             </a:solidFill>
             <a:round/>
             <a:tailEnd type="triangle" w="med" len="med"/>
@@ -8664,13 +9024,13 @@
       </p:sp>
       <p:sp>
         <p:nvSpPr>
-          <p:cNvPr id="30" name="Rótulo límite"/>
+          <p:cNvPr id="29" name="Rótulo límite"/>
           <p:cNvSpPr txBox="1"/>
           <p:nvPr/>
         </p:nvSpPr>
         <p:spPr>
           <a:xfrm>
-            <a:off x="7149394" y="5829300"/>
+            <a:off x="6141839" y="5956300"/>
             <a:ext cx="1905000" cy="292100"/>
           </a:xfrm>
           <a:prstGeom prst="rect">
@@ -8686,9 +9046,9 @@
           <a:p>
             <a:pPr algn="l"/>
             <a:r>
-              <a:rPr sz="2000" b="0" i="1" lang="es-ES">
-                <a:solidFill>
-                  <a:srgbClr val="FFFFFF"/>
+              <a:rPr sz="2200" b="0" i="1" lang="es-ES">
+                <a:solidFill>
+                  <a:srgbClr val="263445"/>
                 </a:solidFill>
               </a:rPr>
               <a:t>esto es un límite</a:t>
@@ -8698,7 +9058,7 @@
       </p:sp>
       <p:sp>
         <p:nvSpPr>
-          <p:cNvPr id="31" name="Fuente"/>
+          <p:cNvPr id="30" name="Fuente"/>
           <p:cNvSpPr txBox="1"/>
           <p:nvPr/>
         </p:nvSpPr>
@@ -8757,7 +9117,7 @@
         <p:spPr>
           <a:xfrm>
             <a:off x="508000" y="749300"/>
-            <a:ext cx="11176000" cy="952500"/>
+            <a:ext cx="11176000" cy="635000"/>
           </a:xfrm>
           <a:prstGeom prst="rect">
             <a:avLst/>
@@ -8765,32 +9125,19 @@
           <a:noFill/>
         </p:spPr>
         <p:txBody>
-          <a:bodyPr wrap="square" lIns="0" tIns="0" rIns="0" bIns="0" anchor="t">
+          <a:bodyPr wrap="square" lIns="0" tIns="0" rIns="0" bIns="0" anchor="ctr">
             <a:noAutofit/>
           </a:bodyPr>
           <a:lstStyle/>
           <a:p>
-            <a:pPr algn="l">
-              <a:lnSpc>
-                <a:spcPct val="92000"/>
-              </a:lnSpc>
-            </a:pPr>
-            <a:r>
-              <a:rPr sz="3200" b="0" i="0" lang="es-ES">
+            <a:pPr algn="l"/>
+            <a:r>
+              <a:rPr sz="3600" b="1" i="0" lang="es-ES">
                 <a:solidFill>
                   <a:srgbClr val="263445"/>
                 </a:solidFill>
               </a:rPr>
-              <a:t>Leemos la ficha técnica de lo que dispensamos;</a:t>
-            </a:r>
-            <a:br/>
-            <a:r>
-              <a:rPr sz="3200" b="0" i="0" lang="es-ES">
-                <a:solidFill>
-                  <a:srgbClr val="263445"/>
-                </a:solidFill>
-              </a:rPr>
-              <a:t>leamos también la de la IA que usamos.</a:t>
+              <a:t>Leamos la ficha técnica de la IA como la de un fármaco.</a:t>
             </a:r>
           </a:p>
         </p:txBody>
@@ -9146,61 +9493,6 @@
           <p:nvPr/>
         </p:nvPicPr>
         <p:blipFill>
-          <a:blip r:embed="rId2"/>
-          <a:stretch>
-            <a:fillRect/>
-          </a:stretch>
-        </p:blipFill>
-        <p:spPr>
-          <a:xfrm>
-            <a:off x="1868052" y="4889500"/>
-            <a:ext cx="467597" cy="939800"/>
-          </a:xfrm>
-          <a:prstGeom prst="rect">
-            <a:avLst/>
-          </a:prstGeom>
-        </p:spPr>
-      </p:pic>
-      <p:sp>
-        <p:nvSpPr>
-          <p:cNvPr id="13" name="Ficha: panel 1"/>
-          <p:cNvSpPr/>
-          <p:nvPr/>
-        </p:nvSpPr>
-        <p:spPr>
-          <a:xfrm>
-            <a:off x="5228273" y="1892300"/>
-            <a:ext cx="6455982" cy="1206500"/>
-          </a:xfrm>
-          <a:prstGeom prst="rect">
-            <a:avLst/>
-          </a:prstGeom>
-          <a:solidFill>
-            <a:srgbClr val="FFFFFF"/>
-          </a:solidFill>
-          <a:ln w="19050">
-            <a:solidFill>
-              <a:srgbClr val="C9D2DB"/>
-            </a:solidFill>
-          </a:ln>
-        </p:spPr>
-        <p:txBody>
-          <a:bodyPr rtlCol="0" anchor="ctr"/>
-          <a:lstStyle/>
-          <a:p>
-            <a:pPr algn="ctr"/>
-          </a:p>
-        </p:txBody>
-      </p:sp>
-      <p:pic>
-        <p:nvPicPr>
-          <p:cNvPr id="14" name="Icono Composición" descr="Icono Composición"/>
-          <p:cNvPicPr>
-            <a:picLocks noChangeAspect="1"/>
-          </p:cNvPicPr>
-          <p:nvPr/>
-        </p:nvPicPr>
-        <p:blipFill>
           <a:blip r:embed="rId3"/>
           <a:stretch>
             <a:fillRect/>
@@ -9208,8 +9500,8 @@
         </p:blipFill>
         <p:spPr>
           <a:xfrm>
-            <a:off x="5431473" y="2100290"/>
-            <a:ext cx="609600" cy="508581"/>
+            <a:off x="1868052" y="4889500"/>
+            <a:ext cx="467597" cy="939800"/>
           </a:xfrm>
           <a:prstGeom prst="rect">
             <a:avLst/>
@@ -9218,77 +9510,20 @@
       </p:pic>
       <p:sp>
         <p:nvSpPr>
-          <p:cNvPr id="15" name="TextBox 14"/>
-          <p:cNvSpPr txBox="1"/>
-          <p:nvPr/>
-        </p:nvSpPr>
-        <p:spPr>
-          <a:xfrm>
-            <a:off x="6244273" y="2032000"/>
-            <a:ext cx="5236782" cy="1016000"/>
-          </a:xfrm>
-          <a:prstGeom prst="rect">
-            <a:avLst/>
-          </a:prstGeom>
-          <a:noFill/>
-        </p:spPr>
-        <p:txBody>
-          <a:bodyPr wrap="square" lIns="0" tIns="0" rIns="0" bIns="0" anchor="t">
-            <a:noAutofit/>
-          </a:bodyPr>
-          <a:lstStyle/>
-          <a:p>
-            <a:pPr algn="l">
-              <a:spcAft>
-                <a:spcPts val="200"/>
-              </a:spcAft>
-            </a:pPr>
-            <a:r>
-              <a:rPr sz="2200" b="1" i="0" lang="es-ES">
-                <a:solidFill>
-                  <a:srgbClr val="007A79"/>
-                </a:solidFill>
-              </a:rPr>
-              <a:t>Composición</a:t>
-            </a:r>
-          </a:p>
-          <a:p>
-            <a:pPr algn="l"/>
-            <a:r>
-              <a:rPr sz="2000" b="1" i="0" lang="es-ES">
-                <a:solidFill>
-                  <a:srgbClr val="263445"/>
-                </a:solidFill>
-              </a:rPr>
-              <a:t>¿Qué hay dentro?</a:t>
-            </a:r>
-            <a:r>
-              <a:rPr sz="2000" b="0" i="0" lang="es-ES">
-                <a:solidFill>
-                  <a:srgbClr val="263445"/>
-                </a:solidFill>
-              </a:rPr>
-              <a:t> Estadística con modelo, aprendizaje automático o modelo de lenguaje.</a:t>
-            </a:r>
-          </a:p>
-        </p:txBody>
-      </p:sp>
-      <p:sp>
-        <p:nvSpPr>
-          <p:cNvPr id="16" name="Ficha: panel 2"/>
-          <p:cNvSpPr/>
-          <p:nvPr/>
-        </p:nvSpPr>
-        <p:spPr>
-          <a:xfrm>
-            <a:off x="5228273" y="3098800"/>
+          <p:cNvPr id="13" name="Ficha: panel 1"/>
+          <p:cNvSpPr/>
+          <p:nvPr/>
+        </p:nvSpPr>
+        <p:spPr>
+          <a:xfrm>
+            <a:off x="5228273" y="1892300"/>
             <a:ext cx="6455982" cy="1206500"/>
           </a:xfrm>
           <a:prstGeom prst="rect">
             <a:avLst/>
           </a:prstGeom>
           <a:solidFill>
-            <a:srgbClr val="F3F6F9"/>
+            <a:srgbClr val="FFFFFF"/>
           </a:solidFill>
           <a:ln w="19050">
             <a:solidFill>
@@ -9306,7 +9541,7 @@
       </p:sp>
       <p:pic>
         <p:nvPicPr>
-          <p:cNvPr id="17" name="Icono Mecanismo de acción" descr="Icono Mecanismo de acción"/>
+          <p:cNvPr id="14" name="Icono Composición" descr="Icono Composición"/>
           <p:cNvPicPr>
             <a:picLocks noChangeAspect="1"/>
           </p:cNvPicPr>
@@ -9320,6 +9555,118 @@
         </p:blipFill>
         <p:spPr>
           <a:xfrm>
+            <a:off x="5431473" y="2100290"/>
+            <a:ext cx="609600" cy="508581"/>
+          </a:xfrm>
+          <a:prstGeom prst="rect">
+            <a:avLst/>
+          </a:prstGeom>
+        </p:spPr>
+      </p:pic>
+      <p:sp>
+        <p:nvSpPr>
+          <p:cNvPr id="15" name="TextBox 14"/>
+          <p:cNvSpPr txBox="1"/>
+          <p:nvPr/>
+        </p:nvSpPr>
+        <p:spPr>
+          <a:xfrm>
+            <a:off x="6244273" y="2032000"/>
+            <a:ext cx="5236782" cy="1016000"/>
+          </a:xfrm>
+          <a:prstGeom prst="rect">
+            <a:avLst/>
+          </a:prstGeom>
+          <a:noFill/>
+        </p:spPr>
+        <p:txBody>
+          <a:bodyPr wrap="square" lIns="0" tIns="0" rIns="0" bIns="0" anchor="t">
+            <a:noAutofit/>
+          </a:bodyPr>
+          <a:lstStyle/>
+          <a:p>
+            <a:pPr algn="l">
+              <a:spcAft>
+                <a:spcPts val="200"/>
+              </a:spcAft>
+            </a:pPr>
+            <a:r>
+              <a:rPr sz="2200" b="1" i="0" lang="es-ES">
+                <a:solidFill>
+                  <a:srgbClr val="007A79"/>
+                </a:solidFill>
+              </a:rPr>
+              <a:t>Composición</a:t>
+            </a:r>
+          </a:p>
+          <a:p>
+            <a:pPr algn="l"/>
+            <a:r>
+              <a:rPr sz="2000" b="1" i="0" lang="es-ES">
+                <a:solidFill>
+                  <a:srgbClr val="263445"/>
+                </a:solidFill>
+              </a:rPr>
+              <a:t>¿Qué hay dentro?</a:t>
+            </a:r>
+            <a:r>
+              <a:rPr sz="2000" b="0" i="0" lang="es-ES">
+                <a:solidFill>
+                  <a:srgbClr val="263445"/>
+                </a:solidFill>
+              </a:rPr>
+              <a:t> Estadística con modelo, aprendizaje automático o modelo de lenguaje.</a:t>
+            </a:r>
+          </a:p>
+        </p:txBody>
+      </p:sp>
+      <p:sp>
+        <p:nvSpPr>
+          <p:cNvPr id="16" name="Ficha: panel 2"/>
+          <p:cNvSpPr/>
+          <p:nvPr/>
+        </p:nvSpPr>
+        <p:spPr>
+          <a:xfrm>
+            <a:off x="5228273" y="3098800"/>
+            <a:ext cx="6455982" cy="1206500"/>
+          </a:xfrm>
+          <a:prstGeom prst="rect">
+            <a:avLst/>
+          </a:prstGeom>
+          <a:solidFill>
+            <a:srgbClr val="F3F6F9"/>
+          </a:solidFill>
+          <a:ln w="19050">
+            <a:solidFill>
+              <a:srgbClr val="C9D2DB"/>
+            </a:solidFill>
+          </a:ln>
+        </p:spPr>
+        <p:txBody>
+          <a:bodyPr rtlCol="0" anchor="ctr"/>
+          <a:lstStyle/>
+          <a:p>
+            <a:pPr algn="ctr"/>
+          </a:p>
+        </p:txBody>
+      </p:sp>
+      <p:pic>
+        <p:nvPicPr>
+          <p:cNvPr id="17" name="Icono Mecanismo de acción" descr="Icono Mecanismo de acción"/>
+          <p:cNvPicPr>
+            <a:picLocks noChangeAspect="1"/>
+          </p:cNvPicPr>
+          <p:nvPr/>
+        </p:nvPicPr>
+        <p:blipFill>
+          <a:blip r:embed="rId5"/>
+          <a:stretch>
+            <a:fillRect/>
+          </a:stretch>
+        </p:blipFill>
+        <p:spPr>
+          <a:xfrm>
             <a:off x="5470105" y="3302000"/>
             <a:ext cx="532335" cy="518160"/>
           </a:xfrm>
@@ -9425,7 +9772,7 @@
           <p:nvPr/>
         </p:nvPicPr>
         <p:blipFill>
-          <a:blip r:embed="rId5"/>
+          <a:blip r:embed="rId6"/>
           <a:stretch>
             <a:fillRect/>
           </a:stretch>
@@ -9643,7 +9990,7 @@
         <p:spPr>
           <a:xfrm>
             <a:off x="6096000" y="2819400"/>
-            <a:ext cx="0" cy="248420"/>
+            <a:ext cx="0" cy="264900"/>
           </a:xfrm>
           <a:prstGeom prst="line">
             <a:avLst/>
@@ -9666,11 +10013,11 @@
         <p:spPr>
           <a:xfrm>
             <a:off x="2396109" y="2984500"/>
-            <a:ext cx="7400036" cy="1589202"/>
+            <a:ext cx="7400036" cy="1590612"/>
           </a:xfrm>
           <a:prstGeom prst="roundRect">
             <a:avLst>
-              <a:gd name="adj" fmla="val 6393"/>
+              <a:gd name="adj" fmla="val 6387"/>
             </a:avLst>
           </a:prstGeom>
           <a:noFill/>
@@ -9705,8 +10052,8 @@
         </p:blipFill>
         <p:spPr>
           <a:xfrm>
-            <a:off x="5799007" y="3105920"/>
-            <a:ext cx="593986" cy="1193962"/>
+            <a:off x="5798716" y="3122400"/>
+            <a:ext cx="594569" cy="1195134"/>
           </a:xfrm>
           <a:prstGeom prst="rect">
             <a:avLst/>
@@ -9729,8 +10076,8 @@
         </p:blipFill>
         <p:spPr>
           <a:xfrm>
-            <a:off x="3221074" y="3323464"/>
-            <a:ext cx="579389" cy="758874"/>
+            <a:off x="3218253" y="3340157"/>
+            <a:ext cx="579958" cy="759619"/>
           </a:xfrm>
           <a:prstGeom prst="rect">
             <a:avLst/>
@@ -9753,8 +10100,8 @@
         </p:blipFill>
         <p:spPr>
           <a:xfrm>
-            <a:off x="8509625" y="3146393"/>
-            <a:ext cx="343214" cy="323786"/>
+            <a:off x="8511993" y="3168990"/>
+            <a:ext cx="343550" cy="324104"/>
           </a:xfrm>
           <a:prstGeom prst="rect">
             <a:avLst/>
@@ -9777,8 +10124,8 @@
         </p:blipFill>
         <p:spPr>
           <a:xfrm>
-            <a:off x="8478865" y="3541008"/>
-            <a:ext cx="404733" cy="323786"/>
+            <a:off x="8481203" y="3557915"/>
+            <a:ext cx="405130" cy="324104"/>
           </a:xfrm>
           <a:prstGeom prst="rect">
             <a:avLst/>
@@ -9801,8 +10148,8 @@
         </p:blipFill>
         <p:spPr>
           <a:xfrm>
-            <a:off x="8519339" y="3935622"/>
-            <a:ext cx="323786" cy="323786"/>
+            <a:off x="8521716" y="3946840"/>
+            <a:ext cx="324104" cy="324104"/>
           </a:xfrm>
           <a:prstGeom prst="rect">
             <a:avLst/>
@@ -9817,8 +10164,8 @@
         </p:nvCxnSpPr>
         <p:spPr>
           <a:xfrm>
-            <a:off x="3915501" y="3702901"/>
-            <a:ext cx="1785884" cy="0"/>
+            <a:off x="3977061" y="3719967"/>
+            <a:ext cx="1760399" cy="0"/>
           </a:xfrm>
           <a:prstGeom prst="line">
             <a:avLst/>
@@ -9839,8 +10186,8 @@
         </p:nvCxnSpPr>
         <p:spPr>
           <a:xfrm>
-            <a:off x="6490615" y="3702901"/>
-            <a:ext cx="1866830" cy="0"/>
+            <a:off x="6454540" y="3719967"/>
+            <a:ext cx="1921329" cy="0"/>
           </a:xfrm>
           <a:prstGeom prst="line">
             <a:avLst/>

--- a/examples/sefh-71-ia-tdm/salida/ponencia-ia-tdm-montero.pptx
+++ b/examples/sefh-71-ia-tdm/salida/ponencia-ia-tdm-montero.pptx
@@ -9,6 +9,7 @@
   </p:notesMasterIdLst>
   <p:sldIdLst>
     <p:sldId id="256" r:id="rId5"/>
+    <p:sldId id="265" r:id="rId19"/>
     <p:sldId id="257" r:id="rId8"/>
     <p:sldId id="258" r:id="rId7"/>
     <p:sldId id="259" r:id="rId6"/>
@@ -875,6 +876,76 @@
 </p:notes>
 </file>
 
+<file path=ppt/notesSlides/notesSlide6.xml><?xml version="1.0" encoding="utf-8"?>
+<p:notes xmlns:a="http://schemas.openxmlformats.org/drawingml/2006/main" xmlns:p="http://schemas.openxmlformats.org/presentationml/2006/main" xmlns:r="http://schemas.openxmlformats.org/officeDocument/2006/relationships">
+  <p:cSld>
+    <p:spTree>
+      <p:nvGrpSpPr>
+        <p:cNvPr id="1" name=""/>
+        <p:cNvGrpSpPr/>
+        <p:nvPr/>
+      </p:nvGrpSpPr>
+      <p:grpSpPr>
+        <a:xfrm>
+          <a:off x="0" y="0"/>
+          <a:ext cx="0" cy="0"/>
+          <a:chOff x="0" y="0"/>
+          <a:chExt cx="0" cy="0"/>
+        </a:xfrm>
+      </p:grpSpPr>
+      <p:sp>
+        <p:nvSpPr>
+          <p:cNvPr id="2" name="Slide Image Placeholder 1"/>
+          <p:cNvSpPr>
+            <a:spLocks noGrp="1"/>
+          </p:cNvSpPr>
+          <p:nvPr>
+            <p:ph type="sldImg" idx="2"/>
+          </p:nvPr>
+        </p:nvSpPr>
+        <p:spPr/>
+      </p:sp>
+      <p:sp>
+        <p:nvSpPr>
+          <p:cNvPr id="3" name="Notes Placeholder 2"/>
+          <p:cNvSpPr>
+            <a:spLocks noGrp="1"/>
+          </p:cNvSpPr>
+          <p:nvPr>
+            <p:ph type="body" idx="3" sz="quarter"/>
+          </p:nvPr>
+        </p:nvSpPr>
+        <p:spPr/>
+        <p:txBody>
+          <a:bodyPr/>
+          <a:lstStyle/>
+          <a:p>
+            <a:r>
+              <a:t>Pregunta a mano alzada. La dosis coincidió en todas; cambiaron el AUC, la decisión sobre la dosis de las 20:00, la siguiente extracción y la fuente. Nueve consultas no son un estudio: ¿me pasa solo a mí? → diapositiva siguiente.</a:t>
+            </a:r>
+          </a:p>
+        </p:txBody>
+      </p:sp>
+      <p:sp>
+        <p:nvSpPr>
+          <p:cNvPr id="4" name="Slide Number Placeholder 3"/>
+          <p:cNvSpPr>
+            <a:spLocks noGrp="1"/>
+          </p:cNvSpPr>
+          <p:nvPr>
+            <p:ph type="sldNum" idx="5" sz="quarter"/>
+          </p:nvPr>
+        </p:nvSpPr>
+        <p:spPr/>
+      </p:sp>
+    </p:spTree>
+  </p:cSld>
+  <p:clrMapOvr>
+    <a:masterClrMapping/>
+  </p:clrMapOvr>
+</p:notes>
+</file>
+
 <file path=ppt/slideLayouts/slideLayout1.xml><?xml version="1.0" encoding="utf-8"?>
 <p:sldLayout xmlns:a="http://schemas.openxmlformats.org/drawingml/2006/main" xmlns:r="http://schemas.openxmlformats.org/officeDocument/2006/relationships" xmlns:p="http://schemas.openxmlformats.org/presentationml/2006/main" preserve="1" userDrawn="1">
   <p:cSld name="Title Slide">
@@ -1449,6 +1520,3114 @@
         <p14:creationId xmlns:p14="http://schemas.microsoft.com/office/powerpoint/2010/main" val="4112376270"/>
       </p:ext>
     </p:extLst>
+  </p:cSld>
+  <p:clrMapOvr>
+    <a:masterClrMapping/>
+  </p:clrMapOvr>
+</p:sld>
+</file>
+
+<file path=ppt/slides/slide10.xml><?xml version="1.0" encoding="utf-8"?>
+<p:sld xmlns:a="http://schemas.openxmlformats.org/drawingml/2006/main" xmlns:p="http://schemas.openxmlformats.org/presentationml/2006/main" xmlns:r="http://schemas.openxmlformats.org/officeDocument/2006/relationships">
+  <p:cSld>
+    <p:spTree>
+      <p:nvGrpSpPr>
+        <p:cNvPr id="1" name=""/>
+        <p:cNvGrpSpPr/>
+        <p:nvPr/>
+      </p:nvGrpSpPr>
+      <p:grpSpPr/>
+      <p:sp>
+        <p:nvSpPr>
+          <p:cNvPr id="2" name="Titular"/>
+          <p:cNvSpPr txBox="1"/>
+          <p:nvPr/>
+        </p:nvSpPr>
+        <p:spPr>
+          <a:xfrm>
+            <a:off x="508000" y="749300"/>
+            <a:ext cx="11176000" cy="635000"/>
+          </a:xfrm>
+          <a:prstGeom prst="rect">
+            <a:avLst/>
+          </a:prstGeom>
+          <a:noFill/>
+        </p:spPr>
+        <p:txBody>
+          <a:bodyPr wrap="square" lIns="0" tIns="0" rIns="0" bIns="0" anchor="ctr">
+            <a:noAutofit/>
+          </a:bodyPr>
+          <a:lstStyle/>
+          <a:p>
+            <a:pPr algn="l"/>
+            <a:r>
+              <a:rPr sz="3600" b="1" i="0" lang="es-ES">
+                <a:solidFill>
+                  <a:srgbClr val="263445"/>
+                </a:solidFill>
+              </a:rPr>
+              <a:t>Misma pregunta, misma dosis… decisiones distintas.</a:t>
+            </a:r>
+          </a:p>
+        </p:txBody>
+      </p:sp>
+      <p:sp>
+        <p:nvSpPr>
+          <p:cNvPr id="3" name="Tarjeta caso"/>
+          <p:cNvSpPr/>
+          <p:nvPr/>
+        </p:nvSpPr>
+        <p:spPr>
+          <a:xfrm>
+            <a:off x="508000" y="1778000"/>
+            <a:ext cx="3623818" cy="3771900"/>
+          </a:xfrm>
+          <a:prstGeom prst="roundRect">
+            <a:avLst>
+              <a:gd name="adj" fmla="val 2803"/>
+            </a:avLst>
+          </a:prstGeom>
+          <a:solidFill>
+            <a:srgbClr val="F3F6F9"/>
+          </a:solidFill>
+          <a:ln>
+            <a:noFill/>
+          </a:ln>
+        </p:spPr>
+        <p:txBody>
+          <a:bodyPr rtlCol="0" anchor="ctr"/>
+          <a:lstStyle/>
+          <a:p>
+            <a:pPr algn="ctr"/>
+          </a:p>
+        </p:txBody>
+      </p:sp>
+      <p:sp>
+        <p:nvSpPr>
+          <p:cNvPr id="4" name="Texto caso"/>
+          <p:cNvSpPr txBox="1"/>
+          <p:nvPr/>
+        </p:nvSpPr>
+        <p:spPr>
+          <a:xfrm>
+            <a:off x="711200" y="1981200"/>
+            <a:ext cx="3217418" cy="3111500"/>
+          </a:xfrm>
+          <a:prstGeom prst="rect">
+            <a:avLst/>
+          </a:prstGeom>
+          <a:noFill/>
+        </p:spPr>
+        <p:txBody>
+          <a:bodyPr wrap="square" lIns="0" tIns="0" rIns="0" bIns="0" anchor="t">
+            <a:noAutofit/>
+          </a:bodyPr>
+          <a:lstStyle/>
+          <a:p>
+            <a:pPr algn="l">
+              <a:lnSpc>
+                <a:spcPct val="95000"/>
+              </a:lnSpc>
+              <a:spcAft>
+                <a:spcPts val="600"/>
+              </a:spcAft>
+            </a:pPr>
+            <a:r>
+              <a:rPr sz="2400" b="1" i="0" lang="es-ES">
+                <a:solidFill>
+                  <a:srgbClr val="263445"/>
+                </a:solidFill>
+              </a:rPr>
+              <a:t>El caso</a:t>
+            </a:r>
+          </a:p>
+          <a:p>
+            <a:pPr algn="l">
+              <a:lnSpc>
+                <a:spcPct val="95000"/>
+              </a:lnSpc>
+              <a:spcAft>
+                <a:spcPts val="600"/>
+              </a:spcAft>
+            </a:pPr>
+            <a:r>
+              <a:rPr sz="2000" b="0" i="0" lang="es-ES">
+                <a:solidFill>
+                  <a:srgbClr val="263445"/>
+                </a:solidFill>
+              </a:rPr>
+              <a:t>Varón, 68 años, 82 kg · bacteriemia por SARM</a:t>
+            </a:r>
+          </a:p>
+          <a:p>
+            <a:pPr algn="l">
+              <a:lnSpc>
+                <a:spcPct val="95000"/>
+              </a:lnSpc>
+              <a:spcAft>
+                <a:spcPts val="600"/>
+              </a:spcAft>
+            </a:pPr>
+            <a:r>
+              <a:rPr sz="2000" b="0" i="0" lang="es-ES">
+                <a:solidFill>
+                  <a:srgbClr val="263445"/>
+                </a:solidFill>
+              </a:rPr>
+              <a:t>Creatinina 1,2 mg/dL estable</a:t>
+            </a:r>
+          </a:p>
+          <a:p>
+            <a:pPr algn="l">
+              <a:lnSpc>
+                <a:spcPct val="95000"/>
+              </a:lnSpc>
+              <a:spcAft>
+                <a:spcPts val="600"/>
+              </a:spcAft>
+            </a:pPr>
+            <a:r>
+              <a:rPr sz="2000" b="0" i="0" lang="es-ES">
+                <a:solidFill>
+                  <a:srgbClr val="263445"/>
+                </a:solidFill>
+              </a:rPr>
+              <a:t>1000 mg/12 h · pico 34,0 y valle 21,2 mg/L</a:t>
+            </a:r>
+          </a:p>
+          <a:p>
+            <a:pPr algn="l">
+              <a:lnSpc>
+                <a:spcPct val="95000"/>
+              </a:lnSpc>
+            </a:pPr>
+            <a:r>
+              <a:rPr sz="2000" b="1" i="0" lang="es-ES">
+                <a:solidFill>
+                  <a:srgbClr val="2B7D3D"/>
+                </a:solidFill>
+              </a:rPr>
+              <a:t>Respuesta de referencia: </a:t>
+            </a:r>
+            <a:r>
+              <a:rPr sz="2000" b="0" i="0" lang="es-ES">
+                <a:solidFill>
+                  <a:srgbClr val="263445"/>
+                </a:solidFill>
+              </a:rPr>
+              <a:t>AUC</a:t>
+            </a:r>
+            <a:r>
+              <a:rPr sz="2000" b="0" i="0" lang="es-ES" baseline="-25000">
+                <a:solidFill>
+                  <a:srgbClr val="263445"/>
+                </a:solidFill>
+              </a:rPr>
+              <a:t>24</a:t>
+            </a:r>
+            <a:r>
+              <a:rPr sz="2000" b="0" i="0" lang="es-ES">
+                <a:solidFill>
+                  <a:srgbClr val="263445"/>
+                </a:solidFill>
+              </a:rPr>
+              <a:t> actual ≈ 667 → 750 mg/12 h (AUC</a:t>
+            </a:r>
+            <a:r>
+              <a:rPr sz="2000" b="0" i="0" lang="es-ES" baseline="-25000">
+                <a:solidFill>
+                  <a:srgbClr val="263445"/>
+                </a:solidFill>
+              </a:rPr>
+              <a:t>24</a:t>
+            </a:r>
+            <a:r>
+              <a:rPr sz="2000" b="0" i="0" lang="es-ES">
+                <a:solidFill>
+                  <a:srgbClr val="263445"/>
+                </a:solidFill>
+              </a:rPr>
+              <a:t> ≈ 500)</a:t>
+            </a:r>
+          </a:p>
+        </p:txBody>
+      </p:sp>
+      <p:sp>
+        <p:nvSpPr>
+          <p:cNvPr id="5" name="Nota caso"/>
+          <p:cNvSpPr txBox="1"/>
+          <p:nvPr/>
+        </p:nvSpPr>
+        <p:spPr>
+          <a:xfrm>
+            <a:off x="711200" y="5156200"/>
+            <a:ext cx="3217418" cy="190500"/>
+          </a:xfrm>
+          <a:prstGeom prst="rect">
+            <a:avLst/>
+          </a:prstGeom>
+          <a:noFill/>
+        </p:spPr>
+        <p:txBody>
+          <a:bodyPr wrap="square" lIns="0" tIns="0" rIns="0" bIns="0" anchor="t">
+            <a:noAutofit/>
+          </a:bodyPr>
+          <a:lstStyle/>
+          <a:p>
+            <a:pPr algn="l"/>
+            <a:r>
+              <a:rPr sz="1600" b="0" i="1" lang="es-ES">
+                <a:solidFill>
+                  <a:srgbClr val="5E6B78"/>
+                </a:solidFill>
+              </a:rPr>
+              <a:t>3 IA × 3 chats nuevos · mismo texto</a:t>
+            </a:r>
+          </a:p>
+        </p:txBody>
+      </p:sp>
+      <p:graphicFrame>
+        <p:nvGraphicFramePr>
+          <p:cNvPr id="6" name="Tabla respuestas"/>
+          <p:cNvGraphicFramePr>
+            <a:graphicFrameLocks noGrp="1"/>
+          </p:cNvGraphicFramePr>
+          <p:nvPr/>
+        </p:nvGraphicFramePr>
+        <p:xfrm>
+          <a:off x="4284218" y="1778000"/>
+          <a:ext cx="7397750" cy="3771900"/>
+        </p:xfrm>
+        <a:graphic>
+          <a:graphicData uri="http://schemas.openxmlformats.org/drawingml/2006/table">
+            <a:tbl>
+              <a:tblPr firstRow="1">
+                <a:tableStyleId>{5C22544A-7EE6-4342-B048-85BDC9FD1C3A}</a:tableStyleId>
+              </a:tblPr>
+              <a:tblGrid>
+                <a:gridCol w="889000"/>
+                <a:gridCol w="711200"/>
+                <a:gridCol w="1206500"/>
+                <a:gridCol w="1270000"/>
+                <a:gridCol w="1365250"/>
+                <a:gridCol w="1955800"/>
+              </a:tblGrid>
+              <a:tr h="546100">
+                <a:tc>
+                  <a:txBody>
+                    <a:bodyPr wrap="square"/>
+                    <a:lstStyle/>
+                    <a:p>
+                      <a:pPr algn="l"/>
+                      <a:r>
+                        <a:rPr sz="1600" b="1" i="0" lang="es-ES">
+                          <a:solidFill>
+                            <a:srgbClr val="FFFFFF"/>
+                          </a:solidFill>
+                        </a:rPr>
+                        <a:t>IA</a:t>
+                      </a:r>
+                    </a:p>
+                  </a:txBody>
+                  <a:tcPr anchor="ctr" marL="38100" marR="38100" marT="25400" marB="25400">
+                    <a:lnL w="19050" cap="flat" cmpd="sng" algn="ctr">
+                      <a:solidFill>
+                        <a:srgbClr val="FFFFFF"/>
+                      </a:solidFill>
+                      <a:prstDash val="solid"/>
+                    </a:lnL>
+                    <a:lnR w="19050" cap="flat" cmpd="sng" algn="ctr">
+                      <a:solidFill>
+                        <a:srgbClr val="FFFFFF"/>
+                      </a:solidFill>
+                      <a:prstDash val="solid"/>
+                    </a:lnR>
+                    <a:lnT w="19050" cap="flat" cmpd="sng" algn="ctr">
+                      <a:solidFill>
+                        <a:srgbClr val="FFFFFF"/>
+                      </a:solidFill>
+                      <a:prstDash val="solid"/>
+                    </a:lnT>
+                    <a:lnB w="19050" cap="flat" cmpd="sng" algn="ctr">
+                      <a:solidFill>
+                        <a:srgbClr val="FFFFFF"/>
+                      </a:solidFill>
+                      <a:prstDash val="solid"/>
+                    </a:lnB>
+                    <a:solidFill>
+                      <a:srgbClr val="263445"/>
+                    </a:solidFill>
+                  </a:tcPr>
+                </a:tc>
+                <a:tc>
+                  <a:txBody>
+                    <a:bodyPr wrap="square"/>
+                    <a:lstStyle/>
+                    <a:p>
+                      <a:pPr algn="ctr"/>
+                      <a:r>
+                        <a:rPr sz="1600" b="1" i="0" lang="es-ES">
+                          <a:solidFill>
+                            <a:srgbClr val="FFFFFF"/>
+                          </a:solidFill>
+                        </a:rPr>
+                        <a:t>Prueba</a:t>
+                      </a:r>
+                    </a:p>
+                  </a:txBody>
+                  <a:tcPr anchor="ctr" marL="38100" marR="38100" marT="25400" marB="25400">
+                    <a:lnL w="19050" cap="flat" cmpd="sng" algn="ctr">
+                      <a:solidFill>
+                        <a:srgbClr val="FFFFFF"/>
+                      </a:solidFill>
+                      <a:prstDash val="solid"/>
+                    </a:lnL>
+                    <a:lnR w="19050" cap="flat" cmpd="sng" algn="ctr">
+                      <a:solidFill>
+                        <a:srgbClr val="FFFFFF"/>
+                      </a:solidFill>
+                      <a:prstDash val="solid"/>
+                    </a:lnR>
+                    <a:lnT w="19050" cap="flat" cmpd="sng" algn="ctr">
+                      <a:solidFill>
+                        <a:srgbClr val="FFFFFF"/>
+                      </a:solidFill>
+                      <a:prstDash val="solid"/>
+                    </a:lnT>
+                    <a:lnB w="19050" cap="flat" cmpd="sng" algn="ctr">
+                      <a:solidFill>
+                        <a:srgbClr val="FFFFFF"/>
+                      </a:solidFill>
+                      <a:prstDash val="solid"/>
+                    </a:lnB>
+                    <a:solidFill>
+                      <a:srgbClr val="263445"/>
+                    </a:solidFill>
+                  </a:tcPr>
+                </a:tc>
+                <a:tc>
+                  <a:txBody>
+                    <a:bodyPr wrap="square"/>
+                    <a:lstStyle/>
+                    <a:p>
+                      <a:pPr algn="ctr"/>
+                      <a:r>
+                        <a:rPr sz="1600" b="1" i="0" lang="es-ES">
+                          <a:solidFill>
+                            <a:srgbClr val="FFFFFF"/>
+                          </a:solidFill>
+                        </a:rPr>
+                        <a:t>AUC</a:t>
+                      </a:r>
+                      <a:r>
+                        <a:rPr sz="1600" b="1" i="0" lang="es-ES" baseline="-25000">
+                          <a:solidFill>
+                            <a:srgbClr val="FFFFFF"/>
+                          </a:solidFill>
+                        </a:rPr>
+                        <a:t>24</a:t>
+                      </a:r>
+                      <a:r>
+                        <a:rPr sz="1600" b="1" i="0" lang="es-ES">
+                          <a:solidFill>
+                            <a:srgbClr val="FFFFFF"/>
+                          </a:solidFill>
+                        </a:rPr>
+                        <a:t> actual (ref. 667)</a:t>
+                      </a:r>
+                    </a:p>
+                  </a:txBody>
+                  <a:tcPr anchor="ctr" marL="38100" marR="38100" marT="25400" marB="25400">
+                    <a:lnL w="19050" cap="flat" cmpd="sng" algn="ctr">
+                      <a:solidFill>
+                        <a:srgbClr val="FFFFFF"/>
+                      </a:solidFill>
+                      <a:prstDash val="solid"/>
+                    </a:lnL>
+                    <a:lnR w="19050" cap="flat" cmpd="sng" algn="ctr">
+                      <a:solidFill>
+                        <a:srgbClr val="FFFFFF"/>
+                      </a:solidFill>
+                      <a:prstDash val="solid"/>
+                    </a:lnR>
+                    <a:lnT w="19050" cap="flat" cmpd="sng" algn="ctr">
+                      <a:solidFill>
+                        <a:srgbClr val="FFFFFF"/>
+                      </a:solidFill>
+                      <a:prstDash val="solid"/>
+                    </a:lnT>
+                    <a:lnB w="19050" cap="flat" cmpd="sng" algn="ctr">
+                      <a:solidFill>
+                        <a:srgbClr val="FFFFFF"/>
+                      </a:solidFill>
+                      <a:prstDash val="solid"/>
+                    </a:lnB>
+                    <a:solidFill>
+                      <a:srgbClr val="263445"/>
+                    </a:solidFill>
+                  </a:tcPr>
+                </a:tc>
+                <a:tc>
+                  <a:txBody>
+                    <a:bodyPr wrap="square"/>
+                    <a:lstStyle/>
+                    <a:p>
+                      <a:pPr algn="ctr"/>
+                      <a:r>
+                        <a:rPr sz="1600" b="1" i="0" lang="es-ES">
+                          <a:solidFill>
+                            <a:srgbClr val="FFFFFF"/>
+                          </a:solidFill>
+                        </a:rPr>
+                        <a:t>Dosis de las 20:00</a:t>
+                      </a:r>
+                    </a:p>
+                  </a:txBody>
+                  <a:tcPr anchor="ctr" marL="38100" marR="38100" marT="25400" marB="25400">
+                    <a:lnL w="19050" cap="flat" cmpd="sng" algn="ctr">
+                      <a:solidFill>
+                        <a:srgbClr val="FFFFFF"/>
+                      </a:solidFill>
+                      <a:prstDash val="solid"/>
+                    </a:lnL>
+                    <a:lnR w="19050" cap="flat" cmpd="sng" algn="ctr">
+                      <a:solidFill>
+                        <a:srgbClr val="FFFFFF"/>
+                      </a:solidFill>
+                      <a:prstDash val="solid"/>
+                    </a:lnR>
+                    <a:lnT w="19050" cap="flat" cmpd="sng" algn="ctr">
+                      <a:solidFill>
+                        <a:srgbClr val="FFFFFF"/>
+                      </a:solidFill>
+                      <a:prstDash val="solid"/>
+                    </a:lnT>
+                    <a:lnB w="19050" cap="flat" cmpd="sng" algn="ctr">
+                      <a:solidFill>
+                        <a:srgbClr val="FFFFFF"/>
+                      </a:solidFill>
+                      <a:prstDash val="solid"/>
+                    </a:lnB>
+                    <a:solidFill>
+                      <a:srgbClr val="263445"/>
+                    </a:solidFill>
+                  </a:tcPr>
+                </a:tc>
+                <a:tc>
+                  <a:txBody>
+                    <a:bodyPr wrap="square"/>
+                    <a:lstStyle/>
+                    <a:p>
+                      <a:pPr algn="ctr"/>
+                      <a:r>
+                        <a:rPr sz="1600" b="1" i="0" lang="es-ES">
+                          <a:solidFill>
+                            <a:srgbClr val="FFFFFF"/>
+                          </a:solidFill>
+                        </a:rPr>
+                        <a:t>Siguiente extracción</a:t>
+                      </a:r>
+                    </a:p>
+                  </a:txBody>
+                  <a:tcPr anchor="ctr" marL="38100" marR="38100" marT="25400" marB="25400">
+                    <a:lnL w="19050" cap="flat" cmpd="sng" algn="ctr">
+                      <a:solidFill>
+                        <a:srgbClr val="FFFFFF"/>
+                      </a:solidFill>
+                      <a:prstDash val="solid"/>
+                    </a:lnL>
+                    <a:lnR w="19050" cap="flat" cmpd="sng" algn="ctr">
+                      <a:solidFill>
+                        <a:srgbClr val="FFFFFF"/>
+                      </a:solidFill>
+                      <a:prstDash val="solid"/>
+                    </a:lnR>
+                    <a:lnT w="19050" cap="flat" cmpd="sng" algn="ctr">
+                      <a:solidFill>
+                        <a:srgbClr val="FFFFFF"/>
+                      </a:solidFill>
+                      <a:prstDash val="solid"/>
+                    </a:lnT>
+                    <a:lnB w="19050" cap="flat" cmpd="sng" algn="ctr">
+                      <a:solidFill>
+                        <a:srgbClr val="FFFFFF"/>
+                      </a:solidFill>
+                      <a:prstDash val="solid"/>
+                    </a:lnB>
+                    <a:solidFill>
+                      <a:srgbClr val="263445"/>
+                    </a:solidFill>
+                  </a:tcPr>
+                </a:tc>
+                <a:tc>
+                  <a:txBody>
+                    <a:bodyPr wrap="square"/>
+                    <a:lstStyle/>
+                    <a:p>
+                      <a:pPr algn="ctr"/>
+                      <a:r>
+                        <a:rPr sz="1600" b="1" i="0" lang="es-ES">
+                          <a:solidFill>
+                            <a:srgbClr val="FFFFFF"/>
+                          </a:solidFill>
+                        </a:rPr>
+                        <a:t>Fuente citada</a:t>
+                      </a:r>
+                    </a:p>
+                  </a:txBody>
+                  <a:tcPr anchor="ctr" marL="38100" marR="38100" marT="25400" marB="25400">
+                    <a:lnL w="19050" cap="flat" cmpd="sng" algn="ctr">
+                      <a:solidFill>
+                        <a:srgbClr val="FFFFFF"/>
+                      </a:solidFill>
+                      <a:prstDash val="solid"/>
+                    </a:lnL>
+                    <a:lnR w="19050" cap="flat" cmpd="sng" algn="ctr">
+                      <a:solidFill>
+                        <a:srgbClr val="FFFFFF"/>
+                      </a:solidFill>
+                      <a:prstDash val="solid"/>
+                    </a:lnR>
+                    <a:lnT w="19050" cap="flat" cmpd="sng" algn="ctr">
+                      <a:solidFill>
+                        <a:srgbClr val="FFFFFF"/>
+                      </a:solidFill>
+                      <a:prstDash val="solid"/>
+                    </a:lnT>
+                    <a:lnB w="19050" cap="flat" cmpd="sng" algn="ctr">
+                      <a:solidFill>
+                        <a:srgbClr val="FFFFFF"/>
+                      </a:solidFill>
+                      <a:prstDash val="solid"/>
+                    </a:lnB>
+                    <a:solidFill>
+                      <a:srgbClr val="263445"/>
+                    </a:solidFill>
+                  </a:tcPr>
+                </a:tc>
+              </a:tr>
+              <a:tr h="546100">
+                <a:tc rowSpan="3">
+                  <a:txBody>
+                    <a:bodyPr wrap="square"/>
+                    <a:lstStyle/>
+                    <a:p>
+                      <a:pPr algn="l"/>
+                      <a:r>
+                        <a:rPr sz="1600" b="1" i="0" lang="es-ES">
+                          <a:solidFill>
+                            <a:srgbClr val="263445"/>
+                          </a:solidFill>
+                        </a:rPr>
+                        <a:t>Gemini</a:t>
+                      </a:r>
+                    </a:p>
+                  </a:txBody>
+                  <a:tcPr anchor="ctr" marL="38100" marR="38100" marT="25400" marB="25400">
+                    <a:lnL w="19050" cap="flat" cmpd="sng" algn="ctr">
+                      <a:solidFill>
+                        <a:srgbClr val="FFFFFF"/>
+                      </a:solidFill>
+                      <a:prstDash val="solid"/>
+                    </a:lnL>
+                    <a:lnR w="19050" cap="flat" cmpd="sng" algn="ctr">
+                      <a:solidFill>
+                        <a:srgbClr val="FFFFFF"/>
+                      </a:solidFill>
+                      <a:prstDash val="solid"/>
+                    </a:lnR>
+                    <a:lnT w="19050" cap="flat" cmpd="sng" algn="ctr">
+                      <a:solidFill>
+                        <a:srgbClr val="FFFFFF"/>
+                      </a:solidFill>
+                      <a:prstDash val="solid"/>
+                    </a:lnT>
+                    <a:lnB w="19050" cap="flat" cmpd="sng" algn="ctr">
+                      <a:solidFill>
+                        <a:srgbClr val="FFFFFF"/>
+                      </a:solidFill>
+                      <a:prstDash val="solid"/>
+                    </a:lnB>
+                    <a:solidFill>
+                      <a:srgbClr val="FFFFFF"/>
+                    </a:solidFill>
+                  </a:tcPr>
+                </a:tc>
+                <a:tc>
+                  <a:txBody>
+                    <a:bodyPr wrap="square"/>
+                    <a:lstStyle/>
+                    <a:p>
+                      <a:pPr algn="ctr"/>
+                      <a:r>
+                        <a:rPr sz="1600" b="0" i="0" lang="es-ES">
+                          <a:solidFill>
+                            <a:srgbClr val="263445"/>
+                          </a:solidFill>
+                        </a:rPr>
+                        <a:t>1</a:t>
+                      </a:r>
+                    </a:p>
+                  </a:txBody>
+                  <a:tcPr anchor="ctr" marL="38100" marR="38100" marT="25400" marB="25400">
+                    <a:lnL w="19050" cap="flat" cmpd="sng" algn="ctr">
+                      <a:solidFill>
+                        <a:srgbClr val="FFFFFF"/>
+                      </a:solidFill>
+                      <a:prstDash val="solid"/>
+                    </a:lnL>
+                    <a:lnR w="19050" cap="flat" cmpd="sng" algn="ctr">
+                      <a:solidFill>
+                        <a:srgbClr val="FFFFFF"/>
+                      </a:solidFill>
+                      <a:prstDash val="solid"/>
+                    </a:lnR>
+                    <a:lnT w="19050" cap="flat" cmpd="sng" algn="ctr">
+                      <a:solidFill>
+                        <a:srgbClr val="FFFFFF"/>
+                      </a:solidFill>
+                      <a:prstDash val="solid"/>
+                    </a:lnT>
+                    <a:lnB w="19050" cap="flat" cmpd="sng" algn="ctr">
+                      <a:solidFill>
+                        <a:srgbClr val="FFFFFF"/>
+                      </a:solidFill>
+                      <a:prstDash val="solid"/>
+                    </a:lnB>
+                    <a:solidFill>
+                      <a:srgbClr val="FFFFFF"/>
+                    </a:solidFill>
+                  </a:tcPr>
+                </a:tc>
+                <a:tc>
+                  <a:txBody>
+                    <a:bodyPr wrap="square"/>
+                    <a:lstStyle/>
+                    <a:p>
+                      <a:pPr algn="ctr"/>
+                      <a:r>
+                        <a:rPr sz="1600" b="0" i="0" lang="es-ES">
+                          <a:solidFill>
+                            <a:srgbClr val="263445"/>
+                          </a:solidFill>
+                        </a:rPr>
+                        <a:t>697</a:t>
+                      </a:r>
+                    </a:p>
+                  </a:txBody>
+                  <a:tcPr anchor="ctr" marL="38100" marR="38100" marT="25400" marB="25400">
+                    <a:lnL w="19050" cap="flat" cmpd="sng" algn="ctr">
+                      <a:solidFill>
+                        <a:srgbClr val="FFFFFF"/>
+                      </a:solidFill>
+                      <a:prstDash val="solid"/>
+                    </a:lnL>
+                    <a:lnR w="19050" cap="flat" cmpd="sng" algn="ctr">
+                      <a:solidFill>
+                        <a:srgbClr val="FFFFFF"/>
+                      </a:solidFill>
+                      <a:prstDash val="solid"/>
+                    </a:lnR>
+                    <a:lnT w="19050" cap="flat" cmpd="sng" algn="ctr">
+                      <a:solidFill>
+                        <a:srgbClr val="FFFFFF"/>
+                      </a:solidFill>
+                      <a:prstDash val="solid"/>
+                    </a:lnT>
+                    <a:lnB w="19050" cap="flat" cmpd="sng" algn="ctr">
+                      <a:solidFill>
+                        <a:srgbClr val="FFFFFF"/>
+                      </a:solidFill>
+                      <a:prstDash val="solid"/>
+                    </a:lnB>
+                    <a:solidFill>
+                      <a:srgbClr val="FCE4E6"/>
+                    </a:solidFill>
+                  </a:tcPr>
+                </a:tc>
+                <a:tc>
+                  <a:txBody>
+                    <a:bodyPr wrap="square"/>
+                    <a:lstStyle/>
+                    <a:p>
+                      <a:pPr algn="l"/>
+                      <a:r>
+                        <a:rPr sz="1600" b="0" i="0" lang="es-ES">
+                          <a:solidFill>
+                            <a:srgbClr val="263445"/>
+                          </a:solidFill>
+                        </a:rPr>
+                        <a:t>Darla (750 mg)</a:t>
+                      </a:r>
+                    </a:p>
+                  </a:txBody>
+                  <a:tcPr anchor="ctr" marL="38100" marR="38100" marT="25400" marB="25400">
+                    <a:lnL w="19050" cap="flat" cmpd="sng" algn="ctr">
+                      <a:solidFill>
+                        <a:srgbClr val="FFFFFF"/>
+                      </a:solidFill>
+                      <a:prstDash val="solid"/>
+                    </a:lnL>
+                    <a:lnR w="19050" cap="flat" cmpd="sng" algn="ctr">
+                      <a:solidFill>
+                        <a:srgbClr val="FFFFFF"/>
+                      </a:solidFill>
+                      <a:prstDash val="solid"/>
+                    </a:lnR>
+                    <a:lnT w="19050" cap="flat" cmpd="sng" algn="ctr">
+                      <a:solidFill>
+                        <a:srgbClr val="FFFFFF"/>
+                      </a:solidFill>
+                      <a:prstDash val="solid"/>
+                    </a:lnT>
+                    <a:lnB w="19050" cap="flat" cmpd="sng" algn="ctr">
+                      <a:solidFill>
+                        <a:srgbClr val="FFFFFF"/>
+                      </a:solidFill>
+                      <a:prstDash val="solid"/>
+                    </a:lnB>
+                    <a:solidFill>
+                      <a:srgbClr val="E7F4E9"/>
+                    </a:solidFill>
+                  </a:tcPr>
+                </a:tc>
+                <a:tc>
+                  <a:txBody>
+                    <a:bodyPr wrap="square"/>
+                    <a:lstStyle/>
+                    <a:p>
+                      <a:pPr algn="l"/>
+                      <a:r>
+                        <a:rPr sz="1600" b="0" i="0" lang="es-ES">
+                          <a:solidFill>
+                            <a:srgbClr val="263445"/>
+                          </a:solidFill>
+                        </a:rPr>
+                        <a:t>A las 48-72 h</a:t>
+                      </a:r>
+                    </a:p>
+                  </a:txBody>
+                  <a:tcPr anchor="ctr" marL="38100" marR="38100" marT="25400" marB="25400">
+                    <a:lnL w="19050" cap="flat" cmpd="sng" algn="ctr">
+                      <a:solidFill>
+                        <a:srgbClr val="FFFFFF"/>
+                      </a:solidFill>
+                      <a:prstDash val="solid"/>
+                    </a:lnL>
+                    <a:lnR w="19050" cap="flat" cmpd="sng" algn="ctr">
+                      <a:solidFill>
+                        <a:srgbClr val="FFFFFF"/>
+                      </a:solidFill>
+                      <a:prstDash val="solid"/>
+                    </a:lnR>
+                    <a:lnT w="19050" cap="flat" cmpd="sng" algn="ctr">
+                      <a:solidFill>
+                        <a:srgbClr val="FFFFFF"/>
+                      </a:solidFill>
+                      <a:prstDash val="solid"/>
+                    </a:lnT>
+                    <a:lnB w="19050" cap="flat" cmpd="sng" algn="ctr">
+                      <a:solidFill>
+                        <a:srgbClr val="FFFFFF"/>
+                      </a:solidFill>
+                      <a:prstDash val="solid"/>
+                    </a:lnB>
+                    <a:solidFill>
+                      <a:srgbClr val="E7F4E9"/>
+                    </a:solidFill>
+                  </a:tcPr>
+                </a:tc>
+                <a:tc>
+                  <a:txBody>
+                    <a:bodyPr wrap="square"/>
+                    <a:lstStyle/>
+                    <a:p>
+                      <a:pPr algn="l"/>
+                      <a:r>
+                        <a:rPr sz="1600" b="0" i="0" lang="es-ES">
+                          <a:solidFill>
+                            <a:srgbClr val="263445"/>
+                          </a:solidFill>
+                        </a:rPr>
+                        <a:t>Una guía, como si fuera un modelo</a:t>
+                      </a:r>
+                    </a:p>
+                  </a:txBody>
+                  <a:tcPr anchor="ctr" marL="38100" marR="38100" marT="25400" marB="25400">
+                    <a:lnL w="19050" cap="flat" cmpd="sng" algn="ctr">
+                      <a:solidFill>
+                        <a:srgbClr val="FFFFFF"/>
+                      </a:solidFill>
+                      <a:prstDash val="solid"/>
+                    </a:lnL>
+                    <a:lnR w="19050" cap="flat" cmpd="sng" algn="ctr">
+                      <a:solidFill>
+                        <a:srgbClr val="FFFFFF"/>
+                      </a:solidFill>
+                      <a:prstDash val="solid"/>
+                    </a:lnR>
+                    <a:lnT w="19050" cap="flat" cmpd="sng" algn="ctr">
+                      <a:solidFill>
+                        <a:srgbClr val="FFFFFF"/>
+                      </a:solidFill>
+                      <a:prstDash val="solid"/>
+                    </a:lnT>
+                    <a:lnB w="19050" cap="flat" cmpd="sng" algn="ctr">
+                      <a:solidFill>
+                        <a:srgbClr val="FFFFFF"/>
+                      </a:solidFill>
+                      <a:prstDash val="solid"/>
+                    </a:lnB>
+                    <a:solidFill>
+                      <a:srgbClr val="FCE4E6"/>
+                    </a:solidFill>
+                  </a:tcPr>
+                </a:tc>
+              </a:tr>
+              <a:tr h="304800">
+                <a:tc vMerge="1">
+                  <a:txBody>
+                    <a:bodyPr wrap="square"/>
+                    <a:lstStyle/>
+                    <a:p/>
+                  </a:txBody>
+                  <a:tcPr anchor="ctr" marL="38100" marR="38100" marT="25400" marB="25400">
+                    <a:lnL w="19050" cap="flat" cmpd="sng" algn="ctr">
+                      <a:solidFill>
+                        <a:srgbClr val="FFFFFF"/>
+                      </a:solidFill>
+                      <a:prstDash val="solid"/>
+                    </a:lnL>
+                    <a:lnR w="19050" cap="flat" cmpd="sng" algn="ctr">
+                      <a:solidFill>
+                        <a:srgbClr val="FFFFFF"/>
+                      </a:solidFill>
+                      <a:prstDash val="solid"/>
+                    </a:lnR>
+                    <a:lnT w="19050" cap="flat" cmpd="sng" algn="ctr">
+                      <a:solidFill>
+                        <a:srgbClr val="FFFFFF"/>
+                      </a:solidFill>
+                      <a:prstDash val="solid"/>
+                    </a:lnT>
+                    <a:lnB w="19050" cap="flat" cmpd="sng" algn="ctr">
+                      <a:solidFill>
+                        <a:srgbClr val="FFFFFF"/>
+                      </a:solidFill>
+                      <a:prstDash val="solid"/>
+                    </a:lnB>
+                    <a:solidFill>
+                      <a:srgbClr val="FFFFFF"/>
+                    </a:solidFill>
+                  </a:tcPr>
+                </a:tc>
+                <a:tc>
+                  <a:txBody>
+                    <a:bodyPr wrap="square"/>
+                    <a:lstStyle/>
+                    <a:p>
+                      <a:pPr algn="ctr"/>
+                      <a:r>
+                        <a:rPr sz="1600" b="0" i="0" lang="es-ES">
+                          <a:solidFill>
+                            <a:srgbClr val="263445"/>
+                          </a:solidFill>
+                        </a:rPr>
+                        <a:t>2</a:t>
+                      </a:r>
+                    </a:p>
+                  </a:txBody>
+                  <a:tcPr anchor="ctr" marL="38100" marR="38100" marT="25400" marB="25400">
+                    <a:lnL w="19050" cap="flat" cmpd="sng" algn="ctr">
+                      <a:solidFill>
+                        <a:srgbClr val="FFFFFF"/>
+                      </a:solidFill>
+                      <a:prstDash val="solid"/>
+                    </a:lnL>
+                    <a:lnR w="19050" cap="flat" cmpd="sng" algn="ctr">
+                      <a:solidFill>
+                        <a:srgbClr val="FFFFFF"/>
+                      </a:solidFill>
+                      <a:prstDash val="solid"/>
+                    </a:lnR>
+                    <a:lnT w="19050" cap="flat" cmpd="sng" algn="ctr">
+                      <a:solidFill>
+                        <a:srgbClr val="FFFFFF"/>
+                      </a:solidFill>
+                      <a:prstDash val="solid"/>
+                    </a:lnT>
+                    <a:lnB w="19050" cap="flat" cmpd="sng" algn="ctr">
+                      <a:solidFill>
+                        <a:srgbClr val="FFFFFF"/>
+                      </a:solidFill>
+                      <a:prstDash val="solid"/>
+                    </a:lnB>
+                    <a:solidFill>
+                      <a:srgbClr val="FFFFFF"/>
+                    </a:solidFill>
+                  </a:tcPr>
+                </a:tc>
+                <a:tc>
+                  <a:txBody>
+                    <a:bodyPr wrap="square"/>
+                    <a:lstStyle/>
+                    <a:p>
+                      <a:pPr algn="ctr"/>
+                      <a:r>
+                        <a:rPr sz="1600" b="0" i="0" lang="es-ES">
+                          <a:solidFill>
+                            <a:srgbClr val="263445"/>
+                          </a:solidFill>
+                        </a:rPr>
+                        <a:t>662</a:t>
+                      </a:r>
+                    </a:p>
+                  </a:txBody>
+                  <a:tcPr anchor="ctr" marL="38100" marR="38100" marT="25400" marB="25400">
+                    <a:lnL w="19050" cap="flat" cmpd="sng" algn="ctr">
+                      <a:solidFill>
+                        <a:srgbClr val="FFFFFF"/>
+                      </a:solidFill>
+                      <a:prstDash val="solid"/>
+                    </a:lnL>
+                    <a:lnR w="19050" cap="flat" cmpd="sng" algn="ctr">
+                      <a:solidFill>
+                        <a:srgbClr val="FFFFFF"/>
+                      </a:solidFill>
+                      <a:prstDash val="solid"/>
+                    </a:lnR>
+                    <a:lnT w="19050" cap="flat" cmpd="sng" algn="ctr">
+                      <a:solidFill>
+                        <a:srgbClr val="FFFFFF"/>
+                      </a:solidFill>
+                      <a:prstDash val="solid"/>
+                    </a:lnT>
+                    <a:lnB w="19050" cap="flat" cmpd="sng" algn="ctr">
+                      <a:solidFill>
+                        <a:srgbClr val="FFFFFF"/>
+                      </a:solidFill>
+                      <a:prstDash val="solid"/>
+                    </a:lnB>
+                    <a:solidFill>
+                      <a:srgbClr val="E7F4E9"/>
+                    </a:solidFill>
+                  </a:tcPr>
+                </a:tc>
+                <a:tc>
+                  <a:txBody>
+                    <a:bodyPr wrap="square"/>
+                    <a:lstStyle/>
+                    <a:p>
+                      <a:pPr algn="l"/>
+                      <a:r>
+                        <a:rPr sz="1600" b="0" i="0" lang="es-ES">
+                          <a:solidFill>
+                            <a:srgbClr val="263445"/>
+                          </a:solidFill>
+                        </a:rPr>
+                        <a:t>Omitirla</a:t>
+                      </a:r>
+                    </a:p>
+                  </a:txBody>
+                  <a:tcPr anchor="ctr" marL="38100" marR="38100" marT="25400" marB="25400">
+                    <a:lnL w="19050" cap="flat" cmpd="sng" algn="ctr">
+                      <a:solidFill>
+                        <a:srgbClr val="FFFFFF"/>
+                      </a:solidFill>
+                      <a:prstDash val="solid"/>
+                    </a:lnL>
+                    <a:lnR w="19050" cap="flat" cmpd="sng" algn="ctr">
+                      <a:solidFill>
+                        <a:srgbClr val="FFFFFF"/>
+                      </a:solidFill>
+                      <a:prstDash val="solid"/>
+                    </a:lnR>
+                    <a:lnT w="19050" cap="flat" cmpd="sng" algn="ctr">
+                      <a:solidFill>
+                        <a:srgbClr val="FFFFFF"/>
+                      </a:solidFill>
+                      <a:prstDash val="solid"/>
+                    </a:lnT>
+                    <a:lnB w="19050" cap="flat" cmpd="sng" algn="ctr">
+                      <a:solidFill>
+                        <a:srgbClr val="FFFFFF"/>
+                      </a:solidFill>
+                      <a:prstDash val="solid"/>
+                    </a:lnB>
+                    <a:solidFill>
+                      <a:srgbClr val="FCEFD1"/>
+                    </a:solidFill>
+                  </a:tcPr>
+                </a:tc>
+                <a:tc>
+                  <a:txBody>
+                    <a:bodyPr wrap="square"/>
+                    <a:lstStyle/>
+                    <a:p>
+                      <a:pPr algn="l"/>
+                      <a:r>
+                        <a:rPr sz="1600" b="0" i="0" lang="es-ES">
+                          <a:solidFill>
+                            <a:srgbClr val="263445"/>
+                          </a:solidFill>
+                        </a:rPr>
+                        <a:t>Día 5, 20:00</a:t>
+                      </a:r>
+                    </a:p>
+                  </a:txBody>
+                  <a:tcPr anchor="ctr" marL="38100" marR="38100" marT="25400" marB="25400">
+                    <a:lnL w="19050" cap="flat" cmpd="sng" algn="ctr">
+                      <a:solidFill>
+                        <a:srgbClr val="FFFFFF"/>
+                      </a:solidFill>
+                      <a:prstDash val="solid"/>
+                    </a:lnL>
+                    <a:lnR w="19050" cap="flat" cmpd="sng" algn="ctr">
+                      <a:solidFill>
+                        <a:srgbClr val="FFFFFF"/>
+                      </a:solidFill>
+                      <a:prstDash val="solid"/>
+                    </a:lnR>
+                    <a:lnT w="19050" cap="flat" cmpd="sng" algn="ctr">
+                      <a:solidFill>
+                        <a:srgbClr val="FFFFFF"/>
+                      </a:solidFill>
+                      <a:prstDash val="solid"/>
+                    </a:lnT>
+                    <a:lnB w="19050" cap="flat" cmpd="sng" algn="ctr">
+                      <a:solidFill>
+                        <a:srgbClr val="FFFFFF"/>
+                      </a:solidFill>
+                      <a:prstDash val="solid"/>
+                    </a:lnB>
+                    <a:solidFill>
+                      <a:srgbClr val="FCEFD1"/>
+                    </a:solidFill>
+                  </a:tcPr>
+                </a:tc>
+                <a:tc>
+                  <a:txBody>
+                    <a:bodyPr wrap="square"/>
+                    <a:lstStyle/>
+                    <a:p>
+                      <a:pPr algn="l"/>
+                      <a:r>
+                        <a:rPr sz="1600" b="0" i="0" lang="es-ES">
+                          <a:solidFill>
+                            <a:srgbClr val="263445"/>
+                          </a:solidFill>
+                        </a:rPr>
+                        <a:t>Ecuación mal aplicada</a:t>
+                      </a:r>
+                    </a:p>
+                  </a:txBody>
+                  <a:tcPr anchor="ctr" marL="38100" marR="38100" marT="25400" marB="25400">
+                    <a:lnL w="19050" cap="flat" cmpd="sng" algn="ctr">
+                      <a:solidFill>
+                        <a:srgbClr val="FFFFFF"/>
+                      </a:solidFill>
+                      <a:prstDash val="solid"/>
+                    </a:lnL>
+                    <a:lnR w="19050" cap="flat" cmpd="sng" algn="ctr">
+                      <a:solidFill>
+                        <a:srgbClr val="FFFFFF"/>
+                      </a:solidFill>
+                      <a:prstDash val="solid"/>
+                    </a:lnR>
+                    <a:lnT w="19050" cap="flat" cmpd="sng" algn="ctr">
+                      <a:solidFill>
+                        <a:srgbClr val="FFFFFF"/>
+                      </a:solidFill>
+                      <a:prstDash val="solid"/>
+                    </a:lnT>
+                    <a:lnB w="19050" cap="flat" cmpd="sng" algn="ctr">
+                      <a:solidFill>
+                        <a:srgbClr val="FFFFFF"/>
+                      </a:solidFill>
+                      <a:prstDash val="solid"/>
+                    </a:lnB>
+                    <a:solidFill>
+                      <a:srgbClr val="FCE4E6"/>
+                    </a:solidFill>
+                  </a:tcPr>
+                </a:tc>
+              </a:tr>
+              <a:tr h="546100">
+                <a:tc vMerge="1">
+                  <a:txBody>
+                    <a:bodyPr wrap="square"/>
+                    <a:lstStyle/>
+                    <a:p/>
+                  </a:txBody>
+                  <a:tcPr anchor="ctr" marL="38100" marR="38100" marT="25400" marB="25400">
+                    <a:lnL w="19050" cap="flat" cmpd="sng" algn="ctr">
+                      <a:solidFill>
+                        <a:srgbClr val="FFFFFF"/>
+                      </a:solidFill>
+                      <a:prstDash val="solid"/>
+                    </a:lnL>
+                    <a:lnR w="19050" cap="flat" cmpd="sng" algn="ctr">
+                      <a:solidFill>
+                        <a:srgbClr val="FFFFFF"/>
+                      </a:solidFill>
+                      <a:prstDash val="solid"/>
+                    </a:lnR>
+                    <a:lnT w="19050" cap="flat" cmpd="sng" algn="ctr">
+                      <a:solidFill>
+                        <a:srgbClr val="FFFFFF"/>
+                      </a:solidFill>
+                      <a:prstDash val="solid"/>
+                    </a:lnT>
+                    <a:lnB w="19050" cap="flat" cmpd="sng" algn="ctr">
+                      <a:solidFill>
+                        <a:srgbClr val="FFFFFF"/>
+                      </a:solidFill>
+                      <a:prstDash val="solid"/>
+                    </a:lnB>
+                    <a:solidFill>
+                      <a:srgbClr val="FFFFFF"/>
+                    </a:solidFill>
+                  </a:tcPr>
+                </a:tc>
+                <a:tc>
+                  <a:txBody>
+                    <a:bodyPr wrap="square"/>
+                    <a:lstStyle/>
+                    <a:p>
+                      <a:pPr algn="ctr"/>
+                      <a:r>
+                        <a:rPr sz="1600" b="0" i="0" lang="es-ES">
+                          <a:solidFill>
+                            <a:srgbClr val="263445"/>
+                          </a:solidFill>
+                        </a:rPr>
+                        <a:t>3</a:t>
+                      </a:r>
+                    </a:p>
+                  </a:txBody>
+                  <a:tcPr anchor="ctr" marL="38100" marR="38100" marT="25400" marB="25400">
+                    <a:lnL w="19050" cap="flat" cmpd="sng" algn="ctr">
+                      <a:solidFill>
+                        <a:srgbClr val="FFFFFF"/>
+                      </a:solidFill>
+                      <a:prstDash val="solid"/>
+                    </a:lnL>
+                    <a:lnR w="19050" cap="flat" cmpd="sng" algn="ctr">
+                      <a:solidFill>
+                        <a:srgbClr val="FFFFFF"/>
+                      </a:solidFill>
+                      <a:prstDash val="solid"/>
+                    </a:lnR>
+                    <a:lnT w="19050" cap="flat" cmpd="sng" algn="ctr">
+                      <a:solidFill>
+                        <a:srgbClr val="FFFFFF"/>
+                      </a:solidFill>
+                      <a:prstDash val="solid"/>
+                    </a:lnT>
+                    <a:lnB w="19050" cap="flat" cmpd="sng" algn="ctr">
+                      <a:solidFill>
+                        <a:srgbClr val="FFFFFF"/>
+                      </a:solidFill>
+                      <a:prstDash val="solid"/>
+                    </a:lnB>
+                    <a:solidFill>
+                      <a:srgbClr val="FFFFFF"/>
+                    </a:solidFill>
+                  </a:tcPr>
+                </a:tc>
+                <a:tc>
+                  <a:txBody>
+                    <a:bodyPr wrap="square"/>
+                    <a:lstStyle/>
+                    <a:p>
+                      <a:pPr algn="ctr"/>
+                      <a:r>
+                        <a:rPr sz="1600" b="0" i="0" lang="es-ES">
+                          <a:solidFill>
+                            <a:srgbClr val="263445"/>
+                          </a:solidFill>
+                        </a:rPr>
+                        <a:t>662</a:t>
+                      </a:r>
+                    </a:p>
+                  </a:txBody>
+                  <a:tcPr anchor="ctr" marL="38100" marR="38100" marT="25400" marB="25400">
+                    <a:lnL w="19050" cap="flat" cmpd="sng" algn="ctr">
+                      <a:solidFill>
+                        <a:srgbClr val="FFFFFF"/>
+                      </a:solidFill>
+                      <a:prstDash val="solid"/>
+                    </a:lnL>
+                    <a:lnR w="19050" cap="flat" cmpd="sng" algn="ctr">
+                      <a:solidFill>
+                        <a:srgbClr val="FFFFFF"/>
+                      </a:solidFill>
+                      <a:prstDash val="solid"/>
+                    </a:lnR>
+                    <a:lnT w="19050" cap="flat" cmpd="sng" algn="ctr">
+                      <a:solidFill>
+                        <a:srgbClr val="FFFFFF"/>
+                      </a:solidFill>
+                      <a:prstDash val="solid"/>
+                    </a:lnT>
+                    <a:lnB w="19050" cap="flat" cmpd="sng" algn="ctr">
+                      <a:solidFill>
+                        <a:srgbClr val="FFFFFF"/>
+                      </a:solidFill>
+                      <a:prstDash val="solid"/>
+                    </a:lnB>
+                    <a:solidFill>
+                      <a:srgbClr val="E7F4E9"/>
+                    </a:solidFill>
+                  </a:tcPr>
+                </a:tc>
+                <a:tc>
+                  <a:txBody>
+                    <a:bodyPr wrap="square"/>
+                    <a:lstStyle/>
+                    <a:p>
+                      <a:pPr algn="l"/>
+                      <a:r>
+                        <a:rPr sz="1600" b="0" i="0" lang="es-ES">
+                          <a:solidFill>
+                            <a:srgbClr val="263445"/>
+                          </a:solidFill>
+                        </a:rPr>
+                        <a:t>Omitirla</a:t>
+                      </a:r>
+                    </a:p>
+                  </a:txBody>
+                  <a:tcPr anchor="ctr" marL="38100" marR="38100" marT="25400" marB="25400">
+                    <a:lnL w="19050" cap="flat" cmpd="sng" algn="ctr">
+                      <a:solidFill>
+                        <a:srgbClr val="FFFFFF"/>
+                      </a:solidFill>
+                      <a:prstDash val="solid"/>
+                    </a:lnL>
+                    <a:lnR w="19050" cap="flat" cmpd="sng" algn="ctr">
+                      <a:solidFill>
+                        <a:srgbClr val="FFFFFF"/>
+                      </a:solidFill>
+                      <a:prstDash val="solid"/>
+                    </a:lnR>
+                    <a:lnT w="19050" cap="flat" cmpd="sng" algn="ctr">
+                      <a:solidFill>
+                        <a:srgbClr val="FFFFFF"/>
+                      </a:solidFill>
+                      <a:prstDash val="solid"/>
+                    </a:lnT>
+                    <a:lnB w="19050" cap="flat" cmpd="sng" algn="ctr">
+                      <a:solidFill>
+                        <a:srgbClr val="FFFFFF"/>
+                      </a:solidFill>
+                      <a:prstDash val="solid"/>
+                    </a:lnB>
+                    <a:solidFill>
+                      <a:srgbClr val="FCEFD1"/>
+                    </a:solidFill>
+                  </a:tcPr>
+                </a:tc>
+                <a:tc>
+                  <a:txBody>
+                    <a:bodyPr wrap="square"/>
+                    <a:lstStyle/>
+                    <a:p>
+                      <a:pPr algn="l"/>
+                      <a:r>
+                        <a:rPr sz="1600" b="0" i="0" lang="es-ES">
+                          <a:solidFill>
+                            <a:srgbClr val="263445"/>
+                          </a:solidFill>
+                        </a:rPr>
+                        <a:t>Día 5, 08:00 («equilibrio»)</a:t>
+                      </a:r>
+                    </a:p>
+                  </a:txBody>
+                  <a:tcPr anchor="ctr" marL="38100" marR="38100" marT="25400" marB="25400">
+                    <a:lnL w="19050" cap="flat" cmpd="sng" algn="ctr">
+                      <a:solidFill>
+                        <a:srgbClr val="FFFFFF"/>
+                      </a:solidFill>
+                      <a:prstDash val="solid"/>
+                    </a:lnL>
+                    <a:lnR w="19050" cap="flat" cmpd="sng" algn="ctr">
+                      <a:solidFill>
+                        <a:srgbClr val="FFFFFF"/>
+                      </a:solidFill>
+                      <a:prstDash val="solid"/>
+                    </a:lnR>
+                    <a:lnT w="19050" cap="flat" cmpd="sng" algn="ctr">
+                      <a:solidFill>
+                        <a:srgbClr val="FFFFFF"/>
+                      </a:solidFill>
+                      <a:prstDash val="solid"/>
+                    </a:lnT>
+                    <a:lnB w="19050" cap="flat" cmpd="sng" algn="ctr">
+                      <a:solidFill>
+                        <a:srgbClr val="FFFFFF"/>
+                      </a:solidFill>
+                      <a:prstDash val="solid"/>
+                    </a:lnB>
+                    <a:solidFill>
+                      <a:srgbClr val="FCE4E6"/>
+                    </a:solidFill>
+                  </a:tcPr>
+                </a:tc>
+                <a:tc>
+                  <a:txBody>
+                    <a:bodyPr wrap="square"/>
+                    <a:lstStyle/>
+                    <a:p>
+                      <a:pPr algn="l"/>
+                      <a:r>
+                        <a:rPr sz="1600" b="0" i="0" lang="es-ES">
+                          <a:solidFill>
+                            <a:srgbClr val="5E6B78"/>
+                          </a:solidFill>
+                        </a:rPr>
+                        <a:t>Ninguna</a:t>
+                      </a:r>
+                    </a:p>
+                  </a:txBody>
+                  <a:tcPr anchor="ctr" marL="38100" marR="38100" marT="25400" marB="25400">
+                    <a:lnL w="19050" cap="flat" cmpd="sng" algn="ctr">
+                      <a:solidFill>
+                        <a:srgbClr val="FFFFFF"/>
+                      </a:solidFill>
+                      <a:prstDash val="solid"/>
+                    </a:lnL>
+                    <a:lnR w="19050" cap="flat" cmpd="sng" algn="ctr">
+                      <a:solidFill>
+                        <a:srgbClr val="FFFFFF"/>
+                      </a:solidFill>
+                      <a:prstDash val="solid"/>
+                    </a:lnR>
+                    <a:lnT w="19050" cap="flat" cmpd="sng" algn="ctr">
+                      <a:solidFill>
+                        <a:srgbClr val="FFFFFF"/>
+                      </a:solidFill>
+                      <a:prstDash val="solid"/>
+                    </a:lnT>
+                    <a:lnB w="19050" cap="flat" cmpd="sng" algn="ctr">
+                      <a:solidFill>
+                        <a:srgbClr val="FFFFFF"/>
+                      </a:solidFill>
+                      <a:prstDash val="solid"/>
+                    </a:lnB>
+                    <a:solidFill>
+                      <a:srgbClr val="F3F6F9"/>
+                    </a:solidFill>
+                  </a:tcPr>
+                </a:tc>
+              </a:tr>
+              <a:tr h="304800">
+                <a:tc rowSpan="3">
+                  <a:txBody>
+                    <a:bodyPr wrap="square"/>
+                    <a:lstStyle/>
+                    <a:p>
+                      <a:pPr algn="l"/>
+                      <a:r>
+                        <a:rPr sz="1600" b="1" i="0" lang="es-ES">
+                          <a:solidFill>
+                            <a:srgbClr val="263445"/>
+                          </a:solidFill>
+                        </a:rPr>
+                        <a:t>Claude</a:t>
+                      </a:r>
+                    </a:p>
+                  </a:txBody>
+                  <a:tcPr anchor="ctr" marL="38100" marR="38100" marT="25400" marB="25400">
+                    <a:lnL w="19050" cap="flat" cmpd="sng" algn="ctr">
+                      <a:solidFill>
+                        <a:srgbClr val="FFFFFF"/>
+                      </a:solidFill>
+                      <a:prstDash val="solid"/>
+                    </a:lnL>
+                    <a:lnR w="19050" cap="flat" cmpd="sng" algn="ctr">
+                      <a:solidFill>
+                        <a:srgbClr val="FFFFFF"/>
+                      </a:solidFill>
+                      <a:prstDash val="solid"/>
+                    </a:lnR>
+                    <a:lnT w="31750" cap="flat" cmpd="sng" algn="ctr">
+                      <a:solidFill>
+                        <a:srgbClr val="263445"/>
+                      </a:solidFill>
+                      <a:prstDash val="solid"/>
+                    </a:lnT>
+                    <a:lnB w="19050" cap="flat" cmpd="sng" algn="ctr">
+                      <a:solidFill>
+                        <a:srgbClr val="FFFFFF"/>
+                      </a:solidFill>
+                      <a:prstDash val="solid"/>
+                    </a:lnB>
+                    <a:solidFill>
+                      <a:srgbClr val="FFFFFF"/>
+                    </a:solidFill>
+                  </a:tcPr>
+                </a:tc>
+                <a:tc>
+                  <a:txBody>
+                    <a:bodyPr wrap="square"/>
+                    <a:lstStyle/>
+                    <a:p>
+                      <a:pPr algn="ctr"/>
+                      <a:r>
+                        <a:rPr sz="1600" b="0" i="0" lang="es-ES">
+                          <a:solidFill>
+                            <a:srgbClr val="263445"/>
+                          </a:solidFill>
+                        </a:rPr>
+                        <a:t>1</a:t>
+                      </a:r>
+                    </a:p>
+                  </a:txBody>
+                  <a:tcPr anchor="ctr" marL="38100" marR="38100" marT="25400" marB="25400">
+                    <a:lnL w="19050" cap="flat" cmpd="sng" algn="ctr">
+                      <a:solidFill>
+                        <a:srgbClr val="FFFFFF"/>
+                      </a:solidFill>
+                      <a:prstDash val="solid"/>
+                    </a:lnL>
+                    <a:lnR w="19050" cap="flat" cmpd="sng" algn="ctr">
+                      <a:solidFill>
+                        <a:srgbClr val="FFFFFF"/>
+                      </a:solidFill>
+                      <a:prstDash val="solid"/>
+                    </a:lnR>
+                    <a:lnT w="31750" cap="flat" cmpd="sng" algn="ctr">
+                      <a:solidFill>
+                        <a:srgbClr val="263445"/>
+                      </a:solidFill>
+                      <a:prstDash val="solid"/>
+                    </a:lnT>
+                    <a:lnB w="19050" cap="flat" cmpd="sng" algn="ctr">
+                      <a:solidFill>
+                        <a:srgbClr val="FFFFFF"/>
+                      </a:solidFill>
+                      <a:prstDash val="solid"/>
+                    </a:lnB>
+                    <a:solidFill>
+                      <a:srgbClr val="FFFFFF"/>
+                    </a:solidFill>
+                  </a:tcPr>
+                </a:tc>
+                <a:tc>
+                  <a:txBody>
+                    <a:bodyPr wrap="square"/>
+                    <a:lstStyle/>
+                    <a:p>
+                      <a:pPr algn="ctr"/>
+                      <a:r>
+                        <a:rPr sz="1600" b="0" i="0" lang="es-ES">
+                          <a:solidFill>
+                            <a:srgbClr val="5E6B78"/>
+                          </a:solidFill>
+                        </a:rPr>
+                        <a:t>[pendiente]</a:t>
+                      </a:r>
+                    </a:p>
+                  </a:txBody>
+                  <a:tcPr anchor="ctr" marL="38100" marR="38100" marT="25400" marB="25400">
+                    <a:lnL w="19050" cap="flat" cmpd="sng" algn="ctr">
+                      <a:solidFill>
+                        <a:srgbClr val="FFFFFF"/>
+                      </a:solidFill>
+                      <a:prstDash val="solid"/>
+                    </a:lnL>
+                    <a:lnR w="19050" cap="flat" cmpd="sng" algn="ctr">
+                      <a:solidFill>
+                        <a:srgbClr val="FFFFFF"/>
+                      </a:solidFill>
+                      <a:prstDash val="solid"/>
+                    </a:lnR>
+                    <a:lnT w="31750" cap="flat" cmpd="sng" algn="ctr">
+                      <a:solidFill>
+                        <a:srgbClr val="263445"/>
+                      </a:solidFill>
+                      <a:prstDash val="solid"/>
+                    </a:lnT>
+                    <a:lnB w="19050" cap="flat" cmpd="sng" algn="ctr">
+                      <a:solidFill>
+                        <a:srgbClr val="FFFFFF"/>
+                      </a:solidFill>
+                      <a:prstDash val="solid"/>
+                    </a:lnB>
+                    <a:solidFill>
+                      <a:srgbClr val="F3F6F9"/>
+                    </a:solidFill>
+                  </a:tcPr>
+                </a:tc>
+                <a:tc>
+                  <a:txBody>
+                    <a:bodyPr wrap="square"/>
+                    <a:lstStyle/>
+                    <a:p>
+                      <a:pPr algn="l"/>
+                      <a:r>
+                        <a:rPr sz="1600" b="0" i="0" lang="es-ES">
+                          <a:solidFill>
+                            <a:srgbClr val="5E6B78"/>
+                          </a:solidFill>
+                        </a:rPr>
+                        <a:t>[pendiente]</a:t>
+                      </a:r>
+                    </a:p>
+                  </a:txBody>
+                  <a:tcPr anchor="ctr" marL="38100" marR="38100" marT="25400" marB="25400">
+                    <a:lnL w="19050" cap="flat" cmpd="sng" algn="ctr">
+                      <a:solidFill>
+                        <a:srgbClr val="FFFFFF"/>
+                      </a:solidFill>
+                      <a:prstDash val="solid"/>
+                    </a:lnL>
+                    <a:lnR w="19050" cap="flat" cmpd="sng" algn="ctr">
+                      <a:solidFill>
+                        <a:srgbClr val="FFFFFF"/>
+                      </a:solidFill>
+                      <a:prstDash val="solid"/>
+                    </a:lnR>
+                    <a:lnT w="31750" cap="flat" cmpd="sng" algn="ctr">
+                      <a:solidFill>
+                        <a:srgbClr val="263445"/>
+                      </a:solidFill>
+                      <a:prstDash val="solid"/>
+                    </a:lnT>
+                    <a:lnB w="19050" cap="flat" cmpd="sng" algn="ctr">
+                      <a:solidFill>
+                        <a:srgbClr val="FFFFFF"/>
+                      </a:solidFill>
+                      <a:prstDash val="solid"/>
+                    </a:lnB>
+                    <a:solidFill>
+                      <a:srgbClr val="F3F6F9"/>
+                    </a:solidFill>
+                  </a:tcPr>
+                </a:tc>
+                <a:tc>
+                  <a:txBody>
+                    <a:bodyPr wrap="square"/>
+                    <a:lstStyle/>
+                    <a:p>
+                      <a:pPr algn="l"/>
+                      <a:r>
+                        <a:rPr sz="1600" b="0" i="0" lang="es-ES">
+                          <a:solidFill>
+                            <a:srgbClr val="5E6B78"/>
+                          </a:solidFill>
+                        </a:rPr>
+                        <a:t>[pendiente]</a:t>
+                      </a:r>
+                    </a:p>
+                  </a:txBody>
+                  <a:tcPr anchor="ctr" marL="38100" marR="38100" marT="25400" marB="25400">
+                    <a:lnL w="19050" cap="flat" cmpd="sng" algn="ctr">
+                      <a:solidFill>
+                        <a:srgbClr val="FFFFFF"/>
+                      </a:solidFill>
+                      <a:prstDash val="solid"/>
+                    </a:lnL>
+                    <a:lnR w="19050" cap="flat" cmpd="sng" algn="ctr">
+                      <a:solidFill>
+                        <a:srgbClr val="FFFFFF"/>
+                      </a:solidFill>
+                      <a:prstDash val="solid"/>
+                    </a:lnR>
+                    <a:lnT w="31750" cap="flat" cmpd="sng" algn="ctr">
+                      <a:solidFill>
+                        <a:srgbClr val="263445"/>
+                      </a:solidFill>
+                      <a:prstDash val="solid"/>
+                    </a:lnT>
+                    <a:lnB w="19050" cap="flat" cmpd="sng" algn="ctr">
+                      <a:solidFill>
+                        <a:srgbClr val="FFFFFF"/>
+                      </a:solidFill>
+                      <a:prstDash val="solid"/>
+                    </a:lnB>
+                    <a:solidFill>
+                      <a:srgbClr val="F3F6F9"/>
+                    </a:solidFill>
+                  </a:tcPr>
+                </a:tc>
+                <a:tc>
+                  <a:txBody>
+                    <a:bodyPr wrap="square"/>
+                    <a:lstStyle/>
+                    <a:p>
+                      <a:pPr algn="l"/>
+                      <a:r>
+                        <a:rPr sz="1600" b="0" i="0" lang="es-ES">
+                          <a:solidFill>
+                            <a:srgbClr val="5E6B78"/>
+                          </a:solidFill>
+                        </a:rPr>
+                        <a:t>[pendiente]</a:t>
+                      </a:r>
+                    </a:p>
+                  </a:txBody>
+                  <a:tcPr anchor="ctr" marL="38100" marR="38100" marT="25400" marB="25400">
+                    <a:lnL w="19050" cap="flat" cmpd="sng" algn="ctr">
+                      <a:solidFill>
+                        <a:srgbClr val="FFFFFF"/>
+                      </a:solidFill>
+                      <a:prstDash val="solid"/>
+                    </a:lnL>
+                    <a:lnR w="19050" cap="flat" cmpd="sng" algn="ctr">
+                      <a:solidFill>
+                        <a:srgbClr val="FFFFFF"/>
+                      </a:solidFill>
+                      <a:prstDash val="solid"/>
+                    </a:lnR>
+                    <a:lnT w="31750" cap="flat" cmpd="sng" algn="ctr">
+                      <a:solidFill>
+                        <a:srgbClr val="263445"/>
+                      </a:solidFill>
+                      <a:prstDash val="solid"/>
+                    </a:lnT>
+                    <a:lnB w="19050" cap="flat" cmpd="sng" algn="ctr">
+                      <a:solidFill>
+                        <a:srgbClr val="FFFFFF"/>
+                      </a:solidFill>
+                      <a:prstDash val="solid"/>
+                    </a:lnB>
+                    <a:solidFill>
+                      <a:srgbClr val="F3F6F9"/>
+                    </a:solidFill>
+                  </a:tcPr>
+                </a:tc>
+              </a:tr>
+              <a:tr h="304800">
+                <a:tc vMerge="1">
+                  <a:txBody>
+                    <a:bodyPr wrap="square"/>
+                    <a:lstStyle/>
+                    <a:p/>
+                  </a:txBody>
+                  <a:tcPr anchor="ctr" marL="38100" marR="38100" marT="25400" marB="25400">
+                    <a:lnL w="19050" cap="flat" cmpd="sng" algn="ctr">
+                      <a:solidFill>
+                        <a:srgbClr val="FFFFFF"/>
+                      </a:solidFill>
+                      <a:prstDash val="solid"/>
+                    </a:lnL>
+                    <a:lnR w="19050" cap="flat" cmpd="sng" algn="ctr">
+                      <a:solidFill>
+                        <a:srgbClr val="FFFFFF"/>
+                      </a:solidFill>
+                      <a:prstDash val="solid"/>
+                    </a:lnR>
+                    <a:lnT w="19050" cap="flat" cmpd="sng" algn="ctr">
+                      <a:solidFill>
+                        <a:srgbClr val="FFFFFF"/>
+                      </a:solidFill>
+                      <a:prstDash val="solid"/>
+                    </a:lnT>
+                    <a:lnB w="19050" cap="flat" cmpd="sng" algn="ctr">
+                      <a:solidFill>
+                        <a:srgbClr val="FFFFFF"/>
+                      </a:solidFill>
+                      <a:prstDash val="solid"/>
+                    </a:lnB>
+                    <a:solidFill>
+                      <a:srgbClr val="FFFFFF"/>
+                    </a:solidFill>
+                  </a:tcPr>
+                </a:tc>
+                <a:tc>
+                  <a:txBody>
+                    <a:bodyPr wrap="square"/>
+                    <a:lstStyle/>
+                    <a:p>
+                      <a:pPr algn="ctr"/>
+                      <a:r>
+                        <a:rPr sz="1600" b="0" i="0" lang="es-ES">
+                          <a:solidFill>
+                            <a:srgbClr val="263445"/>
+                          </a:solidFill>
+                        </a:rPr>
+                        <a:t>2</a:t>
+                      </a:r>
+                    </a:p>
+                  </a:txBody>
+                  <a:tcPr anchor="ctr" marL="38100" marR="38100" marT="25400" marB="25400">
+                    <a:lnL w="19050" cap="flat" cmpd="sng" algn="ctr">
+                      <a:solidFill>
+                        <a:srgbClr val="FFFFFF"/>
+                      </a:solidFill>
+                      <a:prstDash val="solid"/>
+                    </a:lnL>
+                    <a:lnR w="19050" cap="flat" cmpd="sng" algn="ctr">
+                      <a:solidFill>
+                        <a:srgbClr val="FFFFFF"/>
+                      </a:solidFill>
+                      <a:prstDash val="solid"/>
+                    </a:lnR>
+                    <a:lnT w="19050" cap="flat" cmpd="sng" algn="ctr">
+                      <a:solidFill>
+                        <a:srgbClr val="FFFFFF"/>
+                      </a:solidFill>
+                      <a:prstDash val="solid"/>
+                    </a:lnT>
+                    <a:lnB w="19050" cap="flat" cmpd="sng" algn="ctr">
+                      <a:solidFill>
+                        <a:srgbClr val="FFFFFF"/>
+                      </a:solidFill>
+                      <a:prstDash val="solid"/>
+                    </a:lnB>
+                    <a:solidFill>
+                      <a:srgbClr val="FFFFFF"/>
+                    </a:solidFill>
+                  </a:tcPr>
+                </a:tc>
+                <a:tc>
+                  <a:txBody>
+                    <a:bodyPr wrap="square"/>
+                    <a:lstStyle/>
+                    <a:p>
+                      <a:pPr algn="ctr"/>
+                      <a:r>
+                        <a:rPr sz="1600" b="0" i="0" lang="es-ES">
+                          <a:solidFill>
+                            <a:srgbClr val="5E6B78"/>
+                          </a:solidFill>
+                        </a:rPr>
+                        <a:t>[pendiente]</a:t>
+                      </a:r>
+                    </a:p>
+                  </a:txBody>
+                  <a:tcPr anchor="ctr" marL="38100" marR="38100" marT="25400" marB="25400">
+                    <a:lnL w="19050" cap="flat" cmpd="sng" algn="ctr">
+                      <a:solidFill>
+                        <a:srgbClr val="FFFFFF"/>
+                      </a:solidFill>
+                      <a:prstDash val="solid"/>
+                    </a:lnL>
+                    <a:lnR w="19050" cap="flat" cmpd="sng" algn="ctr">
+                      <a:solidFill>
+                        <a:srgbClr val="FFFFFF"/>
+                      </a:solidFill>
+                      <a:prstDash val="solid"/>
+                    </a:lnR>
+                    <a:lnT w="19050" cap="flat" cmpd="sng" algn="ctr">
+                      <a:solidFill>
+                        <a:srgbClr val="FFFFFF"/>
+                      </a:solidFill>
+                      <a:prstDash val="solid"/>
+                    </a:lnT>
+                    <a:lnB w="19050" cap="flat" cmpd="sng" algn="ctr">
+                      <a:solidFill>
+                        <a:srgbClr val="FFFFFF"/>
+                      </a:solidFill>
+                      <a:prstDash val="solid"/>
+                    </a:lnB>
+                    <a:solidFill>
+                      <a:srgbClr val="F3F6F9"/>
+                    </a:solidFill>
+                  </a:tcPr>
+                </a:tc>
+                <a:tc>
+                  <a:txBody>
+                    <a:bodyPr wrap="square"/>
+                    <a:lstStyle/>
+                    <a:p>
+                      <a:pPr algn="l"/>
+                      <a:r>
+                        <a:rPr sz="1600" b="0" i="0" lang="es-ES">
+                          <a:solidFill>
+                            <a:srgbClr val="5E6B78"/>
+                          </a:solidFill>
+                        </a:rPr>
+                        <a:t>[pendiente]</a:t>
+                      </a:r>
+                    </a:p>
+                  </a:txBody>
+                  <a:tcPr anchor="ctr" marL="38100" marR="38100" marT="25400" marB="25400">
+                    <a:lnL w="19050" cap="flat" cmpd="sng" algn="ctr">
+                      <a:solidFill>
+                        <a:srgbClr val="FFFFFF"/>
+                      </a:solidFill>
+                      <a:prstDash val="solid"/>
+                    </a:lnL>
+                    <a:lnR w="19050" cap="flat" cmpd="sng" algn="ctr">
+                      <a:solidFill>
+                        <a:srgbClr val="FFFFFF"/>
+                      </a:solidFill>
+                      <a:prstDash val="solid"/>
+                    </a:lnR>
+                    <a:lnT w="19050" cap="flat" cmpd="sng" algn="ctr">
+                      <a:solidFill>
+                        <a:srgbClr val="FFFFFF"/>
+                      </a:solidFill>
+                      <a:prstDash val="solid"/>
+                    </a:lnT>
+                    <a:lnB w="19050" cap="flat" cmpd="sng" algn="ctr">
+                      <a:solidFill>
+                        <a:srgbClr val="FFFFFF"/>
+                      </a:solidFill>
+                      <a:prstDash val="solid"/>
+                    </a:lnB>
+                    <a:solidFill>
+                      <a:srgbClr val="F3F6F9"/>
+                    </a:solidFill>
+                  </a:tcPr>
+                </a:tc>
+                <a:tc>
+                  <a:txBody>
+                    <a:bodyPr wrap="square"/>
+                    <a:lstStyle/>
+                    <a:p>
+                      <a:pPr algn="l"/>
+                      <a:r>
+                        <a:rPr sz="1600" b="0" i="0" lang="es-ES">
+                          <a:solidFill>
+                            <a:srgbClr val="5E6B78"/>
+                          </a:solidFill>
+                        </a:rPr>
+                        <a:t>[pendiente]</a:t>
+                      </a:r>
+                    </a:p>
+                  </a:txBody>
+                  <a:tcPr anchor="ctr" marL="38100" marR="38100" marT="25400" marB="25400">
+                    <a:lnL w="19050" cap="flat" cmpd="sng" algn="ctr">
+                      <a:solidFill>
+                        <a:srgbClr val="FFFFFF"/>
+                      </a:solidFill>
+                      <a:prstDash val="solid"/>
+                    </a:lnL>
+                    <a:lnR w="19050" cap="flat" cmpd="sng" algn="ctr">
+                      <a:solidFill>
+                        <a:srgbClr val="FFFFFF"/>
+                      </a:solidFill>
+                      <a:prstDash val="solid"/>
+                    </a:lnR>
+                    <a:lnT w="19050" cap="flat" cmpd="sng" algn="ctr">
+                      <a:solidFill>
+                        <a:srgbClr val="FFFFFF"/>
+                      </a:solidFill>
+                      <a:prstDash val="solid"/>
+                    </a:lnT>
+                    <a:lnB w="19050" cap="flat" cmpd="sng" algn="ctr">
+                      <a:solidFill>
+                        <a:srgbClr val="FFFFFF"/>
+                      </a:solidFill>
+                      <a:prstDash val="solid"/>
+                    </a:lnB>
+                    <a:solidFill>
+                      <a:srgbClr val="F3F6F9"/>
+                    </a:solidFill>
+                  </a:tcPr>
+                </a:tc>
+                <a:tc>
+                  <a:txBody>
+                    <a:bodyPr wrap="square"/>
+                    <a:lstStyle/>
+                    <a:p>
+                      <a:pPr algn="l"/>
+                      <a:r>
+                        <a:rPr sz="1600" b="0" i="0" lang="es-ES">
+                          <a:solidFill>
+                            <a:srgbClr val="5E6B78"/>
+                          </a:solidFill>
+                        </a:rPr>
+                        <a:t>[pendiente]</a:t>
+                      </a:r>
+                    </a:p>
+                  </a:txBody>
+                  <a:tcPr anchor="ctr" marL="38100" marR="38100" marT="25400" marB="25400">
+                    <a:lnL w="19050" cap="flat" cmpd="sng" algn="ctr">
+                      <a:solidFill>
+                        <a:srgbClr val="FFFFFF"/>
+                      </a:solidFill>
+                      <a:prstDash val="solid"/>
+                    </a:lnL>
+                    <a:lnR w="19050" cap="flat" cmpd="sng" algn="ctr">
+                      <a:solidFill>
+                        <a:srgbClr val="FFFFFF"/>
+                      </a:solidFill>
+                      <a:prstDash val="solid"/>
+                    </a:lnR>
+                    <a:lnT w="19050" cap="flat" cmpd="sng" algn="ctr">
+                      <a:solidFill>
+                        <a:srgbClr val="FFFFFF"/>
+                      </a:solidFill>
+                      <a:prstDash val="solid"/>
+                    </a:lnT>
+                    <a:lnB w="19050" cap="flat" cmpd="sng" algn="ctr">
+                      <a:solidFill>
+                        <a:srgbClr val="FFFFFF"/>
+                      </a:solidFill>
+                      <a:prstDash val="solid"/>
+                    </a:lnB>
+                    <a:solidFill>
+                      <a:srgbClr val="F3F6F9"/>
+                    </a:solidFill>
+                  </a:tcPr>
+                </a:tc>
+              </a:tr>
+              <a:tr h="304800">
+                <a:tc vMerge="1">
+                  <a:txBody>
+                    <a:bodyPr wrap="square"/>
+                    <a:lstStyle/>
+                    <a:p/>
+                  </a:txBody>
+                  <a:tcPr anchor="ctr" marL="38100" marR="38100" marT="25400" marB="25400">
+                    <a:lnL w="19050" cap="flat" cmpd="sng" algn="ctr">
+                      <a:solidFill>
+                        <a:srgbClr val="FFFFFF"/>
+                      </a:solidFill>
+                      <a:prstDash val="solid"/>
+                    </a:lnL>
+                    <a:lnR w="19050" cap="flat" cmpd="sng" algn="ctr">
+                      <a:solidFill>
+                        <a:srgbClr val="FFFFFF"/>
+                      </a:solidFill>
+                      <a:prstDash val="solid"/>
+                    </a:lnR>
+                    <a:lnT w="19050" cap="flat" cmpd="sng" algn="ctr">
+                      <a:solidFill>
+                        <a:srgbClr val="FFFFFF"/>
+                      </a:solidFill>
+                      <a:prstDash val="solid"/>
+                    </a:lnT>
+                    <a:lnB w="19050" cap="flat" cmpd="sng" algn="ctr">
+                      <a:solidFill>
+                        <a:srgbClr val="FFFFFF"/>
+                      </a:solidFill>
+                      <a:prstDash val="solid"/>
+                    </a:lnB>
+                    <a:solidFill>
+                      <a:srgbClr val="FFFFFF"/>
+                    </a:solidFill>
+                  </a:tcPr>
+                </a:tc>
+                <a:tc>
+                  <a:txBody>
+                    <a:bodyPr wrap="square"/>
+                    <a:lstStyle/>
+                    <a:p>
+                      <a:pPr algn="ctr"/>
+                      <a:r>
+                        <a:rPr sz="1600" b="0" i="0" lang="es-ES">
+                          <a:solidFill>
+                            <a:srgbClr val="263445"/>
+                          </a:solidFill>
+                        </a:rPr>
+                        <a:t>3</a:t>
+                      </a:r>
+                    </a:p>
+                  </a:txBody>
+                  <a:tcPr anchor="ctr" marL="38100" marR="38100" marT="25400" marB="25400">
+                    <a:lnL w="19050" cap="flat" cmpd="sng" algn="ctr">
+                      <a:solidFill>
+                        <a:srgbClr val="FFFFFF"/>
+                      </a:solidFill>
+                      <a:prstDash val="solid"/>
+                    </a:lnL>
+                    <a:lnR w="19050" cap="flat" cmpd="sng" algn="ctr">
+                      <a:solidFill>
+                        <a:srgbClr val="FFFFFF"/>
+                      </a:solidFill>
+                      <a:prstDash val="solid"/>
+                    </a:lnR>
+                    <a:lnT w="19050" cap="flat" cmpd="sng" algn="ctr">
+                      <a:solidFill>
+                        <a:srgbClr val="FFFFFF"/>
+                      </a:solidFill>
+                      <a:prstDash val="solid"/>
+                    </a:lnT>
+                    <a:lnB w="19050" cap="flat" cmpd="sng" algn="ctr">
+                      <a:solidFill>
+                        <a:srgbClr val="FFFFFF"/>
+                      </a:solidFill>
+                      <a:prstDash val="solid"/>
+                    </a:lnB>
+                    <a:solidFill>
+                      <a:srgbClr val="FFFFFF"/>
+                    </a:solidFill>
+                  </a:tcPr>
+                </a:tc>
+                <a:tc>
+                  <a:txBody>
+                    <a:bodyPr wrap="square"/>
+                    <a:lstStyle/>
+                    <a:p>
+                      <a:pPr algn="ctr"/>
+                      <a:r>
+                        <a:rPr sz="1600" b="0" i="0" lang="es-ES">
+                          <a:solidFill>
+                            <a:srgbClr val="5E6B78"/>
+                          </a:solidFill>
+                        </a:rPr>
+                        <a:t>[pendiente]</a:t>
+                      </a:r>
+                    </a:p>
+                  </a:txBody>
+                  <a:tcPr anchor="ctr" marL="38100" marR="38100" marT="25400" marB="25400">
+                    <a:lnL w="19050" cap="flat" cmpd="sng" algn="ctr">
+                      <a:solidFill>
+                        <a:srgbClr val="FFFFFF"/>
+                      </a:solidFill>
+                      <a:prstDash val="solid"/>
+                    </a:lnL>
+                    <a:lnR w="19050" cap="flat" cmpd="sng" algn="ctr">
+                      <a:solidFill>
+                        <a:srgbClr val="FFFFFF"/>
+                      </a:solidFill>
+                      <a:prstDash val="solid"/>
+                    </a:lnR>
+                    <a:lnT w="19050" cap="flat" cmpd="sng" algn="ctr">
+                      <a:solidFill>
+                        <a:srgbClr val="FFFFFF"/>
+                      </a:solidFill>
+                      <a:prstDash val="solid"/>
+                    </a:lnT>
+                    <a:lnB w="19050" cap="flat" cmpd="sng" algn="ctr">
+                      <a:solidFill>
+                        <a:srgbClr val="FFFFFF"/>
+                      </a:solidFill>
+                      <a:prstDash val="solid"/>
+                    </a:lnB>
+                    <a:solidFill>
+                      <a:srgbClr val="F3F6F9"/>
+                    </a:solidFill>
+                  </a:tcPr>
+                </a:tc>
+                <a:tc>
+                  <a:txBody>
+                    <a:bodyPr wrap="square"/>
+                    <a:lstStyle/>
+                    <a:p>
+                      <a:pPr algn="l"/>
+                      <a:r>
+                        <a:rPr sz="1600" b="0" i="0" lang="es-ES">
+                          <a:solidFill>
+                            <a:srgbClr val="5E6B78"/>
+                          </a:solidFill>
+                        </a:rPr>
+                        <a:t>[pendiente]</a:t>
+                      </a:r>
+                    </a:p>
+                  </a:txBody>
+                  <a:tcPr anchor="ctr" marL="38100" marR="38100" marT="25400" marB="25400">
+                    <a:lnL w="19050" cap="flat" cmpd="sng" algn="ctr">
+                      <a:solidFill>
+                        <a:srgbClr val="FFFFFF"/>
+                      </a:solidFill>
+                      <a:prstDash val="solid"/>
+                    </a:lnL>
+                    <a:lnR w="19050" cap="flat" cmpd="sng" algn="ctr">
+                      <a:solidFill>
+                        <a:srgbClr val="FFFFFF"/>
+                      </a:solidFill>
+                      <a:prstDash val="solid"/>
+                    </a:lnR>
+                    <a:lnT w="19050" cap="flat" cmpd="sng" algn="ctr">
+                      <a:solidFill>
+                        <a:srgbClr val="FFFFFF"/>
+                      </a:solidFill>
+                      <a:prstDash val="solid"/>
+                    </a:lnT>
+                    <a:lnB w="19050" cap="flat" cmpd="sng" algn="ctr">
+                      <a:solidFill>
+                        <a:srgbClr val="FFFFFF"/>
+                      </a:solidFill>
+                      <a:prstDash val="solid"/>
+                    </a:lnB>
+                    <a:solidFill>
+                      <a:srgbClr val="F3F6F9"/>
+                    </a:solidFill>
+                  </a:tcPr>
+                </a:tc>
+                <a:tc>
+                  <a:txBody>
+                    <a:bodyPr wrap="square"/>
+                    <a:lstStyle/>
+                    <a:p>
+                      <a:pPr algn="l"/>
+                      <a:r>
+                        <a:rPr sz="1600" b="0" i="0" lang="es-ES">
+                          <a:solidFill>
+                            <a:srgbClr val="5E6B78"/>
+                          </a:solidFill>
+                        </a:rPr>
+                        <a:t>[pendiente]</a:t>
+                      </a:r>
+                    </a:p>
+                  </a:txBody>
+                  <a:tcPr anchor="ctr" marL="38100" marR="38100" marT="25400" marB="25400">
+                    <a:lnL w="19050" cap="flat" cmpd="sng" algn="ctr">
+                      <a:solidFill>
+                        <a:srgbClr val="FFFFFF"/>
+                      </a:solidFill>
+                      <a:prstDash val="solid"/>
+                    </a:lnL>
+                    <a:lnR w="19050" cap="flat" cmpd="sng" algn="ctr">
+                      <a:solidFill>
+                        <a:srgbClr val="FFFFFF"/>
+                      </a:solidFill>
+                      <a:prstDash val="solid"/>
+                    </a:lnR>
+                    <a:lnT w="19050" cap="flat" cmpd="sng" algn="ctr">
+                      <a:solidFill>
+                        <a:srgbClr val="FFFFFF"/>
+                      </a:solidFill>
+                      <a:prstDash val="solid"/>
+                    </a:lnT>
+                    <a:lnB w="19050" cap="flat" cmpd="sng" algn="ctr">
+                      <a:solidFill>
+                        <a:srgbClr val="FFFFFF"/>
+                      </a:solidFill>
+                      <a:prstDash val="solid"/>
+                    </a:lnB>
+                    <a:solidFill>
+                      <a:srgbClr val="F3F6F9"/>
+                    </a:solidFill>
+                  </a:tcPr>
+                </a:tc>
+                <a:tc>
+                  <a:txBody>
+                    <a:bodyPr wrap="square"/>
+                    <a:lstStyle/>
+                    <a:p>
+                      <a:pPr algn="l"/>
+                      <a:r>
+                        <a:rPr sz="1600" b="0" i="0" lang="es-ES">
+                          <a:solidFill>
+                            <a:srgbClr val="5E6B78"/>
+                          </a:solidFill>
+                        </a:rPr>
+                        <a:t>[pendiente]</a:t>
+                      </a:r>
+                    </a:p>
+                  </a:txBody>
+                  <a:tcPr anchor="ctr" marL="38100" marR="38100" marT="25400" marB="25400">
+                    <a:lnL w="19050" cap="flat" cmpd="sng" algn="ctr">
+                      <a:solidFill>
+                        <a:srgbClr val="FFFFFF"/>
+                      </a:solidFill>
+                      <a:prstDash val="solid"/>
+                    </a:lnL>
+                    <a:lnR w="19050" cap="flat" cmpd="sng" algn="ctr">
+                      <a:solidFill>
+                        <a:srgbClr val="FFFFFF"/>
+                      </a:solidFill>
+                      <a:prstDash val="solid"/>
+                    </a:lnR>
+                    <a:lnT w="19050" cap="flat" cmpd="sng" algn="ctr">
+                      <a:solidFill>
+                        <a:srgbClr val="FFFFFF"/>
+                      </a:solidFill>
+                      <a:prstDash val="solid"/>
+                    </a:lnT>
+                    <a:lnB w="19050" cap="flat" cmpd="sng" algn="ctr">
+                      <a:solidFill>
+                        <a:srgbClr val="FFFFFF"/>
+                      </a:solidFill>
+                      <a:prstDash val="solid"/>
+                    </a:lnB>
+                    <a:solidFill>
+                      <a:srgbClr val="F3F6F9"/>
+                    </a:solidFill>
+                  </a:tcPr>
+                </a:tc>
+              </a:tr>
+              <a:tr h="304800">
+                <a:tc rowSpan="3">
+                  <a:txBody>
+                    <a:bodyPr wrap="square"/>
+                    <a:lstStyle/>
+                    <a:p>
+                      <a:pPr algn="l"/>
+                      <a:r>
+                        <a:rPr sz="1600" b="1" i="0" lang="es-ES">
+                          <a:solidFill>
+                            <a:srgbClr val="263445"/>
+                          </a:solidFill>
+                        </a:rPr>
+                        <a:t>ChatGPT</a:t>
+                      </a:r>
+                    </a:p>
+                  </a:txBody>
+                  <a:tcPr anchor="ctr" marL="38100" marR="38100" marT="25400" marB="25400">
+                    <a:lnL w="19050" cap="flat" cmpd="sng" algn="ctr">
+                      <a:solidFill>
+                        <a:srgbClr val="FFFFFF"/>
+                      </a:solidFill>
+                      <a:prstDash val="solid"/>
+                    </a:lnL>
+                    <a:lnR w="19050" cap="flat" cmpd="sng" algn="ctr">
+                      <a:solidFill>
+                        <a:srgbClr val="FFFFFF"/>
+                      </a:solidFill>
+                      <a:prstDash val="solid"/>
+                    </a:lnR>
+                    <a:lnT w="31750" cap="flat" cmpd="sng" algn="ctr">
+                      <a:solidFill>
+                        <a:srgbClr val="263445"/>
+                      </a:solidFill>
+                      <a:prstDash val="solid"/>
+                    </a:lnT>
+                    <a:lnB w="19050" cap="flat" cmpd="sng" algn="ctr">
+                      <a:solidFill>
+                        <a:srgbClr val="FFFFFF"/>
+                      </a:solidFill>
+                      <a:prstDash val="solid"/>
+                    </a:lnB>
+                    <a:solidFill>
+                      <a:srgbClr val="FFFFFF"/>
+                    </a:solidFill>
+                  </a:tcPr>
+                </a:tc>
+                <a:tc>
+                  <a:txBody>
+                    <a:bodyPr wrap="square"/>
+                    <a:lstStyle/>
+                    <a:p>
+                      <a:pPr algn="ctr"/>
+                      <a:r>
+                        <a:rPr sz="1600" b="0" i="0" lang="es-ES">
+                          <a:solidFill>
+                            <a:srgbClr val="263445"/>
+                          </a:solidFill>
+                        </a:rPr>
+                        <a:t>1</a:t>
+                      </a:r>
+                    </a:p>
+                  </a:txBody>
+                  <a:tcPr anchor="ctr" marL="38100" marR="38100" marT="25400" marB="25400">
+                    <a:lnL w="19050" cap="flat" cmpd="sng" algn="ctr">
+                      <a:solidFill>
+                        <a:srgbClr val="FFFFFF"/>
+                      </a:solidFill>
+                      <a:prstDash val="solid"/>
+                    </a:lnL>
+                    <a:lnR w="19050" cap="flat" cmpd="sng" algn="ctr">
+                      <a:solidFill>
+                        <a:srgbClr val="FFFFFF"/>
+                      </a:solidFill>
+                      <a:prstDash val="solid"/>
+                    </a:lnR>
+                    <a:lnT w="31750" cap="flat" cmpd="sng" algn="ctr">
+                      <a:solidFill>
+                        <a:srgbClr val="263445"/>
+                      </a:solidFill>
+                      <a:prstDash val="solid"/>
+                    </a:lnT>
+                    <a:lnB w="19050" cap="flat" cmpd="sng" algn="ctr">
+                      <a:solidFill>
+                        <a:srgbClr val="FFFFFF"/>
+                      </a:solidFill>
+                      <a:prstDash val="solid"/>
+                    </a:lnB>
+                    <a:solidFill>
+                      <a:srgbClr val="FFFFFF"/>
+                    </a:solidFill>
+                  </a:tcPr>
+                </a:tc>
+                <a:tc>
+                  <a:txBody>
+                    <a:bodyPr wrap="square"/>
+                    <a:lstStyle/>
+                    <a:p>
+                      <a:pPr algn="ctr"/>
+                      <a:r>
+                        <a:rPr sz="1600" b="0" i="0" lang="es-ES">
+                          <a:solidFill>
+                            <a:srgbClr val="5E6B78"/>
+                          </a:solidFill>
+                        </a:rPr>
+                        <a:t>[pendiente]</a:t>
+                      </a:r>
+                    </a:p>
+                  </a:txBody>
+                  <a:tcPr anchor="ctr" marL="38100" marR="38100" marT="25400" marB="25400">
+                    <a:lnL w="19050" cap="flat" cmpd="sng" algn="ctr">
+                      <a:solidFill>
+                        <a:srgbClr val="FFFFFF"/>
+                      </a:solidFill>
+                      <a:prstDash val="solid"/>
+                    </a:lnL>
+                    <a:lnR w="19050" cap="flat" cmpd="sng" algn="ctr">
+                      <a:solidFill>
+                        <a:srgbClr val="FFFFFF"/>
+                      </a:solidFill>
+                      <a:prstDash val="solid"/>
+                    </a:lnR>
+                    <a:lnT w="31750" cap="flat" cmpd="sng" algn="ctr">
+                      <a:solidFill>
+                        <a:srgbClr val="263445"/>
+                      </a:solidFill>
+                      <a:prstDash val="solid"/>
+                    </a:lnT>
+                    <a:lnB w="19050" cap="flat" cmpd="sng" algn="ctr">
+                      <a:solidFill>
+                        <a:srgbClr val="FFFFFF"/>
+                      </a:solidFill>
+                      <a:prstDash val="solid"/>
+                    </a:lnB>
+                    <a:solidFill>
+                      <a:srgbClr val="F3F6F9"/>
+                    </a:solidFill>
+                  </a:tcPr>
+                </a:tc>
+                <a:tc>
+                  <a:txBody>
+                    <a:bodyPr wrap="square"/>
+                    <a:lstStyle/>
+                    <a:p>
+                      <a:pPr algn="l"/>
+                      <a:r>
+                        <a:rPr sz="1600" b="0" i="0" lang="es-ES">
+                          <a:solidFill>
+                            <a:srgbClr val="5E6B78"/>
+                          </a:solidFill>
+                        </a:rPr>
+                        <a:t>[pendiente]</a:t>
+                      </a:r>
+                    </a:p>
+                  </a:txBody>
+                  <a:tcPr anchor="ctr" marL="38100" marR="38100" marT="25400" marB="25400">
+                    <a:lnL w="19050" cap="flat" cmpd="sng" algn="ctr">
+                      <a:solidFill>
+                        <a:srgbClr val="FFFFFF"/>
+                      </a:solidFill>
+                      <a:prstDash val="solid"/>
+                    </a:lnL>
+                    <a:lnR w="19050" cap="flat" cmpd="sng" algn="ctr">
+                      <a:solidFill>
+                        <a:srgbClr val="FFFFFF"/>
+                      </a:solidFill>
+                      <a:prstDash val="solid"/>
+                    </a:lnR>
+                    <a:lnT w="31750" cap="flat" cmpd="sng" algn="ctr">
+                      <a:solidFill>
+                        <a:srgbClr val="263445"/>
+                      </a:solidFill>
+                      <a:prstDash val="solid"/>
+                    </a:lnT>
+                    <a:lnB w="19050" cap="flat" cmpd="sng" algn="ctr">
+                      <a:solidFill>
+                        <a:srgbClr val="FFFFFF"/>
+                      </a:solidFill>
+                      <a:prstDash val="solid"/>
+                    </a:lnB>
+                    <a:solidFill>
+                      <a:srgbClr val="F3F6F9"/>
+                    </a:solidFill>
+                  </a:tcPr>
+                </a:tc>
+                <a:tc>
+                  <a:txBody>
+                    <a:bodyPr wrap="square"/>
+                    <a:lstStyle/>
+                    <a:p>
+                      <a:pPr algn="l"/>
+                      <a:r>
+                        <a:rPr sz="1600" b="0" i="0" lang="es-ES">
+                          <a:solidFill>
+                            <a:srgbClr val="5E6B78"/>
+                          </a:solidFill>
+                        </a:rPr>
+                        <a:t>[pendiente]</a:t>
+                      </a:r>
+                    </a:p>
+                  </a:txBody>
+                  <a:tcPr anchor="ctr" marL="38100" marR="38100" marT="25400" marB="25400">
+                    <a:lnL w="19050" cap="flat" cmpd="sng" algn="ctr">
+                      <a:solidFill>
+                        <a:srgbClr val="FFFFFF"/>
+                      </a:solidFill>
+                      <a:prstDash val="solid"/>
+                    </a:lnL>
+                    <a:lnR w="19050" cap="flat" cmpd="sng" algn="ctr">
+                      <a:solidFill>
+                        <a:srgbClr val="FFFFFF"/>
+                      </a:solidFill>
+                      <a:prstDash val="solid"/>
+                    </a:lnR>
+                    <a:lnT w="31750" cap="flat" cmpd="sng" algn="ctr">
+                      <a:solidFill>
+                        <a:srgbClr val="263445"/>
+                      </a:solidFill>
+                      <a:prstDash val="solid"/>
+                    </a:lnT>
+                    <a:lnB w="19050" cap="flat" cmpd="sng" algn="ctr">
+                      <a:solidFill>
+                        <a:srgbClr val="FFFFFF"/>
+                      </a:solidFill>
+                      <a:prstDash val="solid"/>
+                    </a:lnB>
+                    <a:solidFill>
+                      <a:srgbClr val="F3F6F9"/>
+                    </a:solidFill>
+                  </a:tcPr>
+                </a:tc>
+                <a:tc>
+                  <a:txBody>
+                    <a:bodyPr wrap="square"/>
+                    <a:lstStyle/>
+                    <a:p>
+                      <a:pPr algn="l"/>
+                      <a:r>
+                        <a:rPr sz="1600" b="0" i="0" lang="es-ES">
+                          <a:solidFill>
+                            <a:srgbClr val="5E6B78"/>
+                          </a:solidFill>
+                        </a:rPr>
+                        <a:t>[pendiente]</a:t>
+                      </a:r>
+                    </a:p>
+                  </a:txBody>
+                  <a:tcPr anchor="ctr" marL="38100" marR="38100" marT="25400" marB="25400">
+                    <a:lnL w="19050" cap="flat" cmpd="sng" algn="ctr">
+                      <a:solidFill>
+                        <a:srgbClr val="FFFFFF"/>
+                      </a:solidFill>
+                      <a:prstDash val="solid"/>
+                    </a:lnL>
+                    <a:lnR w="19050" cap="flat" cmpd="sng" algn="ctr">
+                      <a:solidFill>
+                        <a:srgbClr val="FFFFFF"/>
+                      </a:solidFill>
+                      <a:prstDash val="solid"/>
+                    </a:lnR>
+                    <a:lnT w="31750" cap="flat" cmpd="sng" algn="ctr">
+                      <a:solidFill>
+                        <a:srgbClr val="263445"/>
+                      </a:solidFill>
+                      <a:prstDash val="solid"/>
+                    </a:lnT>
+                    <a:lnB w="19050" cap="flat" cmpd="sng" algn="ctr">
+                      <a:solidFill>
+                        <a:srgbClr val="FFFFFF"/>
+                      </a:solidFill>
+                      <a:prstDash val="solid"/>
+                    </a:lnB>
+                    <a:solidFill>
+                      <a:srgbClr val="F3F6F9"/>
+                    </a:solidFill>
+                  </a:tcPr>
+                </a:tc>
+              </a:tr>
+              <a:tr h="304800">
+                <a:tc vMerge="1">
+                  <a:txBody>
+                    <a:bodyPr wrap="square"/>
+                    <a:lstStyle/>
+                    <a:p/>
+                  </a:txBody>
+                  <a:tcPr anchor="ctr" marL="38100" marR="38100" marT="25400" marB="25400">
+                    <a:lnL w="19050" cap="flat" cmpd="sng" algn="ctr">
+                      <a:solidFill>
+                        <a:srgbClr val="FFFFFF"/>
+                      </a:solidFill>
+                      <a:prstDash val="solid"/>
+                    </a:lnL>
+                    <a:lnR w="19050" cap="flat" cmpd="sng" algn="ctr">
+                      <a:solidFill>
+                        <a:srgbClr val="FFFFFF"/>
+                      </a:solidFill>
+                      <a:prstDash val="solid"/>
+                    </a:lnR>
+                    <a:lnT w="19050" cap="flat" cmpd="sng" algn="ctr">
+                      <a:solidFill>
+                        <a:srgbClr val="FFFFFF"/>
+                      </a:solidFill>
+                      <a:prstDash val="solid"/>
+                    </a:lnT>
+                    <a:lnB w="19050" cap="flat" cmpd="sng" algn="ctr">
+                      <a:solidFill>
+                        <a:srgbClr val="FFFFFF"/>
+                      </a:solidFill>
+                      <a:prstDash val="solid"/>
+                    </a:lnB>
+                    <a:solidFill>
+                      <a:srgbClr val="FFFFFF"/>
+                    </a:solidFill>
+                  </a:tcPr>
+                </a:tc>
+                <a:tc>
+                  <a:txBody>
+                    <a:bodyPr wrap="square"/>
+                    <a:lstStyle/>
+                    <a:p>
+                      <a:pPr algn="ctr"/>
+                      <a:r>
+                        <a:rPr sz="1600" b="0" i="0" lang="es-ES">
+                          <a:solidFill>
+                            <a:srgbClr val="263445"/>
+                          </a:solidFill>
+                        </a:rPr>
+                        <a:t>2</a:t>
+                      </a:r>
+                    </a:p>
+                  </a:txBody>
+                  <a:tcPr anchor="ctr" marL="38100" marR="38100" marT="25400" marB="25400">
+                    <a:lnL w="19050" cap="flat" cmpd="sng" algn="ctr">
+                      <a:solidFill>
+                        <a:srgbClr val="FFFFFF"/>
+                      </a:solidFill>
+                      <a:prstDash val="solid"/>
+                    </a:lnL>
+                    <a:lnR w="19050" cap="flat" cmpd="sng" algn="ctr">
+                      <a:solidFill>
+                        <a:srgbClr val="FFFFFF"/>
+                      </a:solidFill>
+                      <a:prstDash val="solid"/>
+                    </a:lnR>
+                    <a:lnT w="19050" cap="flat" cmpd="sng" algn="ctr">
+                      <a:solidFill>
+                        <a:srgbClr val="FFFFFF"/>
+                      </a:solidFill>
+                      <a:prstDash val="solid"/>
+                    </a:lnT>
+                    <a:lnB w="19050" cap="flat" cmpd="sng" algn="ctr">
+                      <a:solidFill>
+                        <a:srgbClr val="FFFFFF"/>
+                      </a:solidFill>
+                      <a:prstDash val="solid"/>
+                    </a:lnB>
+                    <a:solidFill>
+                      <a:srgbClr val="FFFFFF"/>
+                    </a:solidFill>
+                  </a:tcPr>
+                </a:tc>
+                <a:tc>
+                  <a:txBody>
+                    <a:bodyPr wrap="square"/>
+                    <a:lstStyle/>
+                    <a:p>
+                      <a:pPr algn="ctr"/>
+                      <a:r>
+                        <a:rPr sz="1600" b="0" i="0" lang="es-ES">
+                          <a:solidFill>
+                            <a:srgbClr val="5E6B78"/>
+                          </a:solidFill>
+                        </a:rPr>
+                        <a:t>[pendiente]</a:t>
+                      </a:r>
+                    </a:p>
+                  </a:txBody>
+                  <a:tcPr anchor="ctr" marL="38100" marR="38100" marT="25400" marB="25400">
+                    <a:lnL w="19050" cap="flat" cmpd="sng" algn="ctr">
+                      <a:solidFill>
+                        <a:srgbClr val="FFFFFF"/>
+                      </a:solidFill>
+                      <a:prstDash val="solid"/>
+                    </a:lnL>
+                    <a:lnR w="19050" cap="flat" cmpd="sng" algn="ctr">
+                      <a:solidFill>
+                        <a:srgbClr val="FFFFFF"/>
+                      </a:solidFill>
+                      <a:prstDash val="solid"/>
+                    </a:lnR>
+                    <a:lnT w="19050" cap="flat" cmpd="sng" algn="ctr">
+                      <a:solidFill>
+                        <a:srgbClr val="FFFFFF"/>
+                      </a:solidFill>
+                      <a:prstDash val="solid"/>
+                    </a:lnT>
+                    <a:lnB w="19050" cap="flat" cmpd="sng" algn="ctr">
+                      <a:solidFill>
+                        <a:srgbClr val="FFFFFF"/>
+                      </a:solidFill>
+                      <a:prstDash val="solid"/>
+                    </a:lnB>
+                    <a:solidFill>
+                      <a:srgbClr val="F3F6F9"/>
+                    </a:solidFill>
+                  </a:tcPr>
+                </a:tc>
+                <a:tc>
+                  <a:txBody>
+                    <a:bodyPr wrap="square"/>
+                    <a:lstStyle/>
+                    <a:p>
+                      <a:pPr algn="l"/>
+                      <a:r>
+                        <a:rPr sz="1600" b="0" i="0" lang="es-ES">
+                          <a:solidFill>
+                            <a:srgbClr val="5E6B78"/>
+                          </a:solidFill>
+                        </a:rPr>
+                        <a:t>[pendiente]</a:t>
+                      </a:r>
+                    </a:p>
+                  </a:txBody>
+                  <a:tcPr anchor="ctr" marL="38100" marR="38100" marT="25400" marB="25400">
+                    <a:lnL w="19050" cap="flat" cmpd="sng" algn="ctr">
+                      <a:solidFill>
+                        <a:srgbClr val="FFFFFF"/>
+                      </a:solidFill>
+                      <a:prstDash val="solid"/>
+                    </a:lnL>
+                    <a:lnR w="19050" cap="flat" cmpd="sng" algn="ctr">
+                      <a:solidFill>
+                        <a:srgbClr val="FFFFFF"/>
+                      </a:solidFill>
+                      <a:prstDash val="solid"/>
+                    </a:lnR>
+                    <a:lnT w="19050" cap="flat" cmpd="sng" algn="ctr">
+                      <a:solidFill>
+                        <a:srgbClr val="FFFFFF"/>
+                      </a:solidFill>
+                      <a:prstDash val="solid"/>
+                    </a:lnT>
+                    <a:lnB w="19050" cap="flat" cmpd="sng" algn="ctr">
+                      <a:solidFill>
+                        <a:srgbClr val="FFFFFF"/>
+                      </a:solidFill>
+                      <a:prstDash val="solid"/>
+                    </a:lnB>
+                    <a:solidFill>
+                      <a:srgbClr val="F3F6F9"/>
+                    </a:solidFill>
+                  </a:tcPr>
+                </a:tc>
+                <a:tc>
+                  <a:txBody>
+                    <a:bodyPr wrap="square"/>
+                    <a:lstStyle/>
+                    <a:p>
+                      <a:pPr algn="l"/>
+                      <a:r>
+                        <a:rPr sz="1600" b="0" i="0" lang="es-ES">
+                          <a:solidFill>
+                            <a:srgbClr val="5E6B78"/>
+                          </a:solidFill>
+                        </a:rPr>
+                        <a:t>[pendiente]</a:t>
+                      </a:r>
+                    </a:p>
+                  </a:txBody>
+                  <a:tcPr anchor="ctr" marL="38100" marR="38100" marT="25400" marB="25400">
+                    <a:lnL w="19050" cap="flat" cmpd="sng" algn="ctr">
+                      <a:solidFill>
+                        <a:srgbClr val="FFFFFF"/>
+                      </a:solidFill>
+                      <a:prstDash val="solid"/>
+                    </a:lnL>
+                    <a:lnR w="19050" cap="flat" cmpd="sng" algn="ctr">
+                      <a:solidFill>
+                        <a:srgbClr val="FFFFFF"/>
+                      </a:solidFill>
+                      <a:prstDash val="solid"/>
+                    </a:lnR>
+                    <a:lnT w="19050" cap="flat" cmpd="sng" algn="ctr">
+                      <a:solidFill>
+                        <a:srgbClr val="FFFFFF"/>
+                      </a:solidFill>
+                      <a:prstDash val="solid"/>
+                    </a:lnT>
+                    <a:lnB w="19050" cap="flat" cmpd="sng" algn="ctr">
+                      <a:solidFill>
+                        <a:srgbClr val="FFFFFF"/>
+                      </a:solidFill>
+                      <a:prstDash val="solid"/>
+                    </a:lnB>
+                    <a:solidFill>
+                      <a:srgbClr val="F3F6F9"/>
+                    </a:solidFill>
+                  </a:tcPr>
+                </a:tc>
+                <a:tc>
+                  <a:txBody>
+                    <a:bodyPr wrap="square"/>
+                    <a:lstStyle/>
+                    <a:p>
+                      <a:pPr algn="l"/>
+                      <a:r>
+                        <a:rPr sz="1600" b="0" i="0" lang="es-ES">
+                          <a:solidFill>
+                            <a:srgbClr val="5E6B78"/>
+                          </a:solidFill>
+                        </a:rPr>
+                        <a:t>[pendiente]</a:t>
+                      </a:r>
+                    </a:p>
+                  </a:txBody>
+                  <a:tcPr anchor="ctr" marL="38100" marR="38100" marT="25400" marB="25400">
+                    <a:lnL w="19050" cap="flat" cmpd="sng" algn="ctr">
+                      <a:solidFill>
+                        <a:srgbClr val="FFFFFF"/>
+                      </a:solidFill>
+                      <a:prstDash val="solid"/>
+                    </a:lnL>
+                    <a:lnR w="19050" cap="flat" cmpd="sng" algn="ctr">
+                      <a:solidFill>
+                        <a:srgbClr val="FFFFFF"/>
+                      </a:solidFill>
+                      <a:prstDash val="solid"/>
+                    </a:lnR>
+                    <a:lnT w="19050" cap="flat" cmpd="sng" algn="ctr">
+                      <a:solidFill>
+                        <a:srgbClr val="FFFFFF"/>
+                      </a:solidFill>
+                      <a:prstDash val="solid"/>
+                    </a:lnT>
+                    <a:lnB w="19050" cap="flat" cmpd="sng" algn="ctr">
+                      <a:solidFill>
+                        <a:srgbClr val="FFFFFF"/>
+                      </a:solidFill>
+                      <a:prstDash val="solid"/>
+                    </a:lnB>
+                    <a:solidFill>
+                      <a:srgbClr val="F3F6F9"/>
+                    </a:solidFill>
+                  </a:tcPr>
+                </a:tc>
+              </a:tr>
+              <a:tr h="304800">
+                <a:tc vMerge="1">
+                  <a:txBody>
+                    <a:bodyPr wrap="square"/>
+                    <a:lstStyle/>
+                    <a:p/>
+                  </a:txBody>
+                  <a:tcPr anchor="ctr" marL="38100" marR="38100" marT="25400" marB="25400">
+                    <a:lnL w="19050" cap="flat" cmpd="sng" algn="ctr">
+                      <a:solidFill>
+                        <a:srgbClr val="FFFFFF"/>
+                      </a:solidFill>
+                      <a:prstDash val="solid"/>
+                    </a:lnL>
+                    <a:lnR w="19050" cap="flat" cmpd="sng" algn="ctr">
+                      <a:solidFill>
+                        <a:srgbClr val="FFFFFF"/>
+                      </a:solidFill>
+                      <a:prstDash val="solid"/>
+                    </a:lnR>
+                    <a:lnT w="19050" cap="flat" cmpd="sng" algn="ctr">
+                      <a:solidFill>
+                        <a:srgbClr val="FFFFFF"/>
+                      </a:solidFill>
+                      <a:prstDash val="solid"/>
+                    </a:lnT>
+                    <a:lnB w="19050" cap="flat" cmpd="sng" algn="ctr">
+                      <a:solidFill>
+                        <a:srgbClr val="FFFFFF"/>
+                      </a:solidFill>
+                      <a:prstDash val="solid"/>
+                    </a:lnB>
+                    <a:solidFill>
+                      <a:srgbClr val="FFFFFF"/>
+                    </a:solidFill>
+                  </a:tcPr>
+                </a:tc>
+                <a:tc>
+                  <a:txBody>
+                    <a:bodyPr wrap="square"/>
+                    <a:lstStyle/>
+                    <a:p>
+                      <a:pPr algn="ctr"/>
+                      <a:r>
+                        <a:rPr sz="1600" b="0" i="0" lang="es-ES">
+                          <a:solidFill>
+                            <a:srgbClr val="263445"/>
+                          </a:solidFill>
+                        </a:rPr>
+                        <a:t>3</a:t>
+                      </a:r>
+                    </a:p>
+                  </a:txBody>
+                  <a:tcPr anchor="ctr" marL="38100" marR="38100" marT="25400" marB="25400">
+                    <a:lnL w="19050" cap="flat" cmpd="sng" algn="ctr">
+                      <a:solidFill>
+                        <a:srgbClr val="FFFFFF"/>
+                      </a:solidFill>
+                      <a:prstDash val="solid"/>
+                    </a:lnL>
+                    <a:lnR w="19050" cap="flat" cmpd="sng" algn="ctr">
+                      <a:solidFill>
+                        <a:srgbClr val="FFFFFF"/>
+                      </a:solidFill>
+                      <a:prstDash val="solid"/>
+                    </a:lnR>
+                    <a:lnT w="19050" cap="flat" cmpd="sng" algn="ctr">
+                      <a:solidFill>
+                        <a:srgbClr val="FFFFFF"/>
+                      </a:solidFill>
+                      <a:prstDash val="solid"/>
+                    </a:lnT>
+                    <a:lnB w="19050" cap="flat" cmpd="sng" algn="ctr">
+                      <a:solidFill>
+                        <a:srgbClr val="FFFFFF"/>
+                      </a:solidFill>
+                      <a:prstDash val="solid"/>
+                    </a:lnB>
+                    <a:solidFill>
+                      <a:srgbClr val="FFFFFF"/>
+                    </a:solidFill>
+                  </a:tcPr>
+                </a:tc>
+                <a:tc>
+                  <a:txBody>
+                    <a:bodyPr wrap="square"/>
+                    <a:lstStyle/>
+                    <a:p>
+                      <a:pPr algn="ctr"/>
+                      <a:r>
+                        <a:rPr sz="1600" b="0" i="0" lang="es-ES">
+                          <a:solidFill>
+                            <a:srgbClr val="5E6B78"/>
+                          </a:solidFill>
+                        </a:rPr>
+                        <a:t>[pendiente]</a:t>
+                      </a:r>
+                    </a:p>
+                  </a:txBody>
+                  <a:tcPr anchor="ctr" marL="38100" marR="38100" marT="25400" marB="25400">
+                    <a:lnL w="19050" cap="flat" cmpd="sng" algn="ctr">
+                      <a:solidFill>
+                        <a:srgbClr val="FFFFFF"/>
+                      </a:solidFill>
+                      <a:prstDash val="solid"/>
+                    </a:lnL>
+                    <a:lnR w="19050" cap="flat" cmpd="sng" algn="ctr">
+                      <a:solidFill>
+                        <a:srgbClr val="FFFFFF"/>
+                      </a:solidFill>
+                      <a:prstDash val="solid"/>
+                    </a:lnR>
+                    <a:lnT w="19050" cap="flat" cmpd="sng" algn="ctr">
+                      <a:solidFill>
+                        <a:srgbClr val="FFFFFF"/>
+                      </a:solidFill>
+                      <a:prstDash val="solid"/>
+                    </a:lnT>
+                    <a:lnB w="19050" cap="flat" cmpd="sng" algn="ctr">
+                      <a:solidFill>
+                        <a:srgbClr val="FFFFFF"/>
+                      </a:solidFill>
+                      <a:prstDash val="solid"/>
+                    </a:lnB>
+                    <a:solidFill>
+                      <a:srgbClr val="F3F6F9"/>
+                    </a:solidFill>
+                  </a:tcPr>
+                </a:tc>
+                <a:tc>
+                  <a:txBody>
+                    <a:bodyPr wrap="square"/>
+                    <a:lstStyle/>
+                    <a:p>
+                      <a:pPr algn="l"/>
+                      <a:r>
+                        <a:rPr sz="1600" b="0" i="0" lang="es-ES">
+                          <a:solidFill>
+                            <a:srgbClr val="5E6B78"/>
+                          </a:solidFill>
+                        </a:rPr>
+                        <a:t>[pendiente]</a:t>
+                      </a:r>
+                    </a:p>
+                  </a:txBody>
+                  <a:tcPr anchor="ctr" marL="38100" marR="38100" marT="25400" marB="25400">
+                    <a:lnL w="19050" cap="flat" cmpd="sng" algn="ctr">
+                      <a:solidFill>
+                        <a:srgbClr val="FFFFFF"/>
+                      </a:solidFill>
+                      <a:prstDash val="solid"/>
+                    </a:lnL>
+                    <a:lnR w="19050" cap="flat" cmpd="sng" algn="ctr">
+                      <a:solidFill>
+                        <a:srgbClr val="FFFFFF"/>
+                      </a:solidFill>
+                      <a:prstDash val="solid"/>
+                    </a:lnR>
+                    <a:lnT w="19050" cap="flat" cmpd="sng" algn="ctr">
+                      <a:solidFill>
+                        <a:srgbClr val="FFFFFF"/>
+                      </a:solidFill>
+                      <a:prstDash val="solid"/>
+                    </a:lnT>
+                    <a:lnB w="19050" cap="flat" cmpd="sng" algn="ctr">
+                      <a:solidFill>
+                        <a:srgbClr val="FFFFFF"/>
+                      </a:solidFill>
+                      <a:prstDash val="solid"/>
+                    </a:lnB>
+                    <a:solidFill>
+                      <a:srgbClr val="F3F6F9"/>
+                    </a:solidFill>
+                  </a:tcPr>
+                </a:tc>
+                <a:tc>
+                  <a:txBody>
+                    <a:bodyPr wrap="square"/>
+                    <a:lstStyle/>
+                    <a:p>
+                      <a:pPr algn="l"/>
+                      <a:r>
+                        <a:rPr sz="1600" b="0" i="0" lang="es-ES">
+                          <a:solidFill>
+                            <a:srgbClr val="5E6B78"/>
+                          </a:solidFill>
+                        </a:rPr>
+                        <a:t>[pendiente]</a:t>
+                      </a:r>
+                    </a:p>
+                  </a:txBody>
+                  <a:tcPr anchor="ctr" marL="38100" marR="38100" marT="25400" marB="25400">
+                    <a:lnL w="19050" cap="flat" cmpd="sng" algn="ctr">
+                      <a:solidFill>
+                        <a:srgbClr val="FFFFFF"/>
+                      </a:solidFill>
+                      <a:prstDash val="solid"/>
+                    </a:lnL>
+                    <a:lnR w="19050" cap="flat" cmpd="sng" algn="ctr">
+                      <a:solidFill>
+                        <a:srgbClr val="FFFFFF"/>
+                      </a:solidFill>
+                      <a:prstDash val="solid"/>
+                    </a:lnR>
+                    <a:lnT w="19050" cap="flat" cmpd="sng" algn="ctr">
+                      <a:solidFill>
+                        <a:srgbClr val="FFFFFF"/>
+                      </a:solidFill>
+                      <a:prstDash val="solid"/>
+                    </a:lnT>
+                    <a:lnB w="19050" cap="flat" cmpd="sng" algn="ctr">
+                      <a:solidFill>
+                        <a:srgbClr val="FFFFFF"/>
+                      </a:solidFill>
+                      <a:prstDash val="solid"/>
+                    </a:lnB>
+                    <a:solidFill>
+                      <a:srgbClr val="F3F6F9"/>
+                    </a:solidFill>
+                  </a:tcPr>
+                </a:tc>
+                <a:tc>
+                  <a:txBody>
+                    <a:bodyPr wrap="square"/>
+                    <a:lstStyle/>
+                    <a:p>
+                      <a:pPr algn="l"/>
+                      <a:r>
+                        <a:rPr sz="1600" b="0" i="0" lang="es-ES">
+                          <a:solidFill>
+                            <a:srgbClr val="5E6B78"/>
+                          </a:solidFill>
+                        </a:rPr>
+                        <a:t>[pendiente]</a:t>
+                      </a:r>
+                    </a:p>
+                  </a:txBody>
+                  <a:tcPr anchor="ctr" marL="38100" marR="38100" marT="25400" marB="25400">
+                    <a:lnL w="19050" cap="flat" cmpd="sng" algn="ctr">
+                      <a:solidFill>
+                        <a:srgbClr val="FFFFFF"/>
+                      </a:solidFill>
+                      <a:prstDash val="solid"/>
+                    </a:lnL>
+                    <a:lnR w="19050" cap="flat" cmpd="sng" algn="ctr">
+                      <a:solidFill>
+                        <a:srgbClr val="FFFFFF"/>
+                      </a:solidFill>
+                      <a:prstDash val="solid"/>
+                    </a:lnR>
+                    <a:lnT w="19050" cap="flat" cmpd="sng" algn="ctr">
+                      <a:solidFill>
+                        <a:srgbClr val="FFFFFF"/>
+                      </a:solidFill>
+                      <a:prstDash val="solid"/>
+                    </a:lnT>
+                    <a:lnB w="19050" cap="flat" cmpd="sng" algn="ctr">
+                      <a:solidFill>
+                        <a:srgbClr val="FFFFFF"/>
+                      </a:solidFill>
+                      <a:prstDash val="solid"/>
+                    </a:lnB>
+                    <a:solidFill>
+                      <a:srgbClr val="F3F6F9"/>
+                    </a:solidFill>
+                  </a:tcPr>
+                </a:tc>
+              </a:tr>
+            </a:tbl>
+          </a:graphicData>
+        </a:graphic>
+      </p:graphicFrame>
+      <p:sp>
+        <p:nvSpPr>
+          <p:cNvPr id="7" name="Franja"/>
+          <p:cNvSpPr/>
+          <p:nvPr/>
+        </p:nvSpPr>
+        <p:spPr>
+          <a:xfrm>
+            <a:off x="508000" y="5676900"/>
+            <a:ext cx="11176000" cy="444500"/>
+          </a:xfrm>
+          <a:prstGeom prst="roundRect">
+            <a:avLst>
+              <a:gd name="adj" fmla="val 22857"/>
+            </a:avLst>
+          </a:prstGeom>
+          <a:solidFill>
+            <a:srgbClr val="263445"/>
+          </a:solidFill>
+          <a:ln>
+            <a:noFill/>
+          </a:ln>
+        </p:spPr>
+        <p:txBody>
+          <a:bodyPr rtlCol="0" anchor="ctr" wrap="square" lIns="101600" tIns="0" rIns="101600" bIns="0">
+            <a:noAutofit/>
+          </a:bodyPr>
+          <a:lstStyle/>
+          <a:p>
+            <a:pPr algn="ctr"/>
+            <a:r>
+              <a:rPr sz="2200" b="1" i="0" lang="es-ES">
+                <a:solidFill>
+                  <a:srgbClr val="FFFFFF"/>
+                </a:solidFill>
+              </a:rPr>
+              <a:t>Dosis recomendada: 750 mg/12 h en las 9 respuestas · lo que cambia es el juicio que la rodea</a:t>
+            </a:r>
+          </a:p>
+        </p:txBody>
+      </p:sp>
+      <p:sp>
+        <p:nvSpPr>
+          <p:cNvPr id="8" name="Fuente"/>
+          <p:cNvSpPr txBox="1"/>
+          <p:nvPr/>
+        </p:nvSpPr>
+        <p:spPr>
+          <a:xfrm>
+            <a:off x="508000" y="6337300"/>
+            <a:ext cx="11176000" cy="241300"/>
+          </a:xfrm>
+          <a:prstGeom prst="rect">
+            <a:avLst/>
+          </a:prstGeom>
+          <a:noFill/>
+        </p:spPr>
+        <p:txBody>
+          <a:bodyPr wrap="square" lIns="0" tIns="0" rIns="0" bIns="0" anchor="b">
+            <a:noAutofit/>
+          </a:bodyPr>
+          <a:lstStyle/>
+          <a:p>
+            <a:pPr algn="l"/>
+            <a:r>
+              <a:rPr sz="1200" b="0" i="0" lang="es-ES">
+                <a:solidFill>
+                  <a:srgbClr val="5E6B78"/>
+                </a:solidFill>
+              </a:rPr>
+              <a:t>Elaboración propia · Gemini [versión], Claude [versión], ChatGPT [versión] · octubre de 2026 · Caso simulado (CL 3 L/h, V 60 L)</a:t>
+            </a:r>
+          </a:p>
+        </p:txBody>
+      </p:sp>
+    </p:spTree>
   </p:cSld>
   <p:clrMapOvr>
     <a:masterClrMapping/>

--- a/examples/sefh-71-ia-tdm/salida/ponencia-ia-tdm-montero.pptx
+++ b/examples/sefh-71-ia-tdm/salida/ponencia-ia-tdm-montero.pptx
@@ -921,7 +921,7 @@
           <a:lstStyle/>
           <a:p>
             <a:r>
-              <a:t>Pregunta a mano alzada. La dosis coincidió en todas; cambiaron el AUC, la decisión sobre la dosis de las 20:00, la siguiente extracción y la fuente. Nueve consultas no son un estudio: ¿me pasa solo a mí? → diapositiva siguiente.</a:t>
+              <a:t>Las 9 aciertan la dosis. Fallan alrededor: 2 omiten la dosis de las 20:00, 1 calcula mal el AUC, 2 citan mal sus fuentes y 6 perfunden más rápido de lo que permite la ficha técnica. El error de perfusión estaba en mi propio caso; solo lo detectó la IA que consultó la ficha. Nueve consultas no son un estudio: ¿me pasa solo a mí? → diapositiva siguiente.</a:t>
             </a:r>
           </a:p>
         </p:txBody>
@@ -1566,7 +1566,7 @@
                   <a:srgbClr val="263445"/>
                 </a:solidFill>
               </a:rPr>
-              <a:t>Misma pregunta, misma dosis… decisiones distintas.</a:t>
+              <a:t>Todas aciertan la dosis. No todas aciertan el criterio.</a:t>
             </a:r>
           </a:p>
         </p:txBody>
@@ -1579,8 +1579,8 @@
         </p:nvSpPr>
         <p:spPr>
           <a:xfrm>
-            <a:off x="508000" y="1778000"/>
-            <a:ext cx="3623818" cy="3771900"/>
+            <a:off x="508000" y="1651000"/>
+            <a:ext cx="3623818" cy="4292600"/>
           </a:xfrm>
           <a:prstGeom prst="roundRect">
             <a:avLst>
@@ -1610,8 +1610,8 @@
         </p:nvSpPr>
         <p:spPr>
           <a:xfrm>
-            <a:off x="711200" y="1981200"/>
-            <a:ext cx="3217418" cy="3111500"/>
+            <a:off x="711200" y="1854200"/>
+            <a:ext cx="3217418" cy="3441700"/>
           </a:xfrm>
           <a:prstGeom prst="rect">
             <a:avLst/>
@@ -1625,11 +1625,8 @@
           <a:lstStyle/>
           <a:p>
             <a:pPr algn="l">
-              <a:lnSpc>
-                <a:spcPct val="95000"/>
-              </a:lnSpc>
               <a:spcAft>
-                <a:spcPts val="600"/>
+                <a:spcPts val="1000"/>
               </a:spcAft>
             </a:pPr>
             <a:r>
@@ -1643,11 +1640,8 @@
           </a:p>
           <a:p>
             <a:pPr algn="l">
-              <a:lnSpc>
-                <a:spcPct val="95000"/>
-              </a:lnSpc>
               <a:spcAft>
-                <a:spcPts val="600"/>
+                <a:spcPts val="1000"/>
               </a:spcAft>
             </a:pPr>
             <a:r>
@@ -1661,11 +1655,8 @@
           </a:p>
           <a:p>
             <a:pPr algn="l">
-              <a:lnSpc>
-                <a:spcPct val="95000"/>
-              </a:lnSpc>
               <a:spcAft>
-                <a:spcPts val="600"/>
+                <a:spcPts val="1000"/>
               </a:spcAft>
             </a:pPr>
             <a:r>
@@ -1674,16 +1665,13 @@
                   <a:srgbClr val="263445"/>
                 </a:solidFill>
               </a:rPr>
-              <a:t>Creatinina 1,2 mg/dL estable</a:t>
+              <a:t>Creatinina 1,2 mg/dL estable · 1000 mg/12 h</a:t>
             </a:r>
           </a:p>
           <a:p>
             <a:pPr algn="l">
-              <a:lnSpc>
-                <a:spcPct val="95000"/>
-              </a:lnSpc>
               <a:spcAft>
-                <a:spcPts val="600"/>
+                <a:spcPts val="1000"/>
               </a:spcAft>
             </a:pPr>
             <a:r>
@@ -1692,9 +1680,155 @@
                   <a:srgbClr val="263445"/>
                 </a:solidFill>
               </a:rPr>
-              <a:t>1000 mg/12 h · pico 34,0 y valle 21,2 mg/L</a:t>
-            </a:r>
-          </a:p>
+              <a:t>Pico 34,0 y valle 21,2 mg/L</a:t>
+            </a:r>
+          </a:p>
+          <a:p>
+            <a:pPr algn="l"/>
+            <a:r>
+              <a:rPr sz="2000" b="1" i="0" lang="es-ES">
+                <a:solidFill>
+                  <a:srgbClr val="2B7D3D"/>
+                </a:solidFill>
+              </a:rPr>
+              <a:t>Referencia: </a:t>
+            </a:r>
+            <a:r>
+              <a:rPr sz="2000" b="0" i="0" lang="es-ES">
+                <a:solidFill>
+                  <a:srgbClr val="263445"/>
+                </a:solidFill>
+              </a:rPr>
+              <a:t>AUC</a:t>
+            </a:r>
+            <a:r>
+              <a:rPr sz="2000" b="0" i="0" lang="es-ES" baseline="-25000">
+                <a:solidFill>
+                  <a:srgbClr val="263445"/>
+                </a:solidFill>
+              </a:rPr>
+              <a:t>24</a:t>
+            </a:r>
+            <a:r>
+              <a:rPr sz="2000" b="0" i="0" lang="es-ES">
+                <a:solidFill>
+                  <a:srgbClr val="263445"/>
+                </a:solidFill>
+              </a:rPr>
+              <a:t> ≈ 667 → 750 mg/12 h (AUC</a:t>
+            </a:r>
+            <a:r>
+              <a:rPr sz="2000" b="0" i="0" lang="es-ES" baseline="-25000">
+                <a:solidFill>
+                  <a:srgbClr val="263445"/>
+                </a:solidFill>
+              </a:rPr>
+              <a:t>24</a:t>
+            </a:r>
+            <a:r>
+              <a:rPr sz="2000" b="0" i="0" lang="es-ES">
+                <a:solidFill>
+                  <a:srgbClr val="263445"/>
+                </a:solidFill>
+              </a:rPr>
+              <a:t> ≈ 500)</a:t>
+            </a:r>
+          </a:p>
+        </p:txBody>
+      </p:sp>
+      <p:sp>
+        <p:nvSpPr>
+          <p:cNvPr id="5" name="Pie caso"/>
+          <p:cNvSpPr txBox="1"/>
+          <p:nvPr/>
+        </p:nvSpPr>
+        <p:spPr>
+          <a:xfrm>
+            <a:off x="711200" y="5359400"/>
+            <a:ext cx="3217418" cy="381000"/>
+          </a:xfrm>
+          <a:prstGeom prst="rect">
+            <a:avLst/>
+          </a:prstGeom>
+          <a:noFill/>
+        </p:spPr>
+        <p:txBody>
+          <a:bodyPr wrap="square" lIns="0" tIns="0" rIns="0" bIns="0" anchor="b">
+            <a:noAutofit/>
+          </a:bodyPr>
+          <a:lstStyle/>
+          <a:p>
+            <a:pPr algn="l"/>
+            <a:r>
+              <a:rPr sz="1600" b="0" i="1" lang="es-ES">
+                <a:solidFill>
+                  <a:srgbClr val="5E6B78"/>
+                </a:solidFill>
+              </a:rPr>
+              <a:t>Gemini, ChatGPT y Claude · 3 chats nuevos cada uno · mismo texto</a:t>
+            </a:r>
+          </a:p>
+        </p:txBody>
+      </p:sp>
+      <p:sp>
+        <p:nvSpPr>
+          <p:cNvPr id="6" name="Cifra 1"/>
+          <p:cNvSpPr txBox="1"/>
+          <p:nvPr/>
+        </p:nvSpPr>
+        <p:spPr>
+          <a:xfrm>
+            <a:off x="4284218" y="1651000"/>
+            <a:ext cx="1587500" cy="990600"/>
+          </a:xfrm>
+          <a:prstGeom prst="rect">
+            <a:avLst/>
+          </a:prstGeom>
+          <a:noFill/>
+        </p:spPr>
+        <p:txBody>
+          <a:bodyPr wrap="square" lIns="0" tIns="0" rIns="0" bIns="0" anchor="ctr">
+            <a:noAutofit/>
+          </a:bodyPr>
+          <a:lstStyle/>
+          <a:p>
+            <a:pPr algn="r">
+              <a:lnSpc>
+                <a:spcPct val="80000"/>
+              </a:lnSpc>
+            </a:pPr>
+            <a:r>
+              <a:rPr sz="7200" b="1" i="0" lang="es-ES">
+                <a:solidFill>
+                  <a:srgbClr val="2B7D3D"/>
+                </a:solidFill>
+              </a:rPr>
+              <a:t>9/9</a:t>
+            </a:r>
+          </a:p>
+        </p:txBody>
+      </p:sp>
+      <p:sp>
+        <p:nvSpPr>
+          <p:cNvPr id="7" name="Texto 1"/>
+          <p:cNvSpPr txBox="1"/>
+          <p:nvPr/>
+        </p:nvSpPr>
+        <p:spPr>
+          <a:xfrm>
+            <a:off x="6024118" y="1847850"/>
+            <a:ext cx="5660136" cy="342900"/>
+          </a:xfrm>
+          <a:prstGeom prst="rect">
+            <a:avLst/>
+          </a:prstGeom>
+          <a:noFill/>
+        </p:spPr>
+        <p:txBody>
+          <a:bodyPr wrap="square" lIns="0" tIns="0" rIns="0" bIns="0" anchor="b">
+            <a:noAutofit/>
+          </a:bodyPr>
+          <a:lstStyle/>
           <a:p>
             <a:pPr algn="l">
               <a:lnSpc>
@@ -1702,66 +1836,305 @@
               </a:lnSpc>
             </a:pPr>
             <a:r>
-              <a:rPr sz="2000" b="1" i="0" lang="es-ES">
-                <a:solidFill>
-                  <a:srgbClr val="2B7D3D"/>
-                </a:solidFill>
-              </a:rPr>
-              <a:t>Respuesta de referencia: </a:t>
-            </a:r>
-            <a:r>
-              <a:rPr sz="2000" b="0" i="0" lang="es-ES">
+              <a:rPr sz="2200" b="0" i="0" lang="es-ES">
                 <a:solidFill>
                   <a:srgbClr val="263445"/>
                 </a:solidFill>
               </a:rPr>
-              <a:t>AUC</a:t>
-            </a:r>
-            <a:r>
-              <a:rPr sz="2000" b="0" i="0" lang="es-ES" baseline="-25000">
-                <a:solidFill>
-                  <a:srgbClr val="263445"/>
-                </a:solidFill>
-              </a:rPr>
-              <a:t>24</a:t>
-            </a:r>
-            <a:r>
-              <a:rPr sz="2000" b="0" i="0" lang="es-ES">
-                <a:solidFill>
-                  <a:srgbClr val="263445"/>
-                </a:solidFill>
-              </a:rPr>
-              <a:t> actual ≈ 667 → 750 mg/12 h (AUC</a:t>
-            </a:r>
-            <a:r>
-              <a:rPr sz="2000" b="0" i="0" lang="es-ES" baseline="-25000">
-                <a:solidFill>
-                  <a:srgbClr val="263445"/>
-                </a:solidFill>
-              </a:rPr>
-              <a:t>24</a:t>
-            </a:r>
-            <a:r>
-              <a:rPr sz="2000" b="0" i="0" lang="es-ES">
-                <a:solidFill>
-                  <a:srgbClr val="263445"/>
-                </a:solidFill>
-              </a:rPr>
-              <a:t> ≈ 500)</a:t>
-            </a:r>
-          </a:p>
-        </p:txBody>
-      </p:sp>
-      <p:sp>
-        <p:nvSpPr>
-          <p:cNvPr id="5" name="Nota caso"/>
+              <a:t>misma dosis: 750 mg/12 h</a:t>
+            </a:r>
+          </a:p>
+        </p:txBody>
+      </p:sp>
+      <p:sp>
+        <p:nvSpPr>
+          <p:cNvPr id="8" name="Segmento 1.1"/>
+          <p:cNvSpPr/>
+          <p:nvPr/>
+        </p:nvSpPr>
+        <p:spPr>
+          <a:xfrm>
+            <a:off x="6024118" y="2279650"/>
+            <a:ext cx="572460" cy="165100"/>
+          </a:xfrm>
+          <a:prstGeom prst="roundRect">
+            <a:avLst>
+              <a:gd name="adj" fmla="val 23076"/>
+            </a:avLst>
+          </a:prstGeom>
+          <a:solidFill>
+            <a:srgbClr val="5BB46C"/>
+          </a:solidFill>
+          <a:ln>
+            <a:noFill/>
+          </a:ln>
+        </p:spPr>
+        <p:txBody>
+          <a:bodyPr rtlCol="0" anchor="ctr"/>
+          <a:lstStyle/>
+          <a:p>
+            <a:pPr algn="ctr"/>
+          </a:p>
+        </p:txBody>
+      </p:sp>
+      <p:sp>
+        <p:nvSpPr>
+          <p:cNvPr id="9" name="Segmento 1.2"/>
+          <p:cNvSpPr/>
+          <p:nvPr/>
+        </p:nvSpPr>
+        <p:spPr>
+          <a:xfrm>
+            <a:off x="6660078" y="2279650"/>
+            <a:ext cx="572460" cy="165100"/>
+          </a:xfrm>
+          <a:prstGeom prst="roundRect">
+            <a:avLst>
+              <a:gd name="adj" fmla="val 23076"/>
+            </a:avLst>
+          </a:prstGeom>
+          <a:solidFill>
+            <a:srgbClr val="5BB46C"/>
+          </a:solidFill>
+          <a:ln>
+            <a:noFill/>
+          </a:ln>
+        </p:spPr>
+        <p:txBody>
+          <a:bodyPr rtlCol="0" anchor="ctr"/>
+          <a:lstStyle/>
+          <a:p>
+            <a:pPr algn="ctr"/>
+          </a:p>
+        </p:txBody>
+      </p:sp>
+      <p:sp>
+        <p:nvSpPr>
+          <p:cNvPr id="10" name="Segmento 1.3"/>
+          <p:cNvSpPr/>
+          <p:nvPr/>
+        </p:nvSpPr>
+        <p:spPr>
+          <a:xfrm>
+            <a:off x="7296037" y="2279650"/>
+            <a:ext cx="572460" cy="165100"/>
+          </a:xfrm>
+          <a:prstGeom prst="roundRect">
+            <a:avLst>
+              <a:gd name="adj" fmla="val 23076"/>
+            </a:avLst>
+          </a:prstGeom>
+          <a:solidFill>
+            <a:srgbClr val="5BB46C"/>
+          </a:solidFill>
+          <a:ln>
+            <a:noFill/>
+          </a:ln>
+        </p:spPr>
+        <p:txBody>
+          <a:bodyPr rtlCol="0" anchor="ctr"/>
+          <a:lstStyle/>
+          <a:p>
+            <a:pPr algn="ctr"/>
+          </a:p>
+        </p:txBody>
+      </p:sp>
+      <p:sp>
+        <p:nvSpPr>
+          <p:cNvPr id="11" name="Segmento 1.4"/>
+          <p:cNvSpPr/>
+          <p:nvPr/>
+        </p:nvSpPr>
+        <p:spPr>
+          <a:xfrm>
+            <a:off x="7931997" y="2279650"/>
+            <a:ext cx="572460" cy="165100"/>
+          </a:xfrm>
+          <a:prstGeom prst="roundRect">
+            <a:avLst>
+              <a:gd name="adj" fmla="val 23076"/>
+            </a:avLst>
+          </a:prstGeom>
+          <a:solidFill>
+            <a:srgbClr val="5BB46C"/>
+          </a:solidFill>
+          <a:ln>
+            <a:noFill/>
+          </a:ln>
+        </p:spPr>
+        <p:txBody>
+          <a:bodyPr rtlCol="0" anchor="ctr"/>
+          <a:lstStyle/>
+          <a:p>
+            <a:pPr algn="ctr"/>
+          </a:p>
+        </p:txBody>
+      </p:sp>
+      <p:sp>
+        <p:nvSpPr>
+          <p:cNvPr id="12" name="Segmento 1.5"/>
+          <p:cNvSpPr/>
+          <p:nvPr/>
+        </p:nvSpPr>
+        <p:spPr>
+          <a:xfrm>
+            <a:off x="8567956" y="2279650"/>
+            <a:ext cx="572460" cy="165100"/>
+          </a:xfrm>
+          <a:prstGeom prst="roundRect">
+            <a:avLst>
+              <a:gd name="adj" fmla="val 23076"/>
+            </a:avLst>
+          </a:prstGeom>
+          <a:solidFill>
+            <a:srgbClr val="5BB46C"/>
+          </a:solidFill>
+          <a:ln>
+            <a:noFill/>
+          </a:ln>
+        </p:spPr>
+        <p:txBody>
+          <a:bodyPr rtlCol="0" anchor="ctr"/>
+          <a:lstStyle/>
+          <a:p>
+            <a:pPr algn="ctr"/>
+          </a:p>
+        </p:txBody>
+      </p:sp>
+      <p:sp>
+        <p:nvSpPr>
+          <p:cNvPr id="13" name="Segmento 1.6"/>
+          <p:cNvSpPr/>
+          <p:nvPr/>
+        </p:nvSpPr>
+        <p:spPr>
+          <a:xfrm>
+            <a:off x="9203916" y="2279650"/>
+            <a:ext cx="572460" cy="165100"/>
+          </a:xfrm>
+          <a:prstGeom prst="roundRect">
+            <a:avLst>
+              <a:gd name="adj" fmla="val 23076"/>
+            </a:avLst>
+          </a:prstGeom>
+          <a:solidFill>
+            <a:srgbClr val="5BB46C"/>
+          </a:solidFill>
+          <a:ln>
+            <a:noFill/>
+          </a:ln>
+        </p:spPr>
+        <p:txBody>
+          <a:bodyPr rtlCol="0" anchor="ctr"/>
+          <a:lstStyle/>
+          <a:p>
+            <a:pPr algn="ctr"/>
+          </a:p>
+        </p:txBody>
+      </p:sp>
+      <p:sp>
+        <p:nvSpPr>
+          <p:cNvPr id="14" name="Segmento 1.7"/>
+          <p:cNvSpPr/>
+          <p:nvPr/>
+        </p:nvSpPr>
+        <p:spPr>
+          <a:xfrm>
+            <a:off x="9839875" y="2279650"/>
+            <a:ext cx="572460" cy="165100"/>
+          </a:xfrm>
+          <a:prstGeom prst="roundRect">
+            <a:avLst>
+              <a:gd name="adj" fmla="val 23076"/>
+            </a:avLst>
+          </a:prstGeom>
+          <a:solidFill>
+            <a:srgbClr val="5BB46C"/>
+          </a:solidFill>
+          <a:ln>
+            <a:noFill/>
+          </a:ln>
+        </p:spPr>
+        <p:txBody>
+          <a:bodyPr rtlCol="0" anchor="ctr"/>
+          <a:lstStyle/>
+          <a:p>
+            <a:pPr algn="ctr"/>
+          </a:p>
+        </p:txBody>
+      </p:sp>
+      <p:sp>
+        <p:nvSpPr>
+          <p:cNvPr id="15" name="Segmento 1.8"/>
+          <p:cNvSpPr/>
+          <p:nvPr/>
+        </p:nvSpPr>
+        <p:spPr>
+          <a:xfrm>
+            <a:off x="10475835" y="2279650"/>
+            <a:ext cx="572460" cy="165100"/>
+          </a:xfrm>
+          <a:prstGeom prst="roundRect">
+            <a:avLst>
+              <a:gd name="adj" fmla="val 23076"/>
+            </a:avLst>
+          </a:prstGeom>
+          <a:solidFill>
+            <a:srgbClr val="5BB46C"/>
+          </a:solidFill>
+          <a:ln>
+            <a:noFill/>
+          </a:ln>
+        </p:spPr>
+        <p:txBody>
+          <a:bodyPr rtlCol="0" anchor="ctr"/>
+          <a:lstStyle/>
+          <a:p>
+            <a:pPr algn="ctr"/>
+          </a:p>
+        </p:txBody>
+      </p:sp>
+      <p:sp>
+        <p:nvSpPr>
+          <p:cNvPr id="16" name="Segmento 1.9"/>
+          <p:cNvSpPr/>
+          <p:nvPr/>
+        </p:nvSpPr>
+        <p:spPr>
+          <a:xfrm>
+            <a:off x="11111794" y="2279650"/>
+            <a:ext cx="572460" cy="165100"/>
+          </a:xfrm>
+          <a:prstGeom prst="roundRect">
+            <a:avLst>
+              <a:gd name="adj" fmla="val 23076"/>
+            </a:avLst>
+          </a:prstGeom>
+          <a:solidFill>
+            <a:srgbClr val="5BB46C"/>
+          </a:solidFill>
+          <a:ln>
+            <a:noFill/>
+          </a:ln>
+        </p:spPr>
+        <p:txBody>
+          <a:bodyPr rtlCol="0" anchor="ctr"/>
+          <a:lstStyle/>
+          <a:p>
+            <a:pPr algn="ctr"/>
+          </a:p>
+        </p:txBody>
+      </p:sp>
+      <p:sp>
+        <p:nvSpPr>
+          <p:cNvPr id="17" name="Cifra 2"/>
           <p:cNvSpPr txBox="1"/>
           <p:nvPr/>
         </p:nvSpPr>
         <p:spPr>
           <a:xfrm>
-            <a:off x="711200" y="5156200"/>
-            <a:ext cx="3217418" cy="190500"/>
+            <a:off x="4284218" y="2641600"/>
+            <a:ext cx="1587500" cy="990600"/>
           </a:xfrm>
           <a:prstGeom prst="rect">
             <a:avLst/>
@@ -1769,2840 +2142,37 @@
           <a:noFill/>
         </p:spPr>
         <p:txBody>
-          <a:bodyPr wrap="square" lIns="0" tIns="0" rIns="0" bIns="0" anchor="t">
+          <a:bodyPr wrap="square" lIns="0" tIns="0" rIns="0" bIns="0" anchor="ctr">
             <a:noAutofit/>
           </a:bodyPr>
           <a:lstStyle/>
           <a:p>
-            <a:pPr algn="l"/>
-            <a:r>
-              <a:rPr sz="1600" b="0" i="1" lang="es-ES">
-                <a:solidFill>
-                  <a:srgbClr val="5E6B78"/>
-                </a:solidFill>
-              </a:rPr>
-              <a:t>3 IA × 3 chats nuevos · mismo texto</a:t>
-            </a:r>
-          </a:p>
-        </p:txBody>
-      </p:sp>
-      <p:graphicFrame>
-        <p:nvGraphicFramePr>
-          <p:cNvPr id="6" name="Tabla respuestas"/>
-          <p:cNvGraphicFramePr>
-            <a:graphicFrameLocks noGrp="1"/>
-          </p:cNvGraphicFramePr>
-          <p:nvPr/>
-        </p:nvGraphicFramePr>
-        <p:xfrm>
-          <a:off x="4284218" y="1778000"/>
-          <a:ext cx="7397750" cy="3771900"/>
-        </p:xfrm>
-        <a:graphic>
-          <a:graphicData uri="http://schemas.openxmlformats.org/drawingml/2006/table">
-            <a:tbl>
-              <a:tblPr firstRow="1">
-                <a:tableStyleId>{5C22544A-7EE6-4342-B048-85BDC9FD1C3A}</a:tableStyleId>
-              </a:tblPr>
-              <a:tblGrid>
-                <a:gridCol w="889000"/>
-                <a:gridCol w="711200"/>
-                <a:gridCol w="1206500"/>
-                <a:gridCol w="1270000"/>
-                <a:gridCol w="1365250"/>
-                <a:gridCol w="1955800"/>
-              </a:tblGrid>
-              <a:tr h="546100">
-                <a:tc>
-                  <a:txBody>
-                    <a:bodyPr wrap="square"/>
-                    <a:lstStyle/>
-                    <a:p>
-                      <a:pPr algn="l"/>
-                      <a:r>
-                        <a:rPr sz="1600" b="1" i="0" lang="es-ES">
-                          <a:solidFill>
-                            <a:srgbClr val="FFFFFF"/>
-                          </a:solidFill>
-                        </a:rPr>
-                        <a:t>IA</a:t>
-                      </a:r>
-                    </a:p>
-                  </a:txBody>
-                  <a:tcPr anchor="ctr" marL="38100" marR="38100" marT="25400" marB="25400">
-                    <a:lnL w="19050" cap="flat" cmpd="sng" algn="ctr">
-                      <a:solidFill>
-                        <a:srgbClr val="FFFFFF"/>
-                      </a:solidFill>
-                      <a:prstDash val="solid"/>
-                    </a:lnL>
-                    <a:lnR w="19050" cap="flat" cmpd="sng" algn="ctr">
-                      <a:solidFill>
-                        <a:srgbClr val="FFFFFF"/>
-                      </a:solidFill>
-                      <a:prstDash val="solid"/>
-                    </a:lnR>
-                    <a:lnT w="19050" cap="flat" cmpd="sng" algn="ctr">
-                      <a:solidFill>
-                        <a:srgbClr val="FFFFFF"/>
-                      </a:solidFill>
-                      <a:prstDash val="solid"/>
-                    </a:lnT>
-                    <a:lnB w="19050" cap="flat" cmpd="sng" algn="ctr">
-                      <a:solidFill>
-                        <a:srgbClr val="FFFFFF"/>
-                      </a:solidFill>
-                      <a:prstDash val="solid"/>
-                    </a:lnB>
-                    <a:solidFill>
-                      <a:srgbClr val="263445"/>
-                    </a:solidFill>
-                  </a:tcPr>
-                </a:tc>
-                <a:tc>
-                  <a:txBody>
-                    <a:bodyPr wrap="square"/>
-                    <a:lstStyle/>
-                    <a:p>
-                      <a:pPr algn="ctr"/>
-                      <a:r>
-                        <a:rPr sz="1600" b="1" i="0" lang="es-ES">
-                          <a:solidFill>
-                            <a:srgbClr val="FFFFFF"/>
-                          </a:solidFill>
-                        </a:rPr>
-                        <a:t>Prueba</a:t>
-                      </a:r>
-                    </a:p>
-                  </a:txBody>
-                  <a:tcPr anchor="ctr" marL="38100" marR="38100" marT="25400" marB="25400">
-                    <a:lnL w="19050" cap="flat" cmpd="sng" algn="ctr">
-                      <a:solidFill>
-                        <a:srgbClr val="FFFFFF"/>
-                      </a:solidFill>
-                      <a:prstDash val="solid"/>
-                    </a:lnL>
-                    <a:lnR w="19050" cap="flat" cmpd="sng" algn="ctr">
-                      <a:solidFill>
-                        <a:srgbClr val="FFFFFF"/>
-                      </a:solidFill>
-                      <a:prstDash val="solid"/>
-                    </a:lnR>
-                    <a:lnT w="19050" cap="flat" cmpd="sng" algn="ctr">
-                      <a:solidFill>
-                        <a:srgbClr val="FFFFFF"/>
-                      </a:solidFill>
-                      <a:prstDash val="solid"/>
-                    </a:lnT>
-                    <a:lnB w="19050" cap="flat" cmpd="sng" algn="ctr">
-                      <a:solidFill>
-                        <a:srgbClr val="FFFFFF"/>
-                      </a:solidFill>
-                      <a:prstDash val="solid"/>
-                    </a:lnB>
-                    <a:solidFill>
-                      <a:srgbClr val="263445"/>
-                    </a:solidFill>
-                  </a:tcPr>
-                </a:tc>
-                <a:tc>
-                  <a:txBody>
-                    <a:bodyPr wrap="square"/>
-                    <a:lstStyle/>
-                    <a:p>
-                      <a:pPr algn="ctr"/>
-                      <a:r>
-                        <a:rPr sz="1600" b="1" i="0" lang="es-ES">
-                          <a:solidFill>
-                            <a:srgbClr val="FFFFFF"/>
-                          </a:solidFill>
-                        </a:rPr>
-                        <a:t>AUC</a:t>
-                      </a:r>
-                      <a:r>
-                        <a:rPr sz="1600" b="1" i="0" lang="es-ES" baseline="-25000">
-                          <a:solidFill>
-                            <a:srgbClr val="FFFFFF"/>
-                          </a:solidFill>
-                        </a:rPr>
-                        <a:t>24</a:t>
-                      </a:r>
-                      <a:r>
-                        <a:rPr sz="1600" b="1" i="0" lang="es-ES">
-                          <a:solidFill>
-                            <a:srgbClr val="FFFFFF"/>
-                          </a:solidFill>
-                        </a:rPr>
-                        <a:t> actual (ref. 667)</a:t>
-                      </a:r>
-                    </a:p>
-                  </a:txBody>
-                  <a:tcPr anchor="ctr" marL="38100" marR="38100" marT="25400" marB="25400">
-                    <a:lnL w="19050" cap="flat" cmpd="sng" algn="ctr">
-                      <a:solidFill>
-                        <a:srgbClr val="FFFFFF"/>
-                      </a:solidFill>
-                      <a:prstDash val="solid"/>
-                    </a:lnL>
-                    <a:lnR w="19050" cap="flat" cmpd="sng" algn="ctr">
-                      <a:solidFill>
-                        <a:srgbClr val="FFFFFF"/>
-                      </a:solidFill>
-                      <a:prstDash val="solid"/>
-                    </a:lnR>
-                    <a:lnT w="19050" cap="flat" cmpd="sng" algn="ctr">
-                      <a:solidFill>
-                        <a:srgbClr val="FFFFFF"/>
-                      </a:solidFill>
-                      <a:prstDash val="solid"/>
-                    </a:lnT>
-                    <a:lnB w="19050" cap="flat" cmpd="sng" algn="ctr">
-                      <a:solidFill>
-                        <a:srgbClr val="FFFFFF"/>
-                      </a:solidFill>
-                      <a:prstDash val="solid"/>
-                    </a:lnB>
-                    <a:solidFill>
-                      <a:srgbClr val="263445"/>
-                    </a:solidFill>
-                  </a:tcPr>
-                </a:tc>
-                <a:tc>
-                  <a:txBody>
-                    <a:bodyPr wrap="square"/>
-                    <a:lstStyle/>
-                    <a:p>
-                      <a:pPr algn="ctr"/>
-                      <a:r>
-                        <a:rPr sz="1600" b="1" i="0" lang="es-ES">
-                          <a:solidFill>
-                            <a:srgbClr val="FFFFFF"/>
-                          </a:solidFill>
-                        </a:rPr>
-                        <a:t>Dosis de las 20:00</a:t>
-                      </a:r>
-                    </a:p>
-                  </a:txBody>
-                  <a:tcPr anchor="ctr" marL="38100" marR="38100" marT="25400" marB="25400">
-                    <a:lnL w="19050" cap="flat" cmpd="sng" algn="ctr">
-                      <a:solidFill>
-                        <a:srgbClr val="FFFFFF"/>
-                      </a:solidFill>
-                      <a:prstDash val="solid"/>
-                    </a:lnL>
-                    <a:lnR w="19050" cap="flat" cmpd="sng" algn="ctr">
-                      <a:solidFill>
-                        <a:srgbClr val="FFFFFF"/>
-                      </a:solidFill>
-                      <a:prstDash val="solid"/>
-                    </a:lnR>
-                    <a:lnT w="19050" cap="flat" cmpd="sng" algn="ctr">
-                      <a:solidFill>
-                        <a:srgbClr val="FFFFFF"/>
-                      </a:solidFill>
-                      <a:prstDash val="solid"/>
-                    </a:lnT>
-                    <a:lnB w="19050" cap="flat" cmpd="sng" algn="ctr">
-                      <a:solidFill>
-                        <a:srgbClr val="FFFFFF"/>
-                      </a:solidFill>
-                      <a:prstDash val="solid"/>
-                    </a:lnB>
-                    <a:solidFill>
-                      <a:srgbClr val="263445"/>
-                    </a:solidFill>
-                  </a:tcPr>
-                </a:tc>
-                <a:tc>
-                  <a:txBody>
-                    <a:bodyPr wrap="square"/>
-                    <a:lstStyle/>
-                    <a:p>
-                      <a:pPr algn="ctr"/>
-                      <a:r>
-                        <a:rPr sz="1600" b="1" i="0" lang="es-ES">
-                          <a:solidFill>
-                            <a:srgbClr val="FFFFFF"/>
-                          </a:solidFill>
-                        </a:rPr>
-                        <a:t>Siguiente extracción</a:t>
-                      </a:r>
-                    </a:p>
-                  </a:txBody>
-                  <a:tcPr anchor="ctr" marL="38100" marR="38100" marT="25400" marB="25400">
-                    <a:lnL w="19050" cap="flat" cmpd="sng" algn="ctr">
-                      <a:solidFill>
-                        <a:srgbClr val="FFFFFF"/>
-                      </a:solidFill>
-                      <a:prstDash val="solid"/>
-                    </a:lnL>
-                    <a:lnR w="19050" cap="flat" cmpd="sng" algn="ctr">
-                      <a:solidFill>
-                        <a:srgbClr val="FFFFFF"/>
-                      </a:solidFill>
-                      <a:prstDash val="solid"/>
-                    </a:lnR>
-                    <a:lnT w="19050" cap="flat" cmpd="sng" algn="ctr">
-                      <a:solidFill>
-                        <a:srgbClr val="FFFFFF"/>
-                      </a:solidFill>
-                      <a:prstDash val="solid"/>
-                    </a:lnT>
-                    <a:lnB w="19050" cap="flat" cmpd="sng" algn="ctr">
-                      <a:solidFill>
-                        <a:srgbClr val="FFFFFF"/>
-                      </a:solidFill>
-                      <a:prstDash val="solid"/>
-                    </a:lnB>
-                    <a:solidFill>
-                      <a:srgbClr val="263445"/>
-                    </a:solidFill>
-                  </a:tcPr>
-                </a:tc>
-                <a:tc>
-                  <a:txBody>
-                    <a:bodyPr wrap="square"/>
-                    <a:lstStyle/>
-                    <a:p>
-                      <a:pPr algn="ctr"/>
-                      <a:r>
-                        <a:rPr sz="1600" b="1" i="0" lang="es-ES">
-                          <a:solidFill>
-                            <a:srgbClr val="FFFFFF"/>
-                          </a:solidFill>
-                        </a:rPr>
-                        <a:t>Fuente citada</a:t>
-                      </a:r>
-                    </a:p>
-                  </a:txBody>
-                  <a:tcPr anchor="ctr" marL="38100" marR="38100" marT="25400" marB="25400">
-                    <a:lnL w="19050" cap="flat" cmpd="sng" algn="ctr">
-                      <a:solidFill>
-                        <a:srgbClr val="FFFFFF"/>
-                      </a:solidFill>
-                      <a:prstDash val="solid"/>
-                    </a:lnL>
-                    <a:lnR w="19050" cap="flat" cmpd="sng" algn="ctr">
-                      <a:solidFill>
-                        <a:srgbClr val="FFFFFF"/>
-                      </a:solidFill>
-                      <a:prstDash val="solid"/>
-                    </a:lnR>
-                    <a:lnT w="19050" cap="flat" cmpd="sng" algn="ctr">
-                      <a:solidFill>
-                        <a:srgbClr val="FFFFFF"/>
-                      </a:solidFill>
-                      <a:prstDash val="solid"/>
-                    </a:lnT>
-                    <a:lnB w="19050" cap="flat" cmpd="sng" algn="ctr">
-                      <a:solidFill>
-                        <a:srgbClr val="FFFFFF"/>
-                      </a:solidFill>
-                      <a:prstDash val="solid"/>
-                    </a:lnB>
-                    <a:solidFill>
-                      <a:srgbClr val="263445"/>
-                    </a:solidFill>
-                  </a:tcPr>
-                </a:tc>
-              </a:tr>
-              <a:tr h="546100">
-                <a:tc rowSpan="3">
-                  <a:txBody>
-                    <a:bodyPr wrap="square"/>
-                    <a:lstStyle/>
-                    <a:p>
-                      <a:pPr algn="l"/>
-                      <a:r>
-                        <a:rPr sz="1600" b="1" i="0" lang="es-ES">
-                          <a:solidFill>
-                            <a:srgbClr val="263445"/>
-                          </a:solidFill>
-                        </a:rPr>
-                        <a:t>Gemini</a:t>
-                      </a:r>
-                    </a:p>
-                  </a:txBody>
-                  <a:tcPr anchor="ctr" marL="38100" marR="38100" marT="25400" marB="25400">
-                    <a:lnL w="19050" cap="flat" cmpd="sng" algn="ctr">
-                      <a:solidFill>
-                        <a:srgbClr val="FFFFFF"/>
-                      </a:solidFill>
-                      <a:prstDash val="solid"/>
-                    </a:lnL>
-                    <a:lnR w="19050" cap="flat" cmpd="sng" algn="ctr">
-                      <a:solidFill>
-                        <a:srgbClr val="FFFFFF"/>
-                      </a:solidFill>
-                      <a:prstDash val="solid"/>
-                    </a:lnR>
-                    <a:lnT w="19050" cap="flat" cmpd="sng" algn="ctr">
-                      <a:solidFill>
-                        <a:srgbClr val="FFFFFF"/>
-                      </a:solidFill>
-                      <a:prstDash val="solid"/>
-                    </a:lnT>
-                    <a:lnB w="19050" cap="flat" cmpd="sng" algn="ctr">
-                      <a:solidFill>
-                        <a:srgbClr val="FFFFFF"/>
-                      </a:solidFill>
-                      <a:prstDash val="solid"/>
-                    </a:lnB>
-                    <a:solidFill>
-                      <a:srgbClr val="FFFFFF"/>
-                    </a:solidFill>
-                  </a:tcPr>
-                </a:tc>
-                <a:tc>
-                  <a:txBody>
-                    <a:bodyPr wrap="square"/>
-                    <a:lstStyle/>
-                    <a:p>
-                      <a:pPr algn="ctr"/>
-                      <a:r>
-                        <a:rPr sz="1600" b="0" i="0" lang="es-ES">
-                          <a:solidFill>
-                            <a:srgbClr val="263445"/>
-                          </a:solidFill>
-                        </a:rPr>
-                        <a:t>1</a:t>
-                      </a:r>
-                    </a:p>
-                  </a:txBody>
-                  <a:tcPr anchor="ctr" marL="38100" marR="38100" marT="25400" marB="25400">
-                    <a:lnL w="19050" cap="flat" cmpd="sng" algn="ctr">
-                      <a:solidFill>
-                        <a:srgbClr val="FFFFFF"/>
-                      </a:solidFill>
-                      <a:prstDash val="solid"/>
-                    </a:lnL>
-                    <a:lnR w="19050" cap="flat" cmpd="sng" algn="ctr">
-                      <a:solidFill>
-                        <a:srgbClr val="FFFFFF"/>
-                      </a:solidFill>
-                      <a:prstDash val="solid"/>
-                    </a:lnR>
-                    <a:lnT w="19050" cap="flat" cmpd="sng" algn="ctr">
-                      <a:solidFill>
-                        <a:srgbClr val="FFFFFF"/>
-                      </a:solidFill>
-                      <a:prstDash val="solid"/>
-                    </a:lnT>
-                    <a:lnB w="19050" cap="flat" cmpd="sng" algn="ctr">
-                      <a:solidFill>
-                        <a:srgbClr val="FFFFFF"/>
-                      </a:solidFill>
-                      <a:prstDash val="solid"/>
-                    </a:lnB>
-                    <a:solidFill>
-                      <a:srgbClr val="FFFFFF"/>
-                    </a:solidFill>
-                  </a:tcPr>
-                </a:tc>
-                <a:tc>
-                  <a:txBody>
-                    <a:bodyPr wrap="square"/>
-                    <a:lstStyle/>
-                    <a:p>
-                      <a:pPr algn="ctr"/>
-                      <a:r>
-                        <a:rPr sz="1600" b="0" i="0" lang="es-ES">
-                          <a:solidFill>
-                            <a:srgbClr val="263445"/>
-                          </a:solidFill>
-                        </a:rPr>
-                        <a:t>697</a:t>
-                      </a:r>
-                    </a:p>
-                  </a:txBody>
-                  <a:tcPr anchor="ctr" marL="38100" marR="38100" marT="25400" marB="25400">
-                    <a:lnL w="19050" cap="flat" cmpd="sng" algn="ctr">
-                      <a:solidFill>
-                        <a:srgbClr val="FFFFFF"/>
-                      </a:solidFill>
-                      <a:prstDash val="solid"/>
-                    </a:lnL>
-                    <a:lnR w="19050" cap="flat" cmpd="sng" algn="ctr">
-                      <a:solidFill>
-                        <a:srgbClr val="FFFFFF"/>
-                      </a:solidFill>
-                      <a:prstDash val="solid"/>
-                    </a:lnR>
-                    <a:lnT w="19050" cap="flat" cmpd="sng" algn="ctr">
-                      <a:solidFill>
-                        <a:srgbClr val="FFFFFF"/>
-                      </a:solidFill>
-                      <a:prstDash val="solid"/>
-                    </a:lnT>
-                    <a:lnB w="19050" cap="flat" cmpd="sng" algn="ctr">
-                      <a:solidFill>
-                        <a:srgbClr val="FFFFFF"/>
-                      </a:solidFill>
-                      <a:prstDash val="solid"/>
-                    </a:lnB>
-                    <a:solidFill>
-                      <a:srgbClr val="FCE4E6"/>
-                    </a:solidFill>
-                  </a:tcPr>
-                </a:tc>
-                <a:tc>
-                  <a:txBody>
-                    <a:bodyPr wrap="square"/>
-                    <a:lstStyle/>
-                    <a:p>
-                      <a:pPr algn="l"/>
-                      <a:r>
-                        <a:rPr sz="1600" b="0" i="0" lang="es-ES">
-                          <a:solidFill>
-                            <a:srgbClr val="263445"/>
-                          </a:solidFill>
-                        </a:rPr>
-                        <a:t>Darla (750 mg)</a:t>
-                      </a:r>
-                    </a:p>
-                  </a:txBody>
-                  <a:tcPr anchor="ctr" marL="38100" marR="38100" marT="25400" marB="25400">
-                    <a:lnL w="19050" cap="flat" cmpd="sng" algn="ctr">
-                      <a:solidFill>
-                        <a:srgbClr val="FFFFFF"/>
-                      </a:solidFill>
-                      <a:prstDash val="solid"/>
-                    </a:lnL>
-                    <a:lnR w="19050" cap="flat" cmpd="sng" algn="ctr">
-                      <a:solidFill>
-                        <a:srgbClr val="FFFFFF"/>
-                      </a:solidFill>
-                      <a:prstDash val="solid"/>
-                    </a:lnR>
-                    <a:lnT w="19050" cap="flat" cmpd="sng" algn="ctr">
-                      <a:solidFill>
-                        <a:srgbClr val="FFFFFF"/>
-                      </a:solidFill>
-                      <a:prstDash val="solid"/>
-                    </a:lnT>
-                    <a:lnB w="19050" cap="flat" cmpd="sng" algn="ctr">
-                      <a:solidFill>
-                        <a:srgbClr val="FFFFFF"/>
-                      </a:solidFill>
-                      <a:prstDash val="solid"/>
-                    </a:lnB>
-                    <a:solidFill>
-                      <a:srgbClr val="E7F4E9"/>
-                    </a:solidFill>
-                  </a:tcPr>
-                </a:tc>
-                <a:tc>
-                  <a:txBody>
-                    <a:bodyPr wrap="square"/>
-                    <a:lstStyle/>
-                    <a:p>
-                      <a:pPr algn="l"/>
-                      <a:r>
-                        <a:rPr sz="1600" b="0" i="0" lang="es-ES">
-                          <a:solidFill>
-                            <a:srgbClr val="263445"/>
-                          </a:solidFill>
-                        </a:rPr>
-                        <a:t>A las 48-72 h</a:t>
-                      </a:r>
-                    </a:p>
-                  </a:txBody>
-                  <a:tcPr anchor="ctr" marL="38100" marR="38100" marT="25400" marB="25400">
-                    <a:lnL w="19050" cap="flat" cmpd="sng" algn="ctr">
-                      <a:solidFill>
-                        <a:srgbClr val="FFFFFF"/>
-                      </a:solidFill>
-                      <a:prstDash val="solid"/>
-                    </a:lnL>
-                    <a:lnR w="19050" cap="flat" cmpd="sng" algn="ctr">
-                      <a:solidFill>
-                        <a:srgbClr val="FFFFFF"/>
-                      </a:solidFill>
-                      <a:prstDash val="solid"/>
-                    </a:lnR>
-                    <a:lnT w="19050" cap="flat" cmpd="sng" algn="ctr">
-                      <a:solidFill>
-                        <a:srgbClr val="FFFFFF"/>
-                      </a:solidFill>
-                      <a:prstDash val="solid"/>
-                    </a:lnT>
-                    <a:lnB w="19050" cap="flat" cmpd="sng" algn="ctr">
-                      <a:solidFill>
-                        <a:srgbClr val="FFFFFF"/>
-                      </a:solidFill>
-                      <a:prstDash val="solid"/>
-                    </a:lnB>
-                    <a:solidFill>
-                      <a:srgbClr val="E7F4E9"/>
-                    </a:solidFill>
-                  </a:tcPr>
-                </a:tc>
-                <a:tc>
-                  <a:txBody>
-                    <a:bodyPr wrap="square"/>
-                    <a:lstStyle/>
-                    <a:p>
-                      <a:pPr algn="l"/>
-                      <a:r>
-                        <a:rPr sz="1600" b="0" i="0" lang="es-ES">
-                          <a:solidFill>
-                            <a:srgbClr val="263445"/>
-                          </a:solidFill>
-                        </a:rPr>
-                        <a:t>Una guía, como si fuera un modelo</a:t>
-                      </a:r>
-                    </a:p>
-                  </a:txBody>
-                  <a:tcPr anchor="ctr" marL="38100" marR="38100" marT="25400" marB="25400">
-                    <a:lnL w="19050" cap="flat" cmpd="sng" algn="ctr">
-                      <a:solidFill>
-                        <a:srgbClr val="FFFFFF"/>
-                      </a:solidFill>
-                      <a:prstDash val="solid"/>
-                    </a:lnL>
-                    <a:lnR w="19050" cap="flat" cmpd="sng" algn="ctr">
-                      <a:solidFill>
-                        <a:srgbClr val="FFFFFF"/>
-                      </a:solidFill>
-                      <a:prstDash val="solid"/>
-                    </a:lnR>
-                    <a:lnT w="19050" cap="flat" cmpd="sng" algn="ctr">
-                      <a:solidFill>
-                        <a:srgbClr val="FFFFFF"/>
-                      </a:solidFill>
-                      <a:prstDash val="solid"/>
-                    </a:lnT>
-                    <a:lnB w="19050" cap="flat" cmpd="sng" algn="ctr">
-                      <a:solidFill>
-                        <a:srgbClr val="FFFFFF"/>
-                      </a:solidFill>
-                      <a:prstDash val="solid"/>
-                    </a:lnB>
-                    <a:solidFill>
-                      <a:srgbClr val="FCE4E6"/>
-                    </a:solidFill>
-                  </a:tcPr>
-                </a:tc>
-              </a:tr>
-              <a:tr h="304800">
-                <a:tc vMerge="1">
-                  <a:txBody>
-                    <a:bodyPr wrap="square"/>
-                    <a:lstStyle/>
-                    <a:p/>
-                  </a:txBody>
-                  <a:tcPr anchor="ctr" marL="38100" marR="38100" marT="25400" marB="25400">
-                    <a:lnL w="19050" cap="flat" cmpd="sng" algn="ctr">
-                      <a:solidFill>
-                        <a:srgbClr val="FFFFFF"/>
-                      </a:solidFill>
-                      <a:prstDash val="solid"/>
-                    </a:lnL>
-                    <a:lnR w="19050" cap="flat" cmpd="sng" algn="ctr">
-                      <a:solidFill>
-                        <a:srgbClr val="FFFFFF"/>
-                      </a:solidFill>
-                      <a:prstDash val="solid"/>
-                    </a:lnR>
-                    <a:lnT w="19050" cap="flat" cmpd="sng" algn="ctr">
-                      <a:solidFill>
-                        <a:srgbClr val="FFFFFF"/>
-                      </a:solidFill>
-                      <a:prstDash val="solid"/>
-                    </a:lnT>
-                    <a:lnB w="19050" cap="flat" cmpd="sng" algn="ctr">
-                      <a:solidFill>
-                        <a:srgbClr val="FFFFFF"/>
-                      </a:solidFill>
-                      <a:prstDash val="solid"/>
-                    </a:lnB>
-                    <a:solidFill>
-                      <a:srgbClr val="FFFFFF"/>
-                    </a:solidFill>
-                  </a:tcPr>
-                </a:tc>
-                <a:tc>
-                  <a:txBody>
-                    <a:bodyPr wrap="square"/>
-                    <a:lstStyle/>
-                    <a:p>
-                      <a:pPr algn="ctr"/>
-                      <a:r>
-                        <a:rPr sz="1600" b="0" i="0" lang="es-ES">
-                          <a:solidFill>
-                            <a:srgbClr val="263445"/>
-                          </a:solidFill>
-                        </a:rPr>
-                        <a:t>2</a:t>
-                      </a:r>
-                    </a:p>
-                  </a:txBody>
-                  <a:tcPr anchor="ctr" marL="38100" marR="38100" marT="25400" marB="25400">
-                    <a:lnL w="19050" cap="flat" cmpd="sng" algn="ctr">
-                      <a:solidFill>
-                        <a:srgbClr val="FFFFFF"/>
-                      </a:solidFill>
-                      <a:prstDash val="solid"/>
-                    </a:lnL>
-                    <a:lnR w="19050" cap="flat" cmpd="sng" algn="ctr">
-                      <a:solidFill>
-                        <a:srgbClr val="FFFFFF"/>
-                      </a:solidFill>
-                      <a:prstDash val="solid"/>
-                    </a:lnR>
-                    <a:lnT w="19050" cap="flat" cmpd="sng" algn="ctr">
-                      <a:solidFill>
-                        <a:srgbClr val="FFFFFF"/>
-                      </a:solidFill>
-                      <a:prstDash val="solid"/>
-                    </a:lnT>
-                    <a:lnB w="19050" cap="flat" cmpd="sng" algn="ctr">
-                      <a:solidFill>
-                        <a:srgbClr val="FFFFFF"/>
-                      </a:solidFill>
-                      <a:prstDash val="solid"/>
-                    </a:lnB>
-                    <a:solidFill>
-                      <a:srgbClr val="FFFFFF"/>
-                    </a:solidFill>
-                  </a:tcPr>
-                </a:tc>
-                <a:tc>
-                  <a:txBody>
-                    <a:bodyPr wrap="square"/>
-                    <a:lstStyle/>
-                    <a:p>
-                      <a:pPr algn="ctr"/>
-                      <a:r>
-                        <a:rPr sz="1600" b="0" i="0" lang="es-ES">
-                          <a:solidFill>
-                            <a:srgbClr val="263445"/>
-                          </a:solidFill>
-                        </a:rPr>
-                        <a:t>662</a:t>
-                      </a:r>
-                    </a:p>
-                  </a:txBody>
-                  <a:tcPr anchor="ctr" marL="38100" marR="38100" marT="25400" marB="25400">
-                    <a:lnL w="19050" cap="flat" cmpd="sng" algn="ctr">
-                      <a:solidFill>
-                        <a:srgbClr val="FFFFFF"/>
-                      </a:solidFill>
-                      <a:prstDash val="solid"/>
-                    </a:lnL>
-                    <a:lnR w="19050" cap="flat" cmpd="sng" algn="ctr">
-                      <a:solidFill>
-                        <a:srgbClr val="FFFFFF"/>
-                      </a:solidFill>
-                      <a:prstDash val="solid"/>
-                    </a:lnR>
-                    <a:lnT w="19050" cap="flat" cmpd="sng" algn="ctr">
-                      <a:solidFill>
-                        <a:srgbClr val="FFFFFF"/>
-                      </a:solidFill>
-                      <a:prstDash val="solid"/>
-                    </a:lnT>
-                    <a:lnB w="19050" cap="flat" cmpd="sng" algn="ctr">
-                      <a:solidFill>
-                        <a:srgbClr val="FFFFFF"/>
-                      </a:solidFill>
-                      <a:prstDash val="solid"/>
-                    </a:lnB>
-                    <a:solidFill>
-                      <a:srgbClr val="E7F4E9"/>
-                    </a:solidFill>
-                  </a:tcPr>
-                </a:tc>
-                <a:tc>
-                  <a:txBody>
-                    <a:bodyPr wrap="square"/>
-                    <a:lstStyle/>
-                    <a:p>
-                      <a:pPr algn="l"/>
-                      <a:r>
-                        <a:rPr sz="1600" b="0" i="0" lang="es-ES">
-                          <a:solidFill>
-                            <a:srgbClr val="263445"/>
-                          </a:solidFill>
-                        </a:rPr>
-                        <a:t>Omitirla</a:t>
-                      </a:r>
-                    </a:p>
-                  </a:txBody>
-                  <a:tcPr anchor="ctr" marL="38100" marR="38100" marT="25400" marB="25400">
-                    <a:lnL w="19050" cap="flat" cmpd="sng" algn="ctr">
-                      <a:solidFill>
-                        <a:srgbClr val="FFFFFF"/>
-                      </a:solidFill>
-                      <a:prstDash val="solid"/>
-                    </a:lnL>
-                    <a:lnR w="19050" cap="flat" cmpd="sng" algn="ctr">
-                      <a:solidFill>
-                        <a:srgbClr val="FFFFFF"/>
-                      </a:solidFill>
-                      <a:prstDash val="solid"/>
-                    </a:lnR>
-                    <a:lnT w="19050" cap="flat" cmpd="sng" algn="ctr">
-                      <a:solidFill>
-                        <a:srgbClr val="FFFFFF"/>
-                      </a:solidFill>
-                      <a:prstDash val="solid"/>
-                    </a:lnT>
-                    <a:lnB w="19050" cap="flat" cmpd="sng" algn="ctr">
-                      <a:solidFill>
-                        <a:srgbClr val="FFFFFF"/>
-                      </a:solidFill>
-                      <a:prstDash val="solid"/>
-                    </a:lnB>
-                    <a:solidFill>
-                      <a:srgbClr val="FCEFD1"/>
-                    </a:solidFill>
-                  </a:tcPr>
-                </a:tc>
-                <a:tc>
-                  <a:txBody>
-                    <a:bodyPr wrap="square"/>
-                    <a:lstStyle/>
-                    <a:p>
-                      <a:pPr algn="l"/>
-                      <a:r>
-                        <a:rPr sz="1600" b="0" i="0" lang="es-ES">
-                          <a:solidFill>
-                            <a:srgbClr val="263445"/>
-                          </a:solidFill>
-                        </a:rPr>
-                        <a:t>Día 5, 20:00</a:t>
-                      </a:r>
-                    </a:p>
-                  </a:txBody>
-                  <a:tcPr anchor="ctr" marL="38100" marR="38100" marT="25400" marB="25400">
-                    <a:lnL w="19050" cap="flat" cmpd="sng" algn="ctr">
-                      <a:solidFill>
-                        <a:srgbClr val="FFFFFF"/>
-                      </a:solidFill>
-                      <a:prstDash val="solid"/>
-                    </a:lnL>
-                    <a:lnR w="19050" cap="flat" cmpd="sng" algn="ctr">
-                      <a:solidFill>
-                        <a:srgbClr val="FFFFFF"/>
-                      </a:solidFill>
-                      <a:prstDash val="solid"/>
-                    </a:lnR>
-                    <a:lnT w="19050" cap="flat" cmpd="sng" algn="ctr">
-                      <a:solidFill>
-                        <a:srgbClr val="FFFFFF"/>
-                      </a:solidFill>
-                      <a:prstDash val="solid"/>
-                    </a:lnT>
-                    <a:lnB w="19050" cap="flat" cmpd="sng" algn="ctr">
-                      <a:solidFill>
-                        <a:srgbClr val="FFFFFF"/>
-                      </a:solidFill>
-                      <a:prstDash val="solid"/>
-                    </a:lnB>
-                    <a:solidFill>
-                      <a:srgbClr val="FCEFD1"/>
-                    </a:solidFill>
-                  </a:tcPr>
-                </a:tc>
-                <a:tc>
-                  <a:txBody>
-                    <a:bodyPr wrap="square"/>
-                    <a:lstStyle/>
-                    <a:p>
-                      <a:pPr algn="l"/>
-                      <a:r>
-                        <a:rPr sz="1600" b="0" i="0" lang="es-ES">
-                          <a:solidFill>
-                            <a:srgbClr val="263445"/>
-                          </a:solidFill>
-                        </a:rPr>
-                        <a:t>Ecuación mal aplicada</a:t>
-                      </a:r>
-                    </a:p>
-                  </a:txBody>
-                  <a:tcPr anchor="ctr" marL="38100" marR="38100" marT="25400" marB="25400">
-                    <a:lnL w="19050" cap="flat" cmpd="sng" algn="ctr">
-                      <a:solidFill>
-                        <a:srgbClr val="FFFFFF"/>
-                      </a:solidFill>
-                      <a:prstDash val="solid"/>
-                    </a:lnL>
-                    <a:lnR w="19050" cap="flat" cmpd="sng" algn="ctr">
-                      <a:solidFill>
-                        <a:srgbClr val="FFFFFF"/>
-                      </a:solidFill>
-                      <a:prstDash val="solid"/>
-                    </a:lnR>
-                    <a:lnT w="19050" cap="flat" cmpd="sng" algn="ctr">
-                      <a:solidFill>
-                        <a:srgbClr val="FFFFFF"/>
-                      </a:solidFill>
-                      <a:prstDash val="solid"/>
-                    </a:lnT>
-                    <a:lnB w="19050" cap="flat" cmpd="sng" algn="ctr">
-                      <a:solidFill>
-                        <a:srgbClr val="FFFFFF"/>
-                      </a:solidFill>
-                      <a:prstDash val="solid"/>
-                    </a:lnB>
-                    <a:solidFill>
-                      <a:srgbClr val="FCE4E6"/>
-                    </a:solidFill>
-                  </a:tcPr>
-                </a:tc>
-              </a:tr>
-              <a:tr h="546100">
-                <a:tc vMerge="1">
-                  <a:txBody>
-                    <a:bodyPr wrap="square"/>
-                    <a:lstStyle/>
-                    <a:p/>
-                  </a:txBody>
-                  <a:tcPr anchor="ctr" marL="38100" marR="38100" marT="25400" marB="25400">
-                    <a:lnL w="19050" cap="flat" cmpd="sng" algn="ctr">
-                      <a:solidFill>
-                        <a:srgbClr val="FFFFFF"/>
-                      </a:solidFill>
-                      <a:prstDash val="solid"/>
-                    </a:lnL>
-                    <a:lnR w="19050" cap="flat" cmpd="sng" algn="ctr">
-                      <a:solidFill>
-                        <a:srgbClr val="FFFFFF"/>
-                      </a:solidFill>
-                      <a:prstDash val="solid"/>
-                    </a:lnR>
-                    <a:lnT w="19050" cap="flat" cmpd="sng" algn="ctr">
-                      <a:solidFill>
-                        <a:srgbClr val="FFFFFF"/>
-                      </a:solidFill>
-                      <a:prstDash val="solid"/>
-                    </a:lnT>
-                    <a:lnB w="19050" cap="flat" cmpd="sng" algn="ctr">
-                      <a:solidFill>
-                        <a:srgbClr val="FFFFFF"/>
-                      </a:solidFill>
-                      <a:prstDash val="solid"/>
-                    </a:lnB>
-                    <a:solidFill>
-                      <a:srgbClr val="FFFFFF"/>
-                    </a:solidFill>
-                  </a:tcPr>
-                </a:tc>
-                <a:tc>
-                  <a:txBody>
-                    <a:bodyPr wrap="square"/>
-                    <a:lstStyle/>
-                    <a:p>
-                      <a:pPr algn="ctr"/>
-                      <a:r>
-                        <a:rPr sz="1600" b="0" i="0" lang="es-ES">
-                          <a:solidFill>
-                            <a:srgbClr val="263445"/>
-                          </a:solidFill>
-                        </a:rPr>
-                        <a:t>3</a:t>
-                      </a:r>
-                    </a:p>
-                  </a:txBody>
-                  <a:tcPr anchor="ctr" marL="38100" marR="38100" marT="25400" marB="25400">
-                    <a:lnL w="19050" cap="flat" cmpd="sng" algn="ctr">
-                      <a:solidFill>
-                        <a:srgbClr val="FFFFFF"/>
-                      </a:solidFill>
-                      <a:prstDash val="solid"/>
-                    </a:lnL>
-                    <a:lnR w="19050" cap="flat" cmpd="sng" algn="ctr">
-                      <a:solidFill>
-                        <a:srgbClr val="FFFFFF"/>
-                      </a:solidFill>
-                      <a:prstDash val="solid"/>
-                    </a:lnR>
-                    <a:lnT w="19050" cap="flat" cmpd="sng" algn="ctr">
-                      <a:solidFill>
-                        <a:srgbClr val="FFFFFF"/>
-                      </a:solidFill>
-                      <a:prstDash val="solid"/>
-                    </a:lnT>
-                    <a:lnB w="19050" cap="flat" cmpd="sng" algn="ctr">
-                      <a:solidFill>
-                        <a:srgbClr val="FFFFFF"/>
-                      </a:solidFill>
-                      <a:prstDash val="solid"/>
-                    </a:lnB>
-                    <a:solidFill>
-                      <a:srgbClr val="FFFFFF"/>
-                    </a:solidFill>
-                  </a:tcPr>
-                </a:tc>
-                <a:tc>
-                  <a:txBody>
-                    <a:bodyPr wrap="square"/>
-                    <a:lstStyle/>
-                    <a:p>
-                      <a:pPr algn="ctr"/>
-                      <a:r>
-                        <a:rPr sz="1600" b="0" i="0" lang="es-ES">
-                          <a:solidFill>
-                            <a:srgbClr val="263445"/>
-                          </a:solidFill>
-                        </a:rPr>
-                        <a:t>662</a:t>
-                      </a:r>
-                    </a:p>
-                  </a:txBody>
-                  <a:tcPr anchor="ctr" marL="38100" marR="38100" marT="25400" marB="25400">
-                    <a:lnL w="19050" cap="flat" cmpd="sng" algn="ctr">
-                      <a:solidFill>
-                        <a:srgbClr val="FFFFFF"/>
-                      </a:solidFill>
-                      <a:prstDash val="solid"/>
-                    </a:lnL>
-                    <a:lnR w="19050" cap="flat" cmpd="sng" algn="ctr">
-                      <a:solidFill>
-                        <a:srgbClr val="FFFFFF"/>
-                      </a:solidFill>
-                      <a:prstDash val="solid"/>
-                    </a:lnR>
-                    <a:lnT w="19050" cap="flat" cmpd="sng" algn="ctr">
-                      <a:solidFill>
-                        <a:srgbClr val="FFFFFF"/>
-                      </a:solidFill>
-                      <a:prstDash val="solid"/>
-                    </a:lnT>
-                    <a:lnB w="19050" cap="flat" cmpd="sng" algn="ctr">
-                      <a:solidFill>
-                        <a:srgbClr val="FFFFFF"/>
-                      </a:solidFill>
-                      <a:prstDash val="solid"/>
-                    </a:lnB>
-                    <a:solidFill>
-                      <a:srgbClr val="E7F4E9"/>
-                    </a:solidFill>
-                  </a:tcPr>
-                </a:tc>
-                <a:tc>
-                  <a:txBody>
-                    <a:bodyPr wrap="square"/>
-                    <a:lstStyle/>
-                    <a:p>
-                      <a:pPr algn="l"/>
-                      <a:r>
-                        <a:rPr sz="1600" b="0" i="0" lang="es-ES">
-                          <a:solidFill>
-                            <a:srgbClr val="263445"/>
-                          </a:solidFill>
-                        </a:rPr>
-                        <a:t>Omitirla</a:t>
-                      </a:r>
-                    </a:p>
-                  </a:txBody>
-                  <a:tcPr anchor="ctr" marL="38100" marR="38100" marT="25400" marB="25400">
-                    <a:lnL w="19050" cap="flat" cmpd="sng" algn="ctr">
-                      <a:solidFill>
-                        <a:srgbClr val="FFFFFF"/>
-                      </a:solidFill>
-                      <a:prstDash val="solid"/>
-                    </a:lnL>
-                    <a:lnR w="19050" cap="flat" cmpd="sng" algn="ctr">
-                      <a:solidFill>
-                        <a:srgbClr val="FFFFFF"/>
-                      </a:solidFill>
-                      <a:prstDash val="solid"/>
-                    </a:lnR>
-                    <a:lnT w="19050" cap="flat" cmpd="sng" algn="ctr">
-                      <a:solidFill>
-                        <a:srgbClr val="FFFFFF"/>
-                      </a:solidFill>
-                      <a:prstDash val="solid"/>
-                    </a:lnT>
-                    <a:lnB w="19050" cap="flat" cmpd="sng" algn="ctr">
-                      <a:solidFill>
-                        <a:srgbClr val="FFFFFF"/>
-                      </a:solidFill>
-                      <a:prstDash val="solid"/>
-                    </a:lnB>
-                    <a:solidFill>
-                      <a:srgbClr val="FCEFD1"/>
-                    </a:solidFill>
-                  </a:tcPr>
-                </a:tc>
-                <a:tc>
-                  <a:txBody>
-                    <a:bodyPr wrap="square"/>
-                    <a:lstStyle/>
-                    <a:p>
-                      <a:pPr algn="l"/>
-                      <a:r>
-                        <a:rPr sz="1600" b="0" i="0" lang="es-ES">
-                          <a:solidFill>
-                            <a:srgbClr val="263445"/>
-                          </a:solidFill>
-                        </a:rPr>
-                        <a:t>Día 5, 08:00 («equilibrio»)</a:t>
-                      </a:r>
-                    </a:p>
-                  </a:txBody>
-                  <a:tcPr anchor="ctr" marL="38100" marR="38100" marT="25400" marB="25400">
-                    <a:lnL w="19050" cap="flat" cmpd="sng" algn="ctr">
-                      <a:solidFill>
-                        <a:srgbClr val="FFFFFF"/>
-                      </a:solidFill>
-                      <a:prstDash val="solid"/>
-                    </a:lnL>
-                    <a:lnR w="19050" cap="flat" cmpd="sng" algn="ctr">
-                      <a:solidFill>
-                        <a:srgbClr val="FFFFFF"/>
-                      </a:solidFill>
-                      <a:prstDash val="solid"/>
-                    </a:lnR>
-                    <a:lnT w="19050" cap="flat" cmpd="sng" algn="ctr">
-                      <a:solidFill>
-                        <a:srgbClr val="FFFFFF"/>
-                      </a:solidFill>
-                      <a:prstDash val="solid"/>
-                    </a:lnT>
-                    <a:lnB w="19050" cap="flat" cmpd="sng" algn="ctr">
-                      <a:solidFill>
-                        <a:srgbClr val="FFFFFF"/>
-                      </a:solidFill>
-                      <a:prstDash val="solid"/>
-                    </a:lnB>
-                    <a:solidFill>
-                      <a:srgbClr val="FCE4E6"/>
-                    </a:solidFill>
-                  </a:tcPr>
-                </a:tc>
-                <a:tc>
-                  <a:txBody>
-                    <a:bodyPr wrap="square"/>
-                    <a:lstStyle/>
-                    <a:p>
-                      <a:pPr algn="l"/>
-                      <a:r>
-                        <a:rPr sz="1600" b="0" i="0" lang="es-ES">
-                          <a:solidFill>
-                            <a:srgbClr val="5E6B78"/>
-                          </a:solidFill>
-                        </a:rPr>
-                        <a:t>Ninguna</a:t>
-                      </a:r>
-                    </a:p>
-                  </a:txBody>
-                  <a:tcPr anchor="ctr" marL="38100" marR="38100" marT="25400" marB="25400">
-                    <a:lnL w="19050" cap="flat" cmpd="sng" algn="ctr">
-                      <a:solidFill>
-                        <a:srgbClr val="FFFFFF"/>
-                      </a:solidFill>
-                      <a:prstDash val="solid"/>
-                    </a:lnL>
-                    <a:lnR w="19050" cap="flat" cmpd="sng" algn="ctr">
-                      <a:solidFill>
-                        <a:srgbClr val="FFFFFF"/>
-                      </a:solidFill>
-                      <a:prstDash val="solid"/>
-                    </a:lnR>
-                    <a:lnT w="19050" cap="flat" cmpd="sng" algn="ctr">
-                      <a:solidFill>
-                        <a:srgbClr val="FFFFFF"/>
-                      </a:solidFill>
-                      <a:prstDash val="solid"/>
-                    </a:lnT>
-                    <a:lnB w="19050" cap="flat" cmpd="sng" algn="ctr">
-                      <a:solidFill>
-                        <a:srgbClr val="FFFFFF"/>
-                      </a:solidFill>
-                      <a:prstDash val="solid"/>
-                    </a:lnB>
-                    <a:solidFill>
-                      <a:srgbClr val="F3F6F9"/>
-                    </a:solidFill>
-                  </a:tcPr>
-                </a:tc>
-              </a:tr>
-              <a:tr h="304800">
-                <a:tc rowSpan="3">
-                  <a:txBody>
-                    <a:bodyPr wrap="square"/>
-                    <a:lstStyle/>
-                    <a:p>
-                      <a:pPr algn="l"/>
-                      <a:r>
-                        <a:rPr sz="1600" b="1" i="0" lang="es-ES">
-                          <a:solidFill>
-                            <a:srgbClr val="263445"/>
-                          </a:solidFill>
-                        </a:rPr>
-                        <a:t>Claude</a:t>
-                      </a:r>
-                    </a:p>
-                  </a:txBody>
-                  <a:tcPr anchor="ctr" marL="38100" marR="38100" marT="25400" marB="25400">
-                    <a:lnL w="19050" cap="flat" cmpd="sng" algn="ctr">
-                      <a:solidFill>
-                        <a:srgbClr val="FFFFFF"/>
-                      </a:solidFill>
-                      <a:prstDash val="solid"/>
-                    </a:lnL>
-                    <a:lnR w="19050" cap="flat" cmpd="sng" algn="ctr">
-                      <a:solidFill>
-                        <a:srgbClr val="FFFFFF"/>
-                      </a:solidFill>
-                      <a:prstDash val="solid"/>
-                    </a:lnR>
-                    <a:lnT w="31750" cap="flat" cmpd="sng" algn="ctr">
-                      <a:solidFill>
-                        <a:srgbClr val="263445"/>
-                      </a:solidFill>
-                      <a:prstDash val="solid"/>
-                    </a:lnT>
-                    <a:lnB w="19050" cap="flat" cmpd="sng" algn="ctr">
-                      <a:solidFill>
-                        <a:srgbClr val="FFFFFF"/>
-                      </a:solidFill>
-                      <a:prstDash val="solid"/>
-                    </a:lnB>
-                    <a:solidFill>
-                      <a:srgbClr val="FFFFFF"/>
-                    </a:solidFill>
-                  </a:tcPr>
-                </a:tc>
-                <a:tc>
-                  <a:txBody>
-                    <a:bodyPr wrap="square"/>
-                    <a:lstStyle/>
-                    <a:p>
-                      <a:pPr algn="ctr"/>
-                      <a:r>
-                        <a:rPr sz="1600" b="0" i="0" lang="es-ES">
-                          <a:solidFill>
-                            <a:srgbClr val="263445"/>
-                          </a:solidFill>
-                        </a:rPr>
-                        <a:t>1</a:t>
-                      </a:r>
-                    </a:p>
-                  </a:txBody>
-                  <a:tcPr anchor="ctr" marL="38100" marR="38100" marT="25400" marB="25400">
-                    <a:lnL w="19050" cap="flat" cmpd="sng" algn="ctr">
-                      <a:solidFill>
-                        <a:srgbClr val="FFFFFF"/>
-                      </a:solidFill>
-                      <a:prstDash val="solid"/>
-                    </a:lnL>
-                    <a:lnR w="19050" cap="flat" cmpd="sng" algn="ctr">
-                      <a:solidFill>
-                        <a:srgbClr val="FFFFFF"/>
-                      </a:solidFill>
-                      <a:prstDash val="solid"/>
-                    </a:lnR>
-                    <a:lnT w="31750" cap="flat" cmpd="sng" algn="ctr">
-                      <a:solidFill>
-                        <a:srgbClr val="263445"/>
-                      </a:solidFill>
-                      <a:prstDash val="solid"/>
-                    </a:lnT>
-                    <a:lnB w="19050" cap="flat" cmpd="sng" algn="ctr">
-                      <a:solidFill>
-                        <a:srgbClr val="FFFFFF"/>
-                      </a:solidFill>
-                      <a:prstDash val="solid"/>
-                    </a:lnB>
-                    <a:solidFill>
-                      <a:srgbClr val="FFFFFF"/>
-                    </a:solidFill>
-                  </a:tcPr>
-                </a:tc>
-                <a:tc>
-                  <a:txBody>
-                    <a:bodyPr wrap="square"/>
-                    <a:lstStyle/>
-                    <a:p>
-                      <a:pPr algn="ctr"/>
-                      <a:r>
-                        <a:rPr sz="1600" b="0" i="0" lang="es-ES">
-                          <a:solidFill>
-                            <a:srgbClr val="5E6B78"/>
-                          </a:solidFill>
-                        </a:rPr>
-                        <a:t>[pendiente]</a:t>
-                      </a:r>
-                    </a:p>
-                  </a:txBody>
-                  <a:tcPr anchor="ctr" marL="38100" marR="38100" marT="25400" marB="25400">
-                    <a:lnL w="19050" cap="flat" cmpd="sng" algn="ctr">
-                      <a:solidFill>
-                        <a:srgbClr val="FFFFFF"/>
-                      </a:solidFill>
-                      <a:prstDash val="solid"/>
-                    </a:lnL>
-                    <a:lnR w="19050" cap="flat" cmpd="sng" algn="ctr">
-                      <a:solidFill>
-                        <a:srgbClr val="FFFFFF"/>
-                      </a:solidFill>
-                      <a:prstDash val="solid"/>
-                    </a:lnR>
-                    <a:lnT w="31750" cap="flat" cmpd="sng" algn="ctr">
-                      <a:solidFill>
-                        <a:srgbClr val="263445"/>
-                      </a:solidFill>
-                      <a:prstDash val="solid"/>
-                    </a:lnT>
-                    <a:lnB w="19050" cap="flat" cmpd="sng" algn="ctr">
-                      <a:solidFill>
-                        <a:srgbClr val="FFFFFF"/>
-                      </a:solidFill>
-                      <a:prstDash val="solid"/>
-                    </a:lnB>
-                    <a:solidFill>
-                      <a:srgbClr val="F3F6F9"/>
-                    </a:solidFill>
-                  </a:tcPr>
-                </a:tc>
-                <a:tc>
-                  <a:txBody>
-                    <a:bodyPr wrap="square"/>
-                    <a:lstStyle/>
-                    <a:p>
-                      <a:pPr algn="l"/>
-                      <a:r>
-                        <a:rPr sz="1600" b="0" i="0" lang="es-ES">
-                          <a:solidFill>
-                            <a:srgbClr val="5E6B78"/>
-                          </a:solidFill>
-                        </a:rPr>
-                        <a:t>[pendiente]</a:t>
-                      </a:r>
-                    </a:p>
-                  </a:txBody>
-                  <a:tcPr anchor="ctr" marL="38100" marR="38100" marT="25400" marB="25400">
-                    <a:lnL w="19050" cap="flat" cmpd="sng" algn="ctr">
-                      <a:solidFill>
-                        <a:srgbClr val="FFFFFF"/>
-                      </a:solidFill>
-                      <a:prstDash val="solid"/>
-                    </a:lnL>
-                    <a:lnR w="19050" cap="flat" cmpd="sng" algn="ctr">
-                      <a:solidFill>
-                        <a:srgbClr val="FFFFFF"/>
-                      </a:solidFill>
-                      <a:prstDash val="solid"/>
-                    </a:lnR>
-                    <a:lnT w="31750" cap="flat" cmpd="sng" algn="ctr">
-                      <a:solidFill>
-                        <a:srgbClr val="263445"/>
-                      </a:solidFill>
-                      <a:prstDash val="solid"/>
-                    </a:lnT>
-                    <a:lnB w="19050" cap="flat" cmpd="sng" algn="ctr">
-                      <a:solidFill>
-                        <a:srgbClr val="FFFFFF"/>
-                      </a:solidFill>
-                      <a:prstDash val="solid"/>
-                    </a:lnB>
-                    <a:solidFill>
-                      <a:srgbClr val="F3F6F9"/>
-                    </a:solidFill>
-                  </a:tcPr>
-                </a:tc>
-                <a:tc>
-                  <a:txBody>
-                    <a:bodyPr wrap="square"/>
-                    <a:lstStyle/>
-                    <a:p>
-                      <a:pPr algn="l"/>
-                      <a:r>
-                        <a:rPr sz="1600" b="0" i="0" lang="es-ES">
-                          <a:solidFill>
-                            <a:srgbClr val="5E6B78"/>
-                          </a:solidFill>
-                        </a:rPr>
-                        <a:t>[pendiente]</a:t>
-                      </a:r>
-                    </a:p>
-                  </a:txBody>
-                  <a:tcPr anchor="ctr" marL="38100" marR="38100" marT="25400" marB="25400">
-                    <a:lnL w="19050" cap="flat" cmpd="sng" algn="ctr">
-                      <a:solidFill>
-                        <a:srgbClr val="FFFFFF"/>
-                      </a:solidFill>
-                      <a:prstDash val="solid"/>
-                    </a:lnL>
-                    <a:lnR w="19050" cap="flat" cmpd="sng" algn="ctr">
-                      <a:solidFill>
-                        <a:srgbClr val="FFFFFF"/>
-                      </a:solidFill>
-                      <a:prstDash val="solid"/>
-                    </a:lnR>
-                    <a:lnT w="31750" cap="flat" cmpd="sng" algn="ctr">
-                      <a:solidFill>
-                        <a:srgbClr val="263445"/>
-                      </a:solidFill>
-                      <a:prstDash val="solid"/>
-                    </a:lnT>
-                    <a:lnB w="19050" cap="flat" cmpd="sng" algn="ctr">
-                      <a:solidFill>
-                        <a:srgbClr val="FFFFFF"/>
-                      </a:solidFill>
-                      <a:prstDash val="solid"/>
-                    </a:lnB>
-                    <a:solidFill>
-                      <a:srgbClr val="F3F6F9"/>
-                    </a:solidFill>
-                  </a:tcPr>
-                </a:tc>
-                <a:tc>
-                  <a:txBody>
-                    <a:bodyPr wrap="square"/>
-                    <a:lstStyle/>
-                    <a:p>
-                      <a:pPr algn="l"/>
-                      <a:r>
-                        <a:rPr sz="1600" b="0" i="0" lang="es-ES">
-                          <a:solidFill>
-                            <a:srgbClr val="5E6B78"/>
-                          </a:solidFill>
-                        </a:rPr>
-                        <a:t>[pendiente]</a:t>
-                      </a:r>
-                    </a:p>
-                  </a:txBody>
-                  <a:tcPr anchor="ctr" marL="38100" marR="38100" marT="25400" marB="25400">
-                    <a:lnL w="19050" cap="flat" cmpd="sng" algn="ctr">
-                      <a:solidFill>
-                        <a:srgbClr val="FFFFFF"/>
-                      </a:solidFill>
-                      <a:prstDash val="solid"/>
-                    </a:lnL>
-                    <a:lnR w="19050" cap="flat" cmpd="sng" algn="ctr">
-                      <a:solidFill>
-                        <a:srgbClr val="FFFFFF"/>
-                      </a:solidFill>
-                      <a:prstDash val="solid"/>
-                    </a:lnR>
-                    <a:lnT w="31750" cap="flat" cmpd="sng" algn="ctr">
-                      <a:solidFill>
-                        <a:srgbClr val="263445"/>
-                      </a:solidFill>
-                      <a:prstDash val="solid"/>
-                    </a:lnT>
-                    <a:lnB w="19050" cap="flat" cmpd="sng" algn="ctr">
-                      <a:solidFill>
-                        <a:srgbClr val="FFFFFF"/>
-                      </a:solidFill>
-                      <a:prstDash val="solid"/>
-                    </a:lnB>
-                    <a:solidFill>
-                      <a:srgbClr val="F3F6F9"/>
-                    </a:solidFill>
-                  </a:tcPr>
-                </a:tc>
-              </a:tr>
-              <a:tr h="304800">
-                <a:tc vMerge="1">
-                  <a:txBody>
-                    <a:bodyPr wrap="square"/>
-                    <a:lstStyle/>
-                    <a:p/>
-                  </a:txBody>
-                  <a:tcPr anchor="ctr" marL="38100" marR="38100" marT="25400" marB="25400">
-                    <a:lnL w="19050" cap="flat" cmpd="sng" algn="ctr">
-                      <a:solidFill>
-                        <a:srgbClr val="FFFFFF"/>
-                      </a:solidFill>
-                      <a:prstDash val="solid"/>
-                    </a:lnL>
-                    <a:lnR w="19050" cap="flat" cmpd="sng" algn="ctr">
-                      <a:solidFill>
-                        <a:srgbClr val="FFFFFF"/>
-                      </a:solidFill>
-                      <a:prstDash val="solid"/>
-                    </a:lnR>
-                    <a:lnT w="19050" cap="flat" cmpd="sng" algn="ctr">
-                      <a:solidFill>
-                        <a:srgbClr val="FFFFFF"/>
-                      </a:solidFill>
-                      <a:prstDash val="solid"/>
-                    </a:lnT>
-                    <a:lnB w="19050" cap="flat" cmpd="sng" algn="ctr">
-                      <a:solidFill>
-                        <a:srgbClr val="FFFFFF"/>
-                      </a:solidFill>
-                      <a:prstDash val="solid"/>
-                    </a:lnB>
-                    <a:solidFill>
-                      <a:srgbClr val="FFFFFF"/>
-                    </a:solidFill>
-                  </a:tcPr>
-                </a:tc>
-                <a:tc>
-                  <a:txBody>
-                    <a:bodyPr wrap="square"/>
-                    <a:lstStyle/>
-                    <a:p>
-                      <a:pPr algn="ctr"/>
-                      <a:r>
-                        <a:rPr sz="1600" b="0" i="0" lang="es-ES">
-                          <a:solidFill>
-                            <a:srgbClr val="263445"/>
-                          </a:solidFill>
-                        </a:rPr>
-                        <a:t>2</a:t>
-                      </a:r>
-                    </a:p>
-                  </a:txBody>
-                  <a:tcPr anchor="ctr" marL="38100" marR="38100" marT="25400" marB="25400">
-                    <a:lnL w="19050" cap="flat" cmpd="sng" algn="ctr">
-                      <a:solidFill>
-                        <a:srgbClr val="FFFFFF"/>
-                      </a:solidFill>
-                      <a:prstDash val="solid"/>
-                    </a:lnL>
-                    <a:lnR w="19050" cap="flat" cmpd="sng" algn="ctr">
-                      <a:solidFill>
-                        <a:srgbClr val="FFFFFF"/>
-                      </a:solidFill>
-                      <a:prstDash val="solid"/>
-                    </a:lnR>
-                    <a:lnT w="19050" cap="flat" cmpd="sng" algn="ctr">
-                      <a:solidFill>
-                        <a:srgbClr val="FFFFFF"/>
-                      </a:solidFill>
-                      <a:prstDash val="solid"/>
-                    </a:lnT>
-                    <a:lnB w="19050" cap="flat" cmpd="sng" algn="ctr">
-                      <a:solidFill>
-                        <a:srgbClr val="FFFFFF"/>
-                      </a:solidFill>
-                      <a:prstDash val="solid"/>
-                    </a:lnB>
-                    <a:solidFill>
-                      <a:srgbClr val="FFFFFF"/>
-                    </a:solidFill>
-                  </a:tcPr>
-                </a:tc>
-                <a:tc>
-                  <a:txBody>
-                    <a:bodyPr wrap="square"/>
-                    <a:lstStyle/>
-                    <a:p>
-                      <a:pPr algn="ctr"/>
-                      <a:r>
-                        <a:rPr sz="1600" b="0" i="0" lang="es-ES">
-                          <a:solidFill>
-                            <a:srgbClr val="5E6B78"/>
-                          </a:solidFill>
-                        </a:rPr>
-                        <a:t>[pendiente]</a:t>
-                      </a:r>
-                    </a:p>
-                  </a:txBody>
-                  <a:tcPr anchor="ctr" marL="38100" marR="38100" marT="25400" marB="25400">
-                    <a:lnL w="19050" cap="flat" cmpd="sng" algn="ctr">
-                      <a:solidFill>
-                        <a:srgbClr val="FFFFFF"/>
-                      </a:solidFill>
-                      <a:prstDash val="solid"/>
-                    </a:lnL>
-                    <a:lnR w="19050" cap="flat" cmpd="sng" algn="ctr">
-                      <a:solidFill>
-                        <a:srgbClr val="FFFFFF"/>
-                      </a:solidFill>
-                      <a:prstDash val="solid"/>
-                    </a:lnR>
-                    <a:lnT w="19050" cap="flat" cmpd="sng" algn="ctr">
-                      <a:solidFill>
-                        <a:srgbClr val="FFFFFF"/>
-                      </a:solidFill>
-                      <a:prstDash val="solid"/>
-                    </a:lnT>
-                    <a:lnB w="19050" cap="flat" cmpd="sng" algn="ctr">
-                      <a:solidFill>
-                        <a:srgbClr val="FFFFFF"/>
-                      </a:solidFill>
-                      <a:prstDash val="solid"/>
-                    </a:lnB>
-                    <a:solidFill>
-                      <a:srgbClr val="F3F6F9"/>
-                    </a:solidFill>
-                  </a:tcPr>
-                </a:tc>
-                <a:tc>
-                  <a:txBody>
-                    <a:bodyPr wrap="square"/>
-                    <a:lstStyle/>
-                    <a:p>
-                      <a:pPr algn="l"/>
-                      <a:r>
-                        <a:rPr sz="1600" b="0" i="0" lang="es-ES">
-                          <a:solidFill>
-                            <a:srgbClr val="5E6B78"/>
-                          </a:solidFill>
-                        </a:rPr>
-                        <a:t>[pendiente]</a:t>
-                      </a:r>
-                    </a:p>
-                  </a:txBody>
-                  <a:tcPr anchor="ctr" marL="38100" marR="38100" marT="25400" marB="25400">
-                    <a:lnL w="19050" cap="flat" cmpd="sng" algn="ctr">
-                      <a:solidFill>
-                        <a:srgbClr val="FFFFFF"/>
-                      </a:solidFill>
-                      <a:prstDash val="solid"/>
-                    </a:lnL>
-                    <a:lnR w="19050" cap="flat" cmpd="sng" algn="ctr">
-                      <a:solidFill>
-                        <a:srgbClr val="FFFFFF"/>
-                      </a:solidFill>
-                      <a:prstDash val="solid"/>
-                    </a:lnR>
-                    <a:lnT w="19050" cap="flat" cmpd="sng" algn="ctr">
-                      <a:solidFill>
-                        <a:srgbClr val="FFFFFF"/>
-                      </a:solidFill>
-                      <a:prstDash val="solid"/>
-                    </a:lnT>
-                    <a:lnB w="19050" cap="flat" cmpd="sng" algn="ctr">
-                      <a:solidFill>
-                        <a:srgbClr val="FFFFFF"/>
-                      </a:solidFill>
-                      <a:prstDash val="solid"/>
-                    </a:lnB>
-                    <a:solidFill>
-                      <a:srgbClr val="F3F6F9"/>
-                    </a:solidFill>
-                  </a:tcPr>
-                </a:tc>
-                <a:tc>
-                  <a:txBody>
-                    <a:bodyPr wrap="square"/>
-                    <a:lstStyle/>
-                    <a:p>
-                      <a:pPr algn="l"/>
-                      <a:r>
-                        <a:rPr sz="1600" b="0" i="0" lang="es-ES">
-                          <a:solidFill>
-                            <a:srgbClr val="5E6B78"/>
-                          </a:solidFill>
-                        </a:rPr>
-                        <a:t>[pendiente]</a:t>
-                      </a:r>
-                    </a:p>
-                  </a:txBody>
-                  <a:tcPr anchor="ctr" marL="38100" marR="38100" marT="25400" marB="25400">
-                    <a:lnL w="19050" cap="flat" cmpd="sng" algn="ctr">
-                      <a:solidFill>
-                        <a:srgbClr val="FFFFFF"/>
-                      </a:solidFill>
-                      <a:prstDash val="solid"/>
-                    </a:lnL>
-                    <a:lnR w="19050" cap="flat" cmpd="sng" algn="ctr">
-                      <a:solidFill>
-                        <a:srgbClr val="FFFFFF"/>
-                      </a:solidFill>
-                      <a:prstDash val="solid"/>
-                    </a:lnR>
-                    <a:lnT w="19050" cap="flat" cmpd="sng" algn="ctr">
-                      <a:solidFill>
-                        <a:srgbClr val="FFFFFF"/>
-                      </a:solidFill>
-                      <a:prstDash val="solid"/>
-                    </a:lnT>
-                    <a:lnB w="19050" cap="flat" cmpd="sng" algn="ctr">
-                      <a:solidFill>
-                        <a:srgbClr val="FFFFFF"/>
-                      </a:solidFill>
-                      <a:prstDash val="solid"/>
-                    </a:lnB>
-                    <a:solidFill>
-                      <a:srgbClr val="F3F6F9"/>
-                    </a:solidFill>
-                  </a:tcPr>
-                </a:tc>
-                <a:tc>
-                  <a:txBody>
-                    <a:bodyPr wrap="square"/>
-                    <a:lstStyle/>
-                    <a:p>
-                      <a:pPr algn="l"/>
-                      <a:r>
-                        <a:rPr sz="1600" b="0" i="0" lang="es-ES">
-                          <a:solidFill>
-                            <a:srgbClr val="5E6B78"/>
-                          </a:solidFill>
-                        </a:rPr>
-                        <a:t>[pendiente]</a:t>
-                      </a:r>
-                    </a:p>
-                  </a:txBody>
-                  <a:tcPr anchor="ctr" marL="38100" marR="38100" marT="25400" marB="25400">
-                    <a:lnL w="19050" cap="flat" cmpd="sng" algn="ctr">
-                      <a:solidFill>
-                        <a:srgbClr val="FFFFFF"/>
-                      </a:solidFill>
-                      <a:prstDash val="solid"/>
-                    </a:lnL>
-                    <a:lnR w="19050" cap="flat" cmpd="sng" algn="ctr">
-                      <a:solidFill>
-                        <a:srgbClr val="FFFFFF"/>
-                      </a:solidFill>
-                      <a:prstDash val="solid"/>
-                    </a:lnR>
-                    <a:lnT w="19050" cap="flat" cmpd="sng" algn="ctr">
-                      <a:solidFill>
-                        <a:srgbClr val="FFFFFF"/>
-                      </a:solidFill>
-                      <a:prstDash val="solid"/>
-                    </a:lnT>
-                    <a:lnB w="19050" cap="flat" cmpd="sng" algn="ctr">
-                      <a:solidFill>
-                        <a:srgbClr val="FFFFFF"/>
-                      </a:solidFill>
-                      <a:prstDash val="solid"/>
-                    </a:lnB>
-                    <a:solidFill>
-                      <a:srgbClr val="F3F6F9"/>
-                    </a:solidFill>
-                  </a:tcPr>
-                </a:tc>
-              </a:tr>
-              <a:tr h="304800">
-                <a:tc vMerge="1">
-                  <a:txBody>
-                    <a:bodyPr wrap="square"/>
-                    <a:lstStyle/>
-                    <a:p/>
-                  </a:txBody>
-                  <a:tcPr anchor="ctr" marL="38100" marR="38100" marT="25400" marB="25400">
-                    <a:lnL w="19050" cap="flat" cmpd="sng" algn="ctr">
-                      <a:solidFill>
-                        <a:srgbClr val="FFFFFF"/>
-                      </a:solidFill>
-                      <a:prstDash val="solid"/>
-                    </a:lnL>
-                    <a:lnR w="19050" cap="flat" cmpd="sng" algn="ctr">
-                      <a:solidFill>
-                        <a:srgbClr val="FFFFFF"/>
-                      </a:solidFill>
-                      <a:prstDash val="solid"/>
-                    </a:lnR>
-                    <a:lnT w="19050" cap="flat" cmpd="sng" algn="ctr">
-                      <a:solidFill>
-                        <a:srgbClr val="FFFFFF"/>
-                      </a:solidFill>
-                      <a:prstDash val="solid"/>
-                    </a:lnT>
-                    <a:lnB w="19050" cap="flat" cmpd="sng" algn="ctr">
-                      <a:solidFill>
-                        <a:srgbClr val="FFFFFF"/>
-                      </a:solidFill>
-                      <a:prstDash val="solid"/>
-                    </a:lnB>
-                    <a:solidFill>
-                      <a:srgbClr val="FFFFFF"/>
-                    </a:solidFill>
-                  </a:tcPr>
-                </a:tc>
-                <a:tc>
-                  <a:txBody>
-                    <a:bodyPr wrap="square"/>
-                    <a:lstStyle/>
-                    <a:p>
-                      <a:pPr algn="ctr"/>
-                      <a:r>
-                        <a:rPr sz="1600" b="0" i="0" lang="es-ES">
-                          <a:solidFill>
-                            <a:srgbClr val="263445"/>
-                          </a:solidFill>
-                        </a:rPr>
-                        <a:t>3</a:t>
-                      </a:r>
-                    </a:p>
-                  </a:txBody>
-                  <a:tcPr anchor="ctr" marL="38100" marR="38100" marT="25400" marB="25400">
-                    <a:lnL w="19050" cap="flat" cmpd="sng" algn="ctr">
-                      <a:solidFill>
-                        <a:srgbClr val="FFFFFF"/>
-                      </a:solidFill>
-                      <a:prstDash val="solid"/>
-                    </a:lnL>
-                    <a:lnR w="19050" cap="flat" cmpd="sng" algn="ctr">
-                      <a:solidFill>
-                        <a:srgbClr val="FFFFFF"/>
-                      </a:solidFill>
-                      <a:prstDash val="solid"/>
-                    </a:lnR>
-                    <a:lnT w="19050" cap="flat" cmpd="sng" algn="ctr">
-                      <a:solidFill>
-                        <a:srgbClr val="FFFFFF"/>
-                      </a:solidFill>
-                      <a:prstDash val="solid"/>
-                    </a:lnT>
-                    <a:lnB w="19050" cap="flat" cmpd="sng" algn="ctr">
-                      <a:solidFill>
-                        <a:srgbClr val="FFFFFF"/>
-                      </a:solidFill>
-                      <a:prstDash val="solid"/>
-                    </a:lnB>
-                    <a:solidFill>
-                      <a:srgbClr val="FFFFFF"/>
-                    </a:solidFill>
-                  </a:tcPr>
-                </a:tc>
-                <a:tc>
-                  <a:txBody>
-                    <a:bodyPr wrap="square"/>
-                    <a:lstStyle/>
-                    <a:p>
-                      <a:pPr algn="ctr"/>
-                      <a:r>
-                        <a:rPr sz="1600" b="0" i="0" lang="es-ES">
-                          <a:solidFill>
-                            <a:srgbClr val="5E6B78"/>
-                          </a:solidFill>
-                        </a:rPr>
-                        <a:t>[pendiente]</a:t>
-                      </a:r>
-                    </a:p>
-                  </a:txBody>
-                  <a:tcPr anchor="ctr" marL="38100" marR="38100" marT="25400" marB="25400">
-                    <a:lnL w="19050" cap="flat" cmpd="sng" algn="ctr">
-                      <a:solidFill>
-                        <a:srgbClr val="FFFFFF"/>
-                      </a:solidFill>
-                      <a:prstDash val="solid"/>
-                    </a:lnL>
-                    <a:lnR w="19050" cap="flat" cmpd="sng" algn="ctr">
-                      <a:solidFill>
-                        <a:srgbClr val="FFFFFF"/>
-                      </a:solidFill>
-                      <a:prstDash val="solid"/>
-                    </a:lnR>
-                    <a:lnT w="19050" cap="flat" cmpd="sng" algn="ctr">
-                      <a:solidFill>
-                        <a:srgbClr val="FFFFFF"/>
-                      </a:solidFill>
-                      <a:prstDash val="solid"/>
-                    </a:lnT>
-                    <a:lnB w="19050" cap="flat" cmpd="sng" algn="ctr">
-                      <a:solidFill>
-                        <a:srgbClr val="FFFFFF"/>
-                      </a:solidFill>
-                      <a:prstDash val="solid"/>
-                    </a:lnB>
-                    <a:solidFill>
-                      <a:srgbClr val="F3F6F9"/>
-                    </a:solidFill>
-                  </a:tcPr>
-                </a:tc>
-                <a:tc>
-                  <a:txBody>
-                    <a:bodyPr wrap="square"/>
-                    <a:lstStyle/>
-                    <a:p>
-                      <a:pPr algn="l"/>
-                      <a:r>
-                        <a:rPr sz="1600" b="0" i="0" lang="es-ES">
-                          <a:solidFill>
-                            <a:srgbClr val="5E6B78"/>
-                          </a:solidFill>
-                        </a:rPr>
-                        <a:t>[pendiente]</a:t>
-                      </a:r>
-                    </a:p>
-                  </a:txBody>
-                  <a:tcPr anchor="ctr" marL="38100" marR="38100" marT="25400" marB="25400">
-                    <a:lnL w="19050" cap="flat" cmpd="sng" algn="ctr">
-                      <a:solidFill>
-                        <a:srgbClr val="FFFFFF"/>
-                      </a:solidFill>
-                      <a:prstDash val="solid"/>
-                    </a:lnL>
-                    <a:lnR w="19050" cap="flat" cmpd="sng" algn="ctr">
-                      <a:solidFill>
-                        <a:srgbClr val="FFFFFF"/>
-                      </a:solidFill>
-                      <a:prstDash val="solid"/>
-                    </a:lnR>
-                    <a:lnT w="19050" cap="flat" cmpd="sng" algn="ctr">
-                      <a:solidFill>
-                        <a:srgbClr val="FFFFFF"/>
-                      </a:solidFill>
-                      <a:prstDash val="solid"/>
-                    </a:lnT>
-                    <a:lnB w="19050" cap="flat" cmpd="sng" algn="ctr">
-                      <a:solidFill>
-                        <a:srgbClr val="FFFFFF"/>
-                      </a:solidFill>
-                      <a:prstDash val="solid"/>
-                    </a:lnB>
-                    <a:solidFill>
-                      <a:srgbClr val="F3F6F9"/>
-                    </a:solidFill>
-                  </a:tcPr>
-                </a:tc>
-                <a:tc>
-                  <a:txBody>
-                    <a:bodyPr wrap="square"/>
-                    <a:lstStyle/>
-                    <a:p>
-                      <a:pPr algn="l"/>
-                      <a:r>
-                        <a:rPr sz="1600" b="0" i="0" lang="es-ES">
-                          <a:solidFill>
-                            <a:srgbClr val="5E6B78"/>
-                          </a:solidFill>
-                        </a:rPr>
-                        <a:t>[pendiente]</a:t>
-                      </a:r>
-                    </a:p>
-                  </a:txBody>
-                  <a:tcPr anchor="ctr" marL="38100" marR="38100" marT="25400" marB="25400">
-                    <a:lnL w="19050" cap="flat" cmpd="sng" algn="ctr">
-                      <a:solidFill>
-                        <a:srgbClr val="FFFFFF"/>
-                      </a:solidFill>
-                      <a:prstDash val="solid"/>
-                    </a:lnL>
-                    <a:lnR w="19050" cap="flat" cmpd="sng" algn="ctr">
-                      <a:solidFill>
-                        <a:srgbClr val="FFFFFF"/>
-                      </a:solidFill>
-                      <a:prstDash val="solid"/>
-                    </a:lnR>
-                    <a:lnT w="19050" cap="flat" cmpd="sng" algn="ctr">
-                      <a:solidFill>
-                        <a:srgbClr val="FFFFFF"/>
-                      </a:solidFill>
-                      <a:prstDash val="solid"/>
-                    </a:lnT>
-                    <a:lnB w="19050" cap="flat" cmpd="sng" algn="ctr">
-                      <a:solidFill>
-                        <a:srgbClr val="FFFFFF"/>
-                      </a:solidFill>
-                      <a:prstDash val="solid"/>
-                    </a:lnB>
-                    <a:solidFill>
-                      <a:srgbClr val="F3F6F9"/>
-                    </a:solidFill>
-                  </a:tcPr>
-                </a:tc>
-                <a:tc>
-                  <a:txBody>
-                    <a:bodyPr wrap="square"/>
-                    <a:lstStyle/>
-                    <a:p>
-                      <a:pPr algn="l"/>
-                      <a:r>
-                        <a:rPr sz="1600" b="0" i="0" lang="es-ES">
-                          <a:solidFill>
-                            <a:srgbClr val="5E6B78"/>
-                          </a:solidFill>
-                        </a:rPr>
-                        <a:t>[pendiente]</a:t>
-                      </a:r>
-                    </a:p>
-                  </a:txBody>
-                  <a:tcPr anchor="ctr" marL="38100" marR="38100" marT="25400" marB="25400">
-                    <a:lnL w="19050" cap="flat" cmpd="sng" algn="ctr">
-                      <a:solidFill>
-                        <a:srgbClr val="FFFFFF"/>
-                      </a:solidFill>
-                      <a:prstDash val="solid"/>
-                    </a:lnL>
-                    <a:lnR w="19050" cap="flat" cmpd="sng" algn="ctr">
-                      <a:solidFill>
-                        <a:srgbClr val="FFFFFF"/>
-                      </a:solidFill>
-                      <a:prstDash val="solid"/>
-                    </a:lnR>
-                    <a:lnT w="19050" cap="flat" cmpd="sng" algn="ctr">
-                      <a:solidFill>
-                        <a:srgbClr val="FFFFFF"/>
-                      </a:solidFill>
-                      <a:prstDash val="solid"/>
-                    </a:lnT>
-                    <a:lnB w="19050" cap="flat" cmpd="sng" algn="ctr">
-                      <a:solidFill>
-                        <a:srgbClr val="FFFFFF"/>
-                      </a:solidFill>
-                      <a:prstDash val="solid"/>
-                    </a:lnB>
-                    <a:solidFill>
-                      <a:srgbClr val="F3F6F9"/>
-                    </a:solidFill>
-                  </a:tcPr>
-                </a:tc>
-              </a:tr>
-              <a:tr h="304800">
-                <a:tc rowSpan="3">
-                  <a:txBody>
-                    <a:bodyPr wrap="square"/>
-                    <a:lstStyle/>
-                    <a:p>
-                      <a:pPr algn="l"/>
-                      <a:r>
-                        <a:rPr sz="1600" b="1" i="0" lang="es-ES">
-                          <a:solidFill>
-                            <a:srgbClr val="263445"/>
-                          </a:solidFill>
-                        </a:rPr>
-                        <a:t>ChatGPT</a:t>
-                      </a:r>
-                    </a:p>
-                  </a:txBody>
-                  <a:tcPr anchor="ctr" marL="38100" marR="38100" marT="25400" marB="25400">
-                    <a:lnL w="19050" cap="flat" cmpd="sng" algn="ctr">
-                      <a:solidFill>
-                        <a:srgbClr val="FFFFFF"/>
-                      </a:solidFill>
-                      <a:prstDash val="solid"/>
-                    </a:lnL>
-                    <a:lnR w="19050" cap="flat" cmpd="sng" algn="ctr">
-                      <a:solidFill>
-                        <a:srgbClr val="FFFFFF"/>
-                      </a:solidFill>
-                      <a:prstDash val="solid"/>
-                    </a:lnR>
-                    <a:lnT w="31750" cap="flat" cmpd="sng" algn="ctr">
-                      <a:solidFill>
-                        <a:srgbClr val="263445"/>
-                      </a:solidFill>
-                      <a:prstDash val="solid"/>
-                    </a:lnT>
-                    <a:lnB w="19050" cap="flat" cmpd="sng" algn="ctr">
-                      <a:solidFill>
-                        <a:srgbClr val="FFFFFF"/>
-                      </a:solidFill>
-                      <a:prstDash val="solid"/>
-                    </a:lnB>
-                    <a:solidFill>
-                      <a:srgbClr val="FFFFFF"/>
-                    </a:solidFill>
-                  </a:tcPr>
-                </a:tc>
-                <a:tc>
-                  <a:txBody>
-                    <a:bodyPr wrap="square"/>
-                    <a:lstStyle/>
-                    <a:p>
-                      <a:pPr algn="ctr"/>
-                      <a:r>
-                        <a:rPr sz="1600" b="0" i="0" lang="es-ES">
-                          <a:solidFill>
-                            <a:srgbClr val="263445"/>
-                          </a:solidFill>
-                        </a:rPr>
-                        <a:t>1</a:t>
-                      </a:r>
-                    </a:p>
-                  </a:txBody>
-                  <a:tcPr anchor="ctr" marL="38100" marR="38100" marT="25400" marB="25400">
-                    <a:lnL w="19050" cap="flat" cmpd="sng" algn="ctr">
-                      <a:solidFill>
-                        <a:srgbClr val="FFFFFF"/>
-                      </a:solidFill>
-                      <a:prstDash val="solid"/>
-                    </a:lnL>
-                    <a:lnR w="19050" cap="flat" cmpd="sng" algn="ctr">
-                      <a:solidFill>
-                        <a:srgbClr val="FFFFFF"/>
-                      </a:solidFill>
-                      <a:prstDash val="solid"/>
-                    </a:lnR>
-                    <a:lnT w="31750" cap="flat" cmpd="sng" algn="ctr">
-                      <a:solidFill>
-                        <a:srgbClr val="263445"/>
-                      </a:solidFill>
-                      <a:prstDash val="solid"/>
-                    </a:lnT>
-                    <a:lnB w="19050" cap="flat" cmpd="sng" algn="ctr">
-                      <a:solidFill>
-                        <a:srgbClr val="FFFFFF"/>
-                      </a:solidFill>
-                      <a:prstDash val="solid"/>
-                    </a:lnB>
-                    <a:solidFill>
-                      <a:srgbClr val="FFFFFF"/>
-                    </a:solidFill>
-                  </a:tcPr>
-                </a:tc>
-                <a:tc>
-                  <a:txBody>
-                    <a:bodyPr wrap="square"/>
-                    <a:lstStyle/>
-                    <a:p>
-                      <a:pPr algn="ctr"/>
-                      <a:r>
-                        <a:rPr sz="1600" b="0" i="0" lang="es-ES">
-                          <a:solidFill>
-                            <a:srgbClr val="5E6B78"/>
-                          </a:solidFill>
-                        </a:rPr>
-                        <a:t>[pendiente]</a:t>
-                      </a:r>
-                    </a:p>
-                  </a:txBody>
-                  <a:tcPr anchor="ctr" marL="38100" marR="38100" marT="25400" marB="25400">
-                    <a:lnL w="19050" cap="flat" cmpd="sng" algn="ctr">
-                      <a:solidFill>
-                        <a:srgbClr val="FFFFFF"/>
-                      </a:solidFill>
-                      <a:prstDash val="solid"/>
-                    </a:lnL>
-                    <a:lnR w="19050" cap="flat" cmpd="sng" algn="ctr">
-                      <a:solidFill>
-                        <a:srgbClr val="FFFFFF"/>
-                      </a:solidFill>
-                      <a:prstDash val="solid"/>
-                    </a:lnR>
-                    <a:lnT w="31750" cap="flat" cmpd="sng" algn="ctr">
-                      <a:solidFill>
-                        <a:srgbClr val="263445"/>
-                      </a:solidFill>
-                      <a:prstDash val="solid"/>
-                    </a:lnT>
-                    <a:lnB w="19050" cap="flat" cmpd="sng" algn="ctr">
-                      <a:solidFill>
-                        <a:srgbClr val="FFFFFF"/>
-                      </a:solidFill>
-                      <a:prstDash val="solid"/>
-                    </a:lnB>
-                    <a:solidFill>
-                      <a:srgbClr val="F3F6F9"/>
-                    </a:solidFill>
-                  </a:tcPr>
-                </a:tc>
-                <a:tc>
-                  <a:txBody>
-                    <a:bodyPr wrap="square"/>
-                    <a:lstStyle/>
-                    <a:p>
-                      <a:pPr algn="l"/>
-                      <a:r>
-                        <a:rPr sz="1600" b="0" i="0" lang="es-ES">
-                          <a:solidFill>
-                            <a:srgbClr val="5E6B78"/>
-                          </a:solidFill>
-                        </a:rPr>
-                        <a:t>[pendiente]</a:t>
-                      </a:r>
-                    </a:p>
-                  </a:txBody>
-                  <a:tcPr anchor="ctr" marL="38100" marR="38100" marT="25400" marB="25400">
-                    <a:lnL w="19050" cap="flat" cmpd="sng" algn="ctr">
-                      <a:solidFill>
-                        <a:srgbClr val="FFFFFF"/>
-                      </a:solidFill>
-                      <a:prstDash val="solid"/>
-                    </a:lnL>
-                    <a:lnR w="19050" cap="flat" cmpd="sng" algn="ctr">
-                      <a:solidFill>
-                        <a:srgbClr val="FFFFFF"/>
-                      </a:solidFill>
-                      <a:prstDash val="solid"/>
-                    </a:lnR>
-                    <a:lnT w="31750" cap="flat" cmpd="sng" algn="ctr">
-                      <a:solidFill>
-                        <a:srgbClr val="263445"/>
-                      </a:solidFill>
-                      <a:prstDash val="solid"/>
-                    </a:lnT>
-                    <a:lnB w="19050" cap="flat" cmpd="sng" algn="ctr">
-                      <a:solidFill>
-                        <a:srgbClr val="FFFFFF"/>
-                      </a:solidFill>
-                      <a:prstDash val="solid"/>
-                    </a:lnB>
-                    <a:solidFill>
-                      <a:srgbClr val="F3F6F9"/>
-                    </a:solidFill>
-                  </a:tcPr>
-                </a:tc>
-                <a:tc>
-                  <a:txBody>
-                    <a:bodyPr wrap="square"/>
-                    <a:lstStyle/>
-                    <a:p>
-                      <a:pPr algn="l"/>
-                      <a:r>
-                        <a:rPr sz="1600" b="0" i="0" lang="es-ES">
-                          <a:solidFill>
-                            <a:srgbClr val="5E6B78"/>
-                          </a:solidFill>
-                        </a:rPr>
-                        <a:t>[pendiente]</a:t>
-                      </a:r>
-                    </a:p>
-                  </a:txBody>
-                  <a:tcPr anchor="ctr" marL="38100" marR="38100" marT="25400" marB="25400">
-                    <a:lnL w="19050" cap="flat" cmpd="sng" algn="ctr">
-                      <a:solidFill>
-                        <a:srgbClr val="FFFFFF"/>
-                      </a:solidFill>
-                      <a:prstDash val="solid"/>
-                    </a:lnL>
-                    <a:lnR w="19050" cap="flat" cmpd="sng" algn="ctr">
-                      <a:solidFill>
-                        <a:srgbClr val="FFFFFF"/>
-                      </a:solidFill>
-                      <a:prstDash val="solid"/>
-                    </a:lnR>
-                    <a:lnT w="31750" cap="flat" cmpd="sng" algn="ctr">
-                      <a:solidFill>
-                        <a:srgbClr val="263445"/>
-                      </a:solidFill>
-                      <a:prstDash val="solid"/>
-                    </a:lnT>
-                    <a:lnB w="19050" cap="flat" cmpd="sng" algn="ctr">
-                      <a:solidFill>
-                        <a:srgbClr val="FFFFFF"/>
-                      </a:solidFill>
-                      <a:prstDash val="solid"/>
-                    </a:lnB>
-                    <a:solidFill>
-                      <a:srgbClr val="F3F6F9"/>
-                    </a:solidFill>
-                  </a:tcPr>
-                </a:tc>
-                <a:tc>
-                  <a:txBody>
-                    <a:bodyPr wrap="square"/>
-                    <a:lstStyle/>
-                    <a:p>
-                      <a:pPr algn="l"/>
-                      <a:r>
-                        <a:rPr sz="1600" b="0" i="0" lang="es-ES">
-                          <a:solidFill>
-                            <a:srgbClr val="5E6B78"/>
-                          </a:solidFill>
-                        </a:rPr>
-                        <a:t>[pendiente]</a:t>
-                      </a:r>
-                    </a:p>
-                  </a:txBody>
-                  <a:tcPr anchor="ctr" marL="38100" marR="38100" marT="25400" marB="25400">
-                    <a:lnL w="19050" cap="flat" cmpd="sng" algn="ctr">
-                      <a:solidFill>
-                        <a:srgbClr val="FFFFFF"/>
-                      </a:solidFill>
-                      <a:prstDash val="solid"/>
-                    </a:lnL>
-                    <a:lnR w="19050" cap="flat" cmpd="sng" algn="ctr">
-                      <a:solidFill>
-                        <a:srgbClr val="FFFFFF"/>
-                      </a:solidFill>
-                      <a:prstDash val="solid"/>
-                    </a:lnR>
-                    <a:lnT w="31750" cap="flat" cmpd="sng" algn="ctr">
-                      <a:solidFill>
-                        <a:srgbClr val="263445"/>
-                      </a:solidFill>
-                      <a:prstDash val="solid"/>
-                    </a:lnT>
-                    <a:lnB w="19050" cap="flat" cmpd="sng" algn="ctr">
-                      <a:solidFill>
-                        <a:srgbClr val="FFFFFF"/>
-                      </a:solidFill>
-                      <a:prstDash val="solid"/>
-                    </a:lnB>
-                    <a:solidFill>
-                      <a:srgbClr val="F3F6F9"/>
-                    </a:solidFill>
-                  </a:tcPr>
-                </a:tc>
-              </a:tr>
-              <a:tr h="304800">
-                <a:tc vMerge="1">
-                  <a:txBody>
-                    <a:bodyPr wrap="square"/>
-                    <a:lstStyle/>
-                    <a:p/>
-                  </a:txBody>
-                  <a:tcPr anchor="ctr" marL="38100" marR="38100" marT="25400" marB="25400">
-                    <a:lnL w="19050" cap="flat" cmpd="sng" algn="ctr">
-                      <a:solidFill>
-                        <a:srgbClr val="FFFFFF"/>
-                      </a:solidFill>
-                      <a:prstDash val="solid"/>
-                    </a:lnL>
-                    <a:lnR w="19050" cap="flat" cmpd="sng" algn="ctr">
-                      <a:solidFill>
-                        <a:srgbClr val="FFFFFF"/>
-                      </a:solidFill>
-                      <a:prstDash val="solid"/>
-                    </a:lnR>
-                    <a:lnT w="19050" cap="flat" cmpd="sng" algn="ctr">
-                      <a:solidFill>
-                        <a:srgbClr val="FFFFFF"/>
-                      </a:solidFill>
-                      <a:prstDash val="solid"/>
-                    </a:lnT>
-                    <a:lnB w="19050" cap="flat" cmpd="sng" algn="ctr">
-                      <a:solidFill>
-                        <a:srgbClr val="FFFFFF"/>
-                      </a:solidFill>
-                      <a:prstDash val="solid"/>
-                    </a:lnB>
-                    <a:solidFill>
-                      <a:srgbClr val="FFFFFF"/>
-                    </a:solidFill>
-                  </a:tcPr>
-                </a:tc>
-                <a:tc>
-                  <a:txBody>
-                    <a:bodyPr wrap="square"/>
-                    <a:lstStyle/>
-                    <a:p>
-                      <a:pPr algn="ctr"/>
-                      <a:r>
-                        <a:rPr sz="1600" b="0" i="0" lang="es-ES">
-                          <a:solidFill>
-                            <a:srgbClr val="263445"/>
-                          </a:solidFill>
-                        </a:rPr>
-                        <a:t>2</a:t>
-                      </a:r>
-                    </a:p>
-                  </a:txBody>
-                  <a:tcPr anchor="ctr" marL="38100" marR="38100" marT="25400" marB="25400">
-                    <a:lnL w="19050" cap="flat" cmpd="sng" algn="ctr">
-                      <a:solidFill>
-                        <a:srgbClr val="FFFFFF"/>
-                      </a:solidFill>
-                      <a:prstDash val="solid"/>
-                    </a:lnL>
-                    <a:lnR w="19050" cap="flat" cmpd="sng" algn="ctr">
-                      <a:solidFill>
-                        <a:srgbClr val="FFFFFF"/>
-                      </a:solidFill>
-                      <a:prstDash val="solid"/>
-                    </a:lnR>
-                    <a:lnT w="19050" cap="flat" cmpd="sng" algn="ctr">
-                      <a:solidFill>
-                        <a:srgbClr val="FFFFFF"/>
-                      </a:solidFill>
-                      <a:prstDash val="solid"/>
-                    </a:lnT>
-                    <a:lnB w="19050" cap="flat" cmpd="sng" algn="ctr">
-                      <a:solidFill>
-                        <a:srgbClr val="FFFFFF"/>
-                      </a:solidFill>
-                      <a:prstDash val="solid"/>
-                    </a:lnB>
-                    <a:solidFill>
-                      <a:srgbClr val="FFFFFF"/>
-                    </a:solidFill>
-                  </a:tcPr>
-                </a:tc>
-                <a:tc>
-                  <a:txBody>
-                    <a:bodyPr wrap="square"/>
-                    <a:lstStyle/>
-                    <a:p>
-                      <a:pPr algn="ctr"/>
-                      <a:r>
-                        <a:rPr sz="1600" b="0" i="0" lang="es-ES">
-                          <a:solidFill>
-                            <a:srgbClr val="5E6B78"/>
-                          </a:solidFill>
-                        </a:rPr>
-                        <a:t>[pendiente]</a:t>
-                      </a:r>
-                    </a:p>
-                  </a:txBody>
-                  <a:tcPr anchor="ctr" marL="38100" marR="38100" marT="25400" marB="25400">
-                    <a:lnL w="19050" cap="flat" cmpd="sng" algn="ctr">
-                      <a:solidFill>
-                        <a:srgbClr val="FFFFFF"/>
-                      </a:solidFill>
-                      <a:prstDash val="solid"/>
-                    </a:lnL>
-                    <a:lnR w="19050" cap="flat" cmpd="sng" algn="ctr">
-                      <a:solidFill>
-                        <a:srgbClr val="FFFFFF"/>
-                      </a:solidFill>
-                      <a:prstDash val="solid"/>
-                    </a:lnR>
-                    <a:lnT w="19050" cap="flat" cmpd="sng" algn="ctr">
-                      <a:solidFill>
-                        <a:srgbClr val="FFFFFF"/>
-                      </a:solidFill>
-                      <a:prstDash val="solid"/>
-                    </a:lnT>
-                    <a:lnB w="19050" cap="flat" cmpd="sng" algn="ctr">
-                      <a:solidFill>
-                        <a:srgbClr val="FFFFFF"/>
-                      </a:solidFill>
-                      <a:prstDash val="solid"/>
-                    </a:lnB>
-                    <a:solidFill>
-                      <a:srgbClr val="F3F6F9"/>
-                    </a:solidFill>
-                  </a:tcPr>
-                </a:tc>
-                <a:tc>
-                  <a:txBody>
-                    <a:bodyPr wrap="square"/>
-                    <a:lstStyle/>
-                    <a:p>
-                      <a:pPr algn="l"/>
-                      <a:r>
-                        <a:rPr sz="1600" b="0" i="0" lang="es-ES">
-                          <a:solidFill>
-                            <a:srgbClr val="5E6B78"/>
-                          </a:solidFill>
-                        </a:rPr>
-                        <a:t>[pendiente]</a:t>
-                      </a:r>
-                    </a:p>
-                  </a:txBody>
-                  <a:tcPr anchor="ctr" marL="38100" marR="38100" marT="25400" marB="25400">
-                    <a:lnL w="19050" cap="flat" cmpd="sng" algn="ctr">
-                      <a:solidFill>
-                        <a:srgbClr val="FFFFFF"/>
-                      </a:solidFill>
-                      <a:prstDash val="solid"/>
-                    </a:lnL>
-                    <a:lnR w="19050" cap="flat" cmpd="sng" algn="ctr">
-                      <a:solidFill>
-                        <a:srgbClr val="FFFFFF"/>
-                      </a:solidFill>
-                      <a:prstDash val="solid"/>
-                    </a:lnR>
-                    <a:lnT w="19050" cap="flat" cmpd="sng" algn="ctr">
-                      <a:solidFill>
-                        <a:srgbClr val="FFFFFF"/>
-                      </a:solidFill>
-                      <a:prstDash val="solid"/>
-                    </a:lnT>
-                    <a:lnB w="19050" cap="flat" cmpd="sng" algn="ctr">
-                      <a:solidFill>
-                        <a:srgbClr val="FFFFFF"/>
-                      </a:solidFill>
-                      <a:prstDash val="solid"/>
-                    </a:lnB>
-                    <a:solidFill>
-                      <a:srgbClr val="F3F6F9"/>
-                    </a:solidFill>
-                  </a:tcPr>
-                </a:tc>
-                <a:tc>
-                  <a:txBody>
-                    <a:bodyPr wrap="square"/>
-                    <a:lstStyle/>
-                    <a:p>
-                      <a:pPr algn="l"/>
-                      <a:r>
-                        <a:rPr sz="1600" b="0" i="0" lang="es-ES">
-                          <a:solidFill>
-                            <a:srgbClr val="5E6B78"/>
-                          </a:solidFill>
-                        </a:rPr>
-                        <a:t>[pendiente]</a:t>
-                      </a:r>
-                    </a:p>
-                  </a:txBody>
-                  <a:tcPr anchor="ctr" marL="38100" marR="38100" marT="25400" marB="25400">
-                    <a:lnL w="19050" cap="flat" cmpd="sng" algn="ctr">
-                      <a:solidFill>
-                        <a:srgbClr val="FFFFFF"/>
-                      </a:solidFill>
-                      <a:prstDash val="solid"/>
-                    </a:lnL>
-                    <a:lnR w="19050" cap="flat" cmpd="sng" algn="ctr">
-                      <a:solidFill>
-                        <a:srgbClr val="FFFFFF"/>
-                      </a:solidFill>
-                      <a:prstDash val="solid"/>
-                    </a:lnR>
-                    <a:lnT w="19050" cap="flat" cmpd="sng" algn="ctr">
-                      <a:solidFill>
-                        <a:srgbClr val="FFFFFF"/>
-                      </a:solidFill>
-                      <a:prstDash val="solid"/>
-                    </a:lnT>
-                    <a:lnB w="19050" cap="flat" cmpd="sng" algn="ctr">
-                      <a:solidFill>
-                        <a:srgbClr val="FFFFFF"/>
-                      </a:solidFill>
-                      <a:prstDash val="solid"/>
-                    </a:lnB>
-                    <a:solidFill>
-                      <a:srgbClr val="F3F6F9"/>
-                    </a:solidFill>
-                  </a:tcPr>
-                </a:tc>
-                <a:tc>
-                  <a:txBody>
-                    <a:bodyPr wrap="square"/>
-                    <a:lstStyle/>
-                    <a:p>
-                      <a:pPr algn="l"/>
-                      <a:r>
-                        <a:rPr sz="1600" b="0" i="0" lang="es-ES">
-                          <a:solidFill>
-                            <a:srgbClr val="5E6B78"/>
-                          </a:solidFill>
-                        </a:rPr>
-                        <a:t>[pendiente]</a:t>
-                      </a:r>
-                    </a:p>
-                  </a:txBody>
-                  <a:tcPr anchor="ctr" marL="38100" marR="38100" marT="25400" marB="25400">
-                    <a:lnL w="19050" cap="flat" cmpd="sng" algn="ctr">
-                      <a:solidFill>
-                        <a:srgbClr val="FFFFFF"/>
-                      </a:solidFill>
-                      <a:prstDash val="solid"/>
-                    </a:lnL>
-                    <a:lnR w="19050" cap="flat" cmpd="sng" algn="ctr">
-                      <a:solidFill>
-                        <a:srgbClr val="FFFFFF"/>
-                      </a:solidFill>
-                      <a:prstDash val="solid"/>
-                    </a:lnR>
-                    <a:lnT w="19050" cap="flat" cmpd="sng" algn="ctr">
-                      <a:solidFill>
-                        <a:srgbClr val="FFFFFF"/>
-                      </a:solidFill>
-                      <a:prstDash val="solid"/>
-                    </a:lnT>
-                    <a:lnB w="19050" cap="flat" cmpd="sng" algn="ctr">
-                      <a:solidFill>
-                        <a:srgbClr val="FFFFFF"/>
-                      </a:solidFill>
-                      <a:prstDash val="solid"/>
-                    </a:lnB>
-                    <a:solidFill>
-                      <a:srgbClr val="F3F6F9"/>
-                    </a:solidFill>
-                  </a:tcPr>
-                </a:tc>
-              </a:tr>
-              <a:tr h="304800">
-                <a:tc vMerge="1">
-                  <a:txBody>
-                    <a:bodyPr wrap="square"/>
-                    <a:lstStyle/>
-                    <a:p/>
-                  </a:txBody>
-                  <a:tcPr anchor="ctr" marL="38100" marR="38100" marT="25400" marB="25400">
-                    <a:lnL w="19050" cap="flat" cmpd="sng" algn="ctr">
-                      <a:solidFill>
-                        <a:srgbClr val="FFFFFF"/>
-                      </a:solidFill>
-                      <a:prstDash val="solid"/>
-                    </a:lnL>
-                    <a:lnR w="19050" cap="flat" cmpd="sng" algn="ctr">
-                      <a:solidFill>
-                        <a:srgbClr val="FFFFFF"/>
-                      </a:solidFill>
-                      <a:prstDash val="solid"/>
-                    </a:lnR>
-                    <a:lnT w="19050" cap="flat" cmpd="sng" algn="ctr">
-                      <a:solidFill>
-                        <a:srgbClr val="FFFFFF"/>
-                      </a:solidFill>
-                      <a:prstDash val="solid"/>
-                    </a:lnT>
-                    <a:lnB w="19050" cap="flat" cmpd="sng" algn="ctr">
-                      <a:solidFill>
-                        <a:srgbClr val="FFFFFF"/>
-                      </a:solidFill>
-                      <a:prstDash val="solid"/>
-                    </a:lnB>
-                    <a:solidFill>
-                      <a:srgbClr val="FFFFFF"/>
-                    </a:solidFill>
-                  </a:tcPr>
-                </a:tc>
-                <a:tc>
-                  <a:txBody>
-                    <a:bodyPr wrap="square"/>
-                    <a:lstStyle/>
-                    <a:p>
-                      <a:pPr algn="ctr"/>
-                      <a:r>
-                        <a:rPr sz="1600" b="0" i="0" lang="es-ES">
-                          <a:solidFill>
-                            <a:srgbClr val="263445"/>
-                          </a:solidFill>
-                        </a:rPr>
-                        <a:t>3</a:t>
-                      </a:r>
-                    </a:p>
-                  </a:txBody>
-                  <a:tcPr anchor="ctr" marL="38100" marR="38100" marT="25400" marB="25400">
-                    <a:lnL w="19050" cap="flat" cmpd="sng" algn="ctr">
-                      <a:solidFill>
-                        <a:srgbClr val="FFFFFF"/>
-                      </a:solidFill>
-                      <a:prstDash val="solid"/>
-                    </a:lnL>
-                    <a:lnR w="19050" cap="flat" cmpd="sng" algn="ctr">
-                      <a:solidFill>
-                        <a:srgbClr val="FFFFFF"/>
-                      </a:solidFill>
-                      <a:prstDash val="solid"/>
-                    </a:lnR>
-                    <a:lnT w="19050" cap="flat" cmpd="sng" algn="ctr">
-                      <a:solidFill>
-                        <a:srgbClr val="FFFFFF"/>
-                      </a:solidFill>
-                      <a:prstDash val="solid"/>
-                    </a:lnT>
-                    <a:lnB w="19050" cap="flat" cmpd="sng" algn="ctr">
-                      <a:solidFill>
-                        <a:srgbClr val="FFFFFF"/>
-                      </a:solidFill>
-                      <a:prstDash val="solid"/>
-                    </a:lnB>
-                    <a:solidFill>
-                      <a:srgbClr val="FFFFFF"/>
-                    </a:solidFill>
-                  </a:tcPr>
-                </a:tc>
-                <a:tc>
-                  <a:txBody>
-                    <a:bodyPr wrap="square"/>
-                    <a:lstStyle/>
-                    <a:p>
-                      <a:pPr algn="ctr"/>
-                      <a:r>
-                        <a:rPr sz="1600" b="0" i="0" lang="es-ES">
-                          <a:solidFill>
-                            <a:srgbClr val="5E6B78"/>
-                          </a:solidFill>
-                        </a:rPr>
-                        <a:t>[pendiente]</a:t>
-                      </a:r>
-                    </a:p>
-                  </a:txBody>
-                  <a:tcPr anchor="ctr" marL="38100" marR="38100" marT="25400" marB="25400">
-                    <a:lnL w="19050" cap="flat" cmpd="sng" algn="ctr">
-                      <a:solidFill>
-                        <a:srgbClr val="FFFFFF"/>
-                      </a:solidFill>
-                      <a:prstDash val="solid"/>
-                    </a:lnL>
-                    <a:lnR w="19050" cap="flat" cmpd="sng" algn="ctr">
-                      <a:solidFill>
-                        <a:srgbClr val="FFFFFF"/>
-                      </a:solidFill>
-                      <a:prstDash val="solid"/>
-                    </a:lnR>
-                    <a:lnT w="19050" cap="flat" cmpd="sng" algn="ctr">
-                      <a:solidFill>
-                        <a:srgbClr val="FFFFFF"/>
-                      </a:solidFill>
-                      <a:prstDash val="solid"/>
-                    </a:lnT>
-                    <a:lnB w="19050" cap="flat" cmpd="sng" algn="ctr">
-                      <a:solidFill>
-                        <a:srgbClr val="FFFFFF"/>
-                      </a:solidFill>
-                      <a:prstDash val="solid"/>
-                    </a:lnB>
-                    <a:solidFill>
-                      <a:srgbClr val="F3F6F9"/>
-                    </a:solidFill>
-                  </a:tcPr>
-                </a:tc>
-                <a:tc>
-                  <a:txBody>
-                    <a:bodyPr wrap="square"/>
-                    <a:lstStyle/>
-                    <a:p>
-                      <a:pPr algn="l"/>
-                      <a:r>
-                        <a:rPr sz="1600" b="0" i="0" lang="es-ES">
-                          <a:solidFill>
-                            <a:srgbClr val="5E6B78"/>
-                          </a:solidFill>
-                        </a:rPr>
-                        <a:t>[pendiente]</a:t>
-                      </a:r>
-                    </a:p>
-                  </a:txBody>
-                  <a:tcPr anchor="ctr" marL="38100" marR="38100" marT="25400" marB="25400">
-                    <a:lnL w="19050" cap="flat" cmpd="sng" algn="ctr">
-                      <a:solidFill>
-                        <a:srgbClr val="FFFFFF"/>
-                      </a:solidFill>
-                      <a:prstDash val="solid"/>
-                    </a:lnL>
-                    <a:lnR w="19050" cap="flat" cmpd="sng" algn="ctr">
-                      <a:solidFill>
-                        <a:srgbClr val="FFFFFF"/>
-                      </a:solidFill>
-                      <a:prstDash val="solid"/>
-                    </a:lnR>
-                    <a:lnT w="19050" cap="flat" cmpd="sng" algn="ctr">
-                      <a:solidFill>
-                        <a:srgbClr val="FFFFFF"/>
-                      </a:solidFill>
-                      <a:prstDash val="solid"/>
-                    </a:lnT>
-                    <a:lnB w="19050" cap="flat" cmpd="sng" algn="ctr">
-                      <a:solidFill>
-                        <a:srgbClr val="FFFFFF"/>
-                      </a:solidFill>
-                      <a:prstDash val="solid"/>
-                    </a:lnB>
-                    <a:solidFill>
-                      <a:srgbClr val="F3F6F9"/>
-                    </a:solidFill>
-                  </a:tcPr>
-                </a:tc>
-                <a:tc>
-                  <a:txBody>
-                    <a:bodyPr wrap="square"/>
-                    <a:lstStyle/>
-                    <a:p>
-                      <a:pPr algn="l"/>
-                      <a:r>
-                        <a:rPr sz="1600" b="0" i="0" lang="es-ES">
-                          <a:solidFill>
-                            <a:srgbClr val="5E6B78"/>
-                          </a:solidFill>
-                        </a:rPr>
-                        <a:t>[pendiente]</a:t>
-                      </a:r>
-                    </a:p>
-                  </a:txBody>
-                  <a:tcPr anchor="ctr" marL="38100" marR="38100" marT="25400" marB="25400">
-                    <a:lnL w="19050" cap="flat" cmpd="sng" algn="ctr">
-                      <a:solidFill>
-                        <a:srgbClr val="FFFFFF"/>
-                      </a:solidFill>
-                      <a:prstDash val="solid"/>
-                    </a:lnL>
-                    <a:lnR w="19050" cap="flat" cmpd="sng" algn="ctr">
-                      <a:solidFill>
-                        <a:srgbClr val="FFFFFF"/>
-                      </a:solidFill>
-                      <a:prstDash val="solid"/>
-                    </a:lnR>
-                    <a:lnT w="19050" cap="flat" cmpd="sng" algn="ctr">
-                      <a:solidFill>
-                        <a:srgbClr val="FFFFFF"/>
-                      </a:solidFill>
-                      <a:prstDash val="solid"/>
-                    </a:lnT>
-                    <a:lnB w="19050" cap="flat" cmpd="sng" algn="ctr">
-                      <a:solidFill>
-                        <a:srgbClr val="FFFFFF"/>
-                      </a:solidFill>
-                      <a:prstDash val="solid"/>
-                    </a:lnB>
-                    <a:solidFill>
-                      <a:srgbClr val="F3F6F9"/>
-                    </a:solidFill>
-                  </a:tcPr>
-                </a:tc>
-                <a:tc>
-                  <a:txBody>
-                    <a:bodyPr wrap="square"/>
-                    <a:lstStyle/>
-                    <a:p>
-                      <a:pPr algn="l"/>
-                      <a:r>
-                        <a:rPr sz="1600" b="0" i="0" lang="es-ES">
-                          <a:solidFill>
-                            <a:srgbClr val="5E6B78"/>
-                          </a:solidFill>
-                        </a:rPr>
-                        <a:t>[pendiente]</a:t>
-                      </a:r>
-                    </a:p>
-                  </a:txBody>
-                  <a:tcPr anchor="ctr" marL="38100" marR="38100" marT="25400" marB="25400">
-                    <a:lnL w="19050" cap="flat" cmpd="sng" algn="ctr">
-                      <a:solidFill>
-                        <a:srgbClr val="FFFFFF"/>
-                      </a:solidFill>
-                      <a:prstDash val="solid"/>
-                    </a:lnL>
-                    <a:lnR w="19050" cap="flat" cmpd="sng" algn="ctr">
-                      <a:solidFill>
-                        <a:srgbClr val="FFFFFF"/>
-                      </a:solidFill>
-                      <a:prstDash val="solid"/>
-                    </a:lnR>
-                    <a:lnT w="19050" cap="flat" cmpd="sng" algn="ctr">
-                      <a:solidFill>
-                        <a:srgbClr val="FFFFFF"/>
-                      </a:solidFill>
-                      <a:prstDash val="solid"/>
-                    </a:lnT>
-                    <a:lnB w="19050" cap="flat" cmpd="sng" algn="ctr">
-                      <a:solidFill>
-                        <a:srgbClr val="FFFFFF"/>
-                      </a:solidFill>
-                      <a:prstDash val="solid"/>
-                    </a:lnB>
-                    <a:solidFill>
-                      <a:srgbClr val="F3F6F9"/>
-                    </a:solidFill>
-                  </a:tcPr>
-                </a:tc>
-              </a:tr>
-            </a:tbl>
-          </a:graphicData>
-        </a:graphic>
-      </p:graphicFrame>
-      <p:sp>
-        <p:nvSpPr>
-          <p:cNvPr id="7" name="Franja"/>
-          <p:cNvSpPr/>
-          <p:nvPr/>
-        </p:nvSpPr>
-        <p:spPr>
-          <a:xfrm>
-            <a:off x="508000" y="5676900"/>
-            <a:ext cx="11176000" cy="444500"/>
-          </a:xfrm>
-          <a:prstGeom prst="roundRect">
-            <a:avLst>
-              <a:gd name="adj" fmla="val 22857"/>
-            </a:avLst>
-          </a:prstGeom>
-          <a:solidFill>
-            <a:srgbClr val="263445"/>
-          </a:solidFill>
-          <a:ln>
-            <a:noFill/>
-          </a:ln>
-        </p:spPr>
-        <p:txBody>
-          <a:bodyPr rtlCol="0" anchor="ctr" wrap="square" lIns="101600" tIns="0" rIns="101600" bIns="0">
-            <a:noAutofit/>
-          </a:bodyPr>
-          <a:lstStyle/>
-          <a:p>
-            <a:pPr algn="ctr"/>
-            <a:r>
-              <a:rPr sz="2200" b="1" i="0" lang="es-ES">
-                <a:solidFill>
-                  <a:srgbClr val="FFFFFF"/>
-                </a:solidFill>
-              </a:rPr>
-              <a:t>Dosis recomendada: 750 mg/12 h en las 9 respuestas · lo que cambia es el juicio que la rodea</a:t>
-            </a:r>
-          </a:p>
-        </p:txBody>
-      </p:sp>
-      <p:sp>
-        <p:nvSpPr>
-          <p:cNvPr id="8" name="Fuente"/>
+            <a:pPr algn="r">
+              <a:lnSpc>
+                <a:spcPct val="80000"/>
+              </a:lnSpc>
+            </a:pPr>
+            <a:r>
+              <a:rPr sz="7200" b="1" i="0" lang="es-ES">
+                <a:solidFill>
+                  <a:srgbClr val="2B7D3D"/>
+                </a:solidFill>
+              </a:rPr>
+              <a:t>8/9</a:t>
+            </a:r>
+          </a:p>
+        </p:txBody>
+      </p:sp>
+      <p:sp>
+        <p:nvSpPr>
+          <p:cNvPr id="18" name="Texto 2"/>
           <p:cNvSpPr txBox="1"/>
           <p:nvPr/>
         </p:nvSpPr>
         <p:spPr>
           <a:xfrm>
-            <a:off x="508000" y="6337300"/>
-            <a:ext cx="11176000" cy="241300"/>
+            <a:off x="6024118" y="2838450"/>
+            <a:ext cx="5660136" cy="342900"/>
           </a:xfrm>
           <a:prstGeom prst="rect">
             <a:avLst/>
@@ -4615,6 +2185,1067 @@
           </a:bodyPr>
           <a:lstStyle/>
           <a:p>
+            <a:pPr algn="l">
+              <a:lnSpc>
+                <a:spcPct val="95000"/>
+              </a:lnSpc>
+            </a:pPr>
+            <a:r>
+              <a:rPr sz="2200" b="0" i="0" lang="es-ES">
+                <a:solidFill>
+                  <a:srgbClr val="263445"/>
+                </a:solidFill>
+              </a:rPr>
+              <a:t>AUC</a:t>
+            </a:r>
+            <a:r>
+              <a:rPr sz="2200" b="0" i="0" lang="es-ES" baseline="-25000">
+                <a:solidFill>
+                  <a:srgbClr val="263445"/>
+                </a:solidFill>
+              </a:rPr>
+              <a:t>24</a:t>
+            </a:r>
+            <a:r>
+              <a:rPr sz="2200" b="0" i="0" lang="es-ES">
+                <a:solidFill>
+                  <a:srgbClr val="263445"/>
+                </a:solidFill>
+              </a:rPr>
+              <a:t> actual correcto</a:t>
+            </a:r>
+          </a:p>
+        </p:txBody>
+      </p:sp>
+      <p:sp>
+        <p:nvSpPr>
+          <p:cNvPr id="19" name="Segmento 2.1"/>
+          <p:cNvSpPr/>
+          <p:nvPr/>
+        </p:nvSpPr>
+        <p:spPr>
+          <a:xfrm>
+            <a:off x="6024118" y="3270250"/>
+            <a:ext cx="572460" cy="165100"/>
+          </a:xfrm>
+          <a:prstGeom prst="roundRect">
+            <a:avLst>
+              <a:gd name="adj" fmla="val 23076"/>
+            </a:avLst>
+          </a:prstGeom>
+          <a:solidFill>
+            <a:srgbClr val="5BB46C"/>
+          </a:solidFill>
+          <a:ln>
+            <a:noFill/>
+          </a:ln>
+        </p:spPr>
+        <p:txBody>
+          <a:bodyPr rtlCol="0" anchor="ctr"/>
+          <a:lstStyle/>
+          <a:p>
+            <a:pPr algn="ctr"/>
+          </a:p>
+        </p:txBody>
+      </p:sp>
+      <p:sp>
+        <p:nvSpPr>
+          <p:cNvPr id="20" name="Segmento 2.2"/>
+          <p:cNvSpPr/>
+          <p:nvPr/>
+        </p:nvSpPr>
+        <p:spPr>
+          <a:xfrm>
+            <a:off x="6660078" y="3270250"/>
+            <a:ext cx="572460" cy="165100"/>
+          </a:xfrm>
+          <a:prstGeom prst="roundRect">
+            <a:avLst>
+              <a:gd name="adj" fmla="val 23076"/>
+            </a:avLst>
+          </a:prstGeom>
+          <a:solidFill>
+            <a:srgbClr val="5BB46C"/>
+          </a:solidFill>
+          <a:ln>
+            <a:noFill/>
+          </a:ln>
+        </p:spPr>
+        <p:txBody>
+          <a:bodyPr rtlCol="0" anchor="ctr"/>
+          <a:lstStyle/>
+          <a:p>
+            <a:pPr algn="ctr"/>
+          </a:p>
+        </p:txBody>
+      </p:sp>
+      <p:sp>
+        <p:nvSpPr>
+          <p:cNvPr id="21" name="Segmento 2.3"/>
+          <p:cNvSpPr/>
+          <p:nvPr/>
+        </p:nvSpPr>
+        <p:spPr>
+          <a:xfrm>
+            <a:off x="7296037" y="3270250"/>
+            <a:ext cx="572460" cy="165100"/>
+          </a:xfrm>
+          <a:prstGeom prst="roundRect">
+            <a:avLst>
+              <a:gd name="adj" fmla="val 23076"/>
+            </a:avLst>
+          </a:prstGeom>
+          <a:solidFill>
+            <a:srgbClr val="5BB46C"/>
+          </a:solidFill>
+          <a:ln>
+            <a:noFill/>
+          </a:ln>
+        </p:spPr>
+        <p:txBody>
+          <a:bodyPr rtlCol="0" anchor="ctr"/>
+          <a:lstStyle/>
+          <a:p>
+            <a:pPr algn="ctr"/>
+          </a:p>
+        </p:txBody>
+      </p:sp>
+      <p:sp>
+        <p:nvSpPr>
+          <p:cNvPr id="22" name="Segmento 2.4"/>
+          <p:cNvSpPr/>
+          <p:nvPr/>
+        </p:nvSpPr>
+        <p:spPr>
+          <a:xfrm>
+            <a:off x="7931997" y="3270250"/>
+            <a:ext cx="572460" cy="165100"/>
+          </a:xfrm>
+          <a:prstGeom prst="roundRect">
+            <a:avLst>
+              <a:gd name="adj" fmla="val 23076"/>
+            </a:avLst>
+          </a:prstGeom>
+          <a:solidFill>
+            <a:srgbClr val="5BB46C"/>
+          </a:solidFill>
+          <a:ln>
+            <a:noFill/>
+          </a:ln>
+        </p:spPr>
+        <p:txBody>
+          <a:bodyPr rtlCol="0" anchor="ctr"/>
+          <a:lstStyle/>
+          <a:p>
+            <a:pPr algn="ctr"/>
+          </a:p>
+        </p:txBody>
+      </p:sp>
+      <p:sp>
+        <p:nvSpPr>
+          <p:cNvPr id="23" name="Segmento 2.5"/>
+          <p:cNvSpPr/>
+          <p:nvPr/>
+        </p:nvSpPr>
+        <p:spPr>
+          <a:xfrm>
+            <a:off x="8567956" y="3270250"/>
+            <a:ext cx="572460" cy="165100"/>
+          </a:xfrm>
+          <a:prstGeom prst="roundRect">
+            <a:avLst>
+              <a:gd name="adj" fmla="val 23076"/>
+            </a:avLst>
+          </a:prstGeom>
+          <a:solidFill>
+            <a:srgbClr val="5BB46C"/>
+          </a:solidFill>
+          <a:ln>
+            <a:noFill/>
+          </a:ln>
+        </p:spPr>
+        <p:txBody>
+          <a:bodyPr rtlCol="0" anchor="ctr"/>
+          <a:lstStyle/>
+          <a:p>
+            <a:pPr algn="ctr"/>
+          </a:p>
+        </p:txBody>
+      </p:sp>
+      <p:sp>
+        <p:nvSpPr>
+          <p:cNvPr id="24" name="Segmento 2.6"/>
+          <p:cNvSpPr/>
+          <p:nvPr/>
+        </p:nvSpPr>
+        <p:spPr>
+          <a:xfrm>
+            <a:off x="9203916" y="3270250"/>
+            <a:ext cx="572460" cy="165100"/>
+          </a:xfrm>
+          <a:prstGeom prst="roundRect">
+            <a:avLst>
+              <a:gd name="adj" fmla="val 23076"/>
+            </a:avLst>
+          </a:prstGeom>
+          <a:solidFill>
+            <a:srgbClr val="5BB46C"/>
+          </a:solidFill>
+          <a:ln>
+            <a:noFill/>
+          </a:ln>
+        </p:spPr>
+        <p:txBody>
+          <a:bodyPr rtlCol="0" anchor="ctr"/>
+          <a:lstStyle/>
+          <a:p>
+            <a:pPr algn="ctr"/>
+          </a:p>
+        </p:txBody>
+      </p:sp>
+      <p:sp>
+        <p:nvSpPr>
+          <p:cNvPr id="25" name="Segmento 2.7"/>
+          <p:cNvSpPr/>
+          <p:nvPr/>
+        </p:nvSpPr>
+        <p:spPr>
+          <a:xfrm>
+            <a:off x="9839875" y="3270250"/>
+            <a:ext cx="572460" cy="165100"/>
+          </a:xfrm>
+          <a:prstGeom prst="roundRect">
+            <a:avLst>
+              <a:gd name="adj" fmla="val 23076"/>
+            </a:avLst>
+          </a:prstGeom>
+          <a:solidFill>
+            <a:srgbClr val="5BB46C"/>
+          </a:solidFill>
+          <a:ln>
+            <a:noFill/>
+          </a:ln>
+        </p:spPr>
+        <p:txBody>
+          <a:bodyPr rtlCol="0" anchor="ctr"/>
+          <a:lstStyle/>
+          <a:p>
+            <a:pPr algn="ctr"/>
+          </a:p>
+        </p:txBody>
+      </p:sp>
+      <p:sp>
+        <p:nvSpPr>
+          <p:cNvPr id="26" name="Segmento 2.8"/>
+          <p:cNvSpPr/>
+          <p:nvPr/>
+        </p:nvSpPr>
+        <p:spPr>
+          <a:xfrm>
+            <a:off x="10475835" y="3270250"/>
+            <a:ext cx="572460" cy="165100"/>
+          </a:xfrm>
+          <a:prstGeom prst="roundRect">
+            <a:avLst>
+              <a:gd name="adj" fmla="val 23076"/>
+            </a:avLst>
+          </a:prstGeom>
+          <a:solidFill>
+            <a:srgbClr val="5BB46C"/>
+          </a:solidFill>
+          <a:ln>
+            <a:noFill/>
+          </a:ln>
+        </p:spPr>
+        <p:txBody>
+          <a:bodyPr rtlCol="0" anchor="ctr"/>
+          <a:lstStyle/>
+          <a:p>
+            <a:pPr algn="ctr"/>
+          </a:p>
+        </p:txBody>
+      </p:sp>
+      <p:sp>
+        <p:nvSpPr>
+          <p:cNvPr id="27" name="Segmento 2.9"/>
+          <p:cNvSpPr/>
+          <p:nvPr/>
+        </p:nvSpPr>
+        <p:spPr>
+          <a:xfrm>
+            <a:off x="11111794" y="3270250"/>
+            <a:ext cx="572460" cy="165100"/>
+          </a:xfrm>
+          <a:prstGeom prst="roundRect">
+            <a:avLst>
+              <a:gd name="adj" fmla="val 23076"/>
+            </a:avLst>
+          </a:prstGeom>
+          <a:solidFill>
+            <a:srgbClr val="FFFFFF"/>
+          </a:solidFill>
+          <a:ln w="19050">
+            <a:solidFill>
+              <a:srgbClr val="C9D2DB"/>
+            </a:solidFill>
+          </a:ln>
+        </p:spPr>
+        <p:txBody>
+          <a:bodyPr rtlCol="0" anchor="ctr"/>
+          <a:lstStyle/>
+          <a:p>
+            <a:pPr algn="ctr"/>
+          </a:p>
+        </p:txBody>
+      </p:sp>
+      <p:sp>
+        <p:nvSpPr>
+          <p:cNvPr id="28" name="Cifra 3"/>
+          <p:cNvSpPr txBox="1"/>
+          <p:nvPr/>
+        </p:nvSpPr>
+        <p:spPr>
+          <a:xfrm>
+            <a:off x="4284218" y="3632200"/>
+            <a:ext cx="1587500" cy="990600"/>
+          </a:xfrm>
+          <a:prstGeom prst="rect">
+            <a:avLst/>
+          </a:prstGeom>
+          <a:noFill/>
+        </p:spPr>
+        <p:txBody>
+          <a:bodyPr wrap="square" lIns="0" tIns="0" rIns="0" bIns="0" anchor="ctr">
+            <a:noAutofit/>
+          </a:bodyPr>
+          <a:lstStyle/>
+          <a:p>
+            <a:pPr algn="r">
+              <a:lnSpc>
+                <a:spcPct val="80000"/>
+              </a:lnSpc>
+            </a:pPr>
+            <a:r>
+              <a:rPr sz="7200" b="1" i="0" lang="es-ES">
+                <a:solidFill>
+                  <a:srgbClr val="2B7D3D"/>
+                </a:solidFill>
+              </a:rPr>
+              <a:t>7/9</a:t>
+            </a:r>
+          </a:p>
+        </p:txBody>
+      </p:sp>
+      <p:sp>
+        <p:nvSpPr>
+          <p:cNvPr id="29" name="Texto 3"/>
+          <p:cNvSpPr txBox="1"/>
+          <p:nvPr/>
+        </p:nvSpPr>
+        <p:spPr>
+          <a:xfrm>
+            <a:off x="6024118" y="3829050"/>
+            <a:ext cx="5660136" cy="342900"/>
+          </a:xfrm>
+          <a:prstGeom prst="rect">
+            <a:avLst/>
+          </a:prstGeom>
+          <a:noFill/>
+        </p:spPr>
+        <p:txBody>
+          <a:bodyPr wrap="square" lIns="0" tIns="0" rIns="0" bIns="0" anchor="b">
+            <a:noAutofit/>
+          </a:bodyPr>
+          <a:lstStyle/>
+          <a:p>
+            <a:pPr algn="l">
+              <a:lnSpc>
+                <a:spcPct val="95000"/>
+              </a:lnSpc>
+            </a:pPr>
+            <a:r>
+              <a:rPr sz="2200" b="0" i="0" lang="es-ES">
+                <a:solidFill>
+                  <a:srgbClr val="263445"/>
+                </a:solidFill>
+              </a:rPr>
+              <a:t>no omitieron la dosis de las 20:00</a:t>
+            </a:r>
+          </a:p>
+        </p:txBody>
+      </p:sp>
+      <p:sp>
+        <p:nvSpPr>
+          <p:cNvPr id="30" name="Segmento 3.1"/>
+          <p:cNvSpPr/>
+          <p:nvPr/>
+        </p:nvSpPr>
+        <p:spPr>
+          <a:xfrm>
+            <a:off x="6024118" y="4260850"/>
+            <a:ext cx="572460" cy="165100"/>
+          </a:xfrm>
+          <a:prstGeom prst="roundRect">
+            <a:avLst>
+              <a:gd name="adj" fmla="val 23076"/>
+            </a:avLst>
+          </a:prstGeom>
+          <a:solidFill>
+            <a:srgbClr val="5BB46C"/>
+          </a:solidFill>
+          <a:ln>
+            <a:noFill/>
+          </a:ln>
+        </p:spPr>
+        <p:txBody>
+          <a:bodyPr rtlCol="0" anchor="ctr"/>
+          <a:lstStyle/>
+          <a:p>
+            <a:pPr algn="ctr"/>
+          </a:p>
+        </p:txBody>
+      </p:sp>
+      <p:sp>
+        <p:nvSpPr>
+          <p:cNvPr id="31" name="Segmento 3.2"/>
+          <p:cNvSpPr/>
+          <p:nvPr/>
+        </p:nvSpPr>
+        <p:spPr>
+          <a:xfrm>
+            <a:off x="6660078" y="4260850"/>
+            <a:ext cx="572460" cy="165100"/>
+          </a:xfrm>
+          <a:prstGeom prst="roundRect">
+            <a:avLst>
+              <a:gd name="adj" fmla="val 23076"/>
+            </a:avLst>
+          </a:prstGeom>
+          <a:solidFill>
+            <a:srgbClr val="5BB46C"/>
+          </a:solidFill>
+          <a:ln>
+            <a:noFill/>
+          </a:ln>
+        </p:spPr>
+        <p:txBody>
+          <a:bodyPr rtlCol="0" anchor="ctr"/>
+          <a:lstStyle/>
+          <a:p>
+            <a:pPr algn="ctr"/>
+          </a:p>
+        </p:txBody>
+      </p:sp>
+      <p:sp>
+        <p:nvSpPr>
+          <p:cNvPr id="32" name="Segmento 3.3"/>
+          <p:cNvSpPr/>
+          <p:nvPr/>
+        </p:nvSpPr>
+        <p:spPr>
+          <a:xfrm>
+            <a:off x="7296037" y="4260850"/>
+            <a:ext cx="572460" cy="165100"/>
+          </a:xfrm>
+          <a:prstGeom prst="roundRect">
+            <a:avLst>
+              <a:gd name="adj" fmla="val 23076"/>
+            </a:avLst>
+          </a:prstGeom>
+          <a:solidFill>
+            <a:srgbClr val="5BB46C"/>
+          </a:solidFill>
+          <a:ln>
+            <a:noFill/>
+          </a:ln>
+        </p:spPr>
+        <p:txBody>
+          <a:bodyPr rtlCol="0" anchor="ctr"/>
+          <a:lstStyle/>
+          <a:p>
+            <a:pPr algn="ctr"/>
+          </a:p>
+        </p:txBody>
+      </p:sp>
+      <p:sp>
+        <p:nvSpPr>
+          <p:cNvPr id="33" name="Segmento 3.4"/>
+          <p:cNvSpPr/>
+          <p:nvPr/>
+        </p:nvSpPr>
+        <p:spPr>
+          <a:xfrm>
+            <a:off x="7931997" y="4260850"/>
+            <a:ext cx="572460" cy="165100"/>
+          </a:xfrm>
+          <a:prstGeom prst="roundRect">
+            <a:avLst>
+              <a:gd name="adj" fmla="val 23076"/>
+            </a:avLst>
+          </a:prstGeom>
+          <a:solidFill>
+            <a:srgbClr val="5BB46C"/>
+          </a:solidFill>
+          <a:ln>
+            <a:noFill/>
+          </a:ln>
+        </p:spPr>
+        <p:txBody>
+          <a:bodyPr rtlCol="0" anchor="ctr"/>
+          <a:lstStyle/>
+          <a:p>
+            <a:pPr algn="ctr"/>
+          </a:p>
+        </p:txBody>
+      </p:sp>
+      <p:sp>
+        <p:nvSpPr>
+          <p:cNvPr id="34" name="Segmento 3.5"/>
+          <p:cNvSpPr/>
+          <p:nvPr/>
+        </p:nvSpPr>
+        <p:spPr>
+          <a:xfrm>
+            <a:off x="8567956" y="4260850"/>
+            <a:ext cx="572460" cy="165100"/>
+          </a:xfrm>
+          <a:prstGeom prst="roundRect">
+            <a:avLst>
+              <a:gd name="adj" fmla="val 23076"/>
+            </a:avLst>
+          </a:prstGeom>
+          <a:solidFill>
+            <a:srgbClr val="5BB46C"/>
+          </a:solidFill>
+          <a:ln>
+            <a:noFill/>
+          </a:ln>
+        </p:spPr>
+        <p:txBody>
+          <a:bodyPr rtlCol="0" anchor="ctr"/>
+          <a:lstStyle/>
+          <a:p>
+            <a:pPr algn="ctr"/>
+          </a:p>
+        </p:txBody>
+      </p:sp>
+      <p:sp>
+        <p:nvSpPr>
+          <p:cNvPr id="35" name="Segmento 3.6"/>
+          <p:cNvSpPr/>
+          <p:nvPr/>
+        </p:nvSpPr>
+        <p:spPr>
+          <a:xfrm>
+            <a:off x="9203916" y="4260850"/>
+            <a:ext cx="572460" cy="165100"/>
+          </a:xfrm>
+          <a:prstGeom prst="roundRect">
+            <a:avLst>
+              <a:gd name="adj" fmla="val 23076"/>
+            </a:avLst>
+          </a:prstGeom>
+          <a:solidFill>
+            <a:srgbClr val="5BB46C"/>
+          </a:solidFill>
+          <a:ln>
+            <a:noFill/>
+          </a:ln>
+        </p:spPr>
+        <p:txBody>
+          <a:bodyPr rtlCol="0" anchor="ctr"/>
+          <a:lstStyle/>
+          <a:p>
+            <a:pPr algn="ctr"/>
+          </a:p>
+        </p:txBody>
+      </p:sp>
+      <p:sp>
+        <p:nvSpPr>
+          <p:cNvPr id="36" name="Segmento 3.7"/>
+          <p:cNvSpPr/>
+          <p:nvPr/>
+        </p:nvSpPr>
+        <p:spPr>
+          <a:xfrm>
+            <a:off x="9839875" y="4260850"/>
+            <a:ext cx="572460" cy="165100"/>
+          </a:xfrm>
+          <a:prstGeom prst="roundRect">
+            <a:avLst>
+              <a:gd name="adj" fmla="val 23076"/>
+            </a:avLst>
+          </a:prstGeom>
+          <a:solidFill>
+            <a:srgbClr val="5BB46C"/>
+          </a:solidFill>
+          <a:ln>
+            <a:noFill/>
+          </a:ln>
+        </p:spPr>
+        <p:txBody>
+          <a:bodyPr rtlCol="0" anchor="ctr"/>
+          <a:lstStyle/>
+          <a:p>
+            <a:pPr algn="ctr"/>
+          </a:p>
+        </p:txBody>
+      </p:sp>
+      <p:sp>
+        <p:nvSpPr>
+          <p:cNvPr id="37" name="Segmento 3.8"/>
+          <p:cNvSpPr/>
+          <p:nvPr/>
+        </p:nvSpPr>
+        <p:spPr>
+          <a:xfrm>
+            <a:off x="10475835" y="4260850"/>
+            <a:ext cx="572460" cy="165100"/>
+          </a:xfrm>
+          <a:prstGeom prst="roundRect">
+            <a:avLst>
+              <a:gd name="adj" fmla="val 23076"/>
+            </a:avLst>
+          </a:prstGeom>
+          <a:solidFill>
+            <a:srgbClr val="FFFFFF"/>
+          </a:solidFill>
+          <a:ln w="19050">
+            <a:solidFill>
+              <a:srgbClr val="C9D2DB"/>
+            </a:solidFill>
+          </a:ln>
+        </p:spPr>
+        <p:txBody>
+          <a:bodyPr rtlCol="0" anchor="ctr"/>
+          <a:lstStyle/>
+          <a:p>
+            <a:pPr algn="ctr"/>
+          </a:p>
+        </p:txBody>
+      </p:sp>
+      <p:sp>
+        <p:nvSpPr>
+          <p:cNvPr id="38" name="Segmento 3.9"/>
+          <p:cNvSpPr/>
+          <p:nvPr/>
+        </p:nvSpPr>
+        <p:spPr>
+          <a:xfrm>
+            <a:off x="11111794" y="4260850"/>
+            <a:ext cx="572460" cy="165100"/>
+          </a:xfrm>
+          <a:prstGeom prst="roundRect">
+            <a:avLst>
+              <a:gd name="adj" fmla="val 23076"/>
+            </a:avLst>
+          </a:prstGeom>
+          <a:solidFill>
+            <a:srgbClr val="FFFFFF"/>
+          </a:solidFill>
+          <a:ln w="19050">
+            <a:solidFill>
+              <a:srgbClr val="C9D2DB"/>
+            </a:solidFill>
+          </a:ln>
+        </p:spPr>
+        <p:txBody>
+          <a:bodyPr rtlCol="0" anchor="ctr"/>
+          <a:lstStyle/>
+          <a:p>
+            <a:pPr algn="ctr"/>
+          </a:p>
+        </p:txBody>
+      </p:sp>
+      <p:sp>
+        <p:nvSpPr>
+          <p:cNvPr id="39" name="Cifra 4"/>
+          <p:cNvSpPr txBox="1"/>
+          <p:nvPr/>
+        </p:nvSpPr>
+        <p:spPr>
+          <a:xfrm>
+            <a:off x="4284218" y="4927600"/>
+            <a:ext cx="1587500" cy="1016000"/>
+          </a:xfrm>
+          <a:prstGeom prst="rect">
+            <a:avLst/>
+          </a:prstGeom>
+          <a:noFill/>
+        </p:spPr>
+        <p:txBody>
+          <a:bodyPr wrap="square" lIns="0" tIns="0" rIns="0" bIns="0" anchor="ctr">
+            <a:noAutofit/>
+          </a:bodyPr>
+          <a:lstStyle/>
+          <a:p>
+            <a:pPr algn="r">
+              <a:lnSpc>
+                <a:spcPct val="80000"/>
+              </a:lnSpc>
+            </a:pPr>
+            <a:r>
+              <a:rPr sz="7200" b="1" i="0" lang="es-ES">
+                <a:solidFill>
+                  <a:srgbClr val="D42A3B"/>
+                </a:solidFill>
+              </a:rPr>
+              <a:t>3/9</a:t>
+            </a:r>
+          </a:p>
+        </p:txBody>
+      </p:sp>
+      <p:sp>
+        <p:nvSpPr>
+          <p:cNvPr id="40" name="Texto 4"/>
+          <p:cNvSpPr txBox="1"/>
+          <p:nvPr/>
+        </p:nvSpPr>
+        <p:spPr>
+          <a:xfrm>
+            <a:off x="6024118" y="4965700"/>
+            <a:ext cx="5660136" cy="685800"/>
+          </a:xfrm>
+          <a:prstGeom prst="rect">
+            <a:avLst/>
+          </a:prstGeom>
+          <a:noFill/>
+        </p:spPr>
+        <p:txBody>
+          <a:bodyPr wrap="square" lIns="0" tIns="0" rIns="0" bIns="0" anchor="b">
+            <a:noAutofit/>
+          </a:bodyPr>
+          <a:lstStyle/>
+          <a:p>
+            <a:pPr algn="l">
+              <a:lnSpc>
+                <a:spcPct val="95000"/>
+              </a:lnSpc>
+            </a:pPr>
+            <a:r>
+              <a:rPr sz="2200" b="0" i="0" lang="es-ES">
+                <a:solidFill>
+                  <a:srgbClr val="263445"/>
+                </a:solidFill>
+              </a:rPr>
+              <a:t>respetaron la velocidad de perfusión de la ficha técnica (≤ 10 mg/min)</a:t>
+            </a:r>
+          </a:p>
+        </p:txBody>
+      </p:sp>
+      <p:sp>
+        <p:nvSpPr>
+          <p:cNvPr id="41" name="Segmento 4.1"/>
+          <p:cNvSpPr/>
+          <p:nvPr/>
+        </p:nvSpPr>
+        <p:spPr>
+          <a:xfrm>
+            <a:off x="6024118" y="5740400"/>
+            <a:ext cx="572460" cy="165100"/>
+          </a:xfrm>
+          <a:prstGeom prst="roundRect">
+            <a:avLst>
+              <a:gd name="adj" fmla="val 23076"/>
+            </a:avLst>
+          </a:prstGeom>
+          <a:solidFill>
+            <a:srgbClr val="D42A3B"/>
+          </a:solidFill>
+          <a:ln>
+            <a:noFill/>
+          </a:ln>
+        </p:spPr>
+        <p:txBody>
+          <a:bodyPr rtlCol="0" anchor="ctr"/>
+          <a:lstStyle/>
+          <a:p>
+            <a:pPr algn="ctr"/>
+          </a:p>
+        </p:txBody>
+      </p:sp>
+      <p:sp>
+        <p:nvSpPr>
+          <p:cNvPr id="42" name="Segmento 4.2"/>
+          <p:cNvSpPr/>
+          <p:nvPr/>
+        </p:nvSpPr>
+        <p:spPr>
+          <a:xfrm>
+            <a:off x="6660078" y="5740400"/>
+            <a:ext cx="572460" cy="165100"/>
+          </a:xfrm>
+          <a:prstGeom prst="roundRect">
+            <a:avLst>
+              <a:gd name="adj" fmla="val 23076"/>
+            </a:avLst>
+          </a:prstGeom>
+          <a:solidFill>
+            <a:srgbClr val="D42A3B"/>
+          </a:solidFill>
+          <a:ln>
+            <a:noFill/>
+          </a:ln>
+        </p:spPr>
+        <p:txBody>
+          <a:bodyPr rtlCol="0" anchor="ctr"/>
+          <a:lstStyle/>
+          <a:p>
+            <a:pPr algn="ctr"/>
+          </a:p>
+        </p:txBody>
+      </p:sp>
+      <p:sp>
+        <p:nvSpPr>
+          <p:cNvPr id="43" name="Segmento 4.3"/>
+          <p:cNvSpPr/>
+          <p:nvPr/>
+        </p:nvSpPr>
+        <p:spPr>
+          <a:xfrm>
+            <a:off x="7296037" y="5740400"/>
+            <a:ext cx="572460" cy="165100"/>
+          </a:xfrm>
+          <a:prstGeom prst="roundRect">
+            <a:avLst>
+              <a:gd name="adj" fmla="val 23076"/>
+            </a:avLst>
+          </a:prstGeom>
+          <a:solidFill>
+            <a:srgbClr val="D42A3B"/>
+          </a:solidFill>
+          <a:ln>
+            <a:noFill/>
+          </a:ln>
+        </p:spPr>
+        <p:txBody>
+          <a:bodyPr rtlCol="0" anchor="ctr"/>
+          <a:lstStyle/>
+          <a:p>
+            <a:pPr algn="ctr"/>
+          </a:p>
+        </p:txBody>
+      </p:sp>
+      <p:sp>
+        <p:nvSpPr>
+          <p:cNvPr id="44" name="Segmento 4.4"/>
+          <p:cNvSpPr/>
+          <p:nvPr/>
+        </p:nvSpPr>
+        <p:spPr>
+          <a:xfrm>
+            <a:off x="7931997" y="5740400"/>
+            <a:ext cx="572460" cy="165100"/>
+          </a:xfrm>
+          <a:prstGeom prst="roundRect">
+            <a:avLst>
+              <a:gd name="adj" fmla="val 23076"/>
+            </a:avLst>
+          </a:prstGeom>
+          <a:solidFill>
+            <a:srgbClr val="FFFFFF"/>
+          </a:solidFill>
+          <a:ln w="19050">
+            <a:solidFill>
+              <a:srgbClr val="C9D2DB"/>
+            </a:solidFill>
+          </a:ln>
+        </p:spPr>
+        <p:txBody>
+          <a:bodyPr rtlCol="0" anchor="ctr"/>
+          <a:lstStyle/>
+          <a:p>
+            <a:pPr algn="ctr"/>
+          </a:p>
+        </p:txBody>
+      </p:sp>
+      <p:sp>
+        <p:nvSpPr>
+          <p:cNvPr id="45" name="Segmento 4.5"/>
+          <p:cNvSpPr/>
+          <p:nvPr/>
+        </p:nvSpPr>
+        <p:spPr>
+          <a:xfrm>
+            <a:off x="8567956" y="5740400"/>
+            <a:ext cx="572460" cy="165100"/>
+          </a:xfrm>
+          <a:prstGeom prst="roundRect">
+            <a:avLst>
+              <a:gd name="adj" fmla="val 23076"/>
+            </a:avLst>
+          </a:prstGeom>
+          <a:solidFill>
+            <a:srgbClr val="FFFFFF"/>
+          </a:solidFill>
+          <a:ln w="19050">
+            <a:solidFill>
+              <a:srgbClr val="C9D2DB"/>
+            </a:solidFill>
+          </a:ln>
+        </p:spPr>
+        <p:txBody>
+          <a:bodyPr rtlCol="0" anchor="ctr"/>
+          <a:lstStyle/>
+          <a:p>
+            <a:pPr algn="ctr"/>
+          </a:p>
+        </p:txBody>
+      </p:sp>
+      <p:sp>
+        <p:nvSpPr>
+          <p:cNvPr id="46" name="Segmento 4.6"/>
+          <p:cNvSpPr/>
+          <p:nvPr/>
+        </p:nvSpPr>
+        <p:spPr>
+          <a:xfrm>
+            <a:off x="9203916" y="5740400"/>
+            <a:ext cx="572460" cy="165100"/>
+          </a:xfrm>
+          <a:prstGeom prst="roundRect">
+            <a:avLst>
+              <a:gd name="adj" fmla="val 23076"/>
+            </a:avLst>
+          </a:prstGeom>
+          <a:solidFill>
+            <a:srgbClr val="FFFFFF"/>
+          </a:solidFill>
+          <a:ln w="19050">
+            <a:solidFill>
+              <a:srgbClr val="C9D2DB"/>
+            </a:solidFill>
+          </a:ln>
+        </p:spPr>
+        <p:txBody>
+          <a:bodyPr rtlCol="0" anchor="ctr"/>
+          <a:lstStyle/>
+          <a:p>
+            <a:pPr algn="ctr"/>
+          </a:p>
+        </p:txBody>
+      </p:sp>
+      <p:sp>
+        <p:nvSpPr>
+          <p:cNvPr id="47" name="Segmento 4.7"/>
+          <p:cNvSpPr/>
+          <p:nvPr/>
+        </p:nvSpPr>
+        <p:spPr>
+          <a:xfrm>
+            <a:off x="9839875" y="5740400"/>
+            <a:ext cx="572460" cy="165100"/>
+          </a:xfrm>
+          <a:prstGeom prst="roundRect">
+            <a:avLst>
+              <a:gd name="adj" fmla="val 23076"/>
+            </a:avLst>
+          </a:prstGeom>
+          <a:solidFill>
+            <a:srgbClr val="FFFFFF"/>
+          </a:solidFill>
+          <a:ln w="19050">
+            <a:solidFill>
+              <a:srgbClr val="C9D2DB"/>
+            </a:solidFill>
+          </a:ln>
+        </p:spPr>
+        <p:txBody>
+          <a:bodyPr rtlCol="0" anchor="ctr"/>
+          <a:lstStyle/>
+          <a:p>
+            <a:pPr algn="ctr"/>
+          </a:p>
+        </p:txBody>
+      </p:sp>
+      <p:sp>
+        <p:nvSpPr>
+          <p:cNvPr id="48" name="Segmento 4.8"/>
+          <p:cNvSpPr/>
+          <p:nvPr/>
+        </p:nvSpPr>
+        <p:spPr>
+          <a:xfrm>
+            <a:off x="10475835" y="5740400"/>
+            <a:ext cx="572460" cy="165100"/>
+          </a:xfrm>
+          <a:prstGeom prst="roundRect">
+            <a:avLst>
+              <a:gd name="adj" fmla="val 23076"/>
+            </a:avLst>
+          </a:prstGeom>
+          <a:solidFill>
+            <a:srgbClr val="FFFFFF"/>
+          </a:solidFill>
+          <a:ln w="19050">
+            <a:solidFill>
+              <a:srgbClr val="C9D2DB"/>
+            </a:solidFill>
+          </a:ln>
+        </p:spPr>
+        <p:txBody>
+          <a:bodyPr rtlCol="0" anchor="ctr"/>
+          <a:lstStyle/>
+          <a:p>
+            <a:pPr algn="ctr"/>
+          </a:p>
+        </p:txBody>
+      </p:sp>
+      <p:sp>
+        <p:nvSpPr>
+          <p:cNvPr id="49" name="Segmento 4.9"/>
+          <p:cNvSpPr/>
+          <p:nvPr/>
+        </p:nvSpPr>
+        <p:spPr>
+          <a:xfrm>
+            <a:off x="11111794" y="5740400"/>
+            <a:ext cx="572460" cy="165100"/>
+          </a:xfrm>
+          <a:prstGeom prst="roundRect">
+            <a:avLst>
+              <a:gd name="adj" fmla="val 23076"/>
+            </a:avLst>
+          </a:prstGeom>
+          <a:solidFill>
+            <a:srgbClr val="FFFFFF"/>
+          </a:solidFill>
+          <a:ln w="19050">
+            <a:solidFill>
+              <a:srgbClr val="C9D2DB"/>
+            </a:solidFill>
+          </a:ln>
+        </p:spPr>
+        <p:txBody>
+          <a:bodyPr rtlCol="0" anchor="ctr"/>
+          <a:lstStyle/>
+          <a:p>
+            <a:pPr algn="ctr"/>
+          </a:p>
+        </p:txBody>
+      </p:sp>
+      <p:sp>
+        <p:nvSpPr>
+          <p:cNvPr id="50" name="Fuente"/>
+          <p:cNvSpPr txBox="1"/>
+          <p:nvPr/>
+        </p:nvSpPr>
+        <p:spPr>
+          <a:xfrm>
+            <a:off x="508000" y="6223000"/>
+            <a:ext cx="11176000" cy="355600"/>
+          </a:xfrm>
+          <a:prstGeom prst="rect">
+            <a:avLst/>
+          </a:prstGeom>
+          <a:noFill/>
+        </p:spPr>
+        <p:txBody>
+          <a:bodyPr wrap="square" lIns="0" tIns="0" rIns="0" bIns="0" anchor="b">
+            <a:noAutofit/>
+          </a:bodyPr>
+          <a:lstStyle/>
+          <a:p>
             <a:pPr algn="l"/>
             <a:r>
               <a:rPr sz="1200" b="0" i="0" lang="es-ES">
@@ -4622,7 +3253,7 @@
                   <a:srgbClr val="5E6B78"/>
                 </a:solidFill>
               </a:rPr>
-              <a:t>Elaboración propia · Gemini [versión], Claude [versión], ChatGPT [versión] · octubre de 2026 · Caso simulado (CL 3 L/h, V 60 L)</a:t>
+              <a:t>Elaboración propia · Gemini [versión], ChatGPT [versión], Claude [versión] · octubre de 2026 · Caso simulado (CL 3 L/h, V 60 L) · Ficha técnica vancomicina, AEMPS, apartado 4.2.2</a:t>
             </a:r>
           </a:p>
         </p:txBody>
